--- a/outputs/HUFS_IoT_Final_Presentation_English.pptx
+++ b/outputs/HUFS_IoT_Final_Presentation_English.pptx
@@ -1,32 +1,31 @@
 
 <file path=ppt/presentation.xml><?xml version="1.0" encoding="utf-8"?>
-<p:presentation xmlns:r="http://schemas.openxmlformats.org/officeDocument/2006/relationships" xmlns:c="http://schemas.openxmlformats.org/drawingml/2006/chart" xmlns:a="http://schemas.openxmlformats.org/drawingml/2006/main" xmlns:dgm="http://schemas.openxmlformats.org/drawingml/2006/diagram" xmlns:dsp="http://schemas.microsoft.com/office/drawing/2008/diagram" xmlns:p="http://schemas.openxmlformats.org/presentationml/2006/main">
+<p:presentation xmlns:p="http://schemas.openxmlformats.org/presentationml/2006/main">
   <p:sldMasterIdLst>
-    <p:sldMasterId id="2147483661" r:id="rId1"/>
-    <p:sldMasterId id="2147483662" r:id="rId2"/>
+    <p:sldMasterId xmlns:r="http://schemas.openxmlformats.org/officeDocument/2006/relationships" id="2147483648" r:id="Rabf09cc1aa3f4609"/>
   </p:sldMasterIdLst>
   <p:notesMasterIdLst>
-    <p:notesMasterId r:id="rId3"/>
+    <p:notesMasterId xmlns:r="http://schemas.openxmlformats.org/officeDocument/2006/relationships" r:id="Rc024370269c24e94"/>
   </p:notesMasterIdLst>
   <p:sldIdLst>
-    <p:sldId id="256" r:id="rId4"/>
-    <p:sldId id="257" r:id="rId5"/>
-    <p:sldId id="258" r:id="rId6"/>
-    <p:sldId id="259" r:id="rId7"/>
-    <p:sldId id="260" r:id="rId8"/>
-    <p:sldId id="261" r:id="rId9"/>
-    <p:sldId id="262" r:id="rId10"/>
-    <p:sldId id="263" r:id="rId11"/>
-    <p:sldId id="264" r:id="rId12"/>
-    <p:sldId id="265" r:id="rId13"/>
+    <p:sldId xmlns:r="http://schemas.openxmlformats.org/officeDocument/2006/relationships" id="256" r:id="R08f814980d5a4fc0"/>
+    <p:sldId xmlns:r="http://schemas.openxmlformats.org/officeDocument/2006/relationships" id="257" r:id="R0fec968322d74cde"/>
+    <p:sldId xmlns:r="http://schemas.openxmlformats.org/officeDocument/2006/relationships" id="258" r:id="R0bab9c67866c4d11"/>
+    <p:sldId xmlns:r="http://schemas.openxmlformats.org/officeDocument/2006/relationships" id="259" r:id="R3613ccdef15c49fd"/>
+    <p:sldId xmlns:r="http://schemas.openxmlformats.org/officeDocument/2006/relationships" id="260" r:id="R46b0f1519af442a3"/>
+    <p:sldId xmlns:r="http://schemas.openxmlformats.org/officeDocument/2006/relationships" id="261" r:id="R9014b107c5e54666"/>
+    <p:sldId xmlns:r="http://schemas.openxmlformats.org/officeDocument/2006/relationships" id="262" r:id="Ree2fa4ecfbbd414a"/>
+    <p:sldId xmlns:r="http://schemas.openxmlformats.org/officeDocument/2006/relationships" id="263" r:id="Rf171cd26143549cb"/>
+    <p:sldId xmlns:r="http://schemas.openxmlformats.org/officeDocument/2006/relationships" id="264" r:id="Rb5ba9291fbf24f4b"/>
+    <p:sldId xmlns:r="http://schemas.openxmlformats.org/officeDocument/2006/relationships" id="265" r:id="R58f6ddd5684d4897"/>
   </p:sldIdLst>
   <p:sldSz cx="12192000" cy="6858000"/>
   <p:notesSz cx="6858000" cy="9144000"/>
   <p:defaultTextStyle>
-    <a:defPPr>
+    <a:defPPr xmlns:a="http://schemas.openxmlformats.org/drawingml/2006/main">
       <a:defRPr lang="en-US"/>
     </a:defPPr>
-    <a:lvl1pPr marL="0" indent="0" algn="l" defTabSz="914400">
+    <a:lvl1pPr xmlns:a="http://schemas.openxmlformats.org/drawingml/2006/main" marL="0" indent="0" algn="l" defTabSz="914400">
       <a:defRPr sz="1800" kern="1200">
         <a:solidFill>
           <a:schemeClr val="tx1"/>
@@ -36,7 +35,7 @@
         <a:cs typeface="+mn-cs"/>
       </a:defRPr>
     </a:lvl1pPr>
-    <a:lvl2pPr marL="457200" indent="0" algn="l" defTabSz="914400">
+    <a:lvl2pPr xmlns:a="http://schemas.openxmlformats.org/drawingml/2006/main" marL="457200" indent="0" algn="l" defTabSz="914400">
       <a:defRPr sz="1800" kern="1200">
         <a:solidFill>
           <a:schemeClr val="tx1"/>
@@ -46,7 +45,7 @@
         <a:cs typeface="+mn-cs"/>
       </a:defRPr>
     </a:lvl2pPr>
-    <a:lvl3pPr marL="914400" indent="0" algn="l" defTabSz="914400">
+    <a:lvl3pPr xmlns:a="http://schemas.openxmlformats.org/drawingml/2006/main" marL="914400" indent="0" algn="l" defTabSz="914400">
       <a:defRPr sz="1800" kern="1200">
         <a:solidFill>
           <a:schemeClr val="tx1"/>
@@ -56,7 +55,7 @@
         <a:cs typeface="+mn-cs"/>
       </a:defRPr>
     </a:lvl3pPr>
-    <a:lvl4pPr marL="1371600" indent="0" algn="l" defTabSz="914400">
+    <a:lvl4pPr xmlns:a="http://schemas.openxmlformats.org/drawingml/2006/main" marL="1371600" indent="0" algn="l" defTabSz="914400">
       <a:defRPr sz="1800" kern="1200">
         <a:solidFill>
           <a:schemeClr val="tx1"/>
@@ -66,7 +65,7 @@
         <a:cs typeface="+mn-cs"/>
       </a:defRPr>
     </a:lvl4pPr>
-    <a:lvl5pPr marL="1828800" indent="0" algn="l" defTabSz="914400">
+    <a:lvl5pPr xmlns:a="http://schemas.openxmlformats.org/drawingml/2006/main" marL="1828800" indent="0" algn="l" defTabSz="914400">
       <a:defRPr sz="1800" kern="1200">
         <a:solidFill>
           <a:schemeClr val="tx1"/>
@@ -76,7 +75,7 @@
         <a:cs typeface="+mn-cs"/>
       </a:defRPr>
     </a:lvl5pPr>
-    <a:lvl6pPr marL="2286000" indent="0" algn="l" defTabSz="914400">
+    <a:lvl6pPr xmlns:a="http://schemas.openxmlformats.org/drawingml/2006/main" marL="2286000" indent="0" algn="l" defTabSz="914400">
       <a:defRPr sz="1800" kern="1200">
         <a:solidFill>
           <a:schemeClr val="tx1"/>
@@ -86,7 +85,7 @@
         <a:cs typeface="+mn-cs"/>
       </a:defRPr>
     </a:lvl6pPr>
-    <a:lvl7pPr marL="2743200" indent="0" algn="l" defTabSz="914400">
+    <a:lvl7pPr xmlns:a="http://schemas.openxmlformats.org/drawingml/2006/main" marL="2743200" indent="0" algn="l" defTabSz="914400">
       <a:defRPr sz="1800" kern="1200">
         <a:solidFill>
           <a:schemeClr val="tx1"/>
@@ -96,7 +95,7 @@
         <a:cs typeface="+mn-cs"/>
       </a:defRPr>
     </a:lvl7pPr>
-    <a:lvl8pPr marL="3200400" indent="0" algn="l" defTabSz="914400">
+    <a:lvl8pPr xmlns:a="http://schemas.openxmlformats.org/drawingml/2006/main" marL="3200400" indent="0" algn="l" defTabSz="914400">
       <a:defRPr sz="1800" kern="1200">
         <a:solidFill>
           <a:schemeClr val="tx1"/>
@@ -106,7 +105,7 @@
         <a:cs typeface="+mn-cs"/>
       </a:defRPr>
     </a:lvl8pPr>
-    <a:lvl9pPr marL="3657600" indent="0" algn="l" defTabSz="914400">
+    <a:lvl9pPr xmlns:a="http://schemas.openxmlformats.org/drawingml/2006/main" marL="3657600" indent="0" algn="l" defTabSz="914400">
       <a:defRPr sz="1800" kern="1200">
         <a:solidFill>
           <a:schemeClr val="tx1"/>
@@ -121,11 +120,11 @@
 </file>
 
 <file path=ppt/notesMasters/notesMaster1.xml><?xml version="1.0" encoding="utf-8"?>
-<p:notesMaster xmlns:r="http://schemas.openxmlformats.org/officeDocument/2006/relationships" xmlns:c="http://schemas.openxmlformats.org/drawingml/2006/chart" xmlns:a="http://schemas.openxmlformats.org/drawingml/2006/main" xmlns:dgm="http://schemas.openxmlformats.org/drawingml/2006/diagram" xmlns:dsp="http://schemas.microsoft.com/office/drawing/2008/diagram" xmlns:p="http://schemas.openxmlformats.org/presentationml/2006/main">
+<p:notesMaster xmlns:p="http://schemas.openxmlformats.org/presentationml/2006/main">
   <p:cSld>
     <p:bg>
       <p:bgRef idx="1001">
-        <a:schemeClr val="bg1"/>
+        <a:schemeClr xmlns:a="http://schemas.openxmlformats.org/drawingml/2006/main" val="bg1"/>
       </p:bgRef>
     </p:bg>
     <p:spTree>
@@ -135,203 +134,326 @@
         <p:nvPr/>
       </p:nvGrpSpPr>
       <p:grpSpPr>
-        <a:xfrm>
-          <a:off x="0" y="0"/>
-          <a:ext cx="0" cy="0"/>
-          <a:chOff x="0" y="0"/>
-          <a:chExt cx="0" cy="0"/>
-        </a:xfrm>
+        <a:xfrm xmlns:a="http://schemas.openxmlformats.org/drawingml/2006/main"/>
       </p:grpSpPr>
       <p:sp>
         <p:nvSpPr>
           <p:cNvPr id="2" name="Header Placeholder"/>
-          <p:cNvSpPr>
-            <a:spLocks noGrp="1"/>
-          </p:cNvSpPr>
+          <p:cNvSpPr/>
           <p:nvPr>
-            <p:ph type="hdr" sz="quarter" idx="0"/>
+            <p:ph type="hdr" sz="quarter"/>
           </p:nvPr>
         </p:nvSpPr>
         <p:spPr>
-          <a:prstGeom prst="rect">
+          <a:prstGeom xmlns:a="http://schemas.openxmlformats.org/drawingml/2006/main" prst="rect">
             <a:avLst/>
           </a:prstGeom>
         </p:spPr>
         <p:txBody>
-          <a:bodyPr/>
-          <a:lstStyle/>
-          <a:p>
-            <a:pPr>
-              <a:defRPr/>
-            </a:pPr>
-            <a:r>
-              <a:rPr lang="ko-KR" altLang="en-US"/>
-              <a:t/>
-            </a:r>
-            <a:endParaRPr lang="ko-KR" altLang="en-US"/>
-          </a:p>
+          <a:bodyPr xmlns:a="http://schemas.openxmlformats.org/drawingml/2006/main"/>
+          <a:lstStyle xmlns:a="http://schemas.openxmlformats.org/drawingml/2006/main"/>
+          <a:p xmlns:a="http://schemas.openxmlformats.org/drawingml/2006/main"/>
         </p:txBody>
       </p:sp>
       <p:sp>
         <p:nvSpPr>
           <p:cNvPr id="3" name="Date Placeholder"/>
-          <p:cNvSpPr>
-            <a:spLocks noGrp="1"/>
-          </p:cNvSpPr>
+          <p:cNvSpPr/>
           <p:nvPr>
             <p:ph type="dt" sz="quarter" idx="1"/>
           </p:nvPr>
         </p:nvSpPr>
         <p:spPr>
-          <a:prstGeom prst="rect">
+          <a:prstGeom xmlns:a="http://schemas.openxmlformats.org/drawingml/2006/main" prst="rect">
             <a:avLst/>
           </a:prstGeom>
         </p:spPr>
         <p:txBody>
-          <a:bodyPr/>
-          <a:lstStyle/>
-          <a:p>
-            <a:pPr>
-              <a:defRPr/>
-            </a:pPr>
-            <a:r>
-              <a:rPr lang="ko-KR" altLang="en-US"/>
-              <a:t/>
-            </a:r>
-            <a:endParaRPr lang="ko-KR" altLang="en-US"/>
-          </a:p>
+          <a:bodyPr xmlns:a="http://schemas.openxmlformats.org/drawingml/2006/main"/>
+          <a:lstStyle xmlns:a="http://schemas.openxmlformats.org/drawingml/2006/main"/>
+          <a:p xmlns:a="http://schemas.openxmlformats.org/drawingml/2006/main"/>
         </p:txBody>
       </p:sp>
       <p:sp>
         <p:nvSpPr>
           <p:cNvPr id="4" name="Slide Image Placeholder"/>
-          <p:cNvSpPr>
-            <a:spLocks noGrp="1" noRot="1" noChangeAspect="1" noTextEdit="1"/>
-          </p:cNvSpPr>
+          <p:cNvSpPr/>
           <p:nvPr>
             <p:ph type="sldImg" idx="2"/>
           </p:nvPr>
         </p:nvSpPr>
         <p:spPr>
-          <a:prstGeom prst="rect">
+          <a:prstGeom xmlns:a="http://schemas.openxmlformats.org/drawingml/2006/main" prst="rect">
             <a:avLst/>
           </a:prstGeom>
         </p:spPr>
         <p:txBody>
-          <a:bodyPr/>
-          <a:lstStyle/>
-          <a:p>
-            <a:pPr>
-              <a:defRPr/>
-            </a:pPr>
-            <a:endParaRPr lang="ko-KR" altLang="en-US"/>
-          </a:p>
+          <a:bodyPr xmlns:a="http://schemas.openxmlformats.org/drawingml/2006/main"/>
+          <a:lstStyle xmlns:a="http://schemas.openxmlformats.org/drawingml/2006/main"/>
+          <a:p xmlns:a="http://schemas.openxmlformats.org/drawingml/2006/main"/>
         </p:txBody>
       </p:sp>
       <p:sp>
         <p:nvSpPr>
           <p:cNvPr id="5" name="Notes Placeholder"/>
-          <p:cNvSpPr>
-            <a:spLocks noGrp="1"/>
-          </p:cNvSpPr>
+          <p:cNvSpPr/>
           <p:nvPr>
             <p:ph type="body" sz="quarter" idx="3"/>
           </p:nvPr>
         </p:nvSpPr>
         <p:spPr>
-          <a:prstGeom prst="rect">
+          <a:prstGeom xmlns:a="http://schemas.openxmlformats.org/drawingml/2006/main" prst="rect">
             <a:avLst/>
           </a:prstGeom>
         </p:spPr>
         <p:txBody>
-          <a:bodyPr/>
-          <a:lstStyle/>
-          <a:p>
-            <a:pPr>
-              <a:defRPr/>
-            </a:pPr>
-            <a:r>
-              <a:rPr lang="ko-KR" altLang="en-US"/>
-              <a:t/>
-            </a:r>
-            <a:endParaRPr lang="ko-KR" altLang="en-US"/>
-          </a:p>
+          <a:bodyPr xmlns:a="http://schemas.openxmlformats.org/drawingml/2006/main"/>
+          <a:lstStyle xmlns:a="http://schemas.openxmlformats.org/drawingml/2006/main"/>
+          <a:p xmlns:a="http://schemas.openxmlformats.org/drawingml/2006/main"/>
         </p:txBody>
       </p:sp>
       <p:sp>
         <p:nvSpPr>
           <p:cNvPr id="6" name="Footer Placeholder"/>
-          <p:cNvSpPr>
-            <a:spLocks noGrp="1"/>
-          </p:cNvSpPr>
+          <p:cNvSpPr/>
           <p:nvPr>
             <p:ph type="ftr" sz="quarter" idx="4"/>
           </p:nvPr>
         </p:nvSpPr>
         <p:spPr>
-          <a:prstGeom prst="rect">
+          <a:prstGeom xmlns:a="http://schemas.openxmlformats.org/drawingml/2006/main" prst="rect">
             <a:avLst/>
           </a:prstGeom>
         </p:spPr>
         <p:txBody>
-          <a:bodyPr/>
-          <a:lstStyle/>
-          <a:p>
-            <a:pPr>
-              <a:defRPr/>
-            </a:pPr>
-            <a:r>
-              <a:rPr lang="ko-KR" altLang="en-US"/>
-              <a:t/>
-            </a:r>
-            <a:endParaRPr lang="ko-KR" altLang="en-US"/>
-          </a:p>
+          <a:bodyPr xmlns:a="http://schemas.openxmlformats.org/drawingml/2006/main"/>
+          <a:lstStyle xmlns:a="http://schemas.openxmlformats.org/drawingml/2006/main"/>
+          <a:p xmlns:a="http://schemas.openxmlformats.org/drawingml/2006/main"/>
         </p:txBody>
       </p:sp>
       <p:sp>
         <p:nvSpPr>
           <p:cNvPr id="7" name="Slide Number Placeholder"/>
-          <p:cNvSpPr>
-            <a:spLocks noGrp="1"/>
-          </p:cNvSpPr>
+          <p:cNvSpPr/>
           <p:nvPr>
             <p:ph type="sldNum" sz="quarter" idx="5"/>
           </p:nvPr>
         </p:nvSpPr>
         <p:spPr>
-          <a:prstGeom prst="rect">
+          <a:prstGeom xmlns:a="http://schemas.openxmlformats.org/drawingml/2006/main" prst="rect">
             <a:avLst/>
           </a:prstGeom>
         </p:spPr>
         <p:txBody>
-          <a:bodyPr/>
-          <a:lstStyle/>
-          <a:p>
-            <a:pPr>
-              <a:defRPr/>
-            </a:pPr>
-            <a:r>
-              <a:rPr lang="ko-KR" altLang="en-US"/>
-              <a:t/>
-            </a:r>
-            <a:endParaRPr lang="ko-KR" altLang="en-US"/>
-          </a:p>
+          <a:bodyPr xmlns:a="http://schemas.openxmlformats.org/drawingml/2006/main"/>
+          <a:lstStyle xmlns:a="http://schemas.openxmlformats.org/drawingml/2006/main"/>
+          <a:p xmlns:a="http://schemas.openxmlformats.org/drawingml/2006/main"/>
         </p:txBody>
       </p:sp>
     </p:spTree>
   </p:cSld>
   <p:clrMap bg1="lt1" tx1="dk1" bg2="lt2" tx2="dk2" accent1="accent1" accent2="accent2" accent3="accent3" accent4="accent4" accent5="accent5" accent6="accent6" hlink="hlink" folHlink="folHlink"/>
-  <p:hf hdr="0" ftr="0" dt="0"/>
   <p:notesStyle>
-    <a:lvl1pPr marL="0" algn="l" defTabSz="914400" rtl="0" eaLnBrk="1" latinLnBrk="0" hangingPunct="1">
+    <a:lvl1pPr xmlns:a="http://schemas.openxmlformats.org/drawingml/2006/main" marL="0" algn="l" defTabSz="914400" rtl="0" eaLnBrk="1" latinLnBrk="0" hangingPunct="1">
       <a:defRPr sz="1200" kern="1200"/>
     </a:lvl1pPr>
   </p:notesStyle>
 </p:notesMaster>
 </file>
 
+<file path=ppt/notesMasters/theme/theme3.xml><?xml version="1.0" encoding="utf-8"?>
+<a:theme xmlns:a="http://schemas.openxmlformats.org/drawingml/2006/main" name="Default Codex Theme">
+  <a:themeElements>
+    <a:clrScheme name="Office">
+      <a:dk1>
+        <a:sysClr val="windowText" lastClr="000000"/>
+      </a:dk1>
+      <a:lt1>
+        <a:sysClr val="window" lastClr="FFFFFF"/>
+      </a:lt1>
+      <a:dk2>
+        <a:srgbClr val="0E2841"/>
+      </a:dk2>
+      <a:lt2>
+        <a:srgbClr val="E8E8E8"/>
+      </a:lt2>
+      <a:accent1>
+        <a:srgbClr val="156082"/>
+      </a:accent1>
+      <a:accent2>
+        <a:srgbClr val="E97132"/>
+      </a:accent2>
+      <a:accent3>
+        <a:srgbClr val="196B24"/>
+      </a:accent3>
+      <a:accent4>
+        <a:srgbClr val="0F9ED5"/>
+      </a:accent4>
+      <a:accent5>
+        <a:srgbClr val="A02B93"/>
+      </a:accent5>
+      <a:accent6>
+        <a:srgbClr val="4EA72E"/>
+      </a:accent6>
+      <a:hlink>
+        <a:srgbClr val="467886"/>
+      </a:hlink>
+      <a:folHlink>
+        <a:srgbClr val="96607D"/>
+      </a:folHlink>
+    </a:clrScheme>
+    <a:fontScheme name="Helvetica Neue">
+      <a:majorFont>
+        <a:latin typeface="Helvetica Neue"/>
+        <a:ea typeface=""/>
+        <a:cs typeface=""/>
+      </a:majorFont>
+      <a:minorFont>
+        <a:latin typeface="Helvetica Neue"/>
+        <a:ea typeface=""/>
+        <a:cs typeface=""/>
+      </a:minorFont>
+    </a:fontScheme>
+    <a:fmtScheme name="Office">
+      <a:fillStyleLst>
+        <a:solidFill>
+          <a:schemeClr val="phClr"/>
+        </a:solidFill>
+        <a:gradFill rotWithShape="1">
+          <a:gsLst>
+            <a:gs pos="0">
+              <a:schemeClr val="phClr">
+                <a:tint val="67000"/>
+                <a:lumMod val="110000"/>
+                <a:satMod val="105000"/>
+              </a:schemeClr>
+            </a:gs>
+            <a:gs pos="50000">
+              <a:schemeClr val="phClr">
+                <a:tint val="73000"/>
+                <a:lumMod val="105000"/>
+                <a:satMod val="103000"/>
+              </a:schemeClr>
+            </a:gs>
+            <a:gs pos="100000">
+              <a:schemeClr val="phClr">
+                <a:tint val="81000"/>
+                <a:lumMod val="105000"/>
+                <a:satMod val="109000"/>
+              </a:schemeClr>
+            </a:gs>
+          </a:gsLst>
+          <a:lin ang="5400000" scaled="0"/>
+        </a:gradFill>
+        <a:gradFill rotWithShape="1">
+          <a:gsLst>
+            <a:gs pos="0">
+              <a:schemeClr val="phClr">
+                <a:tint val="94000"/>
+                <a:lumMod val="102000"/>
+                <a:satMod val="103000"/>
+              </a:schemeClr>
+            </a:gs>
+            <a:gs pos="50000">
+              <a:schemeClr val="phClr">
+                <a:shade val="100000"/>
+                <a:lumMod val="100000"/>
+                <a:satMod val="110000"/>
+              </a:schemeClr>
+            </a:gs>
+            <a:gs pos="100000">
+              <a:schemeClr val="phClr">
+                <a:shade val="78000"/>
+                <a:lumMod val="99000"/>
+                <a:satMod val="120000"/>
+              </a:schemeClr>
+            </a:gs>
+          </a:gsLst>
+          <a:lin ang="5400000" scaled="0"/>
+        </a:gradFill>
+      </a:fillStyleLst>
+      <a:lnStyleLst>
+        <a:ln w="12700">
+          <a:solidFill>
+            <a:schemeClr val="phClr"/>
+          </a:solidFill>
+          <a:prstDash val="solid"/>
+        </a:ln>
+        <a:ln w="19050">
+          <a:solidFill>
+            <a:schemeClr val="phClr"/>
+          </a:solidFill>
+          <a:prstDash val="solid"/>
+        </a:ln>
+        <a:ln w="25400">
+          <a:solidFill>
+            <a:schemeClr val="phClr"/>
+          </a:solidFill>
+          <a:prstDash val="solid"/>
+        </a:ln>
+      </a:lnStyleLst>
+      <a:effectStyleLst>
+        <a:effectStyle>
+          <a:effectLst/>
+        </a:effectStyle>
+        <a:effectStyle>
+          <a:effectLst/>
+        </a:effectStyle>
+        <a:effectStyle>
+          <a:effectLst>
+            <a:outerShdw blurRad="57150" dist="19050" dir="5400000" algn="ctr" rotWithShape="0">
+              <a:srgbClr val="000000">
+                <a:alpha val="63000"/>
+              </a:srgbClr>
+            </a:outerShdw>
+          </a:effectLst>
+        </a:effectStyle>
+      </a:effectStyleLst>
+      <a:bgFillStyleLst>
+        <a:solidFill>
+          <a:schemeClr val="phClr"/>
+        </a:solidFill>
+        <a:solidFill>
+          <a:schemeClr val="phClr">
+            <a:tint val="95000"/>
+            <a:satMod val="170000"/>
+          </a:schemeClr>
+        </a:solidFill>
+        <a:gradFill rotWithShape="1">
+          <a:gsLst>
+            <a:gs pos="0">
+              <a:schemeClr val="phClr">
+                <a:tint val="93000"/>
+                <a:shade val="98000"/>
+                <a:lumMod val="102000"/>
+                <a:satMod val="150000"/>
+              </a:schemeClr>
+            </a:gs>
+            <a:gs pos="50000">
+              <a:schemeClr val="phClr">
+                <a:tint val="98000"/>
+                <a:shade val="90000"/>
+                <a:lumMod val="103000"/>
+                <a:satMod val="130000"/>
+              </a:schemeClr>
+            </a:gs>
+            <a:gs pos="100000">
+              <a:schemeClr val="phClr">
+                <a:shade val="63000"/>
+                <a:satMod val="120000"/>
+              </a:schemeClr>
+            </a:gs>
+          </a:gsLst>
+          <a:lin ang="5400000" scaled="0"/>
+        </a:gradFill>
+      </a:bgFillStyleLst>
+    </a:fmtScheme>
+  </a:themeElements>
+</a:theme>
+</file>
+
 <file path=ppt/notesSlides/notesSlide1.xml><?xml version="1.0" encoding="utf-8"?>
-<p:notes xmlns:r="http://schemas.openxmlformats.org/officeDocument/2006/relationships" xmlns:c="http://schemas.openxmlformats.org/drawingml/2006/chart" xmlns:a="http://schemas.openxmlformats.org/drawingml/2006/main" xmlns:dgm="http://schemas.openxmlformats.org/drawingml/2006/diagram" xmlns:dsp="http://schemas.microsoft.com/office/drawing/2008/diagram" xmlns:p="http://schemas.openxmlformats.org/presentationml/2006/main">
+<p:notes xmlns:p="http://schemas.openxmlformats.org/presentationml/2006/main">
   <p:cSld>
     <p:spTree>
       <p:nvGrpSpPr>
@@ -340,18 +462,13 @@
         <p:nvPr/>
       </p:nvGrpSpPr>
       <p:grpSpPr>
-        <a:xfrm>
-          <a:off x="0" y="0"/>
-          <a:ext cx="0" cy="0"/>
-          <a:chOff x="0" y="0"/>
-          <a:chExt cx="0" cy="0"/>
-        </a:xfrm>
+        <a:xfrm xmlns:a="http://schemas.openxmlformats.org/drawingml/2006/main"/>
       </p:grpSpPr>
       <p:sp>
         <p:nvSpPr>
           <p:cNvPr id="2" name="Slide Image Placeholder 1"/>
           <p:cNvSpPr>
-            <a:spLocks noGrp="1" noRot="1" noChangeAspect="1" noTextEdit="1"/>
+            <a:spLocks xmlns:a="http://schemas.openxmlformats.org/drawingml/2006/main" noGrp="1"/>
           </p:cNvSpPr>
           <p:nvPr>
             <p:ph type="sldImg" idx="0"/>
@@ -363,7 +480,7 @@
         <p:nvSpPr>
           <p:cNvPr id="3" name="Notes Placeholder 2"/>
           <p:cNvSpPr>
-            <a:spLocks noGrp="1"/>
+            <a:spLocks xmlns:a="http://schemas.openxmlformats.org/drawingml/2006/main" noGrp="1"/>
           </p:cNvSpPr>
           <p:nvPr>
             <p:ph type="body" idx="1"/>
@@ -371,17 +488,12 @@
         </p:nvSpPr>
         <p:spPr/>
         <p:txBody>
-          <a:bodyPr/>
-          <a:lstStyle/>
-          <a:p>
-            <a:pPr lvl="0">
-              <a:defRPr/>
-            </a:pPr>
-            <a:r>
-              <a:rPr lang="ko-KR" altLang="en-US"/>
+          <a:bodyPr xmlns:a="http://schemas.openxmlformats.org/drawingml/2006/main"/>
+          <a:lstStyle xmlns:a="http://schemas.openxmlformats.org/drawingml/2006/main"/>
+          <a:p xmlns:a="http://schemas.openxmlformats.org/drawingml/2006/main">
+            <a:r>
               <a:t>Good afternoon. Our project is an edge AI security system that listens for two threat sounds: breaking glass and screams. It runs on a Raspberry Pi, classifies audio in real time, and triggers physical and remote alerts. I will focus on the baseline, our model, what failed, what finally worked, and what should improve next.</a:t>
             </a:r>
-            <a:endParaRPr lang="ko-KR" altLang="en-US"/>
           </a:p>
         </p:txBody>
       </p:sp>
@@ -389,7 +501,7 @@
         <p:nvSpPr>
           <p:cNvPr id="4" name="Slide Number Placeholder 3"/>
           <p:cNvSpPr>
-            <a:spLocks noGrp="1"/>
+            <a:spLocks xmlns:a="http://schemas.openxmlformats.org/drawingml/2006/main" noGrp="1"/>
           </p:cNvSpPr>
           <p:nvPr>
             <p:ph type="sldNum" idx="5"/>
@@ -397,30 +509,21 @@
         </p:nvSpPr>
         <p:spPr/>
         <p:txBody>
-          <a:bodyPr/>
-          <a:lstStyle/>
-          <a:p>
-            <a:pPr>
-              <a:defRPr/>
-            </a:pPr>
-            <a:r>
-              <a:rPr lang="ko-KR" altLang="en-US"/>
-              <a:t/>
-            </a:r>
-            <a:endParaRPr lang="ko-KR" altLang="en-US"/>
-          </a:p>
+          <a:bodyPr xmlns:a="http://schemas.openxmlformats.org/drawingml/2006/main"/>
+          <a:lstStyle xmlns:a="http://schemas.openxmlformats.org/drawingml/2006/main"/>
+          <a:p xmlns:a="http://schemas.openxmlformats.org/drawingml/2006/main"/>
         </p:txBody>
       </p:sp>
     </p:spTree>
   </p:cSld>
   <p:clrMapOvr>
-    <a:masterClrMapping/>
+    <a:masterClrMapping xmlns:a="http://schemas.openxmlformats.org/drawingml/2006/main"/>
   </p:clrMapOvr>
 </p:notes>
 </file>
 
-<file path=ppt/notesSlides/notesSlide2.xml><?xml version="1.0" encoding="utf-8"?>
-<p:notes xmlns:r="http://schemas.openxmlformats.org/officeDocument/2006/relationships" xmlns:c="http://schemas.openxmlformats.org/drawingml/2006/chart" xmlns:a="http://schemas.openxmlformats.org/drawingml/2006/main" xmlns:dgm="http://schemas.openxmlformats.org/drawingml/2006/diagram" xmlns:dsp="http://schemas.microsoft.com/office/drawing/2008/diagram" xmlns:p="http://schemas.openxmlformats.org/presentationml/2006/main">
+<file path=ppt/notesSlides/notesSlide10.xml><?xml version="1.0" encoding="utf-8"?>
+<p:notes xmlns:p="http://schemas.openxmlformats.org/presentationml/2006/main">
   <p:cSld>
     <p:spTree>
       <p:nvGrpSpPr>
@@ -429,18 +532,13 @@
         <p:nvPr/>
       </p:nvGrpSpPr>
       <p:grpSpPr>
-        <a:xfrm>
-          <a:off x="0" y="0"/>
-          <a:ext cx="0" cy="0"/>
-          <a:chOff x="0" y="0"/>
-          <a:chExt cx="0" cy="0"/>
-        </a:xfrm>
+        <a:xfrm xmlns:a="http://schemas.openxmlformats.org/drawingml/2006/main"/>
       </p:grpSpPr>
       <p:sp>
         <p:nvSpPr>
           <p:cNvPr id="2" name="Slide Image Placeholder 1"/>
           <p:cNvSpPr>
-            <a:spLocks noGrp="1" noRot="1" noChangeAspect="1" noTextEdit="1"/>
+            <a:spLocks xmlns:a="http://schemas.openxmlformats.org/drawingml/2006/main" noGrp="1"/>
           </p:cNvSpPr>
           <p:nvPr>
             <p:ph type="sldImg" idx="0"/>
@@ -452,7 +550,7 @@
         <p:nvSpPr>
           <p:cNvPr id="3" name="Notes Placeholder 2"/>
           <p:cNvSpPr>
-            <a:spLocks noGrp="1"/>
+            <a:spLocks xmlns:a="http://schemas.openxmlformats.org/drawingml/2006/main" noGrp="1"/>
           </p:cNvSpPr>
           <p:nvPr>
             <p:ph type="body" idx="1"/>
@@ -460,24 +558,12 @@
         </p:nvSpPr>
         <p:spPr/>
         <p:txBody>
-          <a:bodyPr/>
-          <a:lstStyle/>
-          <a:p>
-            <a:pPr marL="0" indent="0" algn="l">
-              <a:spcBef>
-                <a:spcPts val="0"/>
-              </a:spcBef>
-              <a:spcAft>
-                <a:spcPts val="0"/>
-              </a:spcAft>
-              <a:buNone/>
-              <a:defRPr/>
-            </a:pPr>
-            <a:r>
-              <a:rPr lang="ko-KR" altLang="en-US"/>
-              <a:t>Why use sound at all? Cameras and motion sensors are useful, but they have blind spots. A microphone can detect an event even when the source is outside the camera view. Our design also keeps inference on the edge: raw audio does not need to be continuously uploaded. When a threat is confirmed, the system can immediately activate a buzzer and LED, take a photo, write a log, and send a Telegram message.</a:t>
-            </a:r>
-            <a:endParaRPr lang="ko-KR" altLang="en-US"/>
+          <a:bodyPr xmlns:a="http://schemas.openxmlformats.org/drawingml/2006/main"/>
+          <a:lstStyle xmlns:a="http://schemas.openxmlformats.org/drawingml/2006/main"/>
+          <a:p xmlns:a="http://schemas.openxmlformats.org/drawingml/2006/main">
+            <a:r>
+              <a:t>To conclude, transfer learning made the detector practical, our custom head specialized YAMNet features, and frame-aligned Fusion combined task-specific and semantic evidence. The final Fusion system reached a Macro F1 of 0.837 on our strict-label test. The next step is to validate these results on fresh external data and complete long-duration field testing. Thank you. I am ready for your questions.</a:t>
+            </a:r>
           </a:p>
         </p:txBody>
       </p:sp>
@@ -485,7 +571,7 @@
         <p:nvSpPr>
           <p:cNvPr id="4" name="Slide Number Placeholder 3"/>
           <p:cNvSpPr>
-            <a:spLocks noGrp="1"/>
+            <a:spLocks xmlns:a="http://schemas.openxmlformats.org/drawingml/2006/main" noGrp="1"/>
           </p:cNvSpPr>
           <p:nvPr>
             <p:ph type="sldNum" idx="5"/>
@@ -493,30 +579,21 @@
         </p:nvSpPr>
         <p:spPr/>
         <p:txBody>
-          <a:bodyPr/>
-          <a:lstStyle/>
-          <a:p>
-            <a:pPr>
-              <a:defRPr/>
-            </a:pPr>
-            <a:r>
-              <a:rPr lang="ko-KR" altLang="en-US"/>
-              <a:t/>
-            </a:r>
-            <a:endParaRPr lang="ko-KR" altLang="en-US"/>
-          </a:p>
+          <a:bodyPr xmlns:a="http://schemas.openxmlformats.org/drawingml/2006/main"/>
+          <a:lstStyle xmlns:a="http://schemas.openxmlformats.org/drawingml/2006/main"/>
+          <a:p xmlns:a="http://schemas.openxmlformats.org/drawingml/2006/main"/>
         </p:txBody>
       </p:sp>
     </p:spTree>
   </p:cSld>
   <p:clrMapOvr>
-    <a:masterClrMapping/>
+    <a:masterClrMapping xmlns:a="http://schemas.openxmlformats.org/drawingml/2006/main"/>
   </p:clrMapOvr>
 </p:notes>
 </file>
 
-<file path=ppt/notesSlides/notesSlide3.xml><?xml version="1.0" encoding="utf-8"?>
-<p:notes xmlns:r="http://schemas.openxmlformats.org/officeDocument/2006/relationships" xmlns:c="http://schemas.openxmlformats.org/drawingml/2006/chart" xmlns:a="http://schemas.openxmlformats.org/drawingml/2006/main" xmlns:dgm="http://schemas.openxmlformats.org/drawingml/2006/diagram" xmlns:dsp="http://schemas.microsoft.com/office/drawing/2008/diagram" xmlns:p="http://schemas.openxmlformats.org/presentationml/2006/main">
+<file path=ppt/notesSlides/notesSlide2.xml><?xml version="1.0" encoding="utf-8"?>
+<p:notes xmlns:p="http://schemas.openxmlformats.org/presentationml/2006/main">
   <p:cSld>
     <p:spTree>
       <p:nvGrpSpPr>
@@ -525,18 +602,13 @@
         <p:nvPr/>
       </p:nvGrpSpPr>
       <p:grpSpPr>
-        <a:xfrm>
-          <a:off x="0" y="0"/>
-          <a:ext cx="0" cy="0"/>
-          <a:chOff x="0" y="0"/>
-          <a:chExt cx="0" cy="0"/>
-        </a:xfrm>
+        <a:xfrm xmlns:a="http://schemas.openxmlformats.org/drawingml/2006/main"/>
       </p:grpSpPr>
       <p:sp>
         <p:nvSpPr>
           <p:cNvPr id="2" name="Slide Image Placeholder 1"/>
           <p:cNvSpPr>
-            <a:spLocks noGrp="1" noRot="1" noChangeAspect="1" noTextEdit="1"/>
+            <a:spLocks xmlns:a="http://schemas.openxmlformats.org/drawingml/2006/main" noGrp="1"/>
           </p:cNvSpPr>
           <p:nvPr>
             <p:ph type="sldImg" idx="0"/>
@@ -548,7 +620,7 @@
         <p:nvSpPr>
           <p:cNvPr id="3" name="Notes Placeholder 2"/>
           <p:cNvSpPr>
-            <a:spLocks noGrp="1"/>
+            <a:spLocks xmlns:a="http://schemas.openxmlformats.org/drawingml/2006/main" noGrp="1"/>
           </p:cNvSpPr>
           <p:nvPr>
             <p:ph type="body" idx="1"/>
@@ -556,9 +628,9 @@
         </p:nvSpPr>
         <p:spPr/>
         <p:txBody>
-          <a:bodyPr/>
-          <a:lstStyle/>
-          <a:p>
+          <a:bodyPr xmlns:a="http://schemas.openxmlformats.org/drawingml/2006/main"/>
+          <a:lstStyle xmlns:a="http://schemas.openxmlformats.org/drawingml/2006/main"/>
+          <a:p xmlns:a="http://schemas.openxmlformats.org/drawingml/2006/main">
             <a:pPr marL="0" indent="0" algn="l">
               <a:spcBef>
                 <a:spcPts val="0"/>
@@ -567,13 +639,10 @@
                 <a:spcPts val="0"/>
               </a:spcAft>
               <a:buNone/>
-              <a:defRPr/>
-            </a:pPr>
-            <a:r>
-              <a:rPr lang="ko-KR" altLang="en-US"/>
-              <a:t>Our retained model keeps YAMNet as a frozen feature extractor but adds a task-specific classifier. Every audio frame becomes a 1,024-dimensional embedding. The classifier uses dense layers of 512, 256, and 128 units, followed by a three-class softmax. Batch normalization, dropout, and L2 regularization reduce overfitting. The official policy was selected on validation and uses classifier-only thresholds of 0.95 for glass and 0.40 for scream, with one and three consecutive frames respectively.</a:t>
-            </a:r>
-            <a:endParaRPr lang="ko-KR" altLang="en-US"/>
+            </a:pPr>
+            <a:r>
+              <a:t>Why use sound at all? Cameras and motion sensors are useful, but they have blind spots. A microphone can detect an event even when the source is outside the camera view. Our design also keeps inference on the edge: raw audio does not need to be continuously uploaded. When a threat is confirmed, the system can immediately activate a buzzer and LED, take a photo, write a log, and send a Telegram message.</a:t>
+            </a:r>
           </a:p>
         </p:txBody>
       </p:sp>
@@ -581,7 +650,7 @@
         <p:nvSpPr>
           <p:cNvPr id="4" name="Slide Number Placeholder 3"/>
           <p:cNvSpPr>
-            <a:spLocks noGrp="1"/>
+            <a:spLocks xmlns:a="http://schemas.openxmlformats.org/drawingml/2006/main" noGrp="1"/>
           </p:cNvSpPr>
           <p:nvPr>
             <p:ph type="sldNum" idx="5"/>
@@ -589,30 +658,21 @@
         </p:nvSpPr>
         <p:spPr/>
         <p:txBody>
-          <a:bodyPr/>
-          <a:lstStyle/>
-          <a:p>
-            <a:pPr>
-              <a:defRPr/>
-            </a:pPr>
-            <a:r>
-              <a:rPr lang="ko-KR" altLang="en-US"/>
-              <a:t/>
-            </a:r>
-            <a:endParaRPr lang="ko-KR" altLang="en-US"/>
-          </a:p>
+          <a:bodyPr xmlns:a="http://schemas.openxmlformats.org/drawingml/2006/main"/>
+          <a:lstStyle xmlns:a="http://schemas.openxmlformats.org/drawingml/2006/main"/>
+          <a:p xmlns:a="http://schemas.openxmlformats.org/drawingml/2006/main"/>
         </p:txBody>
       </p:sp>
     </p:spTree>
   </p:cSld>
   <p:clrMapOvr>
-    <a:masterClrMapping/>
+    <a:masterClrMapping xmlns:a="http://schemas.openxmlformats.org/drawingml/2006/main"/>
   </p:clrMapOvr>
 </p:notes>
 </file>
 
-<file path=ppt/notesSlides/notesSlide4.xml><?xml version="1.0" encoding="utf-8"?>
-<p:notes xmlns:r="http://schemas.openxmlformats.org/officeDocument/2006/relationships" xmlns:c="http://schemas.openxmlformats.org/drawingml/2006/chart" xmlns:a="http://schemas.openxmlformats.org/drawingml/2006/main" xmlns:dgm="http://schemas.openxmlformats.org/drawingml/2006/diagram" xmlns:dsp="http://schemas.microsoft.com/office/drawing/2008/diagram" xmlns:p="http://schemas.openxmlformats.org/presentationml/2006/main">
+<file path=ppt/notesSlides/notesSlide3.xml><?xml version="1.0" encoding="utf-8"?>
+<p:notes xmlns:p="http://schemas.openxmlformats.org/presentationml/2006/main">
   <p:cSld>
     <p:spTree>
       <p:nvGrpSpPr>
@@ -621,18 +681,13 @@
         <p:nvPr/>
       </p:nvGrpSpPr>
       <p:grpSpPr>
-        <a:xfrm>
-          <a:off x="0" y="0"/>
-          <a:ext cx="0" cy="0"/>
-          <a:chOff x="0" y="0"/>
-          <a:chExt cx="0" cy="0"/>
-        </a:xfrm>
+        <a:xfrm xmlns:a="http://schemas.openxmlformats.org/drawingml/2006/main"/>
       </p:grpSpPr>
       <p:sp>
         <p:nvSpPr>
           <p:cNvPr id="2" name="Slide Image Placeholder 1"/>
           <p:cNvSpPr>
-            <a:spLocks noGrp="1" noRot="1" noChangeAspect="1" noTextEdit="1"/>
+            <a:spLocks xmlns:a="http://schemas.openxmlformats.org/drawingml/2006/main" noGrp="1"/>
           </p:cNvSpPr>
           <p:nvPr>
             <p:ph type="sldImg" idx="0"/>
@@ -644,7 +699,7 @@
         <p:nvSpPr>
           <p:cNvPr id="3" name="Notes Placeholder 2"/>
           <p:cNvSpPr>
-            <a:spLocks noGrp="1"/>
+            <a:spLocks xmlns:a="http://schemas.openxmlformats.org/drawingml/2006/main" noGrp="1"/>
           </p:cNvSpPr>
           <p:nvPr>
             <p:ph type="body" idx="1"/>
@@ -652,17 +707,12 @@
         </p:nvSpPr>
         <p:spPr/>
         <p:txBody>
-          <a:bodyPr/>
-          <a:lstStyle/>
-          <a:p>
-            <a:pPr lvl="0">
-              <a:defRPr/>
-            </a:pPr>
-            <a:r>
-              <a:rPr lang="ko-KR" altLang="en-US"/>
-              <a:t>These are the official strict-label test results for the retained model. It correctly classified 136 of 165 source groups, for 82.4 percent accuracy and 0.801 Macro F1. Glass recall was 24 of 29, and scream recall was 27 of 38. On 98 normal groups, 13 produced a false alarm. These counts are important because the class sample sizes are modest. No new candidate passed the validation promotion rule, which required higher Macro F1 than the retained model, at most five percent normal false alarms, and at least seventy percent recall for both events.</a:t>
-            </a:r>
-            <a:endParaRPr lang="ko-KR" altLang="en-US"/>
+          <a:bodyPr xmlns:a="http://schemas.openxmlformats.org/drawingml/2006/main"/>
+          <a:lstStyle xmlns:a="http://schemas.openxmlformats.org/drawingml/2006/main"/>
+          <a:p xmlns:a="http://schemas.openxmlformats.org/drawingml/2006/main">
+            <a:r>
+              <a:t>This slide asks one specific question: why not use YAMNet by itself? As a control comparison, we remove our custom head and map YAMNet's 521 generic AudioSet scores directly into glass, scream, or normal using fixed rules. On the strict test set, this produced a Macro F1 of 0.756 and detected only 19 of 38 screams, or 50 percent. The result shows that generic semantic scores alone are not sufficiently specialized for our targets. We use this comparison only to understand the limitation of YAMNet-only detection. It was not used to choose our model or thresholds. This limitation motivates the task-specific head on the next slide.</a:t>
+            </a:r>
           </a:p>
         </p:txBody>
       </p:sp>
@@ -670,7 +720,7 @@
         <p:nvSpPr>
           <p:cNvPr id="4" name="Slide Number Placeholder 3"/>
           <p:cNvSpPr>
-            <a:spLocks noGrp="1"/>
+            <a:spLocks xmlns:a="http://schemas.openxmlformats.org/drawingml/2006/main" noGrp="1"/>
           </p:cNvSpPr>
           <p:nvPr>
             <p:ph type="sldNum" idx="5"/>
@@ -678,30 +728,21 @@
         </p:nvSpPr>
         <p:spPr/>
         <p:txBody>
-          <a:bodyPr/>
-          <a:lstStyle/>
-          <a:p>
-            <a:pPr>
-              <a:defRPr/>
-            </a:pPr>
-            <a:r>
-              <a:rPr lang="ko-KR" altLang="en-US"/>
-              <a:t/>
-            </a:r>
-            <a:endParaRPr lang="ko-KR" altLang="en-US"/>
-          </a:p>
+          <a:bodyPr xmlns:a="http://schemas.openxmlformats.org/drawingml/2006/main"/>
+          <a:lstStyle xmlns:a="http://schemas.openxmlformats.org/drawingml/2006/main"/>
+          <a:p xmlns:a="http://schemas.openxmlformats.org/drawingml/2006/main"/>
         </p:txBody>
       </p:sp>
     </p:spTree>
   </p:cSld>
   <p:clrMapOvr>
-    <a:masterClrMapping/>
+    <a:masterClrMapping xmlns:a="http://schemas.openxmlformats.org/drawingml/2006/main"/>
   </p:clrMapOvr>
 </p:notes>
 </file>
 
-<file path=ppt/notesSlides/notesSlide5.xml><?xml version="1.0" encoding="utf-8"?>
-<p:notes xmlns:r="http://schemas.openxmlformats.org/officeDocument/2006/relationships" xmlns:c="http://schemas.openxmlformats.org/drawingml/2006/chart" xmlns:a="http://schemas.openxmlformats.org/drawingml/2006/main" xmlns:dgm="http://schemas.openxmlformats.org/drawingml/2006/diagram" xmlns:dsp="http://schemas.microsoft.com/office/drawing/2008/diagram" xmlns:p="http://schemas.openxmlformats.org/presentationml/2006/main">
+<file path=ppt/notesSlides/notesSlide4.xml><?xml version="1.0" encoding="utf-8"?>
+<p:notes xmlns:p="http://schemas.openxmlformats.org/presentationml/2006/main">
   <p:cSld>
     <p:spTree>
       <p:nvGrpSpPr>
@@ -710,18 +751,13 @@
         <p:nvPr/>
       </p:nvGrpSpPr>
       <p:grpSpPr>
-        <a:xfrm>
-          <a:off x="0" y="0"/>
-          <a:ext cx="0" cy="0"/>
-          <a:chOff x="0" y="0"/>
-          <a:chExt cx="0" cy="0"/>
-        </a:xfrm>
+        <a:xfrm xmlns:a="http://schemas.openxmlformats.org/drawingml/2006/main"/>
       </p:grpSpPr>
       <p:sp>
         <p:nvSpPr>
           <p:cNvPr id="2" name="Slide Image Placeholder 1"/>
           <p:cNvSpPr>
-            <a:spLocks noGrp="1" noRot="1" noChangeAspect="1" noTextEdit="1"/>
+            <a:spLocks xmlns:a="http://schemas.openxmlformats.org/drawingml/2006/main" noGrp="1"/>
           </p:cNvSpPr>
           <p:nvPr>
             <p:ph type="sldImg" idx="0"/>
@@ -733,7 +769,7 @@
         <p:nvSpPr>
           <p:cNvPr id="3" name="Notes Placeholder 2"/>
           <p:cNvSpPr>
-            <a:spLocks noGrp="1"/>
+            <a:spLocks xmlns:a="http://schemas.openxmlformats.org/drawingml/2006/main" noGrp="1"/>
           </p:cNvSpPr>
           <p:nvPr>
             <p:ph type="body" idx="1"/>
@@ -741,17 +777,21 @@
         </p:nvSpPr>
         <p:spPr/>
         <p:txBody>
-          <a:bodyPr/>
-          <a:lstStyle/>
-          <a:p>
-            <a:pPr lvl="0">
-              <a:defRPr/>
-            </a:pPr>
-            <a:r>
-              <a:rPr lang="ko-KR" altLang="en-US"/>
-              <a:t>The official and original demo policies optimize different risks. The official classifier-only policy achieved Macro F1 0.801, normal false alarms of 13.3 percent, glass recall of 82.8 percent, and scream recall of 71.1 percent. The original demo used higher thresholds, YAMNet corroboration, scream mean and margin filters, and an RMS gate in the live microphone loop. The historical offline ablation did not include that RMS gate. In that ablation, Macro F1 was 0.804, false alarms fell to 7.1 percent, glass recall stayed at 82.8 percent, and scream recall fell to 57.9 percent. This comparison was not used for model selection.</a:t>
-            </a:r>
-            <a:endParaRPr lang="ko-KR" altLang="en-US"/>
+          <a:bodyPr xmlns:a="http://schemas.openxmlformats.org/drawingml/2006/main"/>
+          <a:lstStyle xmlns:a="http://schemas.openxmlformats.org/drawingml/2006/main"/>
+          <a:p xmlns:a="http://schemas.openxmlformats.org/drawingml/2006/main">
+            <a:pPr marL="0" indent="0" algn="l">
+              <a:spcBef>
+                <a:spcPts val="0"/>
+              </a:spcBef>
+              <a:spcAft>
+                <a:spcPts val="0"/>
+              </a:spcAft>
+              <a:buNone/>
+            </a:pPr>
+            <a:r>
+              <a:t>Our final system uses both outputs from one YAMNet forward pass. The 1,024-dimensional embeddings enter our task-specific classifier, which uses dense layers of 512, 256, and 128 units followed by a three-class softmax. In parallel, selected YAMNet AudioSet scores provide semantic corroboration. The final rule has two paths: sustained classifier evidence can trigger directly, while a short corroborated path requires the classifier and YAMNet to agree on the same frame.</a:t>
+            </a:r>
           </a:p>
         </p:txBody>
       </p:sp>
@@ -759,7 +799,7 @@
         <p:nvSpPr>
           <p:cNvPr id="4" name="Slide Number Placeholder 3"/>
           <p:cNvSpPr>
-            <a:spLocks noGrp="1"/>
+            <a:spLocks xmlns:a="http://schemas.openxmlformats.org/drawingml/2006/main" noGrp="1"/>
           </p:cNvSpPr>
           <p:nvPr>
             <p:ph type="sldNum" idx="5"/>
@@ -767,30 +807,21 @@
         </p:nvSpPr>
         <p:spPr/>
         <p:txBody>
-          <a:bodyPr/>
-          <a:lstStyle/>
-          <a:p>
-            <a:pPr>
-              <a:defRPr/>
-            </a:pPr>
-            <a:r>
-              <a:rPr lang="ko-KR" altLang="en-US"/>
-              <a:t/>
-            </a:r>
-            <a:endParaRPr lang="ko-KR" altLang="en-US"/>
-          </a:p>
+          <a:bodyPr xmlns:a="http://schemas.openxmlformats.org/drawingml/2006/main"/>
+          <a:lstStyle xmlns:a="http://schemas.openxmlformats.org/drawingml/2006/main"/>
+          <a:p xmlns:a="http://schemas.openxmlformats.org/drawingml/2006/main"/>
         </p:txBody>
       </p:sp>
     </p:spTree>
   </p:cSld>
   <p:clrMapOvr>
-    <a:masterClrMapping/>
+    <a:masterClrMapping xmlns:a="http://schemas.openxmlformats.org/drawingml/2006/main"/>
   </p:clrMapOvr>
 </p:notes>
 </file>
 
-<file path=ppt/notesSlides/notesSlide6.xml><?xml version="1.0" encoding="utf-8"?>
-<p:notes xmlns:r="http://schemas.openxmlformats.org/officeDocument/2006/relationships" xmlns:c="http://schemas.openxmlformats.org/drawingml/2006/chart" xmlns:a="http://schemas.openxmlformats.org/drawingml/2006/main" xmlns:dgm="http://schemas.openxmlformats.org/drawingml/2006/diagram" xmlns:dsp="http://schemas.microsoft.com/office/drawing/2008/diagram" xmlns:p="http://schemas.openxmlformats.org/presentationml/2006/main">
+<file path=ppt/notesSlides/notesSlide5.xml><?xml version="1.0" encoding="utf-8"?>
+<p:notes xmlns:p="http://schemas.openxmlformats.org/presentationml/2006/main">
   <p:cSld>
     <p:spTree>
       <p:nvGrpSpPr>
@@ -799,18 +830,13 @@
         <p:nvPr/>
       </p:nvGrpSpPr>
       <p:grpSpPr>
-        <a:xfrm>
-          <a:off x="0" y="0"/>
-          <a:ext cx="0" cy="0"/>
-          <a:chOff x="0" y="0"/>
-          <a:chExt cx="0" cy="0"/>
-        </a:xfrm>
+        <a:xfrm xmlns:a="http://schemas.openxmlformats.org/drawingml/2006/main"/>
       </p:grpSpPr>
       <p:sp>
         <p:nvSpPr>
           <p:cNvPr id="2" name="Slide Image Placeholder 1"/>
           <p:cNvSpPr>
-            <a:spLocks noGrp="1" noRot="1" noChangeAspect="1" noTextEdit="1"/>
+            <a:spLocks xmlns:a="http://schemas.openxmlformats.org/drawingml/2006/main" noGrp="1"/>
           </p:cNvSpPr>
           <p:nvPr>
             <p:ph type="sldImg" idx="0"/>
@@ -822,7 +848,7 @@
         <p:nvSpPr>
           <p:cNvPr id="3" name="Notes Placeholder 2"/>
           <p:cNvSpPr>
-            <a:spLocks noGrp="1"/>
+            <a:spLocks xmlns:a="http://schemas.openxmlformats.org/drawingml/2006/main" noGrp="1"/>
           </p:cNvSpPr>
           <p:nvPr>
             <p:ph type="body" idx="1"/>
@@ -830,17 +856,12 @@
         </p:nvSpPr>
         <p:spPr/>
         <p:txBody>
-          <a:bodyPr/>
-          <a:lstStyle/>
-          <a:p>
-            <a:pPr lvl="0">
-              <a:defRPr/>
-            </a:pPr>
-            <a:r>
-              <a:rPr lang="ko-KR" altLang="en-US"/>
-              <a:t>To conclude, transfer learning made the detector practical, while source-group splitting and explicit validation gates made the evaluation more defensible. Comparing the official and original demo policies exposes the real trade-off: fewer false alarms versus more missed screams. The next engineering goal is to reduce false alarms without sacrificing threat recall. Thank you. I am ready for your questions.</a:t>
-            </a:r>
-            <a:endParaRPr lang="ko-KR" altLang="en-US"/>
+          <a:bodyPr xmlns:a="http://schemas.openxmlformats.org/drawingml/2006/main"/>
+          <a:lstStyle xmlns:a="http://schemas.openxmlformats.org/drawingml/2006/main"/>
+          <a:p xmlns:a="http://schemas.openxmlformats.org/drawingml/2006/main">
+            <a:r>
+              <a:t>The largest methodological improvement was the evaluation protocol. We removed 158 broad-label clips, grouped clean and augmented files by original source, merged 325 duplicate aliases, and prevented shared YouTube IDs from crossing splits. For this rerun, we fixed only three candidates before executing the selection program: recall-oriented, balanced, and precision-oriented. Selection used validation only, and the balanced policy achieved the highest Macro F1 while keeping both event recalls above seventy percent.</a:t>
+            </a:r>
           </a:p>
         </p:txBody>
       </p:sp>
@@ -848,7 +869,7 @@
         <p:nvSpPr>
           <p:cNvPr id="4" name="Slide Number Placeholder 3"/>
           <p:cNvSpPr>
-            <a:spLocks noGrp="1"/>
+            <a:spLocks xmlns:a="http://schemas.openxmlformats.org/drawingml/2006/main" noGrp="1"/>
           </p:cNvSpPr>
           <p:nvPr>
             <p:ph type="sldNum" idx="5"/>
@@ -856,29 +877,951 @@
         </p:nvSpPr>
         <p:spPr/>
         <p:txBody>
-          <a:bodyPr/>
-          <a:lstStyle/>
-          <a:p>
-            <a:pPr>
-              <a:defRPr/>
-            </a:pPr>
-            <a:r>
-              <a:rPr lang="ko-KR" altLang="en-US"/>
-              <a:t/>
-            </a:r>
-            <a:endParaRPr lang="ko-KR" altLang="en-US"/>
-          </a:p>
+          <a:bodyPr xmlns:a="http://schemas.openxmlformats.org/drawingml/2006/main"/>
+          <a:lstStyle xmlns:a="http://schemas.openxmlformats.org/drawingml/2006/main"/>
+          <a:p xmlns:a="http://schemas.openxmlformats.org/drawingml/2006/main"/>
         </p:txBody>
       </p:sp>
     </p:spTree>
   </p:cSld>
   <p:clrMapOvr>
-    <a:masterClrMapping/>
+    <a:masterClrMapping xmlns:a="http://schemas.openxmlformats.org/drawingml/2006/main"/>
+  </p:clrMapOvr>
+</p:notes>
+</file>
+
+<file path=ppt/notesSlides/notesSlide6.xml><?xml version="1.0" encoding="utf-8"?>
+<p:notes xmlns:p="http://schemas.openxmlformats.org/presentationml/2006/main">
+  <p:cSld>
+    <p:spTree>
+      <p:nvGrpSpPr>
+        <p:cNvPr id="1" name=""/>
+        <p:cNvGrpSpPr/>
+        <p:nvPr/>
+      </p:nvGrpSpPr>
+      <p:grpSpPr>
+        <a:xfrm xmlns:a="http://schemas.openxmlformats.org/drawingml/2006/main"/>
+      </p:grpSpPr>
+      <p:sp>
+        <p:nvSpPr>
+          <p:cNvPr id="2" name="Slide Image Placeholder 1"/>
+          <p:cNvSpPr>
+            <a:spLocks xmlns:a="http://schemas.openxmlformats.org/drawingml/2006/main" noGrp="1"/>
+          </p:cNvSpPr>
+          <p:nvPr>
+            <p:ph type="sldImg" idx="0"/>
+          </p:nvPr>
+        </p:nvSpPr>
+        <p:spPr/>
+      </p:sp>
+      <p:sp>
+        <p:nvSpPr>
+          <p:cNvPr id="3" name="Notes Placeholder 2"/>
+          <p:cNvSpPr>
+            <a:spLocks xmlns:a="http://schemas.openxmlformats.org/drawingml/2006/main" noGrp="1"/>
+          </p:cNvSpPr>
+          <p:nvPr>
+            <p:ph type="body" idx="1"/>
+          </p:nvPr>
+        </p:nvSpPr>
+        <p:spPr/>
+        <p:txBody>
+          <a:bodyPr xmlns:a="http://schemas.openxmlformats.org/drawingml/2006/main"/>
+          <a:lstStyle xmlns:a="http://schemas.openxmlformats.org/drawingml/2006/main"/>
+          <a:p xmlns:a="http://schemas.openxmlformats.org/drawingml/2006/main">
+            <a:r>
+              <a:t>The final Fusion system provided the best overall balance between threat recall and normal false alarms, reaching a Macro F1 of 0.837. The class-level results show balanced behavior across both threat categories and normal audio. The important limitation is that, although policy selection used validation only, this test split had been inspected in earlier project iterations. We therefore treat this as a retrospective engineering result and still need fresh external validation.</a:t>
+            </a:r>
+          </a:p>
+        </p:txBody>
+      </p:sp>
+      <p:sp>
+        <p:nvSpPr>
+          <p:cNvPr id="4" name="Slide Number Placeholder 3"/>
+          <p:cNvSpPr>
+            <a:spLocks xmlns:a="http://schemas.openxmlformats.org/drawingml/2006/main" noGrp="1"/>
+          </p:cNvSpPr>
+          <p:nvPr>
+            <p:ph type="sldNum" idx="5"/>
+          </p:nvPr>
+        </p:nvSpPr>
+        <p:spPr/>
+        <p:txBody>
+          <a:bodyPr xmlns:a="http://schemas.openxmlformats.org/drawingml/2006/main"/>
+          <a:lstStyle xmlns:a="http://schemas.openxmlformats.org/drawingml/2006/main"/>
+          <a:p xmlns:a="http://schemas.openxmlformats.org/drawingml/2006/main"/>
+        </p:txBody>
+      </p:sp>
+    </p:spTree>
+  </p:cSld>
+  <p:clrMapOvr>
+    <a:masterClrMapping xmlns:a="http://schemas.openxmlformats.org/drawingml/2006/main"/>
+  </p:clrMapOvr>
+</p:notes>
+</file>
+
+<file path=ppt/notesSlides/notesSlide7.xml><?xml version="1.0" encoding="utf-8"?>
+<p:notes xmlns:p="http://schemas.openxmlformats.org/presentationml/2006/main">
+  <p:cSld>
+    <p:spTree>
+      <p:nvGrpSpPr>
+        <p:cNvPr id="1" name=""/>
+        <p:cNvGrpSpPr/>
+        <p:nvPr/>
+      </p:nvGrpSpPr>
+      <p:grpSpPr>
+        <a:xfrm xmlns:a="http://schemas.openxmlformats.org/drawingml/2006/main"/>
+      </p:grpSpPr>
+      <p:sp>
+        <p:nvSpPr>
+          <p:cNvPr id="2" name="Slide Image Placeholder 1"/>
+          <p:cNvSpPr>
+            <a:spLocks xmlns:a="http://schemas.openxmlformats.org/drawingml/2006/main" noGrp="1"/>
+          </p:cNvSpPr>
+          <p:nvPr>
+            <p:ph type="sldImg" idx="0"/>
+          </p:nvPr>
+        </p:nvSpPr>
+        <p:spPr/>
+      </p:sp>
+      <p:sp>
+        <p:nvSpPr>
+          <p:cNvPr id="3" name="Notes Placeholder 2"/>
+          <p:cNvSpPr>
+            <a:spLocks xmlns:a="http://schemas.openxmlformats.org/drawingml/2006/main" noGrp="1"/>
+          </p:cNvSpPr>
+          <p:nvPr>
+            <p:ph type="body" idx="1"/>
+          </p:nvPr>
+        </p:nvSpPr>
+        <p:spPr/>
+        <p:txBody>
+          <a:bodyPr xmlns:a="http://schemas.openxmlformats.org/drawingml/2006/main"/>
+          <a:lstStyle xmlns:a="http://schemas.openxmlformats.org/drawingml/2006/main"/>
+          <a:p xmlns:a="http://schemas.openxmlformats.org/drawingml/2006/main">
+            <a:r>
+              <a:t>Three lessons changed our approach. First, we began with conventional clip-level averaging commonly used with YAMNet. This is appropriate when the goal is to summarize the dominant sound across a clip. Our task, however, is transient-event detection, so short glass impacts were diluted by surrounding normal frames. We therefore retained frame-level evidence. Second, broad AudioSet labels introduced label noise, so we kept only verified glass and shatter sources. Third, the high false-alarm ablation is not the standalone classifier result. We deliberately kept the low-threshold shortcut designed for Fusion and removed only its required YAMNet gate. The sharp increase in false alarms shows that this relaxed path is safe only when both signals agree.</a:t>
+            </a:r>
+          </a:p>
+        </p:txBody>
+      </p:sp>
+      <p:sp>
+        <p:nvSpPr>
+          <p:cNvPr id="4" name="Slide Number Placeholder 3"/>
+          <p:cNvSpPr>
+            <a:spLocks xmlns:a="http://schemas.openxmlformats.org/drawingml/2006/main" noGrp="1"/>
+          </p:cNvSpPr>
+          <p:nvPr>
+            <p:ph type="sldNum" idx="5"/>
+          </p:nvPr>
+        </p:nvSpPr>
+        <p:spPr/>
+        <p:txBody>
+          <a:bodyPr xmlns:a="http://schemas.openxmlformats.org/drawingml/2006/main"/>
+          <a:lstStyle xmlns:a="http://schemas.openxmlformats.org/drawingml/2006/main"/>
+          <a:p xmlns:a="http://schemas.openxmlformats.org/drawingml/2006/main"/>
+        </p:txBody>
+      </p:sp>
+    </p:spTree>
+  </p:cSld>
+  <p:clrMapOvr>
+    <a:masterClrMapping xmlns:a="http://schemas.openxmlformats.org/drawingml/2006/main"/>
+  </p:clrMapOvr>
+</p:notes>
+</file>
+
+<file path=ppt/notesSlides/notesSlide8.xml><?xml version="1.0" encoding="utf-8"?>
+<p:notes xmlns:p="http://schemas.openxmlformats.org/presentationml/2006/main">
+  <p:cSld>
+    <p:spTree>
+      <p:nvGrpSpPr>
+        <p:cNvPr id="1" name=""/>
+        <p:cNvGrpSpPr/>
+        <p:nvPr/>
+      </p:nvGrpSpPr>
+      <p:grpSpPr>
+        <a:xfrm xmlns:a="http://schemas.openxmlformats.org/drawingml/2006/main"/>
+      </p:grpSpPr>
+      <p:sp>
+        <p:nvSpPr>
+          <p:cNvPr id="2" name="Slide Image Placeholder 1"/>
+          <p:cNvSpPr>
+            <a:spLocks xmlns:a="http://schemas.openxmlformats.org/drawingml/2006/main" noGrp="1"/>
+          </p:cNvSpPr>
+          <p:nvPr>
+            <p:ph type="sldImg" idx="0"/>
+          </p:nvPr>
+        </p:nvSpPr>
+        <p:spPr/>
+      </p:sp>
+      <p:sp>
+        <p:nvSpPr>
+          <p:cNvPr id="3" name="Notes Placeholder 2"/>
+          <p:cNvSpPr>
+            <a:spLocks xmlns:a="http://schemas.openxmlformats.org/drawingml/2006/main" noGrp="1"/>
+          </p:cNvSpPr>
+          <p:nvPr>
+            <p:ph type="body" idx="1"/>
+          </p:nvPr>
+        </p:nvSpPr>
+        <p:spPr/>
+        <p:txBody>
+          <a:bodyPr xmlns:a="http://schemas.openxmlformats.org/drawingml/2006/main"/>
+          <a:lstStyle xmlns:a="http://schemas.openxmlformats.org/drawingml/2006/main"/>
+          <a:p xmlns:a="http://schemas.openxmlformats.org/drawingml/2006/main">
+            <a:r>
+              <a:t>Each YAMNet forward pass returns two outputs used by our system: the embeddings for our custom head and the 521 AudioSet scores for semantic corroboration. All cleaned clips, offline evaluation, file prediction, and live defaults now use a three-second window; the live hop is one second. On this Windows PC, YAMNet, the H5 classifier, and Fusion averaged 57 milliseconds with a 61 millisecond p95 over thirty files. On the Raspberry Pi, complete event-to-alert latency was [0000] milliseconds on average, with a [0000] millisecond p95. The bracketed values are temporary fields and must be replaced with tonight's measurement before presenting.</a:t>
+            </a:r>
+          </a:p>
+        </p:txBody>
+      </p:sp>
+      <p:sp>
+        <p:nvSpPr>
+          <p:cNvPr id="4" name="Slide Number Placeholder 3"/>
+          <p:cNvSpPr>
+            <a:spLocks xmlns:a="http://schemas.openxmlformats.org/drawingml/2006/main" noGrp="1"/>
+          </p:cNvSpPr>
+          <p:nvPr>
+            <p:ph type="sldNum" idx="5"/>
+          </p:nvPr>
+        </p:nvSpPr>
+        <p:spPr/>
+        <p:txBody>
+          <a:bodyPr xmlns:a="http://schemas.openxmlformats.org/drawingml/2006/main"/>
+          <a:lstStyle xmlns:a="http://schemas.openxmlformats.org/drawingml/2006/main"/>
+          <a:p xmlns:a="http://schemas.openxmlformats.org/drawingml/2006/main"/>
+        </p:txBody>
+      </p:sp>
+    </p:spTree>
+  </p:cSld>
+  <p:clrMapOvr>
+    <a:masterClrMapping xmlns:a="http://schemas.openxmlformats.org/drawingml/2006/main"/>
+  </p:clrMapOvr>
+</p:notes>
+</file>
+
+<file path=ppt/notesSlides/notesSlide9.xml><?xml version="1.0" encoding="utf-8"?>
+<p:notes xmlns:p="http://schemas.openxmlformats.org/presentationml/2006/main">
+  <p:cSld>
+    <p:spTree>
+      <p:nvGrpSpPr>
+        <p:cNvPr id="1" name=""/>
+        <p:cNvGrpSpPr/>
+        <p:nvPr/>
+      </p:nvGrpSpPr>
+      <p:grpSpPr>
+        <a:xfrm xmlns:a="http://schemas.openxmlformats.org/drawingml/2006/main"/>
+      </p:grpSpPr>
+      <p:sp>
+        <p:nvSpPr>
+          <p:cNvPr id="2" name="Slide Image Placeholder 1"/>
+          <p:cNvSpPr>
+            <a:spLocks xmlns:a="http://schemas.openxmlformats.org/drawingml/2006/main" noGrp="1"/>
+          </p:cNvSpPr>
+          <p:nvPr>
+            <p:ph type="sldImg" idx="0"/>
+          </p:nvPr>
+        </p:nvSpPr>
+        <p:spPr/>
+      </p:sp>
+      <p:sp>
+        <p:nvSpPr>
+          <p:cNvPr id="3" name="Notes Placeholder 2"/>
+          <p:cNvSpPr>
+            <a:spLocks xmlns:a="http://schemas.openxmlformats.org/drawingml/2006/main" noGrp="1"/>
+          </p:cNvSpPr>
+          <p:nvPr>
+            <p:ph type="body" idx="1"/>
+          </p:nvPr>
+        </p:nvSpPr>
+        <p:spPr/>
+        <p:txBody>
+          <a:bodyPr xmlns:a="http://schemas.openxmlformats.org/drawingml/2006/main"/>
+          <a:lstStyle xmlns:a="http://schemas.openxmlformats.org/drawingml/2006/main"/>
+          <a:p xmlns:a="http://schemas.openxmlformats.org/drawingml/2006/main">
+            <a:r>
+              <a:t>There are three practical directions for improvement. For data, we need more real microphone screams and hard negatives such as impacts, speech, and footsteps from the deployment room. For the model, selective YAMNet fine-tuning, better calibration, or a compact temporal network could improve context. For deployment, the current runtime is TensorFlow Hub plus H5; the TFLite file contains only the classifier head. We should validate Raspberry Pi latency under sustained load and measure long-duration false alarms per hour.</a:t>
+            </a:r>
+          </a:p>
+        </p:txBody>
+      </p:sp>
+      <p:sp>
+        <p:nvSpPr>
+          <p:cNvPr id="4" name="Slide Number Placeholder 3"/>
+          <p:cNvSpPr>
+            <a:spLocks xmlns:a="http://schemas.openxmlformats.org/drawingml/2006/main" noGrp="1"/>
+          </p:cNvSpPr>
+          <p:nvPr>
+            <p:ph type="sldNum" idx="5"/>
+          </p:nvPr>
+        </p:nvSpPr>
+        <p:spPr/>
+        <p:txBody>
+          <a:bodyPr xmlns:a="http://schemas.openxmlformats.org/drawingml/2006/main"/>
+          <a:lstStyle xmlns:a="http://schemas.openxmlformats.org/drawingml/2006/main"/>
+          <a:p xmlns:a="http://schemas.openxmlformats.org/drawingml/2006/main"/>
+        </p:txBody>
+      </p:sp>
+    </p:spTree>
+  </p:cSld>
+  <p:clrMapOvr>
+    <a:masterClrMapping xmlns:a="http://schemas.openxmlformats.org/drawingml/2006/main"/>
   </p:clrMapOvr>
 </p:notes>
 </file>
 
 <file path=ppt/slideLayouts/slideLayout1.xml><?xml version="1.0" encoding="utf-8"?>
+<p:sldLayout xmlns:p="http://schemas.openxmlformats.org/presentationml/2006/main" preserve="1" userDrawn="1">
+  <p:cSld name="Title Slide">
+    <p:spTree>
+      <p:nvGrpSpPr>
+        <p:cNvPr id="1" name=""/>
+        <p:cNvGrpSpPr/>
+        <p:nvPr/>
+      </p:nvGrpSpPr>
+      <p:grpSpPr>
+        <a:xfrm xmlns:a="http://schemas.openxmlformats.org/drawingml/2006/main"/>
+      </p:grpSpPr>
+      <p:sp>
+        <p:nvSpPr>
+          <p:cNvPr id="2" name="Title 1">
+            <a:extLst xmlns:a="http://schemas.openxmlformats.org/drawingml/2006/main">
+              <a:ext uri="{FF2B5EF4-FFF2-40B4-BE49-F238E27FC236}">
+                <a16:creationId xmlns:a16="http://schemas.microsoft.com/office/drawing/2014/main" id="{683004A5-B645-655E-5362-4217D55892E1}"/>
+              </a:ext>
+            </a:extLst>
+          </p:cNvPr>
+          <p:cNvSpPr>
+            <a:spLocks xmlns:a="http://schemas.openxmlformats.org/drawingml/2006/main" noGrp="1"/>
+          </p:cNvSpPr>
+          <p:nvPr>
+            <p:ph type="ctrTitle" idx="0"/>
+          </p:nvPr>
+        </p:nvSpPr>
+        <p:spPr>
+          <a:xfrm xmlns:a="http://schemas.openxmlformats.org/drawingml/2006/main">
+            <a:off x="393700" y="1041400"/>
+            <a:ext cx="7493000" cy="2491490"/>
+          </a:xfrm>
+        </p:spPr>
+        <p:txBody>
+          <a:bodyPr xmlns:a="http://schemas.openxmlformats.org/drawingml/2006/main" anchor="b"/>
+          <a:lstStyle xmlns:a="http://schemas.openxmlformats.org/drawingml/2006/main">
+            <a:lvl1pPr algn="l">
+              <a:buNone/>
+              <a:defRPr sz="6000"/>
+            </a:lvl1pPr>
+          </a:lstStyle>
+          <a:p xmlns:a="http://schemas.openxmlformats.org/drawingml/2006/main">
+            <a:r>
+              <a:t>Click to edit Master title style</a:t>
+            </a:r>
+          </a:p>
+        </p:txBody>
+      </p:sp>
+      <p:sp>
+        <p:nvSpPr>
+          <p:cNvPr id="3" name="Subtitle 2">
+            <a:extLst xmlns:a="http://schemas.openxmlformats.org/drawingml/2006/main">
+              <a:ext uri="{FF2B5EF4-FFF2-40B4-BE49-F238E27FC236}">
+                <a16:creationId xmlns:a16="http://schemas.microsoft.com/office/drawing/2014/main" id="{C57031B1-59B2-C235-9FDD-8050418A5FD8}"/>
+              </a:ext>
+            </a:extLst>
+          </p:cNvPr>
+          <p:cNvSpPr>
+            <a:spLocks xmlns:a="http://schemas.openxmlformats.org/drawingml/2006/main" noGrp="1"/>
+          </p:cNvSpPr>
+          <p:nvPr>
+            <p:ph type="subTitle" idx="1"/>
+          </p:nvPr>
+        </p:nvSpPr>
+        <p:spPr>
+          <a:xfrm xmlns:a="http://schemas.openxmlformats.org/drawingml/2006/main">
+            <a:off x="393700" y="4356100"/>
+            <a:ext cx="5537200" cy="1638300"/>
+          </a:xfrm>
+        </p:spPr>
+        <p:txBody>
+          <a:bodyPr xmlns:a="http://schemas.openxmlformats.org/drawingml/2006/main"/>
+          <a:lstStyle xmlns:a="http://schemas.openxmlformats.org/drawingml/2006/main">
+            <a:lvl1pPr marL="0" indent="0" algn="l">
+              <a:buNone/>
+              <a:defRPr sz="2400"/>
+            </a:lvl1pPr>
+            <a:lvl2pPr marL="457200" indent="0" algn="ctr">
+              <a:buNone/>
+              <a:defRPr sz="2000"/>
+            </a:lvl2pPr>
+            <a:lvl3pPr marL="914400" indent="0" algn="ctr">
+              <a:buNone/>
+              <a:defRPr sz="1800"/>
+            </a:lvl3pPr>
+            <a:lvl4pPr marL="1371600" indent="0" algn="ctr">
+              <a:buNone/>
+              <a:defRPr sz="1600"/>
+            </a:lvl4pPr>
+            <a:lvl5pPr marL="1828800" indent="0" algn="ctr">
+              <a:buNone/>
+              <a:defRPr sz="1600"/>
+            </a:lvl5pPr>
+            <a:lvl6pPr marL="2286000" indent="0" algn="ctr">
+              <a:buNone/>
+              <a:defRPr sz="1600"/>
+            </a:lvl6pPr>
+            <a:lvl7pPr marL="2743200" indent="0" algn="ctr">
+              <a:buNone/>
+              <a:defRPr sz="1600"/>
+            </a:lvl7pPr>
+            <a:lvl8pPr marL="3200400" indent="0" algn="ctr">
+              <a:buNone/>
+              <a:defRPr sz="1600"/>
+            </a:lvl8pPr>
+            <a:lvl9pPr marL="3657600" indent="0" algn="ctr">
+              <a:buNone/>
+              <a:defRPr sz="1600"/>
+            </a:lvl9pPr>
+          </a:lstStyle>
+          <a:p xmlns:a="http://schemas.openxmlformats.org/drawingml/2006/main">
+            <a:r>
+              <a:t>Click to edit Master subtitle style</a:t>
+            </a:r>
+          </a:p>
+        </p:txBody>
+      </p:sp>
+    </p:spTree>
+  </p:cSld>
+</p:sldLayout>
+</file>
+
+<file path=ppt/slideLayouts/slideLayout10.xml><?xml version="1.0" encoding="utf-8"?>
+<p:sldLayout xmlns:p="http://schemas.openxmlformats.org/presentationml/2006/main" preserve="1" userDrawn="1">
+  <p:cSld name="48 Field Grid">
+    <p:bg>
+      <p:bgPr>
+        <a:blipFill xmlns:a="http://schemas.openxmlformats.org/drawingml/2006/main" rotWithShape="1">
+          <a:blip xmlns:r="http://schemas.openxmlformats.org/officeDocument/2006/relationships" r:embed="R7d1bd9f2b44d4af4">
+            <a:lum/>
+          </a:blip>
+          <a:srcRect l="0" t="0" r="0" b="0"/>
+          <a:stretch>
+            <a:fillRect l="0" t="0" r="0" b="0"/>
+          </a:stretch>
+        </a:blipFill>
+      </p:bgPr>
+    </p:bg>
+    <p:spTree>
+      <p:nvGrpSpPr>
+        <p:cNvPr id="1" name=""/>
+        <p:cNvGrpSpPr/>
+        <p:nvPr/>
+      </p:nvGrpSpPr>
+      <p:grpSpPr>
+        <a:xfrm xmlns:a="http://schemas.openxmlformats.org/drawingml/2006/main"/>
+      </p:grpSpPr>
+    </p:spTree>
+  </p:cSld>
+</p:sldLayout>
+</file>
+
+<file path=ppt/slideLayouts/slideLayout2.xml><?xml version="1.0" encoding="utf-8"?>
+<p:sldLayout xmlns:p="http://schemas.openxmlformats.org/presentationml/2006/main" preserve="1" userDrawn="1">
+  <p:cSld name="Title and Content">
+    <p:spTree>
+      <p:nvGrpSpPr>
+        <p:cNvPr id="1" name=""/>
+        <p:cNvGrpSpPr/>
+        <p:nvPr/>
+      </p:nvGrpSpPr>
+      <p:grpSpPr>
+        <a:xfrm xmlns:a="http://schemas.openxmlformats.org/drawingml/2006/main"/>
+      </p:grpSpPr>
+      <p:sp>
+        <p:nvSpPr>
+          <p:cNvPr id="8" name="Text Placeholder 2">
+            <a:extLst xmlns:a="http://schemas.openxmlformats.org/drawingml/2006/main">
+              <a:ext uri="{FF2B5EF4-FFF2-40B4-BE49-F238E27FC236}">
+                <a16:creationId xmlns:a16="http://schemas.microsoft.com/office/drawing/2014/main" id="{5E851FDE-9E0B-568C-1CBA-E72B86CC06ED}"/>
+              </a:ext>
+            </a:extLst>
+          </p:cNvPr>
+          <p:cNvSpPr>
+            <a:spLocks xmlns:a="http://schemas.openxmlformats.org/drawingml/2006/main" noGrp="1"/>
+          </p:cNvSpPr>
+          <p:nvPr>
+            <p:ph idx="1"/>
+          </p:nvPr>
+        </p:nvSpPr>
+        <p:spPr>
+          <a:xfrm xmlns:a="http://schemas.openxmlformats.org/drawingml/2006/main">
+            <a:off x="393700" y="2032000"/>
+            <a:ext cx="11404600" cy="3962400"/>
+          </a:xfrm>
+          <a:prstGeom xmlns:a="http://schemas.openxmlformats.org/drawingml/2006/main" prst="rect">
+            <a:avLst/>
+          </a:prstGeom>
+        </p:spPr>
+        <p:txBody>
+          <a:bodyPr xmlns:a="http://schemas.openxmlformats.org/drawingml/2006/main" vert="horz" lIns="0" tIns="0" rIns="0" bIns="0">
+            <a:normAutofit/>
+          </a:bodyPr>
+          <a:lstStyle xmlns:a="http://schemas.openxmlformats.org/drawingml/2006/main"/>
+          <a:p xmlns:a="http://schemas.openxmlformats.org/drawingml/2006/main">
+            <a:pPr>
+              <a:buNone/>
+            </a:pPr>
+            <a:r>
+              <a:t>Click to edit Master text styles</a:t>
+            </a:r>
+          </a:p>
+          <a:p xmlns:a="http://schemas.openxmlformats.org/drawingml/2006/main">
+            <a:pPr>
+              <a:buNone/>
+            </a:pPr>
+            <a:r>
+              <a:t>Second level</a:t>
+            </a:r>
+          </a:p>
+          <a:p xmlns:a="http://schemas.openxmlformats.org/drawingml/2006/main">
+            <a:pPr>
+              <a:buNone/>
+            </a:pPr>
+            <a:r>
+              <a:t>Third level</a:t>
+            </a:r>
+          </a:p>
+          <a:p xmlns:a="http://schemas.openxmlformats.org/drawingml/2006/main">
+            <a:pPr>
+              <a:buNone/>
+            </a:pPr>
+            <a:r>
+              <a:t>Fourth level</a:t>
+            </a:r>
+          </a:p>
+          <a:p xmlns:a="http://schemas.openxmlformats.org/drawingml/2006/main">
+            <a:pPr>
+              <a:buNone/>
+            </a:pPr>
+            <a:r>
+              <a:t>Fifth level</a:t>
+            </a:r>
+          </a:p>
+        </p:txBody>
+      </p:sp>
+      <p:sp>
+        <p:nvSpPr>
+          <p:cNvPr id="9" name="Footer Placeholder 4">
+            <a:extLst xmlns:a="http://schemas.openxmlformats.org/drawingml/2006/main">
+              <a:ext uri="{FF2B5EF4-FFF2-40B4-BE49-F238E27FC236}">
+                <a16:creationId xmlns:a16="http://schemas.microsoft.com/office/drawing/2014/main" id="{29CCD18F-3BF6-A3EE-DAAE-66BD406D7E8D}"/>
+              </a:ext>
+            </a:extLst>
+          </p:cNvPr>
+          <p:cNvSpPr>
+            <a:spLocks xmlns:a="http://schemas.openxmlformats.org/drawingml/2006/main" noGrp="1"/>
+          </p:cNvSpPr>
+          <p:nvPr>
+            <p:ph type="ftr" idx="3"/>
+          </p:nvPr>
+        </p:nvSpPr>
+        <p:spPr>
+          <a:xfrm xmlns:a="http://schemas.openxmlformats.org/drawingml/2006/main">
+            <a:off x="393700" y="6279952"/>
+            <a:ext cx="3568700" cy="241240"/>
+          </a:xfrm>
+          <a:prstGeom xmlns:a="http://schemas.openxmlformats.org/drawingml/2006/main" prst="rect">
+            <a:avLst/>
+          </a:prstGeom>
+        </p:spPr>
+        <p:txBody>
+          <a:bodyPr xmlns:a="http://schemas.openxmlformats.org/drawingml/2006/main" vert="horz" lIns="0" tIns="0" rIns="0" bIns="0" anchor="b"/>
+          <a:lstStyle xmlns:a="http://schemas.openxmlformats.org/drawingml/2006/main">
+            <a:lvl1pPr algn="l">
+              <a:buNone/>
+              <a:defRPr sz="1100">
+                <a:solidFill>
+                  <a:schemeClr val="tx1"/>
+                </a:solidFill>
+              </a:defRPr>
+            </a:lvl1pPr>
+          </a:lstStyle>
+          <a:p xmlns:a="http://schemas.openxmlformats.org/drawingml/2006/main"/>
+        </p:txBody>
+      </p:sp>
+      <p:sp>
+        <p:nvSpPr>
+          <p:cNvPr id="10" name="Slide Number Placeholder 5">
+            <a:extLst xmlns:a="http://schemas.openxmlformats.org/drawingml/2006/main">
+              <a:ext uri="{FF2B5EF4-FFF2-40B4-BE49-F238E27FC236}">
+                <a16:creationId xmlns:a16="http://schemas.microsoft.com/office/drawing/2014/main" id="{5186992D-ADA6-5A23-EBD5-6BEF0A2E61BA}"/>
+              </a:ext>
+            </a:extLst>
+          </p:cNvPr>
+          <p:cNvSpPr>
+            <a:spLocks xmlns:a="http://schemas.openxmlformats.org/drawingml/2006/main" noGrp="1"/>
+          </p:cNvSpPr>
+          <p:nvPr>
+            <p:ph type="sldNum" idx="4"/>
+          </p:nvPr>
+        </p:nvSpPr>
+        <p:spPr>
+          <a:xfrm xmlns:a="http://schemas.openxmlformats.org/drawingml/2006/main">
+            <a:off x="11279332" y="6279294"/>
+            <a:ext cx="518968" cy="241240"/>
+          </a:xfrm>
+          <a:prstGeom xmlns:a="http://schemas.openxmlformats.org/drawingml/2006/main" prst="rect">
+            <a:avLst/>
+          </a:prstGeom>
+        </p:spPr>
+        <p:txBody>
+          <a:bodyPr xmlns:a="http://schemas.openxmlformats.org/drawingml/2006/main" vert="horz" lIns="0" tIns="0" rIns="0" bIns="0" anchor="b"/>
+          <a:lstStyle xmlns:a="http://schemas.openxmlformats.org/drawingml/2006/main">
+            <a:lvl1pPr algn="r">
+              <a:buNone/>
+              <a:defRPr sz="1100">
+                <a:solidFill>
+                  <a:schemeClr val="tx1"/>
+                </a:solidFill>
+                <a:latin typeface="+mn-lt"/>
+                <a:ea typeface="+mn-lt"/>
+                <a:cs typeface="+mn-lt"/>
+              </a:defRPr>
+            </a:lvl1pPr>
+          </a:lstStyle>
+          <a:p xmlns:a="http://schemas.openxmlformats.org/drawingml/2006/main">
+            <a:fld id="{8574A810-7A8E-054F-9F6B-09E9C694ECF9}" type="slidenum">
+              <a:t>‹#›</a:t>
+            </a:fld>
+          </a:p>
+        </p:txBody>
+      </p:sp>
+      <p:sp>
+        <p:nvSpPr>
+          <p:cNvPr id="2" name="Title Placeholder 1">
+            <a:extLst xmlns:a="http://schemas.openxmlformats.org/drawingml/2006/main">
+              <a:ext uri="{FF2B5EF4-FFF2-40B4-BE49-F238E27FC236}">
+                <a16:creationId xmlns:a16="http://schemas.microsoft.com/office/drawing/2014/main" id="{CDBB333F-FFCF-AA9E-7AC0-64DB02353FBC}"/>
+              </a:ext>
+            </a:extLst>
+          </p:cNvPr>
+          <p:cNvSpPr>
+            <a:spLocks xmlns:a="http://schemas.openxmlformats.org/drawingml/2006/main" noGrp="1"/>
+          </p:cNvSpPr>
+          <p:nvPr>
+            <p:ph type="title" idx="0"/>
+          </p:nvPr>
+        </p:nvSpPr>
+        <p:spPr>
+          <a:xfrm xmlns:a="http://schemas.openxmlformats.org/drawingml/2006/main">
+            <a:off x="393700" y="344008"/>
+            <a:ext cx="11404600" cy="1047491"/>
+          </a:xfrm>
+          <a:prstGeom xmlns:a="http://schemas.openxmlformats.org/drawingml/2006/main" prst="rect">
+            <a:avLst/>
+          </a:prstGeom>
+        </p:spPr>
+        <p:txBody>
+          <a:bodyPr xmlns:a="http://schemas.openxmlformats.org/drawingml/2006/main" vert="horz" lIns="0" tIns="0" rIns="0" bIns="0" anchor="t">
+            <a:normAutofit/>
+          </a:bodyPr>
+          <a:lstStyle xmlns:a="http://schemas.openxmlformats.org/drawingml/2006/main"/>
+          <a:p xmlns:a="http://schemas.openxmlformats.org/drawingml/2006/main">
+            <a:r>
+              <a:t>Click to edit Master title style</a:t>
+            </a:r>
+          </a:p>
+        </p:txBody>
+      </p:sp>
+    </p:spTree>
+  </p:cSld>
+</p:sldLayout>
+</file>
+
+<file path=ppt/slideLayouts/slideLayout3.xml><?xml version="1.0" encoding="utf-8"?>
+<p:sldLayout xmlns:p="http://schemas.openxmlformats.org/presentationml/2006/main" preserve="1" userDrawn="1">
+  <p:cSld name="Two Content">
+    <p:spTree>
+      <p:nvGrpSpPr>
+        <p:cNvPr id="1" name=""/>
+        <p:cNvGrpSpPr/>
+        <p:nvPr/>
+      </p:nvGrpSpPr>
+      <p:grpSpPr>
+        <a:xfrm xmlns:a="http://schemas.openxmlformats.org/drawingml/2006/main"/>
+      </p:grpSpPr>
+      <p:sp>
+        <p:nvSpPr>
+          <p:cNvPr id="9" name="Text Placeholder 2">
+            <a:extLst xmlns:a="http://schemas.openxmlformats.org/drawingml/2006/main">
+              <a:ext uri="{FF2B5EF4-FFF2-40B4-BE49-F238E27FC236}">
+                <a16:creationId xmlns:a16="http://schemas.microsoft.com/office/drawing/2014/main" id="{4DCC3060-FADA-4310-30F9-24EC34B5AA87}"/>
+              </a:ext>
+            </a:extLst>
+          </p:cNvPr>
+          <p:cNvSpPr>
+            <a:spLocks xmlns:a="http://schemas.openxmlformats.org/drawingml/2006/main" noGrp="1"/>
+          </p:cNvSpPr>
+          <p:nvPr>
+            <p:ph idx="1"/>
+          </p:nvPr>
+        </p:nvSpPr>
+        <p:spPr>
+          <a:xfrm xmlns:a="http://schemas.openxmlformats.org/drawingml/2006/main">
+            <a:off x="393700" y="2032000"/>
+            <a:ext cx="5537200" cy="3962400"/>
+          </a:xfrm>
+          <a:prstGeom xmlns:a="http://schemas.openxmlformats.org/drawingml/2006/main" prst="rect">
+            <a:avLst/>
+          </a:prstGeom>
+        </p:spPr>
+        <p:txBody>
+          <a:bodyPr xmlns:a="http://schemas.openxmlformats.org/drawingml/2006/main" vert="horz" lIns="0" tIns="0" rIns="0" bIns="0">
+            <a:normAutofit/>
+          </a:bodyPr>
+          <a:lstStyle xmlns:a="http://schemas.openxmlformats.org/drawingml/2006/main"/>
+          <a:p xmlns:a="http://schemas.openxmlformats.org/drawingml/2006/main">
+            <a:pPr>
+              <a:buNone/>
+            </a:pPr>
+            <a:r>
+              <a:t>Click to edit Master text styles</a:t>
+            </a:r>
+          </a:p>
+          <a:p xmlns:a="http://schemas.openxmlformats.org/drawingml/2006/main">
+            <a:pPr>
+              <a:buNone/>
+            </a:pPr>
+            <a:r>
+              <a:t>Second level</a:t>
+            </a:r>
+          </a:p>
+          <a:p xmlns:a="http://schemas.openxmlformats.org/drawingml/2006/main">
+            <a:pPr>
+              <a:buNone/>
+            </a:pPr>
+            <a:r>
+              <a:t>Third level</a:t>
+            </a:r>
+          </a:p>
+          <a:p xmlns:a="http://schemas.openxmlformats.org/drawingml/2006/main">
+            <a:pPr>
+              <a:buNone/>
+            </a:pPr>
+            <a:r>
+              <a:t>Fourth level</a:t>
+            </a:r>
+          </a:p>
+          <a:p xmlns:a="http://schemas.openxmlformats.org/drawingml/2006/main">
+            <a:pPr>
+              <a:buNone/>
+            </a:pPr>
+            <a:r>
+              <a:t>Fifth level</a:t>
+            </a:r>
+          </a:p>
+        </p:txBody>
+      </p:sp>
+      <p:sp>
+        <p:nvSpPr>
+          <p:cNvPr id="10" name="Footer Placeholder 4">
+            <a:extLst xmlns:a="http://schemas.openxmlformats.org/drawingml/2006/main">
+              <a:ext uri="{FF2B5EF4-FFF2-40B4-BE49-F238E27FC236}">
+                <a16:creationId xmlns:a16="http://schemas.microsoft.com/office/drawing/2014/main" id="{19E7B047-08E6-29C1-F101-C084D555AACC}"/>
+              </a:ext>
+            </a:extLst>
+          </p:cNvPr>
+          <p:cNvSpPr>
+            <a:spLocks xmlns:a="http://schemas.openxmlformats.org/drawingml/2006/main" noGrp="1"/>
+          </p:cNvSpPr>
+          <p:nvPr>
+            <p:ph type="ftr" idx="3"/>
+          </p:nvPr>
+        </p:nvSpPr>
+        <p:spPr>
+          <a:xfrm xmlns:a="http://schemas.openxmlformats.org/drawingml/2006/main">
+            <a:off x="393700" y="6279952"/>
+            <a:ext cx="3568700" cy="241240"/>
+          </a:xfrm>
+          <a:prstGeom xmlns:a="http://schemas.openxmlformats.org/drawingml/2006/main" prst="rect">
+            <a:avLst/>
+          </a:prstGeom>
+        </p:spPr>
+        <p:txBody>
+          <a:bodyPr xmlns:a="http://schemas.openxmlformats.org/drawingml/2006/main" vert="horz" lIns="0" tIns="0" rIns="0" bIns="0" anchor="b"/>
+          <a:lstStyle xmlns:a="http://schemas.openxmlformats.org/drawingml/2006/main">
+            <a:lvl1pPr algn="l">
+              <a:buNone/>
+              <a:defRPr sz="1100">
+                <a:solidFill>
+                  <a:schemeClr val="tx1"/>
+                </a:solidFill>
+              </a:defRPr>
+            </a:lvl1pPr>
+          </a:lstStyle>
+          <a:p xmlns:a="http://schemas.openxmlformats.org/drawingml/2006/main"/>
+        </p:txBody>
+      </p:sp>
+      <p:sp>
+        <p:nvSpPr>
+          <p:cNvPr id="11" name="Slide Number Placeholder 5">
+            <a:extLst xmlns:a="http://schemas.openxmlformats.org/drawingml/2006/main">
+              <a:ext uri="{FF2B5EF4-FFF2-40B4-BE49-F238E27FC236}">
+                <a16:creationId xmlns:a16="http://schemas.microsoft.com/office/drawing/2014/main" id="{3DE564C6-8AA0-935D-A919-07AFA15B335B}"/>
+              </a:ext>
+            </a:extLst>
+          </p:cNvPr>
+          <p:cNvSpPr>
+            <a:spLocks xmlns:a="http://schemas.openxmlformats.org/drawingml/2006/main" noGrp="1"/>
+          </p:cNvSpPr>
+          <p:nvPr>
+            <p:ph type="sldNum" idx="4"/>
+          </p:nvPr>
+        </p:nvSpPr>
+        <p:spPr>
+          <a:xfrm xmlns:a="http://schemas.openxmlformats.org/drawingml/2006/main">
+            <a:off x="11279332" y="6279294"/>
+            <a:ext cx="518968" cy="241240"/>
+          </a:xfrm>
+          <a:prstGeom xmlns:a="http://schemas.openxmlformats.org/drawingml/2006/main" prst="rect">
+            <a:avLst/>
+          </a:prstGeom>
+        </p:spPr>
+        <p:txBody>
+          <a:bodyPr xmlns:a="http://schemas.openxmlformats.org/drawingml/2006/main" vert="horz" lIns="0" tIns="0" rIns="0" bIns="0" anchor="b"/>
+          <a:lstStyle xmlns:a="http://schemas.openxmlformats.org/drawingml/2006/main">
+            <a:lvl1pPr algn="r">
+              <a:buNone/>
+              <a:defRPr sz="1100">
+                <a:solidFill>
+                  <a:schemeClr val="tx1"/>
+                </a:solidFill>
+                <a:latin typeface="+mn-lt"/>
+                <a:ea typeface="+mn-lt"/>
+                <a:cs typeface="+mn-lt"/>
+              </a:defRPr>
+            </a:lvl1pPr>
+          </a:lstStyle>
+          <a:p xmlns:a="http://schemas.openxmlformats.org/drawingml/2006/main">
+            <a:fld id="{8574A810-7A8E-054F-9F6B-09E9C694ECF9}" type="slidenum">
+              <a:t>‹#›</a:t>
+            </a:fld>
+          </a:p>
+        </p:txBody>
+      </p:sp>
+      <p:sp>
+        <p:nvSpPr>
+          <p:cNvPr id="12" name="Text Placeholder 2">
+            <a:extLst xmlns:a="http://schemas.openxmlformats.org/drawingml/2006/main">
+              <a:ext uri="{FF2B5EF4-FFF2-40B4-BE49-F238E27FC236}">
+                <a16:creationId xmlns:a16="http://schemas.microsoft.com/office/drawing/2014/main" id="{4ABE46D3-8F05-1C7F-3EC7-20BFCC76C251}"/>
+              </a:ext>
+            </a:extLst>
+          </p:cNvPr>
+          <p:cNvSpPr>
+            <a:spLocks xmlns:a="http://schemas.openxmlformats.org/drawingml/2006/main" noGrp="1"/>
+          </p:cNvSpPr>
+          <p:nvPr>
+            <p:ph idx="10"/>
+          </p:nvPr>
+        </p:nvSpPr>
+        <p:spPr>
+          <a:xfrm xmlns:a="http://schemas.openxmlformats.org/drawingml/2006/main">
+            <a:off x="6256618" y="2032000"/>
+            <a:ext cx="5537200" cy="3962400"/>
+          </a:xfrm>
+          <a:prstGeom xmlns:a="http://schemas.openxmlformats.org/drawingml/2006/main" prst="rect">
+            <a:avLst/>
+          </a:prstGeom>
+        </p:spPr>
+        <p:txBody>
+          <a:bodyPr xmlns:a="http://schemas.openxmlformats.org/drawingml/2006/main" vert="horz" lIns="0" tIns="0" rIns="0" bIns="0">
+            <a:normAutofit/>
+          </a:bodyPr>
+          <a:lstStyle xmlns:a="http://schemas.openxmlformats.org/drawingml/2006/main"/>
+          <a:p xmlns:a="http://schemas.openxmlformats.org/drawingml/2006/main">
+            <a:pPr>
+              <a:buNone/>
+            </a:pPr>
+            <a:r>
+              <a:t>Click to edit Master text styles</a:t>
+            </a:r>
+          </a:p>
+          <a:p xmlns:a="http://schemas.openxmlformats.org/drawingml/2006/main">
+            <a:pPr>
+              <a:buNone/>
+            </a:pPr>
+            <a:r>
+              <a:t>Second level</a:t>
+            </a:r>
+          </a:p>
+          <a:p xmlns:a="http://schemas.openxmlformats.org/drawingml/2006/main">
+            <a:pPr>
+              <a:buNone/>
+            </a:pPr>
+            <a:r>
+              <a:t>Third level</a:t>
+            </a:r>
+          </a:p>
+          <a:p xmlns:a="http://schemas.openxmlformats.org/drawingml/2006/main">
+            <a:pPr>
+              <a:buNone/>
+            </a:pPr>
+            <a:r>
+              <a:t>Fourth level</a:t>
+            </a:r>
+          </a:p>
+          <a:p xmlns:a="http://schemas.openxmlformats.org/drawingml/2006/main">
+            <a:pPr>
+              <a:buNone/>
+            </a:pPr>
+            <a:r>
+              <a:t>Fifth level</a:t>
+            </a:r>
+          </a:p>
+        </p:txBody>
+      </p:sp>
+      <p:sp>
+        <p:nvSpPr>
+          <p:cNvPr id="2" name="Title Placeholder 1">
+            <a:extLst xmlns:a="http://schemas.openxmlformats.org/drawingml/2006/main">
+              <a:ext uri="{FF2B5EF4-FFF2-40B4-BE49-F238E27FC236}">
+                <a16:creationId xmlns:a16="http://schemas.microsoft.com/office/drawing/2014/main" id="{739D2C21-36BF-25E7-8E97-1D17F313F7AF}"/>
+              </a:ext>
+            </a:extLst>
+          </p:cNvPr>
+          <p:cNvSpPr>
+            <a:spLocks xmlns:a="http://schemas.openxmlformats.org/drawingml/2006/main" noGrp="1"/>
+          </p:cNvSpPr>
+          <p:nvPr>
+            <p:ph type="title" idx="0"/>
+          </p:nvPr>
+        </p:nvSpPr>
+        <p:spPr>
+          <a:xfrm xmlns:a="http://schemas.openxmlformats.org/drawingml/2006/main">
+            <a:off x="393700" y="344008"/>
+            <a:ext cx="11404600" cy="1047491"/>
+          </a:xfrm>
+          <a:prstGeom xmlns:a="http://schemas.openxmlformats.org/drawingml/2006/main" prst="rect">
+            <a:avLst/>
+          </a:prstGeom>
+        </p:spPr>
+        <p:txBody>
+          <a:bodyPr xmlns:a="http://schemas.openxmlformats.org/drawingml/2006/main" vert="horz" lIns="0" tIns="0" rIns="0" bIns="0" anchor="t">
+            <a:normAutofit/>
+          </a:bodyPr>
+          <a:lstStyle xmlns:a="http://schemas.openxmlformats.org/drawingml/2006/main"/>
+          <a:p xmlns:a="http://schemas.openxmlformats.org/drawingml/2006/main">
+            <a:r>
+              <a:t>Click to edit Master title style</a:t>
+            </a:r>
+          </a:p>
+        </p:txBody>
+      </p:sp>
+    </p:spTree>
+  </p:cSld>
+</p:sldLayout>
+</file>
+
+<file path=ppt/slideLayouts/slideLayout4.xml><?xml version="1.0" encoding="utf-8"?>
 <p:sldLayout xmlns:p="http://schemas.openxmlformats.org/presentationml/2006/main" preserve="1" userDrawn="1">
   <p:cSld name="Three Content">
     <p:spTree>
@@ -1235,35 +2178,9 @@
 </p:sldLayout>
 </file>
 
-<file path=ppt/slideLayouts/slideLayout2.xml><?xml version="1.0" encoding="utf-8"?>
-<p:sldLayout xmlns:r="http://schemas.openxmlformats.org/officeDocument/2006/relationships" xmlns:c="http://schemas.openxmlformats.org/drawingml/2006/chart" xmlns:a="http://schemas.openxmlformats.org/drawingml/2006/main" xmlns:dgm="http://schemas.openxmlformats.org/drawingml/2006/diagram" xmlns:dsp="http://schemas.microsoft.com/office/drawing/2008/diagram" xmlns:p="http://schemas.openxmlformats.org/presentationml/2006/main" showMasterPhAnim="1">
-  <p:cSld>
-    <p:spTree>
-      <p:nvGrpSpPr>
-        <p:cNvPr id="1" name=""/>
-        <p:cNvGrpSpPr/>
-        <p:nvPr/>
-      </p:nvGrpSpPr>
-      <p:grpSpPr>
-        <a:xfrm>
-          <a:off x="0" y="0"/>
-          <a:ext cx="0" cy="0"/>
-          <a:chOff x="0" y="0"/>
-          <a:chExt cx="0" cy="0"/>
-        </a:xfrm>
-      </p:grpSpPr>
-    </p:spTree>
-  </p:cSld>
-  <p:clrMapOvr>
-    <a:masterClrMapping/>
-  </p:clrMapOvr>
-  <p:transition xmlns:mc="http://schemas.openxmlformats.org/markup-compatibility/2006" xmlns:hp="http://schemas.haansoft.com/office/presentation/8.0" mc:Ignorable="hp" hp:hslDur="500"/>
-</p:sldLayout>
-</file>
-
-<file path=ppt/slideLayouts/slideLayout3.xml><?xml version="1.0" encoding="utf-8"?>
+<file path=ppt/slideLayouts/slideLayout5.xml><?xml version="1.0" encoding="utf-8"?>
 <p:sldLayout xmlns:p="http://schemas.openxmlformats.org/presentationml/2006/main" preserve="1" userDrawn="1">
-  <p:cSld name="Title Only">
+  <p:cSld name="Four Content">
     <p:spTree>
       <p:nvGrpSpPr>
         <p:cNvPr id="1" name=""/>
@@ -1275,10 +2192,71 @@
       </p:grpSpPr>
       <p:sp>
         <p:nvSpPr>
-          <p:cNvPr id="8" name="Footer Placeholder 4">
+          <p:cNvPr id="11" name="Text Placeholder 2">
             <a:extLst xmlns:a="http://schemas.openxmlformats.org/drawingml/2006/main">
               <a:ext uri="{FF2B5EF4-FFF2-40B4-BE49-F238E27FC236}">
-                <a16:creationId xmlns:a16="http://schemas.microsoft.com/office/drawing/2014/main" id="{DB1182C5-F22B-2641-06DE-4EDACA3C1DDD}"/>
+                <a16:creationId xmlns:a16="http://schemas.microsoft.com/office/drawing/2014/main" id="{6F7D12C6-B3BC-2F80-A661-00CC228193B5}"/>
+              </a:ext>
+            </a:extLst>
+          </p:cNvPr>
+          <p:cNvSpPr>
+            <a:spLocks xmlns:a="http://schemas.openxmlformats.org/drawingml/2006/main" noGrp="1"/>
+          </p:cNvSpPr>
+          <p:nvPr>
+            <p:ph idx="1"/>
+          </p:nvPr>
+        </p:nvSpPr>
+        <p:spPr>
+          <a:xfrm xmlns:a="http://schemas.openxmlformats.org/drawingml/2006/main">
+            <a:off x="393700" y="4826000"/>
+            <a:ext cx="2595934" cy="1168400"/>
+          </a:xfrm>
+          <a:prstGeom xmlns:a="http://schemas.openxmlformats.org/drawingml/2006/main" prst="rect">
+            <a:avLst/>
+          </a:prstGeom>
+        </p:spPr>
+        <p:txBody>
+          <a:bodyPr xmlns:a="http://schemas.openxmlformats.org/drawingml/2006/main" vert="horz" lIns="0" tIns="0" rIns="0" bIns="0">
+            <a:normAutofit/>
+          </a:bodyPr>
+          <a:lstStyle xmlns:a="http://schemas.openxmlformats.org/drawingml/2006/main">
+            <a:lvl1pPr>
+              <a:buNone/>
+              <a:defRPr sz="1600"/>
+            </a:lvl1pPr>
+            <a:lvl2pPr>
+              <a:buNone/>
+              <a:defRPr sz="1600"/>
+            </a:lvl2pPr>
+            <a:lvl3pPr>
+              <a:buNone/>
+              <a:defRPr sz="1600"/>
+            </a:lvl3pPr>
+            <a:lvl4pPr>
+              <a:buNone/>
+              <a:defRPr sz="1600"/>
+            </a:lvl4pPr>
+            <a:lvl5pPr>
+              <a:buNone/>
+              <a:defRPr sz="1600"/>
+            </a:lvl5pPr>
+          </a:lstStyle>
+          <a:p xmlns:a="http://schemas.openxmlformats.org/drawingml/2006/main">
+            <a:pPr>
+              <a:buNone/>
+            </a:pPr>
+            <a:r>
+              <a:t>Click to edit Master</a:t>
+            </a:r>
+          </a:p>
+        </p:txBody>
+      </p:sp>
+      <p:sp>
+        <p:nvSpPr>
+          <p:cNvPr id="12" name="Footer Placeholder 4">
+            <a:extLst xmlns:a="http://schemas.openxmlformats.org/drawingml/2006/main">
+              <a:ext uri="{FF2B5EF4-FFF2-40B4-BE49-F238E27FC236}">
+                <a16:creationId xmlns:a16="http://schemas.microsoft.com/office/drawing/2014/main" id="{0682803B-B799-370F-B1B9-EB49CCB10A11}"/>
               </a:ext>
             </a:extLst>
           </p:cNvPr>
@@ -1315,10 +2293,10 @@
       </p:sp>
       <p:sp>
         <p:nvSpPr>
-          <p:cNvPr id="9" name="Slide Number Placeholder 5">
+          <p:cNvPr id="13" name="Slide Number Placeholder 5">
             <a:extLst xmlns:a="http://schemas.openxmlformats.org/drawingml/2006/main">
               <a:ext uri="{FF2B5EF4-FFF2-40B4-BE49-F238E27FC236}">
-                <a16:creationId xmlns:a16="http://schemas.microsoft.com/office/drawing/2014/main" id="{F97A4AD5-204B-38FD-4F33-270C2F9F5CC6}"/>
+                <a16:creationId xmlns:a16="http://schemas.microsoft.com/office/drawing/2014/main" id="{AFE26095-B1FD-5C7C-C8D6-78ABF739DCBA}"/>
               </a:ext>
             </a:extLst>
           </p:cNvPr>
@@ -1365,7 +2343,7 @@
           <p:cNvPr id="2" name="Title Placeholder 1">
             <a:extLst xmlns:a="http://schemas.openxmlformats.org/drawingml/2006/main">
               <a:ext uri="{FF2B5EF4-FFF2-40B4-BE49-F238E27FC236}">
-                <a16:creationId xmlns:a16="http://schemas.microsoft.com/office/drawing/2014/main" id="{75CF9983-3FD7-FAE4-9F0B-B2CE806D891D}"/>
+                <a16:creationId xmlns:a16="http://schemas.microsoft.com/office/drawing/2014/main" id="{EC59174D-4FF5-0FD8-FE78-F71A39E187AE}"/>
               </a:ext>
             </a:extLst>
           </p:cNvPr>
@@ -1397,6 +2375,471 @@
           </a:p>
         </p:txBody>
       </p:sp>
+      <p:sp>
+        <p:nvSpPr>
+          <p:cNvPr id="8" name="Text Placeholder 7">
+            <a:extLst xmlns:a="http://schemas.openxmlformats.org/drawingml/2006/main">
+              <a:ext uri="{FF2B5EF4-FFF2-40B4-BE49-F238E27FC236}">
+                <a16:creationId xmlns:a16="http://schemas.microsoft.com/office/drawing/2014/main" id="{4F70A9DA-D783-0627-3166-E13B68C2ADAC}"/>
+              </a:ext>
+            </a:extLst>
+          </p:cNvPr>
+          <p:cNvSpPr>
+            <a:spLocks xmlns:a="http://schemas.openxmlformats.org/drawingml/2006/main" noGrp="1"/>
+          </p:cNvSpPr>
+          <p:nvPr>
+            <p:ph type="body" idx="12"/>
+          </p:nvPr>
+        </p:nvSpPr>
+        <p:spPr>
+          <a:xfrm xmlns:a="http://schemas.openxmlformats.org/drawingml/2006/main">
+            <a:off x="3334966" y="4826000"/>
+            <a:ext cx="2595934" cy="1168400"/>
+          </a:xfrm>
+        </p:spPr>
+        <p:txBody>
+          <a:bodyPr xmlns:a="http://schemas.openxmlformats.org/drawingml/2006/main"/>
+          <a:lstStyle xmlns:a="http://schemas.openxmlformats.org/drawingml/2006/main">
+            <a:lvl1pPr>
+              <a:buNone/>
+              <a:defRPr sz="1800"/>
+            </a:lvl1pPr>
+            <a:lvl2pPr>
+              <a:buNone/>
+              <a:defRPr sz="1800"/>
+            </a:lvl2pPr>
+            <a:lvl3pPr>
+              <a:buNone/>
+              <a:defRPr sz="1800"/>
+            </a:lvl3pPr>
+            <a:lvl4pPr>
+              <a:buNone/>
+              <a:defRPr sz="1800"/>
+            </a:lvl4pPr>
+            <a:lvl5pPr>
+              <a:buNone/>
+              <a:defRPr sz="1800"/>
+            </a:lvl5pPr>
+          </a:lstStyle>
+          <a:p xmlns:a="http://schemas.openxmlformats.org/drawingml/2006/main">
+            <a:pPr>
+              <a:buNone/>
+            </a:pPr>
+            <a:r>
+              <a:t>Click to edit Master</a:t>
+            </a:r>
+          </a:p>
+        </p:txBody>
+      </p:sp>
+      <p:sp>
+        <p:nvSpPr>
+          <p:cNvPr id="9" name="Text Placeholder 2">
+            <a:extLst xmlns:a="http://schemas.openxmlformats.org/drawingml/2006/main">
+              <a:ext uri="{FF2B5EF4-FFF2-40B4-BE49-F238E27FC236}">
+                <a16:creationId xmlns:a16="http://schemas.microsoft.com/office/drawing/2014/main" id="{75BF2647-8E8C-CAEE-896D-0E1567AF7E99}"/>
+              </a:ext>
+            </a:extLst>
+          </p:cNvPr>
+          <p:cNvSpPr>
+            <a:spLocks xmlns:a="http://schemas.openxmlformats.org/drawingml/2006/main" noGrp="1"/>
+          </p:cNvSpPr>
+          <p:nvPr>
+            <p:ph idx="13"/>
+          </p:nvPr>
+        </p:nvSpPr>
+        <p:spPr>
+          <a:xfrm xmlns:a="http://schemas.openxmlformats.org/drawingml/2006/main">
+            <a:off x="6264413" y="4826000"/>
+            <a:ext cx="2595934" cy="1168400"/>
+          </a:xfrm>
+          <a:prstGeom xmlns:a="http://schemas.openxmlformats.org/drawingml/2006/main" prst="rect">
+            <a:avLst/>
+          </a:prstGeom>
+        </p:spPr>
+        <p:txBody>
+          <a:bodyPr xmlns:a="http://schemas.openxmlformats.org/drawingml/2006/main" vert="horz" lIns="0" tIns="0" rIns="0" bIns="0">
+            <a:normAutofit/>
+          </a:bodyPr>
+          <a:lstStyle xmlns:a="http://schemas.openxmlformats.org/drawingml/2006/main">
+            <a:lvl1pPr>
+              <a:buNone/>
+              <a:defRPr sz="1600"/>
+            </a:lvl1pPr>
+            <a:lvl2pPr>
+              <a:buNone/>
+              <a:defRPr sz="1600"/>
+            </a:lvl2pPr>
+            <a:lvl3pPr>
+              <a:buNone/>
+              <a:defRPr sz="1600"/>
+            </a:lvl3pPr>
+            <a:lvl4pPr>
+              <a:buNone/>
+              <a:defRPr sz="1600"/>
+            </a:lvl4pPr>
+            <a:lvl5pPr>
+              <a:buNone/>
+              <a:defRPr sz="1600"/>
+            </a:lvl5pPr>
+          </a:lstStyle>
+          <a:p xmlns:a="http://schemas.openxmlformats.org/drawingml/2006/main">
+            <a:pPr>
+              <a:buNone/>
+            </a:pPr>
+            <a:r>
+              <a:t>Click to edit Master</a:t>
+            </a:r>
+          </a:p>
+        </p:txBody>
+      </p:sp>
+      <p:sp>
+        <p:nvSpPr>
+          <p:cNvPr id="10" name="Text Placeholder 7">
+            <a:extLst xmlns:a="http://schemas.openxmlformats.org/drawingml/2006/main">
+              <a:ext uri="{FF2B5EF4-FFF2-40B4-BE49-F238E27FC236}">
+                <a16:creationId xmlns:a16="http://schemas.microsoft.com/office/drawing/2014/main" id="{37C6F143-221A-9959-8FBA-B9B1DB6602D0}"/>
+              </a:ext>
+            </a:extLst>
+          </p:cNvPr>
+          <p:cNvSpPr>
+            <a:spLocks xmlns:a="http://schemas.openxmlformats.org/drawingml/2006/main" noGrp="1"/>
+          </p:cNvSpPr>
+          <p:nvPr>
+            <p:ph type="body" idx="14"/>
+          </p:nvPr>
+        </p:nvSpPr>
+        <p:spPr>
+          <a:xfrm xmlns:a="http://schemas.openxmlformats.org/drawingml/2006/main">
+            <a:off x="9205679" y="4826000"/>
+            <a:ext cx="2595934" cy="1168400"/>
+          </a:xfrm>
+        </p:spPr>
+        <p:txBody>
+          <a:bodyPr xmlns:a="http://schemas.openxmlformats.org/drawingml/2006/main"/>
+          <a:lstStyle xmlns:a="http://schemas.openxmlformats.org/drawingml/2006/main">
+            <a:lvl1pPr>
+              <a:buNone/>
+              <a:defRPr sz="1800"/>
+            </a:lvl1pPr>
+            <a:lvl2pPr>
+              <a:buNone/>
+              <a:defRPr sz="1800"/>
+            </a:lvl2pPr>
+            <a:lvl3pPr>
+              <a:buNone/>
+              <a:defRPr sz="1800"/>
+            </a:lvl3pPr>
+            <a:lvl4pPr>
+              <a:buNone/>
+              <a:defRPr sz="1800"/>
+            </a:lvl4pPr>
+            <a:lvl5pPr>
+              <a:buNone/>
+              <a:defRPr sz="1800"/>
+            </a:lvl5pPr>
+          </a:lstStyle>
+          <a:p xmlns:a="http://schemas.openxmlformats.org/drawingml/2006/main">
+            <a:pPr>
+              <a:buNone/>
+            </a:pPr>
+            <a:r>
+              <a:t>Click to edit Master</a:t>
+            </a:r>
+          </a:p>
+        </p:txBody>
+      </p:sp>
+    </p:spTree>
+  </p:cSld>
+</p:sldLayout>
+</file>
+
+<file path=ppt/slideLayouts/slideLayout6.xml><?xml version="1.0" encoding="utf-8"?>
+<p:sldLayout xmlns:p="http://schemas.openxmlformats.org/presentationml/2006/main" preserve="1" userDrawn="1">
+  <p:cSld name="Title Only">
+    <p:spTree>
+      <p:nvGrpSpPr>
+        <p:cNvPr id="1" name=""/>
+        <p:cNvGrpSpPr/>
+        <p:nvPr/>
+      </p:nvGrpSpPr>
+      <p:grpSpPr>
+        <a:xfrm xmlns:a="http://schemas.openxmlformats.org/drawingml/2006/main"/>
+      </p:grpSpPr>
+      <p:sp>
+        <p:nvSpPr>
+          <p:cNvPr id="8" name="Footer Placeholder 4">
+            <a:extLst xmlns:a="http://schemas.openxmlformats.org/drawingml/2006/main">
+              <a:ext uri="{FF2B5EF4-FFF2-40B4-BE49-F238E27FC236}">
+                <a16:creationId xmlns:a16="http://schemas.microsoft.com/office/drawing/2014/main" id="{DB1182C5-F22B-2641-06DE-4EDACA3C1DDD}"/>
+              </a:ext>
+            </a:extLst>
+          </p:cNvPr>
+          <p:cNvSpPr>
+            <a:spLocks xmlns:a="http://schemas.openxmlformats.org/drawingml/2006/main" noGrp="1"/>
+          </p:cNvSpPr>
+          <p:nvPr>
+            <p:ph type="ftr" idx="3"/>
+          </p:nvPr>
+        </p:nvSpPr>
+        <p:spPr>
+          <a:xfrm xmlns:a="http://schemas.openxmlformats.org/drawingml/2006/main">
+            <a:off x="393700" y="6279952"/>
+            <a:ext cx="3568700" cy="241240"/>
+          </a:xfrm>
+          <a:prstGeom xmlns:a="http://schemas.openxmlformats.org/drawingml/2006/main" prst="rect">
+            <a:avLst/>
+          </a:prstGeom>
+        </p:spPr>
+        <p:txBody>
+          <a:bodyPr xmlns:a="http://schemas.openxmlformats.org/drawingml/2006/main" vert="horz" lIns="0" tIns="0" rIns="0" bIns="0" anchor="b"/>
+          <a:lstStyle xmlns:a="http://schemas.openxmlformats.org/drawingml/2006/main">
+            <a:lvl1pPr algn="l">
+              <a:buNone/>
+              <a:defRPr sz="1100">
+                <a:solidFill>
+                  <a:schemeClr val="tx1"/>
+                </a:solidFill>
+              </a:defRPr>
+            </a:lvl1pPr>
+          </a:lstStyle>
+          <a:p xmlns:a="http://schemas.openxmlformats.org/drawingml/2006/main"/>
+        </p:txBody>
+      </p:sp>
+      <p:sp>
+        <p:nvSpPr>
+          <p:cNvPr id="9" name="Slide Number Placeholder 5">
+            <a:extLst xmlns:a="http://schemas.openxmlformats.org/drawingml/2006/main">
+              <a:ext uri="{FF2B5EF4-FFF2-40B4-BE49-F238E27FC236}">
+                <a16:creationId xmlns:a16="http://schemas.microsoft.com/office/drawing/2014/main" id="{F97A4AD5-204B-38FD-4F33-270C2F9F5CC6}"/>
+              </a:ext>
+            </a:extLst>
+          </p:cNvPr>
+          <p:cNvSpPr>
+            <a:spLocks xmlns:a="http://schemas.openxmlformats.org/drawingml/2006/main" noGrp="1"/>
+          </p:cNvSpPr>
+          <p:nvPr>
+            <p:ph type="sldNum" idx="4"/>
+          </p:nvPr>
+        </p:nvSpPr>
+        <p:spPr>
+          <a:xfrm xmlns:a="http://schemas.openxmlformats.org/drawingml/2006/main">
+            <a:off x="11279332" y="6279294"/>
+            <a:ext cx="518968" cy="241240"/>
+          </a:xfrm>
+          <a:prstGeom xmlns:a="http://schemas.openxmlformats.org/drawingml/2006/main" prst="rect">
+            <a:avLst/>
+          </a:prstGeom>
+        </p:spPr>
+        <p:txBody>
+          <a:bodyPr xmlns:a="http://schemas.openxmlformats.org/drawingml/2006/main" vert="horz" lIns="0" tIns="0" rIns="0" bIns="0" anchor="b"/>
+          <a:lstStyle xmlns:a="http://schemas.openxmlformats.org/drawingml/2006/main">
+            <a:lvl1pPr algn="r">
+              <a:buNone/>
+              <a:defRPr sz="1100">
+                <a:solidFill>
+                  <a:schemeClr val="tx1"/>
+                </a:solidFill>
+                <a:latin typeface="+mn-lt"/>
+                <a:ea typeface="+mn-lt"/>
+                <a:cs typeface="+mn-lt"/>
+              </a:defRPr>
+            </a:lvl1pPr>
+          </a:lstStyle>
+          <a:p xmlns:a="http://schemas.openxmlformats.org/drawingml/2006/main">
+            <a:fld id="{8574A810-7A8E-054F-9F6B-09E9C694ECF9}" type="slidenum">
+              <a:t>‹#›</a:t>
+            </a:fld>
+          </a:p>
+        </p:txBody>
+      </p:sp>
+      <p:sp>
+        <p:nvSpPr>
+          <p:cNvPr id="2" name="Title Placeholder 1">
+            <a:extLst xmlns:a="http://schemas.openxmlformats.org/drawingml/2006/main">
+              <a:ext uri="{FF2B5EF4-FFF2-40B4-BE49-F238E27FC236}">
+                <a16:creationId xmlns:a16="http://schemas.microsoft.com/office/drawing/2014/main" id="{75CF9983-3FD7-FAE4-9F0B-B2CE806D891D}"/>
+              </a:ext>
+            </a:extLst>
+          </p:cNvPr>
+          <p:cNvSpPr>
+            <a:spLocks xmlns:a="http://schemas.openxmlformats.org/drawingml/2006/main" noGrp="1"/>
+          </p:cNvSpPr>
+          <p:nvPr>
+            <p:ph type="title" idx="0"/>
+          </p:nvPr>
+        </p:nvSpPr>
+        <p:spPr>
+          <a:xfrm xmlns:a="http://schemas.openxmlformats.org/drawingml/2006/main">
+            <a:off x="393700" y="344008"/>
+            <a:ext cx="11404600" cy="1047491"/>
+          </a:xfrm>
+          <a:prstGeom xmlns:a="http://schemas.openxmlformats.org/drawingml/2006/main" prst="rect">
+            <a:avLst/>
+          </a:prstGeom>
+        </p:spPr>
+        <p:txBody>
+          <a:bodyPr xmlns:a="http://schemas.openxmlformats.org/drawingml/2006/main" vert="horz" lIns="0" tIns="0" rIns="0" bIns="0" anchor="t">
+            <a:normAutofit/>
+          </a:bodyPr>
+          <a:lstStyle xmlns:a="http://schemas.openxmlformats.org/drawingml/2006/main"/>
+          <a:p xmlns:a="http://schemas.openxmlformats.org/drawingml/2006/main">
+            <a:r>
+              <a:t>Click to edit Master title style</a:t>
+            </a:r>
+          </a:p>
+        </p:txBody>
+      </p:sp>
+    </p:spTree>
+  </p:cSld>
+</p:sldLayout>
+</file>
+
+<file path=ppt/slideLayouts/slideLayout7.xml><?xml version="1.0" encoding="utf-8"?>
+<p:sldLayout xmlns:p="http://schemas.openxmlformats.org/presentationml/2006/main" preserve="1" userDrawn="1">
+  <p:cSld name="Footer Only">
+    <p:spTree>
+      <p:nvGrpSpPr>
+        <p:cNvPr id="1" name=""/>
+        <p:cNvGrpSpPr/>
+        <p:nvPr/>
+      </p:nvGrpSpPr>
+      <p:grpSpPr>
+        <a:xfrm xmlns:a="http://schemas.openxmlformats.org/drawingml/2006/main"/>
+      </p:grpSpPr>
+      <p:sp>
+        <p:nvSpPr>
+          <p:cNvPr id="7" name="Footer Placeholder 4">
+            <a:extLst xmlns:a="http://schemas.openxmlformats.org/drawingml/2006/main">
+              <a:ext uri="{FF2B5EF4-FFF2-40B4-BE49-F238E27FC236}">
+                <a16:creationId xmlns:a16="http://schemas.microsoft.com/office/drawing/2014/main" id="{1012CBCC-C555-8C11-443D-86D6F7A45CF8}"/>
+              </a:ext>
+            </a:extLst>
+          </p:cNvPr>
+          <p:cNvSpPr>
+            <a:spLocks xmlns:a="http://schemas.openxmlformats.org/drawingml/2006/main" noGrp="1"/>
+          </p:cNvSpPr>
+          <p:nvPr>
+            <p:ph type="ftr" idx="3"/>
+          </p:nvPr>
+        </p:nvSpPr>
+        <p:spPr>
+          <a:xfrm xmlns:a="http://schemas.openxmlformats.org/drawingml/2006/main">
+            <a:off x="393700" y="6279952"/>
+            <a:ext cx="3568700" cy="241240"/>
+          </a:xfrm>
+          <a:prstGeom xmlns:a="http://schemas.openxmlformats.org/drawingml/2006/main" prst="rect">
+            <a:avLst/>
+          </a:prstGeom>
+        </p:spPr>
+        <p:txBody>
+          <a:bodyPr xmlns:a="http://schemas.openxmlformats.org/drawingml/2006/main" vert="horz" lIns="0" tIns="0" rIns="0" bIns="0" anchor="b"/>
+          <a:lstStyle xmlns:a="http://schemas.openxmlformats.org/drawingml/2006/main">
+            <a:lvl1pPr algn="l">
+              <a:buNone/>
+              <a:defRPr sz="1100">
+                <a:solidFill>
+                  <a:schemeClr val="tx1"/>
+                </a:solidFill>
+              </a:defRPr>
+            </a:lvl1pPr>
+          </a:lstStyle>
+          <a:p xmlns:a="http://schemas.openxmlformats.org/drawingml/2006/main"/>
+        </p:txBody>
+      </p:sp>
+      <p:sp>
+        <p:nvSpPr>
+          <p:cNvPr id="8" name="Slide Number Placeholder 5">
+            <a:extLst xmlns:a="http://schemas.openxmlformats.org/drawingml/2006/main">
+              <a:ext uri="{FF2B5EF4-FFF2-40B4-BE49-F238E27FC236}">
+                <a16:creationId xmlns:a16="http://schemas.microsoft.com/office/drawing/2014/main" id="{B69B260B-B882-BF7F-1BB1-28B9578A25A2}"/>
+              </a:ext>
+            </a:extLst>
+          </p:cNvPr>
+          <p:cNvSpPr>
+            <a:spLocks xmlns:a="http://schemas.openxmlformats.org/drawingml/2006/main" noGrp="1"/>
+          </p:cNvSpPr>
+          <p:nvPr>
+            <p:ph type="sldNum" idx="4"/>
+          </p:nvPr>
+        </p:nvSpPr>
+        <p:spPr>
+          <a:xfrm xmlns:a="http://schemas.openxmlformats.org/drawingml/2006/main">
+            <a:off x="11279332" y="6279294"/>
+            <a:ext cx="518968" cy="241240"/>
+          </a:xfrm>
+          <a:prstGeom xmlns:a="http://schemas.openxmlformats.org/drawingml/2006/main" prst="rect">
+            <a:avLst/>
+          </a:prstGeom>
+        </p:spPr>
+        <p:txBody>
+          <a:bodyPr xmlns:a="http://schemas.openxmlformats.org/drawingml/2006/main" vert="horz" lIns="0" tIns="0" rIns="0" bIns="0" anchor="b"/>
+          <a:lstStyle xmlns:a="http://schemas.openxmlformats.org/drawingml/2006/main">
+            <a:lvl1pPr algn="r">
+              <a:buNone/>
+              <a:defRPr sz="1100">
+                <a:solidFill>
+                  <a:schemeClr val="tx1"/>
+                </a:solidFill>
+                <a:latin typeface="+mn-lt"/>
+                <a:ea typeface="+mn-lt"/>
+                <a:cs typeface="+mn-lt"/>
+              </a:defRPr>
+            </a:lvl1pPr>
+          </a:lstStyle>
+          <a:p xmlns:a="http://schemas.openxmlformats.org/drawingml/2006/main">
+            <a:fld id="{8574A810-7A8E-054F-9F6B-09E9C694ECF9}" type="slidenum">
+              <a:t>‹#›</a:t>
+            </a:fld>
+          </a:p>
+        </p:txBody>
+      </p:sp>
+    </p:spTree>
+  </p:cSld>
+</p:sldLayout>
+</file>
+
+<file path=ppt/slideLayouts/slideLayout8.xml><?xml version="1.0" encoding="utf-8"?>
+<p:sldLayout xmlns:p="http://schemas.openxmlformats.org/presentationml/2006/main" preserve="1" userDrawn="1">
+  <p:cSld name="Blank">
+    <p:spTree>
+      <p:nvGrpSpPr>
+        <p:cNvPr id="1" name=""/>
+        <p:cNvGrpSpPr/>
+        <p:nvPr/>
+      </p:nvGrpSpPr>
+      <p:grpSpPr>
+        <a:xfrm xmlns:a="http://schemas.openxmlformats.org/drawingml/2006/main"/>
+      </p:grpSpPr>
+    </p:spTree>
+  </p:cSld>
+</p:sldLayout>
+</file>
+
+<file path=ppt/slideLayouts/slideLayout9.xml><?xml version="1.0" encoding="utf-8"?>
+<p:sldLayout xmlns:p="http://schemas.openxmlformats.org/presentationml/2006/main" preserve="1" userDrawn="1">
+  <p:cSld name="36 Field Grid">
+    <p:bg>
+      <p:bgPr>
+        <a:blipFill xmlns:a="http://schemas.openxmlformats.org/drawingml/2006/main" rotWithShape="1">
+          <a:blip xmlns:r="http://schemas.openxmlformats.org/officeDocument/2006/relationships" r:embed="R123b6f4753e044da">
+            <a:lum/>
+          </a:blip>
+          <a:srcRect l="0" t="0" r="0" b="0"/>
+          <a:stretch>
+            <a:fillRect l="0" t="0" r="0" b="0"/>
+          </a:stretch>
+        </a:blipFill>
+      </p:bgPr>
+    </p:bg>
+    <p:spTree>
+      <p:nvGrpSpPr>
+        <p:cNvPr id="1" name=""/>
+        <p:cNvGrpSpPr/>
+        <p:nvPr/>
+      </p:nvGrpSpPr>
+      <p:grpSpPr>
+        <a:xfrm xmlns:a="http://schemas.openxmlformats.org/drawingml/2006/main"/>
+      </p:grpSpPr>
     </p:spTree>
   </p:cSld>
 </p:sldLayout>
@@ -1619,16 +3062,16 @@
   </p:cSld>
   <p:clrMap bg1="lt1" tx1="dk1" bg2="lt2" tx2="dk2" accent1="accent1" accent2="accent2" accent3="accent3" accent4="accent4" accent5="accent5" accent6="accent6" hlink="hlink" folHlink="folHlink"/>
   <p:sldLayoutIdLst>
-    <p:sldLayoutId xmlns:r="http://schemas.openxmlformats.org/officeDocument/2006/relationships" id="2147483649" r:id="R0b25bbe7e1cf4e40"/>
-    <p:sldLayoutId xmlns:r="http://schemas.openxmlformats.org/officeDocument/2006/relationships" id="2147483650" r:id="R9a76c124509540f9"/>
-    <p:sldLayoutId xmlns:r="http://schemas.openxmlformats.org/officeDocument/2006/relationships" id="2147483651" r:id="R517cfd618cf5406f"/>
-    <p:sldLayoutId xmlns:r="http://schemas.openxmlformats.org/officeDocument/2006/relationships" id="2147483652" r:id="R0696718aaa034c3c"/>
-    <p:sldLayoutId xmlns:r="http://schemas.openxmlformats.org/officeDocument/2006/relationships" id="2147483653" r:id="R8f17f54670ce4b1e"/>
-    <p:sldLayoutId xmlns:r="http://schemas.openxmlformats.org/officeDocument/2006/relationships" id="2147483654" r:id="Rc9c5b7a65933410b"/>
-    <p:sldLayoutId xmlns:r="http://schemas.openxmlformats.org/officeDocument/2006/relationships" id="2147483655" r:id="R54f57608be47423f"/>
-    <p:sldLayoutId xmlns:r="http://schemas.openxmlformats.org/officeDocument/2006/relationships" id="2147483656" r:id="Rb9b9fe50c1c74d9d"/>
-    <p:sldLayoutId xmlns:r="http://schemas.openxmlformats.org/officeDocument/2006/relationships" id="2147483657" r:id="Rbcfbfe53173740a9"/>
-    <p:sldLayoutId xmlns:r="http://schemas.openxmlformats.org/officeDocument/2006/relationships" id="2147483658" r:id="Rff72bdb2b03e4cbb"/>
+    <p:sldLayoutId xmlns:r="http://schemas.openxmlformats.org/officeDocument/2006/relationships" id="2147483649" r:id="R24b8d304dee94055"/>
+    <p:sldLayoutId xmlns:r="http://schemas.openxmlformats.org/officeDocument/2006/relationships" id="2147483650" r:id="Rf6b3feca29944556"/>
+    <p:sldLayoutId xmlns:r="http://schemas.openxmlformats.org/officeDocument/2006/relationships" id="2147483651" r:id="R1eae2ffe5da34be2"/>
+    <p:sldLayoutId xmlns:r="http://schemas.openxmlformats.org/officeDocument/2006/relationships" id="2147483652" r:id="R78ab511eeccf4d75"/>
+    <p:sldLayoutId xmlns:r="http://schemas.openxmlformats.org/officeDocument/2006/relationships" id="2147483653" r:id="R507a89e7b0bc4179"/>
+    <p:sldLayoutId xmlns:r="http://schemas.openxmlformats.org/officeDocument/2006/relationships" id="2147483654" r:id="R5448b9d1e03b4469"/>
+    <p:sldLayoutId xmlns:r="http://schemas.openxmlformats.org/officeDocument/2006/relationships" id="2147483655" r:id="R4477931afc604e28"/>
+    <p:sldLayoutId xmlns:r="http://schemas.openxmlformats.org/officeDocument/2006/relationships" id="2147483656" r:id="R12288a44fe4741da"/>
+    <p:sldLayoutId xmlns:r="http://schemas.openxmlformats.org/officeDocument/2006/relationships" id="2147483657" r:id="Red8cc1a25fc2448f"/>
+    <p:sldLayoutId xmlns:r="http://schemas.openxmlformats.org/officeDocument/2006/relationships" id="2147483658" r:id="R9a58fbe224ae4534"/>
   </p:sldLayoutIdLst>
   <p:hf hdr="0" dt="0"/>
   <p:txStyles>
@@ -2057,36 +3500,195 @@
 </p:sldMaster>
 </file>
 
-<file path=ppt/slideMasters/slideMaster2.xml><?xml version="1.0" encoding="utf-8"?>
-<p:sldMaster xmlns:r="http://schemas.openxmlformats.org/officeDocument/2006/relationships" xmlns:c="http://schemas.openxmlformats.org/drawingml/2006/chart" xmlns:a="http://schemas.openxmlformats.org/drawingml/2006/main" xmlns:dgm="http://schemas.openxmlformats.org/drawingml/2006/diagram" xmlns:dsp="http://schemas.microsoft.com/office/drawing/2008/diagram" xmlns:p="http://schemas.openxmlformats.org/presentationml/2006/main">
-  <p:cSld>
-    <p:bg>
-      <p:bgRef idx="1001">
-        <a:schemeClr val="bg1"/>
-      </p:bgRef>
-    </p:bg>
-    <p:spTree>
-      <p:nvGrpSpPr>
-        <p:cNvPr id="1" name=""/>
-        <p:cNvGrpSpPr/>
-        <p:nvPr/>
-      </p:nvGrpSpPr>
-      <p:grpSpPr>
-        <a:xfrm>
-          <a:off x="0" y="0"/>
-          <a:ext cx="0" cy="0"/>
-          <a:chOff x="0" y="0"/>
-          <a:chExt cx="0" cy="0"/>
-        </a:xfrm>
-      </p:grpSpPr>
-    </p:spTree>
-  </p:cSld>
-  <p:clrMap bg1="lt1" tx1="dk1" bg2="lt2" tx2="dk2" accent1="accent1" accent2="accent2" accent3="accent3" accent4="accent4" accent5="accent5" accent6="accent6" hlink="hlink" folHlink="folHlink"/>
-  <p:sldLayoutIdLst>
-    <p:sldLayoutId id="2147483660" r:id="rId1"/>
-  </p:sldLayoutIdLst>
-  <p:transition xmlns:mc="http://schemas.openxmlformats.org/markup-compatibility/2006" xmlns:hp="http://schemas.haansoft.com/office/presentation/8.0" mc:Ignorable="hp" hp:hslDur="500"/>
-</p:sldMaster>
+<file path=ppt/slideMasters/theme/theme2.xml><?xml version="1.0" encoding="utf-8"?>
+<a:theme xmlns:a="http://schemas.openxmlformats.org/drawingml/2006/main" name="Default Codex Theme">
+  <a:themeElements>
+    <a:clrScheme name="Office">
+      <a:dk1>
+        <a:sysClr val="windowText" lastClr="000000"/>
+      </a:dk1>
+      <a:lt1>
+        <a:sysClr val="window" lastClr="FFFFFF"/>
+      </a:lt1>
+      <a:dk2>
+        <a:srgbClr val="0E2841"/>
+      </a:dk2>
+      <a:lt2>
+        <a:srgbClr val="E8E8E8"/>
+      </a:lt2>
+      <a:accent1>
+        <a:srgbClr val="156082"/>
+      </a:accent1>
+      <a:accent2>
+        <a:srgbClr val="E97132"/>
+      </a:accent2>
+      <a:accent3>
+        <a:srgbClr val="196B24"/>
+      </a:accent3>
+      <a:accent4>
+        <a:srgbClr val="0F9ED5"/>
+      </a:accent4>
+      <a:accent5>
+        <a:srgbClr val="A02B93"/>
+      </a:accent5>
+      <a:accent6>
+        <a:srgbClr val="4EA72E"/>
+      </a:accent6>
+      <a:hlink>
+        <a:srgbClr val="467886"/>
+      </a:hlink>
+      <a:folHlink>
+        <a:srgbClr val="96607D"/>
+      </a:folHlink>
+    </a:clrScheme>
+    <a:fontScheme name="Helvetica Neue">
+      <a:majorFont>
+        <a:latin typeface="Helvetica Neue"/>
+        <a:ea typeface=""/>
+        <a:cs typeface=""/>
+      </a:majorFont>
+      <a:minorFont>
+        <a:latin typeface="Helvetica Neue"/>
+        <a:ea typeface=""/>
+        <a:cs typeface=""/>
+      </a:minorFont>
+    </a:fontScheme>
+    <a:fmtScheme name="Office">
+      <a:fillStyleLst>
+        <a:solidFill>
+          <a:schemeClr val="phClr"/>
+        </a:solidFill>
+        <a:gradFill rotWithShape="1">
+          <a:gsLst>
+            <a:gs pos="0">
+              <a:schemeClr val="phClr">
+                <a:tint val="67000"/>
+                <a:lumMod val="110000"/>
+                <a:satMod val="105000"/>
+              </a:schemeClr>
+            </a:gs>
+            <a:gs pos="50000">
+              <a:schemeClr val="phClr">
+                <a:tint val="73000"/>
+                <a:lumMod val="105000"/>
+                <a:satMod val="103000"/>
+              </a:schemeClr>
+            </a:gs>
+            <a:gs pos="100000">
+              <a:schemeClr val="phClr">
+                <a:tint val="81000"/>
+                <a:lumMod val="105000"/>
+                <a:satMod val="109000"/>
+              </a:schemeClr>
+            </a:gs>
+          </a:gsLst>
+          <a:lin ang="5400000" scaled="0"/>
+        </a:gradFill>
+        <a:gradFill rotWithShape="1">
+          <a:gsLst>
+            <a:gs pos="0">
+              <a:schemeClr val="phClr">
+                <a:tint val="94000"/>
+                <a:lumMod val="102000"/>
+                <a:satMod val="103000"/>
+              </a:schemeClr>
+            </a:gs>
+            <a:gs pos="50000">
+              <a:schemeClr val="phClr">
+                <a:shade val="100000"/>
+                <a:lumMod val="100000"/>
+                <a:satMod val="110000"/>
+              </a:schemeClr>
+            </a:gs>
+            <a:gs pos="100000">
+              <a:schemeClr val="phClr">
+                <a:shade val="78000"/>
+                <a:lumMod val="99000"/>
+                <a:satMod val="120000"/>
+              </a:schemeClr>
+            </a:gs>
+          </a:gsLst>
+          <a:lin ang="5400000" scaled="0"/>
+        </a:gradFill>
+      </a:fillStyleLst>
+      <a:lnStyleLst>
+        <a:ln w="12700">
+          <a:solidFill>
+            <a:schemeClr val="phClr"/>
+          </a:solidFill>
+          <a:prstDash val="solid"/>
+        </a:ln>
+        <a:ln w="19050">
+          <a:solidFill>
+            <a:schemeClr val="phClr"/>
+          </a:solidFill>
+          <a:prstDash val="solid"/>
+        </a:ln>
+        <a:ln w="25400">
+          <a:solidFill>
+            <a:schemeClr val="phClr"/>
+          </a:solidFill>
+          <a:prstDash val="solid"/>
+        </a:ln>
+      </a:lnStyleLst>
+      <a:effectStyleLst>
+        <a:effectStyle>
+          <a:effectLst/>
+        </a:effectStyle>
+        <a:effectStyle>
+          <a:effectLst/>
+        </a:effectStyle>
+        <a:effectStyle>
+          <a:effectLst>
+            <a:outerShdw blurRad="57150" dist="19050" dir="5400000" algn="ctr" rotWithShape="0">
+              <a:srgbClr val="000000">
+                <a:alpha val="63000"/>
+              </a:srgbClr>
+            </a:outerShdw>
+          </a:effectLst>
+        </a:effectStyle>
+      </a:effectStyleLst>
+      <a:bgFillStyleLst>
+        <a:solidFill>
+          <a:schemeClr val="phClr"/>
+        </a:solidFill>
+        <a:solidFill>
+          <a:schemeClr val="phClr">
+            <a:tint val="95000"/>
+            <a:satMod val="170000"/>
+          </a:schemeClr>
+        </a:solidFill>
+        <a:gradFill rotWithShape="1">
+          <a:gsLst>
+            <a:gs pos="0">
+              <a:schemeClr val="phClr">
+                <a:tint val="93000"/>
+                <a:shade val="98000"/>
+                <a:lumMod val="102000"/>
+                <a:satMod val="150000"/>
+              </a:schemeClr>
+            </a:gs>
+            <a:gs pos="50000">
+              <a:schemeClr val="phClr">
+                <a:tint val="98000"/>
+                <a:shade val="90000"/>
+                <a:lumMod val="103000"/>
+                <a:satMod val="130000"/>
+              </a:schemeClr>
+            </a:gs>
+            <a:gs pos="100000">
+              <a:schemeClr val="phClr">
+                <a:shade val="63000"/>
+                <a:satMod val="120000"/>
+              </a:schemeClr>
+            </a:gs>
+          </a:gsLst>
+          <a:lin ang="5400000" scaled="0"/>
+        </a:gradFill>
+      </a:bgFillStyleLst>
+    </a:fmtScheme>
+  </a:themeElements>
+</a:theme>
 </file>
 
 <file path=ppt/slides/slide1.xml><?xml version="1.0" encoding="utf-8"?>
@@ -2583,7 +4185,7 @@
 </file>
 
 <file path=ppt/slides/slide10.xml><?xml version="1.0" encoding="utf-8"?>
-<p:sld xmlns:r="http://schemas.openxmlformats.org/officeDocument/2006/relationships" xmlns:c="http://schemas.openxmlformats.org/drawingml/2006/chart" xmlns:a="http://schemas.openxmlformats.org/drawingml/2006/main" xmlns:dgm="http://schemas.openxmlformats.org/drawingml/2006/diagram" xmlns:dsp="http://schemas.microsoft.com/office/drawing/2008/diagram" xmlns:p="http://schemas.openxmlformats.org/presentationml/2006/main">
+<p:sld xmlns:p="http://schemas.openxmlformats.org/presentationml/2006/main">
   <p:cSld>
     <p:spTree>
       <p:nvGrpSpPr>
@@ -2592,18 +4194,19 @@
         <p:nvPr/>
       </p:nvGrpSpPr>
       <p:grpSpPr>
-        <a:xfrm>
-          <a:off x="0" y="0"/>
-          <a:ext cx="0" cy="0"/>
-          <a:chOff x="0" y="0"/>
-          <a:chExt cx="0" cy="0"/>
-        </a:xfrm>
+        <a:xfrm xmlns:a="http://schemas.openxmlformats.org/drawingml/2006/main"/>
       </p:grpSpPr>
       <p:sp>
         <p:nvSpPr>
-          <p:cNvPr id="2" name="Slide Number Placeholder 1"/>
+          <p:cNvPr id="2" name="Slide Number Placeholder 1">
+            <a:extLst xmlns:a="http://schemas.openxmlformats.org/drawingml/2006/main">
+              <a:ext uri="{FF2B5EF4-FFF2-40B4-BE49-F238E27FC236}">
+                <a16:creationId xmlns:a16="http://schemas.microsoft.com/office/drawing/2014/main" id="{F6A32FBD-471B-0EBA-B741-E0342E72294D}"/>
+              </a:ext>
+            </a:extLst>
+          </p:cNvPr>
           <p:cNvSpPr>
-            <a:spLocks noGrp="1"/>
+            <a:spLocks xmlns:a="http://schemas.openxmlformats.org/drawingml/2006/main" noGrp="1"/>
           </p:cNvSpPr>
           <p:nvPr>
             <p:ph type="sldNum" idx="4"/>
@@ -2611,80 +4214,79 @@
         </p:nvSpPr>
         <p:spPr/>
         <p:txBody>
-          <a:bodyPr/>
-          <a:lstStyle/>
-          <a:p>
-            <a:pPr>
-              <a:defRPr/>
-            </a:pPr>
+          <a:bodyPr xmlns:a="http://schemas.openxmlformats.org/drawingml/2006/main"/>
+          <a:lstStyle xmlns:a="http://schemas.openxmlformats.org/drawingml/2006/main"/>
+          <a:p xmlns:a="http://schemas.openxmlformats.org/drawingml/2006/main">
             <a:fld id="{DB7BEEEC-A170-5376-2B6E-CB54687B0CB1}" type="slidenum">
-              <a:rPr lang="en-US" altLang="en-US"/>
-              <a:pPr>
-                <a:defRPr/>
-              </a:pPr>
               <a:t>10</a:t>
             </a:fld>
-            <a:endParaRPr lang="en-US" altLang="en-US"/>
           </a:p>
         </p:txBody>
       </p:sp>
       <p:sp>
         <p:nvSpPr>
-          <p:cNvPr id="3" name="Title 2"/>
+          <p:cNvPr id="3" name="Title 2">
+            <a:extLst xmlns:a="http://schemas.openxmlformats.org/drawingml/2006/main">
+              <a:ext uri="{FF2B5EF4-FFF2-40B4-BE49-F238E27FC236}">
+                <a16:creationId xmlns:a16="http://schemas.microsoft.com/office/drawing/2014/main" id="{F6FE9EA6-28D5-24F6-5682-5886DC12588C}"/>
+              </a:ext>
+            </a:extLst>
+          </p:cNvPr>
           <p:cNvSpPr>
-            <a:spLocks noGrp="1"/>
+            <a:spLocks xmlns:a="http://schemas.openxmlformats.org/drawingml/2006/main" noGrp="1"/>
           </p:cNvSpPr>
           <p:nvPr>
             <p:ph type="title" idx="0"/>
           </p:nvPr>
         </p:nvSpPr>
         <p:spPr>
-          <a:xfrm>
+          <a:xfrm xmlns:a="http://schemas.openxmlformats.org/drawingml/2006/main">
             <a:off x="393700" y="344008"/>
             <a:ext cx="3911600" cy="1047491"/>
           </a:xfrm>
         </p:spPr>
         <p:txBody>
-          <a:bodyPr/>
-          <a:lstStyle/>
-          <a:p>
-            <a:pPr lvl="0">
-              <a:defRPr/>
-            </a:pPr>
-            <a:r>
-              <a:rPr lang="ko-KR" altLang="en-US"/>
+          <a:bodyPr xmlns:a="http://schemas.openxmlformats.org/drawingml/2006/main"/>
+          <a:lstStyle xmlns:a="http://schemas.openxmlformats.org/drawingml/2006/main"/>
+          <a:p xmlns:a="http://schemas.openxmlformats.org/drawingml/2006/main">
+            <a:r>
               <a:t>Security that listens</a:t>
             </a:r>
-            <a:endParaRPr lang="ko-KR" altLang="en-US"/>
           </a:p>
         </p:txBody>
       </p:sp>
       <p:sp>
         <p:nvSpPr>
-          <p:cNvPr id="4" name="Title 2"/>
+          <p:cNvPr id="4" name="Title 2">
+            <a:extLst xmlns:a="http://schemas.openxmlformats.org/drawingml/2006/main">
+              <a:ext uri="{FF2B5EF4-FFF2-40B4-BE49-F238E27FC236}">
+                <a16:creationId xmlns:a16="http://schemas.microsoft.com/office/drawing/2014/main" id="{2F10929B-DEFF-CE26-DEB7-6097A95B3B5C}"/>
+              </a:ext>
+            </a:extLst>
+          </p:cNvPr>
           <p:cNvSpPr>
-            <a:spLocks noGrp="1"/>
+            <a:spLocks xmlns:a="http://schemas.openxmlformats.org/drawingml/2006/main" noGrp="1"/>
           </p:cNvSpPr>
           <p:nvPr/>
         </p:nvSpPr>
         <p:spPr>
-          <a:xfrm>
+          <a:xfrm xmlns:a="http://schemas.openxmlformats.org/drawingml/2006/main">
             <a:off x="5930900" y="344008"/>
             <a:ext cx="5867400" cy="4659792"/>
           </a:xfrm>
-          <a:prstGeom prst="rect">
+          <a:prstGeom xmlns:a="http://schemas.openxmlformats.org/drawingml/2006/main" prst="rect">
             <a:avLst/>
           </a:prstGeom>
-          <a:noFill/>
-          <a:ln>
+          <a:noFill xmlns:a="http://schemas.openxmlformats.org/drawingml/2006/main"/>
+          <a:ln xmlns:a="http://schemas.openxmlformats.org/drawingml/2006/main">
             <a:noFill/>
           </a:ln>
         </p:spPr>
         <p:txBody>
-          <a:bodyPr wrap="square" lIns="0" tIns="0" rIns="0" bIns="0" anchor="t">
+          <a:bodyPr xmlns:a="http://schemas.openxmlformats.org/drawingml/2006/main" spcFirstLastPara="1" wrap="square" lIns="0" tIns="0" rIns="0" bIns="0" anchor="t">
             <a:noAutofit/>
           </a:bodyPr>
-          <a:lstStyle>
+          <a:lstStyle xmlns:a="http://schemas.openxmlformats.org/drawingml/2006/main">
             <a:lvl1pPr algn="l">
               <a:lnSpc>
                 <a:spcPct val="100000"/>
@@ -2866,91 +4468,81 @@
               </a:defRPr>
             </a:lvl9pPr>
           </a:lstStyle>
-          <a:p>
+          <a:p xmlns:a="http://schemas.openxmlformats.org/drawingml/2006/main">
             <a:pPr marL="514350" indent="-514350">
               <a:spcAft>
                 <a:spcPts val="600"/>
               </a:spcAft>
               <a:buAutoNum type="arabicPeriod"/>
-              <a:defRPr/>
-            </a:pPr>
-            <a:r>
-              <a:rPr lang="ko-KR" altLang="en-US"/>
+            </a:pPr>
+            <a:r>
               <a:t>Transfer learning made the system practical</a:t>
             </a:r>
-            <a:endParaRPr lang="ko-KR" altLang="en-US"/>
-          </a:p>
-          <a:p>
+          </a:p>
+          <a:p xmlns:a="http://schemas.openxmlformats.org/drawingml/2006/main">
             <a:pPr marL="514350" indent="-514350">
               <a:spcAft>
                 <a:spcPts val="600"/>
               </a:spcAft>
               <a:buAutoNum type="arabicPeriod"/>
-              <a:defRPr/>
-            </a:pPr>
-            <a:r>
-              <a:rPr lang="ko-KR" altLang="en-US"/>
-              <a:t>Source-group splitting reduced leakage risk</a:t>
-            </a:r>
-            <a:endParaRPr lang="ko-KR" altLang="en-US"/>
-          </a:p>
-          <a:p>
+            </a:pPr>
+            <a:r>
+              <a:t>A custom head specialized YAMNet features</a:t>
+            </a:r>
+          </a:p>
+          <a:p xmlns:a="http://schemas.openxmlformats.org/drawingml/2006/main">
             <a:pPr marL="514350" indent="-514350">
               <a:spcAft>
                 <a:spcPts val="800"/>
               </a:spcAft>
               <a:buAutoNum type="arabicPeriod"/>
-              <a:defRPr/>
-            </a:pPr>
-            <a:r>
-              <a:rPr lang="ko-KR" altLang="en-US"/>
-              <a:t>Validation gates prevented a risky upgrade</a:t>
-            </a:r>
-            <a:endParaRPr lang="ko-KR" altLang="en-US"/>
-          </a:p>
-          <a:p>
+            </a:pPr>
+            <a:r>
+              <a:t>Frame-aligned Fusion combined two signals</a:t>
+            </a:r>
+          </a:p>
+          <a:p xmlns:a="http://schemas.openxmlformats.org/drawingml/2006/main">
             <a:pPr marL="514350" indent="-514350">
               <a:spcAft>
                 <a:spcPts val="600"/>
               </a:spcAft>
               <a:buAutoNum type="arabicPeriod"/>
-              <a:defRPr/>
-            </a:pPr>
-            <a:r>
-              <a:rPr lang="ko-KR" altLang="en-US"/>
-              <a:t>Official and demo policies expose a trade-off</a:t>
-            </a:r>
-            <a:endParaRPr lang="ko-KR" altLang="en-US"/>
-          </a:p>
-          <a:p>
+            </a:pPr>
+            <a:r>
+              <a:t>Final Fusion reached Macro F1 0.837</a:t>
+            </a:r>
+          </a:p>
+          <a:p xmlns:a="http://schemas.openxmlformats.org/drawingml/2006/main">
             <a:pPr marL="514350" indent="-514350">
               <a:spcAft>
                 <a:spcPts val="600"/>
               </a:spcAft>
               <a:buAutoNum type="arabicPeriod"/>
-              <a:defRPr/>
-            </a:pPr>
-            <a:r>
-              <a:rPr lang="ko-KR" altLang="en-US"/>
-              <a:t>Next: fewer false alarms without recall loss</a:t>
-            </a:r>
-            <a:endParaRPr lang="ko-KR" altLang="en-US"/>
+            </a:pPr>
+            <a:r>
+              <a:t>Next: validate on fresh external data</a:t>
+            </a:r>
+          </a:p>
+          <a:p xmlns:a="http://schemas.openxmlformats.org/drawingml/2006/main">
+            <a:pPr marL="514350" indent="-514350">
+              <a:spcAft>
+                <a:spcPts val="600"/>
+              </a:spcAft>
+              <a:buAutoNum type="arabicPeriod"/>
+            </a:pPr>
+            <a:r>
+              <a:t>Thank you — Questions?</a:t>
+            </a:r>
           </a:p>
         </p:txBody>
       </p:sp>
     </p:spTree>
+    <p:extLst>
+      <p:ext uri="{BB962C8B-B14F-4D97-AF65-F5344CB8AC3E}">
+        <p14:creationId xmlns:p14="http://schemas.microsoft.com/office/powerpoint/2010/main" val="2382563270"/>
+      </p:ext>
+    </p:extLst>
   </p:cSld>
-  <p:clrMapOvr>
-    <a:masterClrMapping/>
-  </p:clrMapOvr>
-  <mc:AlternateContent xmlns:mc="http://schemas.openxmlformats.org/markup-compatibility/2006">
-    <mc:Choice xmlns:p14="http://schemas.microsoft.com/office/powerpoint/2010/main" Requires="p14">
-      <p:transition xmlns:mc="http://schemas.openxmlformats.org/markup-compatibility/2006" xmlns:p14="http://schemas.microsoft.com/office/powerpoint/2010/main" mc:Ignorable="p14" p14:dur="500"/>
-    </mc:Choice>
-    <mc:Fallback>
-      <p:transition/>
-    </mc:Fallback>
-  </mc:AlternateContent>
 </p:sld>
 </file>
 
@@ -3833,7 +5425,7 @@
 </file>
 
 <file path=ppt/slides/slide3.xml><?xml version="1.0" encoding="utf-8"?>
-<p:sld xmlns:r="http://schemas.openxmlformats.org/officeDocument/2006/relationships" xmlns:c="http://schemas.openxmlformats.org/drawingml/2006/chart" xmlns:a="http://schemas.openxmlformats.org/drawingml/2006/main" xmlns:dgm="http://schemas.openxmlformats.org/drawingml/2006/diagram" xmlns:dsp="http://schemas.microsoft.com/office/drawing/2008/diagram" xmlns:p="http://schemas.openxmlformats.org/presentationml/2006/main">
+<p:sld xmlns:p="http://schemas.openxmlformats.org/presentationml/2006/main">
   <p:cSld>
     <p:spTree>
       <p:nvGrpSpPr>
@@ -3842,18 +5434,19 @@
         <p:nvPr/>
       </p:nvGrpSpPr>
       <p:grpSpPr>
-        <a:xfrm>
-          <a:off x="0" y="0"/>
-          <a:ext cx="0" cy="0"/>
-          <a:chOff x="0" y="0"/>
-          <a:chExt cx="0" cy="0"/>
-        </a:xfrm>
+        <a:xfrm xmlns:a="http://schemas.openxmlformats.org/drawingml/2006/main"/>
       </p:grpSpPr>
       <p:sp>
         <p:nvSpPr>
-          <p:cNvPr id="4" name="Slide Number Placeholder 3"/>
+          <p:cNvPr id="4" name="Slide Number Placeholder 3">
+            <a:extLst xmlns:a="http://schemas.openxmlformats.org/drawingml/2006/main">
+              <a:ext uri="{FF2B5EF4-FFF2-40B4-BE49-F238E27FC236}">
+                <a16:creationId xmlns:a16="http://schemas.microsoft.com/office/drawing/2014/main" id="{DCDD464D-3316-879D-91C3-30E54491AD13}"/>
+              </a:ext>
+            </a:extLst>
+          </p:cNvPr>
           <p:cNvSpPr>
-            <a:spLocks noGrp="1"/>
+            <a:spLocks xmlns:a="http://schemas.openxmlformats.org/drawingml/2006/main" noGrp="1"/>
           </p:cNvSpPr>
           <p:nvPr>
             <p:ph type="sldNum" idx="4"/>
@@ -3861,182 +5454,189 @@
         </p:nvSpPr>
         <p:spPr/>
         <p:txBody>
-          <a:bodyPr/>
-          <a:lstStyle/>
-          <a:p>
-            <a:pPr>
-              <a:defRPr/>
-            </a:pPr>
+          <a:bodyPr xmlns:a="http://schemas.openxmlformats.org/drawingml/2006/main"/>
+          <a:lstStyle xmlns:a="http://schemas.openxmlformats.org/drawingml/2006/main"/>
+          <a:p xmlns:a="http://schemas.openxmlformats.org/drawingml/2006/main">
             <a:fld id="{202359C0-8A7A-196E-DD58-8E6569619F09}" type="slidenum">
-              <a:rPr lang="en-US" altLang="en-US"/>
-              <a:pPr>
-                <a:defRPr/>
-              </a:pPr>
               <a:t>3</a:t>
             </a:fld>
-            <a:endParaRPr lang="en-US" altLang="en-US"/>
           </a:p>
         </p:txBody>
       </p:sp>
       <p:sp>
         <p:nvSpPr>
-          <p:cNvPr id="11" name="Title 10"/>
+          <p:cNvPr id="11" name="Title 10">
+            <a:extLst xmlns:a="http://schemas.openxmlformats.org/drawingml/2006/main">
+              <a:ext uri="{FF2B5EF4-FFF2-40B4-BE49-F238E27FC236}">
+                <a16:creationId xmlns:a16="http://schemas.microsoft.com/office/drawing/2014/main" id="{8D39B68E-326B-DDEB-2069-B8BB0D01F042}"/>
+              </a:ext>
+            </a:extLst>
+          </p:cNvPr>
           <p:cNvSpPr>
-            <a:spLocks noGrp="1"/>
+            <a:spLocks xmlns:a="http://schemas.openxmlformats.org/drawingml/2006/main" noGrp="1"/>
           </p:cNvSpPr>
           <p:nvPr>
             <p:ph type="title" idx="0"/>
           </p:nvPr>
         </p:nvSpPr>
         <p:spPr>
-          <a:xfrm>
+          <a:xfrm xmlns:a="http://schemas.openxmlformats.org/drawingml/2006/main">
             <a:off x="393700" y="344008"/>
             <a:ext cx="5534180" cy="1047491"/>
           </a:xfrm>
         </p:spPr>
         <p:txBody>
-          <a:bodyPr/>
-          <a:lstStyle/>
-          <a:p>
-            <a:pPr lvl="0">
-              <a:defRPr/>
-            </a:pPr>
-            <a:r>
-              <a:rPr lang="ko-KR" altLang="en-US"/>
-              <a:t>Baseline: YAMNet-only ablation</a:t>
-            </a:r>
-            <a:endParaRPr lang="ko-KR" altLang="en-US"/>
+          <a:bodyPr xmlns:a="http://schemas.openxmlformats.org/drawingml/2006/main"/>
+          <a:lstStyle xmlns:a="http://schemas.openxmlformats.org/drawingml/2006/main"/>
+          <a:p xmlns:a="http://schemas.openxmlformats.org/drawingml/2006/main">
+            <a:r>
+              <a:t>Why YAMNet alone is not enough</a:t>
+            </a:r>
           </a:p>
         </p:txBody>
       </p:sp>
       <p:sp>
         <p:nvSpPr>
-          <p:cNvPr id="3" name="Rounded Rectangle 2"/>
+          <p:cNvPr id="3" name="Rounded Rectangle 2">
+            <a:extLst xmlns:a="http://schemas.openxmlformats.org/drawingml/2006/main">
+              <a:ext uri="{FF2B5EF4-FFF2-40B4-BE49-F238E27FC236}">
+                <a16:creationId xmlns:a16="http://schemas.microsoft.com/office/drawing/2014/main" id="{29B30B4D-AB5C-65DB-5658-753508EB3D5D}"/>
+              </a:ext>
+            </a:extLst>
+          </p:cNvPr>
           <p:cNvSpPr>
-            <a:spLocks noGrp="1"/>
+            <a:spLocks xmlns:a="http://schemas.openxmlformats.org/drawingml/2006/main" noGrp="1"/>
           </p:cNvSpPr>
           <p:nvPr/>
         </p:nvSpPr>
         <p:spPr>
-          <a:xfrm>
+          <a:xfrm xmlns:a="http://schemas.openxmlformats.org/drawingml/2006/main">
             <a:off x="393700" y="2032000"/>
             <a:ext cx="2581975" cy="2656541"/>
           </a:xfrm>
-          <a:prstGeom prst="roundRect">
+          <a:prstGeom xmlns:a="http://schemas.openxmlformats.org/drawingml/2006/main" prst="roundRect">
             <a:avLst>
               <a:gd name="adj" fmla="val 0"/>
             </a:avLst>
           </a:prstGeom>
-          <a:solidFill>
+          <a:solidFill xmlns:a="http://schemas.openxmlformats.org/drawingml/2006/main">
             <a:schemeClr val="bg2"/>
           </a:solidFill>
-          <a:ln>
+          <a:ln xmlns:a="http://schemas.openxmlformats.org/drawingml/2006/main">
             <a:noFill/>
           </a:ln>
         </p:spPr>
         <p:style>
-          <a:lnRef idx="2">
+          <a:lnRef xmlns:a="http://schemas.openxmlformats.org/drawingml/2006/main" idx="2">
             <a:schemeClr val="accent1">
               <a:shade val="15000"/>
             </a:schemeClr>
           </a:lnRef>
-          <a:fillRef idx="1">
+          <a:fillRef xmlns:a="http://schemas.openxmlformats.org/drawingml/2006/main" idx="1">
             <a:schemeClr val="accent1"/>
           </a:fillRef>
-          <a:effectRef idx="0">
+          <a:effectRef xmlns:a="http://schemas.openxmlformats.org/drawingml/2006/main" idx="0">
             <a:schemeClr val="accent1"/>
           </a:effectRef>
-          <a:fontRef idx="minor">
+          <a:fontRef xmlns:a="http://schemas.openxmlformats.org/drawingml/2006/main" idx="minor">
             <a:schemeClr val="lt1"/>
           </a:fontRef>
         </p:style>
         <p:txBody>
-          <a:bodyPr anchor="ctr"/>
-          <a:lstStyle/>
-          <a:p>
+          <a:bodyPr xmlns:a="http://schemas.openxmlformats.org/drawingml/2006/main" anchor="ctr"/>
+          <a:lstStyle xmlns:a="http://schemas.openxmlformats.org/drawingml/2006/main"/>
+          <a:p xmlns:a="http://schemas.openxmlformats.org/drawingml/2006/main">
             <a:pPr algn="ctr">
               <a:buNone/>
-              <a:defRPr/>
-            </a:pPr>
-            <a:endParaRPr lang="ko-KR" altLang="en-US"/>
+            </a:pPr>
           </a:p>
         </p:txBody>
       </p:sp>
       <p:sp>
         <p:nvSpPr>
-          <p:cNvPr id="2" name="Rounded Rectangle 1"/>
+          <p:cNvPr id="2" name="Rounded Rectangle 1">
+            <a:extLst xmlns:a="http://schemas.openxmlformats.org/drawingml/2006/main">
+              <a:ext uri="{FF2B5EF4-FFF2-40B4-BE49-F238E27FC236}">
+                <a16:creationId xmlns:a16="http://schemas.microsoft.com/office/drawing/2014/main" id="{2F75E60C-F9D7-0EB1-DB87-30BB4B887E89}"/>
+              </a:ext>
+            </a:extLst>
+          </p:cNvPr>
           <p:cNvSpPr>
-            <a:spLocks noGrp="1"/>
+            <a:spLocks xmlns:a="http://schemas.openxmlformats.org/drawingml/2006/main" noGrp="1"/>
           </p:cNvSpPr>
           <p:nvPr/>
         </p:nvSpPr>
         <p:spPr>
-          <a:xfrm>
+          <a:xfrm xmlns:a="http://schemas.openxmlformats.org/drawingml/2006/main">
             <a:off x="0" y="5385955"/>
             <a:ext cx="12192000" cy="1485900"/>
           </a:xfrm>
-          <a:prstGeom prst="roundRect">
+          <a:prstGeom xmlns:a="http://schemas.openxmlformats.org/drawingml/2006/main" prst="roundRect">
             <a:avLst>
               <a:gd name="adj" fmla="val 0"/>
             </a:avLst>
           </a:prstGeom>
-          <a:solidFill>
+          <a:solidFill xmlns:a="http://schemas.openxmlformats.org/drawingml/2006/main">
             <a:schemeClr val="bg2"/>
           </a:solidFill>
-          <a:ln>
+          <a:ln xmlns:a="http://schemas.openxmlformats.org/drawingml/2006/main">
             <a:noFill/>
           </a:ln>
         </p:spPr>
         <p:style>
-          <a:lnRef idx="2">
+          <a:lnRef xmlns:a="http://schemas.openxmlformats.org/drawingml/2006/main" idx="2">
             <a:schemeClr val="accent1">
               <a:shade val="15000"/>
             </a:schemeClr>
           </a:lnRef>
-          <a:fillRef idx="1">
+          <a:fillRef xmlns:a="http://schemas.openxmlformats.org/drawingml/2006/main" idx="1">
             <a:schemeClr val="accent1"/>
           </a:fillRef>
-          <a:effectRef idx="0">
+          <a:effectRef xmlns:a="http://schemas.openxmlformats.org/drawingml/2006/main" idx="0">
             <a:schemeClr val="accent1"/>
           </a:effectRef>
-          <a:fontRef idx="minor">
+          <a:fontRef xmlns:a="http://schemas.openxmlformats.org/drawingml/2006/main" idx="minor">
             <a:schemeClr val="lt1"/>
           </a:fontRef>
         </p:style>
         <p:txBody>
-          <a:bodyPr anchor="ctr"/>
-          <a:lstStyle/>
-          <a:p>
+          <a:bodyPr xmlns:a="http://schemas.openxmlformats.org/drawingml/2006/main" anchor="ctr"/>
+          <a:lstStyle xmlns:a="http://schemas.openxmlformats.org/drawingml/2006/main"/>
+          <a:p xmlns:a="http://schemas.openxmlformats.org/drawingml/2006/main">
             <a:pPr algn="ctr">
               <a:buNone/>
-              <a:defRPr/>
-            </a:pPr>
-            <a:endParaRPr lang="ko-KR" altLang="en-US"/>
+            </a:pPr>
           </a:p>
         </p:txBody>
       </p:sp>
       <p:sp>
         <p:nvSpPr>
-          <p:cNvPr id="12" name="Content Placeholder 9"/>
+          <p:cNvPr id="12" name="Content Placeholder 9">
+            <a:extLst xmlns:a="http://schemas.openxmlformats.org/drawingml/2006/main">
+              <a:ext uri="{FF2B5EF4-FFF2-40B4-BE49-F238E27FC236}">
+                <a16:creationId xmlns:a16="http://schemas.microsoft.com/office/drawing/2014/main" id="{48F23094-2741-BF93-9618-593A39D42BD2}"/>
+              </a:ext>
+            </a:extLst>
+          </p:cNvPr>
           <p:cNvSpPr>
-            <a:spLocks noGrp="1"/>
+            <a:spLocks xmlns:a="http://schemas.openxmlformats.org/drawingml/2006/main" noGrp="1"/>
           </p:cNvSpPr>
           <p:nvPr/>
         </p:nvSpPr>
         <p:spPr>
-          <a:xfrm>
+          <a:xfrm xmlns:a="http://schemas.openxmlformats.org/drawingml/2006/main">
             <a:off x="631052" y="2251890"/>
             <a:ext cx="2133315" cy="903750"/>
           </a:xfrm>
-          <a:prstGeom prst="rect">
+          <a:prstGeom xmlns:a="http://schemas.openxmlformats.org/drawingml/2006/main" prst="rect">
             <a:avLst/>
           </a:prstGeom>
         </p:spPr>
         <p:txBody>
-          <a:bodyPr vert="horz" lIns="0" tIns="0" rIns="0" bIns="0" anchor="b">
-            <a:normAutofit/>
+          <a:bodyPr xmlns:a="http://schemas.openxmlformats.org/drawingml/2006/main" vert="horz" lIns="0" tIns="0" rIns="0" bIns="0" anchor="b">
+            <a:normAutofit fontScale="100000"/>
           </a:bodyPr>
-          <a:lstStyle>
+          <a:lstStyle xmlns:a="http://schemas.openxmlformats.org/drawingml/2006/main">
             <a:lvl1pPr marL="228600" indent="-228600" algn="l">
               <a:lnSpc>
                 <a:spcPct val="90000"/>
@@ -4191,7 +5791,7 @@
               </a:defRPr>
             </a:lvl9pPr>
           </a:lstStyle>
-          <a:p>
+          <a:p xmlns:a="http://schemas.openxmlformats.org/drawingml/2006/main">
             <a:pPr marL="2540" indent="0" algn="l">
               <a:lnSpc>
                 <a:spcPct val="110000"/>
@@ -4203,10 +5803,12 @@
                 <a:spcPts val="0"/>
               </a:spcAft>
               <a:buNone/>
-              <a:defRPr/>
             </a:pPr>
             <a:r>
               <a:rPr sz="5000" u="none" cap="none">
+                <a:ln>
+                  <a:noFill/>
+                </a:ln>
                 <a:solidFill>
                   <a:prstClr val="black"/>
                 </a:solidFill>
@@ -4216,39 +5818,37 @@
               </a:rPr>
               <a:t>16 kHz</a:t>
             </a:r>
-            <a:endParaRPr sz="5000" u="none" cap="none">
-              <a:solidFill>
-                <a:prstClr val="black"/>
-              </a:solidFill>
-              <a:latin typeface="Helvetica Neue"/>
-              <a:ea typeface="Helvetica Neue"/>
-              <a:cs typeface="Helvetica Neue"/>
-            </a:endParaRPr>
           </a:p>
         </p:txBody>
       </p:sp>
       <p:sp>
         <p:nvSpPr>
-          <p:cNvPr id="16" name="Content Placeholder 15"/>
+          <p:cNvPr id="16" name="Content Placeholder 15">
+            <a:extLst xmlns:a="http://schemas.openxmlformats.org/drawingml/2006/main">
+              <a:ext uri="{FF2B5EF4-FFF2-40B4-BE49-F238E27FC236}">
+                <a16:creationId xmlns:a16="http://schemas.microsoft.com/office/drawing/2014/main" id="{D63831D1-6AB6-9FDC-DF3D-910C1C60EA7D}"/>
+              </a:ext>
+            </a:extLst>
+          </p:cNvPr>
           <p:cNvSpPr>
-            <a:spLocks noGrp="1"/>
+            <a:spLocks xmlns:a="http://schemas.openxmlformats.org/drawingml/2006/main" noGrp="1"/>
           </p:cNvSpPr>
           <p:nvPr>
             <p:ph idx="4294967295"/>
           </p:nvPr>
         </p:nvSpPr>
         <p:spPr>
-          <a:xfrm>
+          <a:xfrm xmlns:a="http://schemas.openxmlformats.org/drawingml/2006/main">
             <a:off x="697670" y="3740150"/>
             <a:ext cx="2066698" cy="615950"/>
           </a:xfrm>
         </p:spPr>
         <p:txBody>
-          <a:bodyPr>
+          <a:bodyPr xmlns:a="http://schemas.openxmlformats.org/drawingml/2006/main">
             <a:noAutofit/>
           </a:bodyPr>
-          <a:lstStyle/>
-          <a:p>
+          <a:lstStyle xmlns:a="http://schemas.openxmlformats.org/drawingml/2006/main"/>
+          <a:p xmlns:a="http://schemas.openxmlformats.org/drawingml/2006/main">
             <a:pPr marL="0" indent="0">
               <a:lnSpc>
                 <a:spcPct val="114000"/>
@@ -4260,7 +5860,6 @@
                 <a:spcPts val="800"/>
               </a:spcAft>
               <a:buNone/>
-              <a:defRPr/>
             </a:pPr>
             <a:r>
               <a:rPr sz="1400">
@@ -4270,13 +5869,8 @@
               </a:rPr>
               <a:t>Mono audio</a:t>
             </a:r>
-            <a:endParaRPr sz="1400">
-              <a:latin typeface="Helvetica Neue"/>
-              <a:ea typeface="Helvetica Neue"/>
-              <a:cs typeface="Helvetica Neue"/>
-            </a:endParaRPr>
-          </a:p>
-          <a:p>
+          </a:p>
+          <a:p xmlns:a="http://schemas.openxmlformats.org/drawingml/2006/main">
             <a:pPr marL="0" indent="0">
               <a:lnSpc>
                 <a:spcPct val="114000"/>
@@ -4288,7 +5882,6 @@
                 <a:spcPts val="800"/>
               </a:spcAft>
               <a:buNone/>
-              <a:defRPr/>
             </a:pPr>
             <a:r>
               <a:rPr sz="1400">
@@ -4298,89 +5891,94 @@
               </a:rPr>
               <a:t>waveform</a:t>
             </a:r>
-            <a:endParaRPr sz="1400">
-              <a:latin typeface="Helvetica Neue"/>
-              <a:ea typeface="Helvetica Neue"/>
-              <a:cs typeface="Helvetica Neue"/>
-            </a:endParaRPr>
           </a:p>
         </p:txBody>
       </p:sp>
       <p:sp>
         <p:nvSpPr>
-          <p:cNvPr id="34" name="Rounded Rectangle 33"/>
+          <p:cNvPr id="34" name="Rounded Rectangle 33">
+            <a:extLst xmlns:a="http://schemas.openxmlformats.org/drawingml/2006/main">
+              <a:ext uri="{FF2B5EF4-FFF2-40B4-BE49-F238E27FC236}">
+                <a16:creationId xmlns:a16="http://schemas.microsoft.com/office/drawing/2014/main" id="{D0C74EF0-61EA-0AD2-19B0-75CAAA4B844A}"/>
+              </a:ext>
+            </a:extLst>
+          </p:cNvPr>
           <p:cNvSpPr>
-            <a:spLocks noGrp="1"/>
+            <a:spLocks xmlns:a="http://schemas.openxmlformats.org/drawingml/2006/main" noGrp="1"/>
           </p:cNvSpPr>
           <p:nvPr/>
         </p:nvSpPr>
         <p:spPr>
-          <a:xfrm>
+          <a:xfrm xmlns:a="http://schemas.openxmlformats.org/drawingml/2006/main">
             <a:off x="3345905" y="2032000"/>
             <a:ext cx="2581975" cy="2656541"/>
           </a:xfrm>
-          <a:prstGeom prst="roundRect">
+          <a:prstGeom xmlns:a="http://schemas.openxmlformats.org/drawingml/2006/main" prst="roundRect">
             <a:avLst>
               <a:gd name="adj" fmla="val 0"/>
             </a:avLst>
           </a:prstGeom>
-          <a:solidFill>
+          <a:solidFill xmlns:a="http://schemas.openxmlformats.org/drawingml/2006/main">
             <a:schemeClr val="bg2"/>
           </a:solidFill>
-          <a:ln>
+          <a:ln xmlns:a="http://schemas.openxmlformats.org/drawingml/2006/main">
             <a:noFill/>
           </a:ln>
         </p:spPr>
         <p:style>
-          <a:lnRef idx="2">
+          <a:lnRef xmlns:a="http://schemas.openxmlformats.org/drawingml/2006/main" idx="2">
             <a:schemeClr val="accent1">
               <a:shade val="15000"/>
             </a:schemeClr>
           </a:lnRef>
-          <a:fillRef idx="1">
+          <a:fillRef xmlns:a="http://schemas.openxmlformats.org/drawingml/2006/main" idx="1">
             <a:schemeClr val="accent1"/>
           </a:fillRef>
-          <a:effectRef idx="0">
+          <a:effectRef xmlns:a="http://schemas.openxmlformats.org/drawingml/2006/main" idx="0">
             <a:schemeClr val="accent1"/>
           </a:effectRef>
-          <a:fontRef idx="minor">
+          <a:fontRef xmlns:a="http://schemas.openxmlformats.org/drawingml/2006/main" idx="minor">
             <a:schemeClr val="lt1"/>
           </a:fontRef>
         </p:style>
         <p:txBody>
-          <a:bodyPr anchor="ctr"/>
-          <a:lstStyle/>
-          <a:p>
+          <a:bodyPr xmlns:a="http://schemas.openxmlformats.org/drawingml/2006/main" anchor="ctr"/>
+          <a:lstStyle xmlns:a="http://schemas.openxmlformats.org/drawingml/2006/main"/>
+          <a:p xmlns:a="http://schemas.openxmlformats.org/drawingml/2006/main">
             <a:pPr algn="ctr">
               <a:buNone/>
-              <a:defRPr/>
-            </a:pPr>
-            <a:endParaRPr lang="ko-KR" altLang="en-US"/>
+            </a:pPr>
           </a:p>
         </p:txBody>
       </p:sp>
       <p:sp>
         <p:nvSpPr>
-          <p:cNvPr id="35" name="Content Placeholder 9"/>
+          <p:cNvPr id="35" name="Content Placeholder 9">
+            <a:extLst xmlns:a="http://schemas.openxmlformats.org/drawingml/2006/main">
+              <a:ext uri="{FF2B5EF4-FFF2-40B4-BE49-F238E27FC236}">
+                <a16:creationId xmlns:a16="http://schemas.microsoft.com/office/drawing/2014/main" id="{6130B530-1157-40A3-0161-21ADDD16DABF}"/>
+              </a:ext>
+            </a:extLst>
+          </p:cNvPr>
           <p:cNvSpPr>
-            <a:spLocks noGrp="1"/>
+            <a:spLocks xmlns:a="http://schemas.openxmlformats.org/drawingml/2006/main" noGrp="1"/>
           </p:cNvSpPr>
           <p:nvPr/>
         </p:nvSpPr>
         <p:spPr>
-          <a:xfrm>
+          <a:xfrm xmlns:a="http://schemas.openxmlformats.org/drawingml/2006/main">
             <a:off x="3583257" y="2251890"/>
             <a:ext cx="2133315" cy="903750"/>
           </a:xfrm>
-          <a:prstGeom prst="rect">
+          <a:prstGeom xmlns:a="http://schemas.openxmlformats.org/drawingml/2006/main" prst="rect">
             <a:avLst/>
           </a:prstGeom>
         </p:spPr>
         <p:txBody>
-          <a:bodyPr vert="horz" lIns="0" tIns="0" rIns="0" bIns="0" anchor="b">
-            <a:normAutofit/>
+          <a:bodyPr xmlns:a="http://schemas.openxmlformats.org/drawingml/2006/main" vert="horz" lIns="0" tIns="0" rIns="0" bIns="0" anchor="b">
+            <a:normAutofit fontScale="100000"/>
           </a:bodyPr>
-          <a:lstStyle>
+          <a:lstStyle xmlns:a="http://schemas.openxmlformats.org/drawingml/2006/main">
             <a:lvl1pPr marL="228600" indent="-228600" algn="l">
               <a:lnSpc>
                 <a:spcPct val="90000"/>
@@ -4535,7 +6133,7 @@
               </a:defRPr>
             </a:lvl9pPr>
           </a:lstStyle>
-          <a:p>
+          <a:p xmlns:a="http://schemas.openxmlformats.org/drawingml/2006/main">
             <a:pPr marL="2540" indent="0" algn="l">
               <a:lnSpc>
                 <a:spcPct val="110000"/>
@@ -4547,10 +6145,12 @@
                 <a:spcPts val="0"/>
               </a:spcAft>
               <a:buNone/>
-              <a:defRPr/>
             </a:pPr>
             <a:r>
               <a:rPr sz="5000" u="none" cap="none">
+                <a:ln>
+                  <a:noFill/>
+                </a:ln>
                 <a:solidFill>
                   <a:prstClr val="black"/>
                 </a:solidFill>
@@ -4560,39 +6160,37 @@
               </a:rPr>
               <a:t>YAMNet</a:t>
             </a:r>
-            <a:endParaRPr sz="5000" u="none" cap="none">
-              <a:solidFill>
-                <a:prstClr val="black"/>
-              </a:solidFill>
-              <a:latin typeface="Helvetica Neue"/>
-              <a:ea typeface="Helvetica Neue"/>
-              <a:cs typeface="Helvetica Neue"/>
-            </a:endParaRPr>
           </a:p>
         </p:txBody>
       </p:sp>
       <p:sp>
         <p:nvSpPr>
-          <p:cNvPr id="36" name="Content Placeholder 15"/>
+          <p:cNvPr id="36" name="Content Placeholder 15">
+            <a:extLst xmlns:a="http://schemas.openxmlformats.org/drawingml/2006/main">
+              <a:ext uri="{FF2B5EF4-FFF2-40B4-BE49-F238E27FC236}">
+                <a16:creationId xmlns:a16="http://schemas.microsoft.com/office/drawing/2014/main" id="{7DE51176-FC24-C3CB-45B8-8EA48AFAF9E1}"/>
+              </a:ext>
+            </a:extLst>
+          </p:cNvPr>
           <p:cNvSpPr>
-            <a:spLocks noGrp="1"/>
+            <a:spLocks xmlns:a="http://schemas.openxmlformats.org/drawingml/2006/main" noGrp="1"/>
           </p:cNvSpPr>
           <p:nvPr/>
         </p:nvSpPr>
         <p:spPr>
-          <a:xfrm>
+          <a:xfrm xmlns:a="http://schemas.openxmlformats.org/drawingml/2006/main">
             <a:off x="3649875" y="3740150"/>
             <a:ext cx="2066698" cy="615950"/>
           </a:xfrm>
-          <a:prstGeom prst="rect">
+          <a:prstGeom xmlns:a="http://schemas.openxmlformats.org/drawingml/2006/main" prst="rect">
             <a:avLst/>
           </a:prstGeom>
         </p:spPr>
         <p:txBody>
-          <a:bodyPr vert="horz" lIns="0" tIns="0" rIns="0" bIns="0">
+          <a:bodyPr xmlns:a="http://schemas.openxmlformats.org/drawingml/2006/main" vert="horz" lIns="0" tIns="0" rIns="0" bIns="0">
             <a:noAutofit/>
           </a:bodyPr>
-          <a:lstStyle>
+          <a:lstStyle xmlns:a="http://schemas.openxmlformats.org/drawingml/2006/main">
             <a:lvl1pPr marL="228600" indent="-228600" algn="l">
               <a:lnSpc>
                 <a:spcPct val="90000"/>
@@ -4747,7 +6345,7 @@
               </a:defRPr>
             </a:lvl9pPr>
           </a:lstStyle>
-          <a:p>
+          <a:p xmlns:a="http://schemas.openxmlformats.org/drawingml/2006/main">
             <a:pPr marL="0" indent="0">
               <a:lnSpc>
                 <a:spcPct val="114000"/>
@@ -4759,7 +6357,6 @@
                 <a:spcPts val="800"/>
               </a:spcAft>
               <a:buNone/>
-              <a:defRPr/>
             </a:pPr>
             <a:r>
               <a:rPr sz="1400">
@@ -4769,13 +6366,8 @@
               </a:rPr>
               <a:t>Pretrained AudioSet</a:t>
             </a:r>
-            <a:endParaRPr sz="1400">
-              <a:latin typeface="Helvetica Neue"/>
-              <a:ea typeface="Helvetica Neue"/>
-              <a:cs typeface="Helvetica Neue"/>
-            </a:endParaRPr>
-          </a:p>
-          <a:p>
+          </a:p>
+          <a:p xmlns:a="http://schemas.openxmlformats.org/drawingml/2006/main">
             <a:pPr marL="0" indent="0">
               <a:lnSpc>
                 <a:spcPct val="114000"/>
@@ -4787,7 +6379,6 @@
                 <a:spcPts val="800"/>
               </a:spcAft>
               <a:buNone/>
-              <a:defRPr/>
             </a:pPr>
             <a:r>
               <a:rPr sz="1400">
@@ -4797,89 +6388,94 @@
               </a:rPr>
               <a:t>network</a:t>
             </a:r>
-            <a:endParaRPr sz="1400">
-              <a:latin typeface="Helvetica Neue"/>
-              <a:ea typeface="Helvetica Neue"/>
-              <a:cs typeface="Helvetica Neue"/>
-            </a:endParaRPr>
           </a:p>
         </p:txBody>
       </p:sp>
       <p:sp>
         <p:nvSpPr>
-          <p:cNvPr id="37" name="Rounded Rectangle 36"/>
+          <p:cNvPr id="37" name="Rounded Rectangle 36">
+            <a:extLst xmlns:a="http://schemas.openxmlformats.org/drawingml/2006/main">
+              <a:ext uri="{FF2B5EF4-FFF2-40B4-BE49-F238E27FC236}">
+                <a16:creationId xmlns:a16="http://schemas.microsoft.com/office/drawing/2014/main" id="{B5992B1D-5E0E-664C-375F-216AFC12EAE8}"/>
+              </a:ext>
+            </a:extLst>
+          </p:cNvPr>
           <p:cNvSpPr>
-            <a:spLocks noGrp="1"/>
+            <a:spLocks xmlns:a="http://schemas.openxmlformats.org/drawingml/2006/main" noGrp="1"/>
           </p:cNvSpPr>
           <p:nvPr/>
         </p:nvSpPr>
         <p:spPr>
-          <a:xfrm>
+          <a:xfrm xmlns:a="http://schemas.openxmlformats.org/drawingml/2006/main">
             <a:off x="6271986" y="2032000"/>
             <a:ext cx="2581975" cy="2656541"/>
           </a:xfrm>
-          <a:prstGeom prst="roundRect">
+          <a:prstGeom xmlns:a="http://schemas.openxmlformats.org/drawingml/2006/main" prst="roundRect">
             <a:avLst>
               <a:gd name="adj" fmla="val 0"/>
             </a:avLst>
           </a:prstGeom>
-          <a:solidFill>
+          <a:solidFill xmlns:a="http://schemas.openxmlformats.org/drawingml/2006/main">
             <a:schemeClr val="bg2"/>
           </a:solidFill>
-          <a:ln>
+          <a:ln xmlns:a="http://schemas.openxmlformats.org/drawingml/2006/main">
             <a:noFill/>
           </a:ln>
         </p:spPr>
         <p:style>
-          <a:lnRef idx="2">
+          <a:lnRef xmlns:a="http://schemas.openxmlformats.org/drawingml/2006/main" idx="2">
             <a:schemeClr val="accent1">
               <a:shade val="15000"/>
             </a:schemeClr>
           </a:lnRef>
-          <a:fillRef idx="1">
+          <a:fillRef xmlns:a="http://schemas.openxmlformats.org/drawingml/2006/main" idx="1">
             <a:schemeClr val="accent1"/>
           </a:fillRef>
-          <a:effectRef idx="0">
+          <a:effectRef xmlns:a="http://schemas.openxmlformats.org/drawingml/2006/main" idx="0">
             <a:schemeClr val="accent1"/>
           </a:effectRef>
-          <a:fontRef idx="minor">
+          <a:fontRef xmlns:a="http://schemas.openxmlformats.org/drawingml/2006/main" idx="minor">
             <a:schemeClr val="lt1"/>
           </a:fontRef>
         </p:style>
         <p:txBody>
-          <a:bodyPr anchor="ctr"/>
-          <a:lstStyle/>
-          <a:p>
+          <a:bodyPr xmlns:a="http://schemas.openxmlformats.org/drawingml/2006/main" anchor="ctr"/>
+          <a:lstStyle xmlns:a="http://schemas.openxmlformats.org/drawingml/2006/main"/>
+          <a:p xmlns:a="http://schemas.openxmlformats.org/drawingml/2006/main">
             <a:pPr algn="ctr">
               <a:buNone/>
-              <a:defRPr/>
-            </a:pPr>
-            <a:endParaRPr lang="ko-KR" altLang="en-US"/>
+            </a:pPr>
           </a:p>
         </p:txBody>
       </p:sp>
       <p:sp>
         <p:nvSpPr>
-          <p:cNvPr id="38" name="Content Placeholder 9"/>
+          <p:cNvPr id="38" name="Content Placeholder 9">
+            <a:extLst xmlns:a="http://schemas.openxmlformats.org/drawingml/2006/main">
+              <a:ext uri="{FF2B5EF4-FFF2-40B4-BE49-F238E27FC236}">
+                <a16:creationId xmlns:a16="http://schemas.microsoft.com/office/drawing/2014/main" id="{54A023A6-B45F-0FFE-0391-DBB435439A7B}"/>
+              </a:ext>
+            </a:extLst>
+          </p:cNvPr>
           <p:cNvSpPr>
-            <a:spLocks noGrp="1"/>
+            <a:spLocks xmlns:a="http://schemas.openxmlformats.org/drawingml/2006/main" noGrp="1"/>
           </p:cNvSpPr>
           <p:nvPr/>
         </p:nvSpPr>
         <p:spPr>
-          <a:xfrm>
+          <a:xfrm xmlns:a="http://schemas.openxmlformats.org/drawingml/2006/main">
             <a:off x="6509338" y="2251890"/>
             <a:ext cx="2133315" cy="903750"/>
           </a:xfrm>
-          <a:prstGeom prst="rect">
+          <a:prstGeom xmlns:a="http://schemas.openxmlformats.org/drawingml/2006/main" prst="rect">
             <a:avLst/>
           </a:prstGeom>
         </p:spPr>
         <p:txBody>
-          <a:bodyPr vert="horz" lIns="0" tIns="0" rIns="0" bIns="0" anchor="b">
-            <a:normAutofit/>
+          <a:bodyPr xmlns:a="http://schemas.openxmlformats.org/drawingml/2006/main" vert="horz" lIns="0" tIns="0" rIns="0" bIns="0" anchor="b">
+            <a:normAutofit fontScale="100000"/>
           </a:bodyPr>
-          <a:lstStyle>
+          <a:lstStyle xmlns:a="http://schemas.openxmlformats.org/drawingml/2006/main">
             <a:lvl1pPr marL="228600" indent="-228600" algn="l">
               <a:lnSpc>
                 <a:spcPct val="90000"/>
@@ -5034,7 +6630,7 @@
               </a:defRPr>
             </a:lvl9pPr>
           </a:lstStyle>
-          <a:p>
+          <a:p xmlns:a="http://schemas.openxmlformats.org/drawingml/2006/main">
             <a:pPr marL="2540" indent="0" algn="l">
               <a:lnSpc>
                 <a:spcPct val="110000"/>
@@ -5046,10 +6642,12 @@
                 <a:spcPts val="0"/>
               </a:spcAft>
               <a:buNone/>
-              <a:defRPr/>
             </a:pPr>
             <a:r>
               <a:rPr sz="5000" u="none" cap="none">
+                <a:ln>
+                  <a:noFill/>
+                </a:ln>
                 <a:solidFill>
                   <a:prstClr val="black"/>
                 </a:solidFill>
@@ -5059,39 +6657,37 @@
               </a:rPr>
               <a:t>521</a:t>
             </a:r>
-            <a:endParaRPr sz="5000" u="none" cap="none">
-              <a:solidFill>
-                <a:prstClr val="black"/>
-              </a:solidFill>
-              <a:latin typeface="Helvetica Neue"/>
-              <a:ea typeface="Helvetica Neue"/>
-              <a:cs typeface="Helvetica Neue"/>
-            </a:endParaRPr>
           </a:p>
         </p:txBody>
       </p:sp>
       <p:sp>
         <p:nvSpPr>
-          <p:cNvPr id="39" name="Content Placeholder 15"/>
+          <p:cNvPr id="39" name="Content Placeholder 15">
+            <a:extLst xmlns:a="http://schemas.openxmlformats.org/drawingml/2006/main">
+              <a:ext uri="{FF2B5EF4-FFF2-40B4-BE49-F238E27FC236}">
+                <a16:creationId xmlns:a16="http://schemas.microsoft.com/office/drawing/2014/main" id="{5E890D67-9D53-7808-5E55-E05F92307EAC}"/>
+              </a:ext>
+            </a:extLst>
+          </p:cNvPr>
           <p:cNvSpPr>
-            <a:spLocks noGrp="1"/>
+            <a:spLocks xmlns:a="http://schemas.openxmlformats.org/drawingml/2006/main" noGrp="1"/>
           </p:cNvSpPr>
           <p:nvPr/>
         </p:nvSpPr>
         <p:spPr>
-          <a:xfrm>
+          <a:xfrm xmlns:a="http://schemas.openxmlformats.org/drawingml/2006/main">
             <a:off x="6575956" y="3740150"/>
             <a:ext cx="2066698" cy="615950"/>
           </a:xfrm>
-          <a:prstGeom prst="rect">
+          <a:prstGeom xmlns:a="http://schemas.openxmlformats.org/drawingml/2006/main" prst="rect">
             <a:avLst/>
           </a:prstGeom>
         </p:spPr>
         <p:txBody>
-          <a:bodyPr vert="horz" lIns="0" tIns="0" rIns="0" bIns="0">
+          <a:bodyPr xmlns:a="http://schemas.openxmlformats.org/drawingml/2006/main" vert="horz" lIns="0" tIns="0" rIns="0" bIns="0">
             <a:noAutofit/>
           </a:bodyPr>
-          <a:lstStyle>
+          <a:lstStyle xmlns:a="http://schemas.openxmlformats.org/drawingml/2006/main">
             <a:lvl1pPr marL="228600" indent="-228600" algn="l">
               <a:lnSpc>
                 <a:spcPct val="90000"/>
@@ -5246,7 +6842,7 @@
               </a:defRPr>
             </a:lvl9pPr>
           </a:lstStyle>
-          <a:p>
+          <a:p xmlns:a="http://schemas.openxmlformats.org/drawingml/2006/main">
             <a:pPr marL="0" indent="0">
               <a:lnSpc>
                 <a:spcPct val="114000"/>
@@ -5258,7 +6854,6 @@
                 <a:spcPts val="800"/>
               </a:spcAft>
               <a:buNone/>
-              <a:defRPr/>
             </a:pPr>
             <a:r>
               <a:rPr sz="1400">
@@ -5268,13 +6863,8 @@
               </a:rPr>
               <a:t>Generic class</a:t>
             </a:r>
-            <a:endParaRPr sz="1400">
-              <a:latin typeface="Helvetica Neue"/>
-              <a:ea typeface="Helvetica Neue"/>
-              <a:cs typeface="Helvetica Neue"/>
-            </a:endParaRPr>
-          </a:p>
-          <a:p>
+          </a:p>
+          <a:p xmlns:a="http://schemas.openxmlformats.org/drawingml/2006/main">
             <a:pPr marL="0" indent="0">
               <a:lnSpc>
                 <a:spcPct val="114000"/>
@@ -5286,7 +6876,6 @@
                 <a:spcPts val="800"/>
               </a:spcAft>
               <a:buNone/>
-              <a:defRPr/>
             </a:pPr>
             <a:r>
               <a:rPr sz="1400">
@@ -5296,89 +6885,94 @@
               </a:rPr>
               <a:t>probabilities</a:t>
             </a:r>
-            <a:endParaRPr sz="1400">
-              <a:latin typeface="Helvetica Neue"/>
-              <a:ea typeface="Helvetica Neue"/>
-              <a:cs typeface="Helvetica Neue"/>
-            </a:endParaRPr>
           </a:p>
         </p:txBody>
       </p:sp>
       <p:sp>
         <p:nvSpPr>
-          <p:cNvPr id="40" name="Rounded Rectangle 39"/>
+          <p:cNvPr id="40" name="Rounded Rectangle 39">
+            <a:extLst xmlns:a="http://schemas.openxmlformats.org/drawingml/2006/main">
+              <a:ext uri="{FF2B5EF4-FFF2-40B4-BE49-F238E27FC236}">
+                <a16:creationId xmlns:a16="http://schemas.microsoft.com/office/drawing/2014/main" id="{DEE6595D-2709-1F7C-8B9A-47164A9A4EB2}"/>
+              </a:ext>
+            </a:extLst>
+          </p:cNvPr>
           <p:cNvSpPr>
-            <a:spLocks noGrp="1"/>
+            <a:spLocks xmlns:a="http://schemas.openxmlformats.org/drawingml/2006/main" noGrp="1"/>
           </p:cNvSpPr>
           <p:nvPr/>
         </p:nvSpPr>
         <p:spPr>
-          <a:xfrm>
+          <a:xfrm xmlns:a="http://schemas.openxmlformats.org/drawingml/2006/main">
             <a:off x="9224191" y="2032000"/>
             <a:ext cx="2581975" cy="2656541"/>
           </a:xfrm>
-          <a:prstGeom prst="roundRect">
+          <a:prstGeom xmlns:a="http://schemas.openxmlformats.org/drawingml/2006/main" prst="roundRect">
             <a:avLst>
               <a:gd name="adj" fmla="val 0"/>
             </a:avLst>
           </a:prstGeom>
-          <a:solidFill>
+          <a:solidFill xmlns:a="http://schemas.openxmlformats.org/drawingml/2006/main">
             <a:schemeClr val="bg2"/>
           </a:solidFill>
-          <a:ln>
+          <a:ln xmlns:a="http://schemas.openxmlformats.org/drawingml/2006/main">
             <a:noFill/>
           </a:ln>
         </p:spPr>
         <p:style>
-          <a:lnRef idx="2">
+          <a:lnRef xmlns:a="http://schemas.openxmlformats.org/drawingml/2006/main" idx="2">
             <a:schemeClr val="accent1">
               <a:shade val="15000"/>
             </a:schemeClr>
           </a:lnRef>
-          <a:fillRef idx="1">
+          <a:fillRef xmlns:a="http://schemas.openxmlformats.org/drawingml/2006/main" idx="1">
             <a:schemeClr val="accent1"/>
           </a:fillRef>
-          <a:effectRef idx="0">
+          <a:effectRef xmlns:a="http://schemas.openxmlformats.org/drawingml/2006/main" idx="0">
             <a:schemeClr val="accent1"/>
           </a:effectRef>
-          <a:fontRef idx="minor">
+          <a:fontRef xmlns:a="http://schemas.openxmlformats.org/drawingml/2006/main" idx="minor">
             <a:schemeClr val="lt1"/>
           </a:fontRef>
         </p:style>
         <p:txBody>
-          <a:bodyPr anchor="ctr"/>
-          <a:lstStyle/>
-          <a:p>
+          <a:bodyPr xmlns:a="http://schemas.openxmlformats.org/drawingml/2006/main" anchor="ctr"/>
+          <a:lstStyle xmlns:a="http://schemas.openxmlformats.org/drawingml/2006/main"/>
+          <a:p xmlns:a="http://schemas.openxmlformats.org/drawingml/2006/main">
             <a:pPr algn="ctr">
               <a:buNone/>
-              <a:defRPr/>
-            </a:pPr>
-            <a:endParaRPr lang="ko-KR" altLang="en-US"/>
+            </a:pPr>
           </a:p>
         </p:txBody>
       </p:sp>
       <p:sp>
         <p:nvSpPr>
-          <p:cNvPr id="41" name="Content Placeholder 9"/>
+          <p:cNvPr id="41" name="Content Placeholder 9">
+            <a:extLst xmlns:a="http://schemas.openxmlformats.org/drawingml/2006/main">
+              <a:ext uri="{FF2B5EF4-FFF2-40B4-BE49-F238E27FC236}">
+                <a16:creationId xmlns:a16="http://schemas.microsoft.com/office/drawing/2014/main" id="{0DD8DA38-D646-1FA9-28D4-71AFE0F87ED8}"/>
+              </a:ext>
+            </a:extLst>
+          </p:cNvPr>
           <p:cNvSpPr>
-            <a:spLocks noGrp="1"/>
+            <a:spLocks xmlns:a="http://schemas.openxmlformats.org/drawingml/2006/main" noGrp="1"/>
           </p:cNvSpPr>
           <p:nvPr/>
         </p:nvSpPr>
         <p:spPr>
-          <a:xfrm>
+          <a:xfrm xmlns:a="http://schemas.openxmlformats.org/drawingml/2006/main">
             <a:off x="9461543" y="2251890"/>
             <a:ext cx="2133315" cy="903750"/>
           </a:xfrm>
-          <a:prstGeom prst="rect">
+          <a:prstGeom xmlns:a="http://schemas.openxmlformats.org/drawingml/2006/main" prst="rect">
             <a:avLst/>
           </a:prstGeom>
         </p:spPr>
         <p:txBody>
-          <a:bodyPr vert="horz" lIns="0" tIns="0" rIns="0" bIns="0" anchor="b">
-            <a:normAutofit/>
+          <a:bodyPr xmlns:a="http://schemas.openxmlformats.org/drawingml/2006/main" vert="horz" lIns="0" tIns="0" rIns="0" bIns="0" anchor="b">
+            <a:normAutofit fontScale="100000"/>
           </a:bodyPr>
-          <a:lstStyle>
+          <a:lstStyle xmlns:a="http://schemas.openxmlformats.org/drawingml/2006/main">
             <a:lvl1pPr marL="228600" indent="-228600" algn="l">
               <a:lnSpc>
                 <a:spcPct val="90000"/>
@@ -5533,7 +7127,7 @@
               </a:defRPr>
             </a:lvl9pPr>
           </a:lstStyle>
-          <a:p>
+          <a:p xmlns:a="http://schemas.openxmlformats.org/drawingml/2006/main">
             <a:pPr marL="2540" indent="0" algn="l">
               <a:lnSpc>
                 <a:spcPct val="110000"/>
@@ -5545,10 +7139,12 @@
                 <a:spcPts val="0"/>
               </a:spcAft>
               <a:buNone/>
-              <a:defRPr/>
             </a:pPr>
             <a:r>
               <a:rPr sz="5000" u="none" cap="none">
+                <a:ln>
+                  <a:noFill/>
+                </a:ln>
                 <a:solidFill>
                   <a:prstClr val="black"/>
                 </a:solidFill>
@@ -5558,39 +7154,37 @@
               </a:rPr>
               <a:t>Rules</a:t>
             </a:r>
-            <a:endParaRPr sz="5000" u="none" cap="none">
-              <a:solidFill>
-                <a:prstClr val="black"/>
-              </a:solidFill>
-              <a:latin typeface="Helvetica Neue"/>
-              <a:ea typeface="Helvetica Neue"/>
-              <a:cs typeface="Helvetica Neue"/>
-            </a:endParaRPr>
           </a:p>
         </p:txBody>
       </p:sp>
       <p:sp>
         <p:nvSpPr>
-          <p:cNvPr id="42" name="Content Placeholder 15"/>
+          <p:cNvPr id="42" name="Content Placeholder 15">
+            <a:extLst xmlns:a="http://schemas.openxmlformats.org/drawingml/2006/main">
+              <a:ext uri="{FF2B5EF4-FFF2-40B4-BE49-F238E27FC236}">
+                <a16:creationId xmlns:a16="http://schemas.microsoft.com/office/drawing/2014/main" id="{5D7CE5C2-7A4C-5B39-AEB6-25510E71F253}"/>
+              </a:ext>
+            </a:extLst>
+          </p:cNvPr>
           <p:cNvSpPr>
-            <a:spLocks noGrp="1"/>
+            <a:spLocks xmlns:a="http://schemas.openxmlformats.org/drawingml/2006/main" noGrp="1"/>
           </p:cNvSpPr>
           <p:nvPr/>
         </p:nvSpPr>
         <p:spPr>
-          <a:xfrm>
+          <a:xfrm xmlns:a="http://schemas.openxmlformats.org/drawingml/2006/main">
             <a:off x="9528161" y="3740150"/>
             <a:ext cx="2066698" cy="615950"/>
           </a:xfrm>
-          <a:prstGeom prst="rect">
+          <a:prstGeom xmlns:a="http://schemas.openxmlformats.org/drawingml/2006/main" prst="rect">
             <a:avLst/>
           </a:prstGeom>
         </p:spPr>
         <p:txBody>
-          <a:bodyPr vert="horz" lIns="0" tIns="0" rIns="0" bIns="0">
+          <a:bodyPr xmlns:a="http://schemas.openxmlformats.org/drawingml/2006/main" vert="horz" lIns="0" tIns="0" rIns="0" bIns="0">
             <a:noAutofit/>
           </a:bodyPr>
-          <a:lstStyle>
+          <a:lstStyle xmlns:a="http://schemas.openxmlformats.org/drawingml/2006/main">
             <a:lvl1pPr marL="228600" indent="-228600" algn="l">
               <a:lnSpc>
                 <a:spcPct val="90000"/>
@@ -5745,7 +7339,7 @@
               </a:defRPr>
             </a:lvl9pPr>
           </a:lstStyle>
-          <a:p>
+          <a:p xmlns:a="http://schemas.openxmlformats.org/drawingml/2006/main">
             <a:pPr marL="0" indent="0">
               <a:lnSpc>
                 <a:spcPct val="114000"/>
@@ -5757,7 +7351,6 @@
                 <a:spcPts val="800"/>
               </a:spcAft>
               <a:buNone/>
-              <a:defRPr/>
             </a:pPr>
             <a:r>
               <a:rPr sz="1400">
@@ -5767,13 +7360,8 @@
               </a:rPr>
               <a:t>Map scores to</a:t>
             </a:r>
-            <a:endParaRPr sz="1400">
-              <a:latin typeface="Helvetica Neue"/>
-              <a:ea typeface="Helvetica Neue"/>
-              <a:cs typeface="Helvetica Neue"/>
-            </a:endParaRPr>
-          </a:p>
-          <a:p>
+          </a:p>
+          <a:p xmlns:a="http://schemas.openxmlformats.org/drawingml/2006/main">
             <a:pPr marL="0" indent="0">
               <a:lnSpc>
                 <a:spcPct val="114000"/>
@@ -5785,7 +7373,6 @@
                 <a:spcPts val="800"/>
               </a:spcAft>
               <a:buNone/>
-              <a:defRPr/>
             </a:pPr>
             <a:r>
               <a:rPr sz="1400">
@@ -5795,36 +7382,37 @@
               </a:rPr>
               <a:t>3 target classes</a:t>
             </a:r>
-            <a:endParaRPr sz="1400">
-              <a:latin typeface="Helvetica Neue"/>
-              <a:ea typeface="Helvetica Neue"/>
-              <a:cs typeface="Helvetica Neue"/>
-            </a:endParaRPr>
           </a:p>
         </p:txBody>
       </p:sp>
       <p:sp>
         <p:nvSpPr>
-          <p:cNvPr id="43" name="Content Placeholder 2"/>
+          <p:cNvPr id="43" name="Content Placeholder 2">
+            <a:extLst xmlns:a="http://schemas.openxmlformats.org/drawingml/2006/main">
+              <a:ext uri="{FF2B5EF4-FFF2-40B4-BE49-F238E27FC236}">
+                <a16:creationId xmlns:a16="http://schemas.microsoft.com/office/drawing/2014/main" id="{21B19CD8-2634-6048-888D-54374B2A6E19}"/>
+              </a:ext>
+            </a:extLst>
+          </p:cNvPr>
           <p:cNvSpPr>
-            <a:spLocks noGrp="1"/>
+            <a:spLocks xmlns:a="http://schemas.openxmlformats.org/drawingml/2006/main" noGrp="1"/>
           </p:cNvSpPr>
           <p:nvPr/>
         </p:nvSpPr>
         <p:spPr>
-          <a:xfrm>
+          <a:xfrm xmlns:a="http://schemas.openxmlformats.org/drawingml/2006/main">
             <a:off x="6261100" y="400899"/>
             <a:ext cx="5539873" cy="990600"/>
           </a:xfrm>
-          <a:prstGeom prst="rect">
+          <a:prstGeom xmlns:a="http://schemas.openxmlformats.org/drawingml/2006/main" prst="rect">
             <a:avLst/>
           </a:prstGeom>
         </p:spPr>
         <p:txBody>
-          <a:bodyPr lIns="0" tIns="0" rIns="0" bIns="0">
+          <a:bodyPr xmlns:a="http://schemas.openxmlformats.org/drawingml/2006/main" lIns="0" tIns="0" rIns="0" bIns="0">
             <a:noAutofit/>
           </a:bodyPr>
-          <a:lstStyle>
+          <a:lstStyle xmlns:a="http://schemas.openxmlformats.org/drawingml/2006/main">
             <a:lvl1pPr marL="228600" indent="-228600" algn="l">
               <a:lnSpc>
                 <a:spcPct val="90000"/>
@@ -5979,7 +7567,7 @@
               </a:defRPr>
             </a:lvl9pPr>
           </a:lstStyle>
-          <a:p>
+          <a:p xmlns:a="http://schemas.openxmlformats.org/drawingml/2006/main">
             <a:pPr marL="0" indent="0">
               <a:lnSpc>
                 <a:spcPct val="114000"/>
@@ -5991,7 +7579,6 @@
                 <a:spcPts val="800"/>
               </a:spcAft>
               <a:buNone/>
-              <a:defRPr/>
             </a:pPr>
             <a:r>
               <a:rPr sz="1600">
@@ -5999,29 +7586,40 @@
                 <a:ea typeface="Helvetica Neue"/>
                 <a:cs typeface="Helvetica Neue"/>
               </a:rPr>
-              <a:t>Exploratory post-hoc test ablation: Macro F1 0.756; glass recall 20/29; scream recall 19/38. Not used for model selection.</a:t>
-            </a:r>
-            <a:endParaRPr sz="1600">
-              <a:latin typeface="Helvetica Neue"/>
-              <a:ea typeface="Helvetica Neue"/>
-              <a:cs typeface="Helvetica Neue"/>
-            </a:endParaRPr>
+              <a:t>CONTROL COMPARISON</a:t>
+            </a:r>
+          </a:p>
+          <a:p xmlns:a="http://schemas.openxmlformats.org/drawingml/2006/main">
+            <a:pPr marL="0" indent="0">
+              <a:lnSpc>
+                <a:spcPct val="114000"/>
+              </a:lnSpc>
+              <a:spcBef>
+                <a:spcPts val="0"/>
+              </a:spcBef>
+              <a:spcAft>
+                <a:spcPts val="800"/>
+              </a:spcAft>
+              <a:buNone/>
+            </a:pPr>
+            <a:r>
+              <a:rPr sz="1600">
+                <a:latin typeface="Helvetica Neue"/>
+                <a:ea typeface="Helvetica Neue"/>
+                <a:cs typeface="Helvetica Neue"/>
+              </a:rPr>
+              <a:t>Remove our custom head and use only generic YAMNet scores plus fixed rules. Macro F1: 0.756; scream recall: 50.0%. Used only to understand YAMNet-only limitations—not to choose the model or thresholds.</a:t>
+            </a:r>
           </a:p>
         </p:txBody>
       </p:sp>
     </p:spTree>
+    <p:extLst>
+      <p:ext uri="{BB962C8B-B14F-4D97-AF65-F5344CB8AC3E}">
+        <p14:creationId xmlns:p14="http://schemas.microsoft.com/office/powerpoint/2010/main" val="4134999073"/>
+      </p:ext>
+    </p:extLst>
   </p:cSld>
-  <p:clrMapOvr>
-    <a:masterClrMapping/>
-  </p:clrMapOvr>
-  <mc:AlternateContent xmlns:mc="http://schemas.openxmlformats.org/markup-compatibility/2006">
-    <mc:Choice xmlns:p14="http://schemas.microsoft.com/office/powerpoint/2010/main" Requires="p14">
-      <p:transition xmlns:mc="http://schemas.openxmlformats.org/markup-compatibility/2006" xmlns:p14="http://schemas.microsoft.com/office/powerpoint/2010/main" mc:Ignorable="p14" p14:dur="500"/>
-    </mc:Choice>
-    <mc:Fallback>
-      <p:transition/>
-    </mc:Fallback>
-  </mc:AlternateContent>
 </p:sld>
 </file>
 
@@ -6526,7 +8124,7 @@
                 <a:ea typeface="Helvetica Neue Medium"/>
                 <a:cs typeface="Helvetica Neue Medium"/>
               </a:rPr>
-              <a:t>OFFICIAL POLICY</a:t>
+              <a:t>FINAL FUSION</a:t>
             </a:r>
           </a:p>
           <a:p xmlns:a="http://schemas.openxmlformats.org/drawingml/2006/main">
@@ -6554,7 +8152,7 @@
                 <a:ea typeface="Helvetica Neue"/>
                 <a:cs typeface="Helvetica Neue"/>
               </a:rPr>
-              <a:t>Validation-selected classifier thresholds convert frame probabilities into one audio-level label.</a:t>
+              <a:t>Sustained path: glass .95/2 frames; scream .55/3.</a:t>
             </a:r>
           </a:p>
           <a:p xmlns:a="http://schemas.openxmlformats.org/drawingml/2006/main">
@@ -6582,7 +8180,7 @@
                 <a:ea typeface="Helvetica Neue"/>
                 <a:cs typeface="Helvetica Neue"/>
               </a:rPr>
-              <a:t>• glass: 0.95 / 1 frame</a:t>
+              <a:t>Aligned path: glass .40 + YAMNet .10/1; scream .85 + YAMNet .02/1.</a:t>
             </a:r>
           </a:p>
           <a:p xmlns:a="http://schemas.openxmlformats.org/drawingml/2006/main">
@@ -6610,7 +8208,7 @@
                 <a:ea typeface="Helvetica Neue"/>
                 <a:cs typeface="Helvetica Neue"/>
               </a:rPr>
-              <a:t>• scream: 0.40 / 3 frames</a:t>
+              <a:t>• embeddings + scores</a:t>
             </a:r>
           </a:p>
           <a:p xmlns:a="http://schemas.openxmlformats.org/drawingml/2006/main">
@@ -6638,7 +8236,7 @@
                 <a:ea typeface="Helvetica Neue"/>
                 <a:cs typeface="Helvetica Neue"/>
               </a:rPr>
-              <a:t>• no YAMNet fusion</a:t>
+              <a:t>• frame-aligned corroboration</a:t>
             </a:r>
           </a:p>
         </p:txBody>
@@ -6671,7 +8269,7 @@
           <a:lstStyle xmlns:a="http://schemas.openxmlformats.org/drawingml/2006/main"/>
           <a:p xmlns:a="http://schemas.openxmlformats.org/drawingml/2006/main">
             <a:r>
-              <a:t>Retained model: YAMNet embeddings + custom head</a:t>
+              <a:t>Final model: custom head + YAMNet fusion</a:t>
             </a:r>
           </a:p>
         </p:txBody>
@@ -6687,7 +8285,7 @@
 </file>
 
 <file path=ppt/slides/slide5.xml><?xml version="1.0" encoding="utf-8"?>
-<p:sld xmlns:r="http://schemas.openxmlformats.org/officeDocument/2006/relationships" xmlns:c="http://schemas.openxmlformats.org/drawingml/2006/chart" xmlns:a="http://schemas.openxmlformats.org/drawingml/2006/main" xmlns:dgm="http://schemas.openxmlformats.org/drawingml/2006/diagram" xmlns:dsp="http://schemas.microsoft.com/office/drawing/2008/diagram" xmlns:p="http://schemas.openxmlformats.org/presentationml/2006/main">
+<p:sld xmlns:p="http://schemas.openxmlformats.org/presentationml/2006/main">
   <p:cSld>
     <p:spTree>
       <p:nvGrpSpPr>
@@ -6696,33 +8294,34 @@
         <p:nvPr/>
       </p:nvGrpSpPr>
       <p:grpSpPr>
-        <a:xfrm>
-          <a:off x="0" y="0"/>
-          <a:ext cx="0" cy="0"/>
-          <a:chOff x="0" y="0"/>
-          <a:chExt cx="0" cy="0"/>
-        </a:xfrm>
+        <a:xfrm xmlns:a="http://schemas.openxmlformats.org/drawingml/2006/main"/>
       </p:grpSpPr>
       <p:sp>
         <p:nvSpPr>
-          <p:cNvPr id="10" name="Content Placeholder 9"/>
+          <p:cNvPr id="10" name="Content Placeholder 9">
+            <a:extLst xmlns:a="http://schemas.openxmlformats.org/drawingml/2006/main">
+              <a:ext uri="{FF2B5EF4-FFF2-40B4-BE49-F238E27FC236}">
+                <a16:creationId xmlns:a16="http://schemas.microsoft.com/office/drawing/2014/main" id="{31C01230-0AB7-5FBA-6CB0-F4C1122A5881}"/>
+              </a:ext>
+            </a:extLst>
+          </p:cNvPr>
           <p:cNvSpPr>
-            <a:spLocks noGrp="1"/>
+            <a:spLocks xmlns:a="http://schemas.openxmlformats.org/drawingml/2006/main" noGrp="1"/>
           </p:cNvSpPr>
           <p:nvPr>
             <p:ph idx="1"/>
           </p:nvPr>
         </p:nvSpPr>
         <p:spPr>
-          <a:xfrm>
+          <a:xfrm xmlns:a="http://schemas.openxmlformats.org/drawingml/2006/main">
             <a:off x="393700" y="2032000"/>
             <a:ext cx="3568700" cy="1981200"/>
           </a:xfrm>
         </p:spPr>
         <p:txBody>
-          <a:bodyPr/>
-          <a:lstStyle/>
-          <a:p>
+          <a:bodyPr xmlns:a="http://schemas.openxmlformats.org/drawingml/2006/main"/>
+          <a:lstStyle xmlns:a="http://schemas.openxmlformats.org/drawingml/2006/main"/>
+          <a:p xmlns:a="http://schemas.openxmlformats.org/drawingml/2006/main">
             <a:pPr marL="0" indent="0" algn="l">
               <a:lnSpc>
                 <a:spcPct val="110000"/>
@@ -6734,10 +8333,12 @@
                 <a:spcPts val="0"/>
               </a:spcAft>
               <a:buNone/>
-              <a:defRPr/>
             </a:pPr>
             <a:r>
               <a:rPr sz="2400" b="0" i="0" u="none" cap="none">
+                <a:ln>
+                  <a:noFill/>
+                </a:ln>
                 <a:solidFill>
                   <a:prstClr val="black"/>
                 </a:solidFill>
@@ -6747,16 +8348,8 @@
               </a:rPr>
               <a:t>DATA QUALITY</a:t>
             </a:r>
-            <a:endParaRPr sz="2400" b="0" i="0" u="none" cap="none">
-              <a:solidFill>
-                <a:prstClr val="black"/>
-              </a:solidFill>
-              <a:latin typeface="Helvetica Neue"/>
-              <a:ea typeface="Helvetica Neue"/>
-              <a:cs typeface="Helvetica Neue"/>
-            </a:endParaRPr>
-          </a:p>
-          <a:p>
+          </a:p>
+          <a:p xmlns:a="http://schemas.openxmlformats.org/drawingml/2006/main">
             <a:pPr marL="0" indent="0" algn="l">
               <a:lnSpc>
                 <a:spcPct val="100000"/>
@@ -6768,10 +8361,12 @@
                 <a:spcPts val="1300"/>
               </a:spcAft>
               <a:buNone/>
-              <a:defRPr/>
             </a:pPr>
             <a:r>
               <a:rPr sz="1800" b="0" i="0" u="none" cap="none">
+                <a:ln>
+                  <a:noFill/>
+                </a:ln>
                 <a:solidFill>
                   <a:prstClr val="black"/>
                 </a:solidFill>
@@ -6781,22 +8376,20 @@
               </a:rPr>
               <a:t>We excluded 158 broad “smash / breaking / crushing” glass clips and kept only verified glass or shatter events.</a:t>
             </a:r>
-            <a:endParaRPr sz="1800" b="0" i="0" u="none" cap="none">
-              <a:solidFill>
-                <a:prstClr val="black"/>
-              </a:solidFill>
-              <a:latin typeface="Helvetica Neue"/>
-              <a:ea typeface="Helvetica Neue"/>
-              <a:cs typeface="Helvetica Neue"/>
-            </a:endParaRPr>
           </a:p>
         </p:txBody>
       </p:sp>
       <p:sp>
         <p:nvSpPr>
-          <p:cNvPr id="2" name="Slide Number Placeholder 1"/>
+          <p:cNvPr id="2" name="Slide Number Placeholder 1">
+            <a:extLst xmlns:a="http://schemas.openxmlformats.org/drawingml/2006/main">
+              <a:ext uri="{FF2B5EF4-FFF2-40B4-BE49-F238E27FC236}">
+                <a16:creationId xmlns:a16="http://schemas.microsoft.com/office/drawing/2014/main" id="{5346F6B8-73F6-AB72-2971-C8B37B27DCFE}"/>
+              </a:ext>
+            </a:extLst>
+          </p:cNvPr>
           <p:cNvSpPr>
-            <a:spLocks noGrp="1"/>
+            <a:spLocks xmlns:a="http://schemas.openxmlformats.org/drawingml/2006/main" noGrp="1"/>
           </p:cNvSpPr>
           <p:nvPr>
             <p:ph type="sldNum" idx="4"/>
@@ -6804,43 +8397,41 @@
         </p:nvSpPr>
         <p:spPr/>
         <p:txBody>
-          <a:bodyPr/>
-          <a:lstStyle/>
-          <a:p>
-            <a:pPr>
-              <a:defRPr/>
-            </a:pPr>
+          <a:bodyPr xmlns:a="http://schemas.openxmlformats.org/drawingml/2006/main"/>
+          <a:lstStyle xmlns:a="http://schemas.openxmlformats.org/drawingml/2006/main"/>
+          <a:p xmlns:a="http://schemas.openxmlformats.org/drawingml/2006/main">
             <a:fld id="{EE5B3003-2C54-13C6-9832-7637201064DE}" type="slidenum">
-              <a:rPr lang="en-US" altLang="en-US"/>
-              <a:pPr>
-                <a:defRPr/>
-              </a:pPr>
               <a:t>5</a:t>
             </a:fld>
-            <a:endParaRPr lang="en-US" altLang="en-US"/>
           </a:p>
         </p:txBody>
       </p:sp>
       <p:sp>
         <p:nvSpPr>
-          <p:cNvPr id="11" name="Content Placeholder 10"/>
+          <p:cNvPr id="11" name="Content Placeholder 10">
+            <a:extLst xmlns:a="http://schemas.openxmlformats.org/drawingml/2006/main">
+              <a:ext uri="{FF2B5EF4-FFF2-40B4-BE49-F238E27FC236}">
+                <a16:creationId xmlns:a16="http://schemas.microsoft.com/office/drawing/2014/main" id="{36C44BD0-2306-5DD3-6221-887B2EAEA0CB}"/>
+              </a:ext>
+            </a:extLst>
+          </p:cNvPr>
           <p:cNvSpPr>
-            <a:spLocks noGrp="1"/>
+            <a:spLocks xmlns:a="http://schemas.openxmlformats.org/drawingml/2006/main" noGrp="1"/>
           </p:cNvSpPr>
           <p:nvPr>
             <p:ph idx="10"/>
           </p:nvPr>
         </p:nvSpPr>
         <p:spPr>
-          <a:xfrm>
+          <a:xfrm xmlns:a="http://schemas.openxmlformats.org/drawingml/2006/main">
             <a:off x="4318000" y="2032000"/>
             <a:ext cx="3568700" cy="1981200"/>
           </a:xfrm>
         </p:spPr>
         <p:txBody>
-          <a:bodyPr/>
-          <a:lstStyle/>
-          <a:p>
+          <a:bodyPr xmlns:a="http://schemas.openxmlformats.org/drawingml/2006/main"/>
+          <a:lstStyle xmlns:a="http://schemas.openxmlformats.org/drawingml/2006/main"/>
+          <a:p xmlns:a="http://schemas.openxmlformats.org/drawingml/2006/main">
             <a:pPr marL="0" indent="0" algn="l">
               <a:lnSpc>
                 <a:spcPct val="110000"/>
@@ -6852,10 +8443,12 @@
                 <a:spcPts val="0"/>
               </a:spcAft>
               <a:buNone/>
-              <a:defRPr/>
             </a:pPr>
             <a:r>
               <a:rPr sz="2400" b="0" i="0" u="none" cap="none">
+                <a:ln>
+                  <a:noFill/>
+                </a:ln>
                 <a:solidFill>
                   <a:prstClr val="black"/>
                 </a:solidFill>
@@ -6865,16 +8458,8 @@
               </a:rPr>
               <a:t>LEAKAGE CONTROL</a:t>
             </a:r>
-            <a:endParaRPr sz="2400" b="0" i="0" u="none" cap="none">
-              <a:solidFill>
-                <a:prstClr val="black"/>
-              </a:solidFill>
-              <a:latin typeface="Helvetica Neue"/>
-              <a:ea typeface="Helvetica Neue"/>
-              <a:cs typeface="Helvetica Neue"/>
-            </a:endParaRPr>
-          </a:p>
-          <a:p>
+          </a:p>
+          <a:p xmlns:a="http://schemas.openxmlformats.org/drawingml/2006/main">
             <a:pPr marL="0" indent="0" algn="l">
               <a:lnSpc>
                 <a:spcPct val="100000"/>
@@ -6886,10 +8471,12 @@
                 <a:spcPts val="1300"/>
               </a:spcAft>
               <a:buNone/>
-              <a:defRPr/>
             </a:pPr>
             <a:r>
               <a:rPr sz="1800" b="0" i="0" u="none" cap="none">
+                <a:ln>
+                  <a:noFill/>
+                </a:ln>
                 <a:solidFill>
                   <a:prstClr val="black"/>
                 </a:solidFill>
@@ -6899,37 +8486,35 @@
               </a:rPr>
               <a:t>Splits were made by original source. Duplicate files and shared YouTube IDs cannot cross train, validation, and test.</a:t>
             </a:r>
-            <a:endParaRPr sz="1800" b="0" i="0" u="none" cap="none">
-              <a:solidFill>
-                <a:prstClr val="black"/>
-              </a:solidFill>
-              <a:latin typeface="Helvetica Neue"/>
-              <a:ea typeface="Helvetica Neue"/>
-              <a:cs typeface="Helvetica Neue"/>
-            </a:endParaRPr>
           </a:p>
         </p:txBody>
       </p:sp>
       <p:sp>
         <p:nvSpPr>
-          <p:cNvPr id="12" name="Content Placeholder 11"/>
+          <p:cNvPr id="12" name="Content Placeholder 11">
+            <a:extLst xmlns:a="http://schemas.openxmlformats.org/drawingml/2006/main">
+              <a:ext uri="{FF2B5EF4-FFF2-40B4-BE49-F238E27FC236}">
+                <a16:creationId xmlns:a16="http://schemas.microsoft.com/office/drawing/2014/main" id="{DE8FF54C-F86E-60F9-B524-2931B90F4D94}"/>
+              </a:ext>
+            </a:extLst>
+          </p:cNvPr>
           <p:cNvSpPr>
-            <a:spLocks noGrp="1"/>
+            <a:spLocks xmlns:a="http://schemas.openxmlformats.org/drawingml/2006/main" noGrp="1"/>
           </p:cNvSpPr>
           <p:nvPr>
             <p:ph idx="11"/>
           </p:nvPr>
         </p:nvSpPr>
         <p:spPr>
-          <a:xfrm>
+          <a:xfrm xmlns:a="http://schemas.openxmlformats.org/drawingml/2006/main">
             <a:off x="8232273" y="2032000"/>
             <a:ext cx="3568700" cy="1981200"/>
           </a:xfrm>
         </p:spPr>
         <p:txBody>
-          <a:bodyPr/>
-          <a:lstStyle/>
-          <a:p>
+          <a:bodyPr xmlns:a="http://schemas.openxmlformats.org/drawingml/2006/main"/>
+          <a:lstStyle xmlns:a="http://schemas.openxmlformats.org/drawingml/2006/main"/>
+          <a:p xmlns:a="http://schemas.openxmlformats.org/drawingml/2006/main">
             <a:pPr marL="0" indent="0" algn="l">
               <a:lnSpc>
                 <a:spcPct val="110000"/>
@@ -6941,10 +8526,12 @@
                 <a:spcPts val="0"/>
               </a:spcAft>
               <a:buNone/>
-              <a:defRPr/>
             </a:pPr>
             <a:r>
               <a:rPr sz="2400" b="0" i="0" u="none" cap="none">
+                <a:ln>
+                  <a:noFill/>
+                </a:ln>
                 <a:solidFill>
                   <a:prstClr val="black"/>
                 </a:solidFill>
@@ -6954,16 +8541,8 @@
               </a:rPr>
               <a:t>SELECTION RULE</a:t>
             </a:r>
-            <a:endParaRPr sz="2400" b="0" i="0" u="none" cap="none">
-              <a:solidFill>
-                <a:prstClr val="black"/>
-              </a:solidFill>
-              <a:latin typeface="Helvetica Neue"/>
-              <a:ea typeface="Helvetica Neue"/>
-              <a:cs typeface="Helvetica Neue"/>
-            </a:endParaRPr>
-          </a:p>
-          <a:p>
+          </a:p>
+          <a:p xmlns:a="http://schemas.openxmlformats.org/drawingml/2006/main">
             <a:pPr marL="0" indent="0" algn="l">
               <a:lnSpc>
                 <a:spcPct val="100000"/>
@@ -6975,10 +8554,12 @@
                 <a:spcPts val="1300"/>
               </a:spcAft>
               <a:buNone/>
-              <a:defRPr/>
             </a:pPr>
             <a:r>
               <a:rPr sz="1800" b="0" i="0" u="none" cap="none">
+                <a:ln>
+                  <a:noFill/>
+                </a:ln>
                 <a:solidFill>
                   <a:prstClr val="black"/>
                 </a:solidFill>
@@ -6986,24 +8567,22 @@
                 <a:ea typeface="Helvetica Neue"/>
                 <a:cs typeface="Helvetica Neue"/>
               </a:rPr>
-              <a:t>Candidates and thresholds use validation only. The 165-group test set is evaluated once after selection.</a:t>
-            </a:r>
-            <a:endParaRPr sz="1800" b="0" i="0" u="none" cap="none">
-              <a:solidFill>
-                <a:prstClr val="black"/>
-              </a:solidFill>
-              <a:latin typeface="Helvetica Neue"/>
-              <a:ea typeface="Helvetica Neue"/>
-              <a:cs typeface="Helvetica Neue"/>
-            </a:endParaRPr>
+              <a:t>Three candidates fixed for this rerun use validation only. Both recalls ≥ 70%; then maximize Macro F1.</a:t>
+            </a:r>
           </a:p>
         </p:txBody>
       </p:sp>
       <p:sp>
         <p:nvSpPr>
-          <p:cNvPr id="3" name="Title 2"/>
+          <p:cNvPr id="3" name="Title 2">
+            <a:extLst xmlns:a="http://schemas.openxmlformats.org/drawingml/2006/main">
+              <a:ext uri="{FF2B5EF4-FFF2-40B4-BE49-F238E27FC236}">
+                <a16:creationId xmlns:a16="http://schemas.microsoft.com/office/drawing/2014/main" id="{BC736807-305D-4EC1-A98F-2A17C38135E7}"/>
+              </a:ext>
+            </a:extLst>
+          </p:cNvPr>
           <p:cNvSpPr>
-            <a:spLocks noGrp="1"/>
+            <a:spLocks xmlns:a="http://schemas.openxmlformats.org/drawingml/2006/main" noGrp="1"/>
           </p:cNvSpPr>
           <p:nvPr>
             <p:ph type="title" idx="0"/>
@@ -7011,42 +8590,43 @@
         </p:nvSpPr>
         <p:spPr/>
         <p:txBody>
-          <a:bodyPr/>
-          <a:lstStyle/>
-          <a:p>
-            <a:pPr lvl="0">
-              <a:defRPr/>
-            </a:pPr>
-            <a:r>
-              <a:rPr lang="ko-KR" altLang="en-US"/>
+          <a:bodyPr xmlns:a="http://schemas.openxmlformats.org/drawingml/2006/main"/>
+          <a:lstStyle xmlns:a="http://schemas.openxmlformats.org/drawingml/2006/main"/>
+          <a:p xmlns:a="http://schemas.openxmlformats.org/drawingml/2006/main">
+            <a:r>
               <a:t>A stricter experiment, not just a larger dataset</a:t>
             </a:r>
-            <a:endParaRPr lang="ko-KR" altLang="en-US"/>
           </a:p>
         </p:txBody>
       </p:sp>
       <p:sp>
         <p:nvSpPr>
-          <p:cNvPr id="13" name="Content Placeholder 9"/>
+          <p:cNvPr id="13" name="Content Placeholder 9">
+            <a:extLst xmlns:a="http://schemas.openxmlformats.org/drawingml/2006/main">
+              <a:ext uri="{FF2B5EF4-FFF2-40B4-BE49-F238E27FC236}">
+                <a16:creationId xmlns:a16="http://schemas.microsoft.com/office/drawing/2014/main" id="{19211427-9600-D234-704D-53BE123AB716}"/>
+              </a:ext>
+            </a:extLst>
+          </p:cNvPr>
           <p:cNvSpPr>
-            <a:spLocks noGrp="1"/>
+            <a:spLocks xmlns:a="http://schemas.openxmlformats.org/drawingml/2006/main" noGrp="1"/>
           </p:cNvSpPr>
           <p:nvPr/>
         </p:nvSpPr>
         <p:spPr>
-          <a:xfrm>
+          <a:xfrm xmlns:a="http://schemas.openxmlformats.org/drawingml/2006/main">
             <a:off x="393700" y="4133787"/>
             <a:ext cx="3568700" cy="1860613"/>
           </a:xfrm>
-          <a:prstGeom prst="rect">
+          <a:prstGeom xmlns:a="http://schemas.openxmlformats.org/drawingml/2006/main" prst="rect">
             <a:avLst/>
           </a:prstGeom>
         </p:spPr>
         <p:txBody>
-          <a:bodyPr vert="horz" lIns="0" tIns="0" rIns="0" bIns="0">
-            <a:normAutofit/>
+          <a:bodyPr xmlns:a="http://schemas.openxmlformats.org/drawingml/2006/main" vert="horz" lIns="0" tIns="0" rIns="0" bIns="0">
+            <a:normAutofit fontScale="100000"/>
           </a:bodyPr>
-          <a:lstStyle>
+          <a:lstStyle xmlns:a="http://schemas.openxmlformats.org/drawingml/2006/main">
             <a:lvl1pPr marL="228600" indent="-228600" algn="l">
               <a:lnSpc>
                 <a:spcPct val="90000"/>
@@ -7201,7 +8781,7 @@
               </a:defRPr>
             </a:lvl9pPr>
           </a:lstStyle>
-          <a:p>
+          <a:p xmlns:a="http://schemas.openxmlformats.org/drawingml/2006/main">
             <a:pPr marL="320040" indent="-226060" algn="l">
               <a:lnSpc>
                 <a:spcPct val="110000"/>
@@ -7213,10 +8793,12 @@
                 <a:spcPts val="0"/>
               </a:spcAft>
               <a:buChar char="→"/>
-              <a:defRPr/>
             </a:pPr>
             <a:r>
               <a:rPr sz="1800" b="0" i="0" u="none" cap="none">
+                <a:ln>
+                  <a:noFill/>
+                </a:ln>
                 <a:solidFill>
                   <a:prstClr val="black"/>
                 </a:solidFill>
@@ -7226,16 +8808,8 @@
               </a:rPr>
               <a:t>Train: 732 groups</a:t>
             </a:r>
-            <a:endParaRPr sz="1800" b="0" i="0" u="none" cap="none">
-              <a:solidFill>
-                <a:prstClr val="black"/>
-              </a:solidFill>
-              <a:latin typeface="Helvetica Neue"/>
-              <a:ea typeface="Helvetica Neue"/>
-              <a:cs typeface="Helvetica Neue"/>
-            </a:endParaRPr>
-          </a:p>
-          <a:p>
+          </a:p>
+          <a:p xmlns:a="http://schemas.openxmlformats.org/drawingml/2006/main">
             <a:pPr marL="320040" indent="-226060" algn="l">
               <a:lnSpc>
                 <a:spcPct val="110000"/>
@@ -7247,10 +8821,12 @@
                 <a:spcPts val="0"/>
               </a:spcAft>
               <a:buChar char="→"/>
-              <a:defRPr/>
             </a:pPr>
             <a:r>
               <a:rPr sz="1800" b="0" i="0" u="none" cap="none">
+                <a:ln>
+                  <a:noFill/>
+                </a:ln>
                 <a:solidFill>
                   <a:prstClr val="black"/>
                 </a:solidFill>
@@ -7260,16 +8836,8 @@
               </a:rPr>
               <a:t>Validation: 156 groups</a:t>
             </a:r>
-            <a:endParaRPr sz="1800" b="0" i="0" u="none" cap="none">
-              <a:solidFill>
-                <a:prstClr val="black"/>
-              </a:solidFill>
-              <a:latin typeface="Helvetica Neue"/>
-              <a:ea typeface="Helvetica Neue"/>
-              <a:cs typeface="Helvetica Neue"/>
-            </a:endParaRPr>
-          </a:p>
-          <a:p>
+          </a:p>
+          <a:p xmlns:a="http://schemas.openxmlformats.org/drawingml/2006/main">
             <a:pPr marL="320040" indent="-226060" algn="l">
               <a:lnSpc>
                 <a:spcPct val="110000"/>
@@ -7281,10 +8849,12 @@
                 <a:spcPts val="0"/>
               </a:spcAft>
               <a:buChar char="→"/>
-              <a:defRPr/>
             </a:pPr>
             <a:r>
               <a:rPr sz="1800" b="0" i="0" u="none" cap="none">
+                <a:ln>
+                  <a:noFill/>
+                </a:ln>
                 <a:solidFill>
                   <a:prstClr val="black"/>
                 </a:solidFill>
@@ -7294,16 +8864,8 @@
               </a:rPr>
               <a:t>Test: 165 groups</a:t>
             </a:r>
-            <a:endParaRPr sz="1800" b="0" i="0" u="none" cap="none">
-              <a:solidFill>
-                <a:prstClr val="black"/>
-              </a:solidFill>
-              <a:latin typeface="Helvetica Neue"/>
-              <a:ea typeface="Helvetica Neue"/>
-              <a:cs typeface="Helvetica Neue"/>
-            </a:endParaRPr>
-          </a:p>
-          <a:p>
+          </a:p>
+          <a:p xmlns:a="http://schemas.openxmlformats.org/drawingml/2006/main">
             <a:pPr marL="320040" indent="-226060" algn="l">
               <a:lnSpc>
                 <a:spcPct val="110000"/>
@@ -7315,10 +8877,12 @@
                 <a:spcPts val="1000"/>
               </a:spcAft>
               <a:buChar char="→"/>
-              <a:defRPr/>
             </a:pPr>
             <a:r>
               <a:rPr sz="1800" b="0" i="0" u="none" cap="none">
+                <a:ln>
+                  <a:noFill/>
+                </a:ln>
                 <a:solidFill>
                   <a:prstClr val="black"/>
                 </a:solidFill>
@@ -7328,39 +8892,37 @@
               </a:rPr>
               <a:t>Seed: 42</a:t>
             </a:r>
-            <a:endParaRPr sz="1800" b="0" i="0" u="none" cap="none">
-              <a:solidFill>
-                <a:prstClr val="black"/>
-              </a:solidFill>
-              <a:latin typeface="Helvetica Neue"/>
-              <a:ea typeface="Helvetica Neue"/>
-              <a:cs typeface="Helvetica Neue"/>
-            </a:endParaRPr>
           </a:p>
         </p:txBody>
       </p:sp>
       <p:sp>
         <p:nvSpPr>
-          <p:cNvPr id="20" name="Content Placeholder 9"/>
+          <p:cNvPr id="20" name="Content Placeholder 9">
+            <a:extLst xmlns:a="http://schemas.openxmlformats.org/drawingml/2006/main">
+              <a:ext uri="{FF2B5EF4-FFF2-40B4-BE49-F238E27FC236}">
+                <a16:creationId xmlns:a16="http://schemas.microsoft.com/office/drawing/2014/main" id="{AC9183D9-7CC4-79A2-884C-5E7D4E0CCD2B}"/>
+              </a:ext>
+            </a:extLst>
+          </p:cNvPr>
           <p:cNvSpPr>
-            <a:spLocks noGrp="1"/>
+            <a:spLocks xmlns:a="http://schemas.openxmlformats.org/drawingml/2006/main" noGrp="1"/>
           </p:cNvSpPr>
           <p:nvPr/>
         </p:nvSpPr>
         <p:spPr>
-          <a:xfrm>
+          <a:xfrm xmlns:a="http://schemas.openxmlformats.org/drawingml/2006/main">
             <a:off x="4307778" y="4133787"/>
             <a:ext cx="3568700" cy="1860613"/>
           </a:xfrm>
-          <a:prstGeom prst="rect">
+          <a:prstGeom xmlns:a="http://schemas.openxmlformats.org/drawingml/2006/main" prst="rect">
             <a:avLst/>
           </a:prstGeom>
         </p:spPr>
         <p:txBody>
-          <a:bodyPr vert="horz" lIns="0" tIns="0" rIns="0" bIns="0">
-            <a:normAutofit/>
+          <a:bodyPr xmlns:a="http://schemas.openxmlformats.org/drawingml/2006/main" vert="horz" lIns="0" tIns="0" rIns="0" bIns="0">
+            <a:normAutofit fontScale="100000"/>
           </a:bodyPr>
-          <a:lstStyle>
+          <a:lstStyle xmlns:a="http://schemas.openxmlformats.org/drawingml/2006/main">
             <a:lvl1pPr marL="228600" indent="-228600" algn="l">
               <a:lnSpc>
                 <a:spcPct val="90000"/>
@@ -7515,7 +9077,7 @@
               </a:defRPr>
             </a:lvl9pPr>
           </a:lstStyle>
-          <a:p>
+          <a:p xmlns:a="http://schemas.openxmlformats.org/drawingml/2006/main">
             <a:pPr marL="320040" indent="-226060" algn="l">
               <a:lnSpc>
                 <a:spcPct val="110000"/>
@@ -7527,10 +9089,12 @@
                 <a:spcPts val="0"/>
               </a:spcAft>
               <a:buChar char="→"/>
-              <a:defRPr/>
             </a:pPr>
             <a:r>
               <a:rPr sz="1800" b="0" i="0" u="none" cap="none">
+                <a:ln>
+                  <a:noFill/>
+                </a:ln>
                 <a:solidFill>
                   <a:prstClr val="black"/>
                 </a:solidFill>
@@ -7540,16 +9104,8 @@
               </a:rPr>
               <a:t>325 duplicate aliases merged</a:t>
             </a:r>
-            <a:endParaRPr sz="1800" b="0" i="0" u="none" cap="none">
-              <a:solidFill>
-                <a:prstClr val="black"/>
-              </a:solidFill>
-              <a:latin typeface="Helvetica Neue"/>
-              <a:ea typeface="Helvetica Neue"/>
-              <a:cs typeface="Helvetica Neue"/>
-            </a:endParaRPr>
-          </a:p>
-          <a:p>
+          </a:p>
+          <a:p xmlns:a="http://schemas.openxmlformats.org/drawingml/2006/main">
             <a:pPr marL="320040" indent="-226060" algn="l">
               <a:lnSpc>
                 <a:spcPct val="110000"/>
@@ -7561,10 +9117,12 @@
                 <a:spcPts val="0"/>
               </a:spcAft>
               <a:buChar char="→"/>
-              <a:defRPr/>
             </a:pPr>
             <a:r>
               <a:rPr sz="1800" b="0" i="0" u="none" cap="none">
+                <a:ln>
+                  <a:noFill/>
+                </a:ln>
                 <a:solidFill>
                   <a:prstClr val="black"/>
                 </a:solidFill>
@@ -7574,16 +9132,8 @@
               </a:rPr>
               <a:t>Original-source split</a:t>
             </a:r>
-            <a:endParaRPr sz="1800" b="0" i="0" u="none" cap="none">
-              <a:solidFill>
-                <a:prstClr val="black"/>
-              </a:solidFill>
-              <a:latin typeface="Helvetica Neue"/>
-              <a:ea typeface="Helvetica Neue"/>
-              <a:cs typeface="Helvetica Neue"/>
-            </a:endParaRPr>
-          </a:p>
-          <a:p>
+          </a:p>
+          <a:p xmlns:a="http://schemas.openxmlformats.org/drawingml/2006/main">
             <a:pPr marL="320040" indent="-226060" algn="l">
               <a:lnSpc>
                 <a:spcPct val="110000"/>
@@ -7595,10 +9145,12 @@
                 <a:spcPts val="0"/>
               </a:spcAft>
               <a:buChar char="→"/>
-              <a:defRPr/>
             </a:pPr>
             <a:r>
               <a:rPr sz="1800" b="0" i="0" u="none" cap="none">
+                <a:ln>
+                  <a:noFill/>
+                </a:ln>
                 <a:solidFill>
                   <a:prstClr val="black"/>
                 </a:solidFill>
@@ -7608,16 +9160,8 @@
               </a:rPr>
               <a:t>No test threshold tuning</a:t>
             </a:r>
-            <a:endParaRPr sz="1800" b="0" i="0" u="none" cap="none">
-              <a:solidFill>
-                <a:prstClr val="black"/>
-              </a:solidFill>
-              <a:latin typeface="Helvetica Neue"/>
-              <a:ea typeface="Helvetica Neue"/>
-              <a:cs typeface="Helvetica Neue"/>
-            </a:endParaRPr>
-          </a:p>
-          <a:p>
+          </a:p>
+          <a:p xmlns:a="http://schemas.openxmlformats.org/drawingml/2006/main">
             <a:pPr marL="320040" indent="-226060" algn="l">
               <a:lnSpc>
                 <a:spcPct val="110000"/>
@@ -7629,10 +9173,12 @@
                 <a:spcPts val="1000"/>
               </a:spcAft>
               <a:buChar char="→"/>
-              <a:defRPr/>
             </a:pPr>
             <a:r>
               <a:rPr sz="1800" b="0" i="0" u="none" cap="none">
+                <a:ln>
+                  <a:noFill/>
+                </a:ln>
                 <a:solidFill>
                   <a:prstClr val="black"/>
                 </a:solidFill>
@@ -7642,39 +9188,37 @@
               </a:rPr>
               <a:t>Independent groups</a:t>
             </a:r>
-            <a:endParaRPr sz="1800" b="0" i="0" u="none" cap="none">
-              <a:solidFill>
-                <a:prstClr val="black"/>
-              </a:solidFill>
-              <a:latin typeface="Helvetica Neue"/>
-              <a:ea typeface="Helvetica Neue"/>
-              <a:cs typeface="Helvetica Neue"/>
-            </a:endParaRPr>
           </a:p>
         </p:txBody>
       </p:sp>
       <p:sp>
         <p:nvSpPr>
-          <p:cNvPr id="21" name="Content Placeholder 9"/>
+          <p:cNvPr id="21" name="Content Placeholder 9">
+            <a:extLst xmlns:a="http://schemas.openxmlformats.org/drawingml/2006/main">
+              <a:ext uri="{FF2B5EF4-FFF2-40B4-BE49-F238E27FC236}">
+                <a16:creationId xmlns:a16="http://schemas.microsoft.com/office/drawing/2014/main" id="{8026D696-5B0D-B1A2-BDA5-A14DA58894A3}"/>
+              </a:ext>
+            </a:extLst>
+          </p:cNvPr>
           <p:cNvSpPr>
-            <a:spLocks noGrp="1"/>
+            <a:spLocks xmlns:a="http://schemas.openxmlformats.org/drawingml/2006/main" noGrp="1"/>
           </p:cNvSpPr>
           <p:nvPr/>
         </p:nvSpPr>
         <p:spPr>
-          <a:xfrm>
+          <a:xfrm xmlns:a="http://schemas.openxmlformats.org/drawingml/2006/main">
             <a:off x="8233007" y="4133787"/>
             <a:ext cx="3568700" cy="1860613"/>
           </a:xfrm>
-          <a:prstGeom prst="rect">
+          <a:prstGeom xmlns:a="http://schemas.openxmlformats.org/drawingml/2006/main" prst="rect">
             <a:avLst/>
           </a:prstGeom>
         </p:spPr>
         <p:txBody>
-          <a:bodyPr vert="horz" lIns="0" tIns="0" rIns="0" bIns="0">
-            <a:normAutofit/>
+          <a:bodyPr xmlns:a="http://schemas.openxmlformats.org/drawingml/2006/main" vert="horz" lIns="0" tIns="0" rIns="0" bIns="0">
+            <a:normAutofit fontScale="100000"/>
           </a:bodyPr>
-          <a:lstStyle>
+          <a:lstStyle xmlns:a="http://schemas.openxmlformats.org/drawingml/2006/main">
             <a:lvl1pPr marL="228600" indent="-228600" algn="l">
               <a:lnSpc>
                 <a:spcPct val="90000"/>
@@ -7829,7 +9373,7 @@
               </a:defRPr>
             </a:lvl9pPr>
           </a:lstStyle>
-          <a:p>
+          <a:p xmlns:a="http://schemas.openxmlformats.org/drawingml/2006/main">
             <a:pPr marL="320040" indent="-226060" algn="l">
               <a:lnSpc>
                 <a:spcPct val="110000"/>
@@ -7841,10 +9385,12 @@
                 <a:spcPts val="0"/>
               </a:spcAft>
               <a:buChar char="→"/>
-              <a:defRPr/>
             </a:pPr>
             <a:r>
               <a:rPr sz="1800" b="0" i="0" u="none" cap="none">
+                <a:ln>
+                  <a:noFill/>
+                </a:ln>
                 <a:solidFill>
                   <a:prstClr val="black"/>
                 </a:solidFill>
@@ -7852,18 +9398,10 @@
                 <a:ea typeface="Helvetica Neue"/>
                 <a:cs typeface="Helvetica Neue"/>
               </a:rPr>
-              <a:t>Validation promotion gate:</a:t>
-            </a:r>
-            <a:endParaRPr sz="1800" b="0" i="0" u="none" cap="none">
-              <a:solidFill>
-                <a:prstClr val="black"/>
-              </a:solidFill>
-              <a:latin typeface="Helvetica Neue"/>
-              <a:ea typeface="Helvetica Neue"/>
-              <a:cs typeface="Helvetica Neue"/>
-            </a:endParaRPr>
-          </a:p>
-          <a:p>
+              <a:t>Final Fusion selection:</a:t>
+            </a:r>
+          </a:p>
+          <a:p xmlns:a="http://schemas.openxmlformats.org/drawingml/2006/main">
             <a:pPr marL="320040" indent="-226060" algn="l">
               <a:lnSpc>
                 <a:spcPct val="110000"/>
@@ -7875,10 +9413,12 @@
                 <a:spcPts val="0"/>
               </a:spcAft>
               <a:buChar char="→"/>
-              <a:defRPr/>
             </a:pPr>
             <a:r>
               <a:rPr sz="1800" b="0" i="0" u="none" cap="none">
+                <a:ln>
+                  <a:noFill/>
+                </a:ln>
                 <a:solidFill>
                   <a:prstClr val="black"/>
                 </a:solidFill>
@@ -7886,18 +9426,10 @@
                 <a:ea typeface="Helvetica Neue"/>
                 <a:cs typeface="Helvetica Neue"/>
               </a:rPr>
-              <a:t>Macro F1 &gt; retained model</a:t>
-            </a:r>
-            <a:endParaRPr sz="1800" b="0" i="0" u="none" cap="none">
-              <a:solidFill>
-                <a:prstClr val="black"/>
-              </a:solidFill>
-              <a:latin typeface="Helvetica Neue"/>
-              <a:ea typeface="Helvetica Neue"/>
-              <a:cs typeface="Helvetica Neue"/>
-            </a:endParaRPr>
-          </a:p>
-          <a:p>
+              <a:t>3 candidates, not a large grid</a:t>
+            </a:r>
+          </a:p>
+          <a:p xmlns:a="http://schemas.openxmlformats.org/drawingml/2006/main">
             <a:pPr marL="320040" indent="-226060" algn="l">
               <a:lnSpc>
                 <a:spcPct val="110000"/>
@@ -7909,44 +9441,12 @@
                 <a:spcPts val="0"/>
               </a:spcAft>
               <a:buChar char="→"/>
-              <a:defRPr/>
             </a:pPr>
             <a:r>
               <a:rPr sz="1800" b="0" i="0" u="none" cap="none">
-                <a:solidFill>
-                  <a:prstClr val="black"/>
-                </a:solidFill>
-                <a:latin typeface="Helvetica Neue"/>
-                <a:ea typeface="Helvetica Neue"/>
-                <a:cs typeface="Helvetica Neue"/>
-              </a:rPr>
-              <a:t>Normal false alarm ≤ 5%</a:t>
-            </a:r>
-            <a:endParaRPr sz="1800" b="0" i="0" u="none" cap="none">
-              <a:solidFill>
-                <a:prstClr val="black"/>
-              </a:solidFill>
-              <a:latin typeface="Helvetica Neue"/>
-              <a:ea typeface="Helvetica Neue"/>
-              <a:cs typeface="Helvetica Neue"/>
-            </a:endParaRPr>
-          </a:p>
-          <a:p>
-            <a:pPr marL="320040" indent="-226060" algn="l">
-              <a:lnSpc>
-                <a:spcPct val="110000"/>
-              </a:lnSpc>
-              <a:spcBef>
-                <a:spcPts val="1000"/>
-              </a:spcBef>
-              <a:spcAft>
-                <a:spcPts val="1000"/>
-              </a:spcAft>
-              <a:buChar char="→"/>
-              <a:defRPr/>
-            </a:pPr>
-            <a:r>
-              <a:rPr sz="1800" b="0" i="0" u="none" cap="none">
+                <a:ln>
+                  <a:noFill/>
+                </a:ln>
                 <a:solidFill>
                   <a:prstClr val="black"/>
                 </a:solidFill>
@@ -7956,35 +9456,49 @@
               </a:rPr>
               <a:t>Both event recalls ≥ 70%</a:t>
             </a:r>
-            <a:endParaRPr sz="1800" b="0" i="0" u="none" cap="none">
-              <a:solidFill>
-                <a:prstClr val="black"/>
-              </a:solidFill>
-              <a:latin typeface="Helvetica Neue"/>
-              <a:ea typeface="Helvetica Neue"/>
-              <a:cs typeface="Helvetica Neue"/>
-            </a:endParaRPr>
+          </a:p>
+          <a:p xmlns:a="http://schemas.openxmlformats.org/drawingml/2006/main">
+            <a:pPr marL="320040" indent="-226060" algn="l">
+              <a:lnSpc>
+                <a:spcPct val="110000"/>
+              </a:lnSpc>
+              <a:spcBef>
+                <a:spcPts val="1000"/>
+              </a:spcBef>
+              <a:spcAft>
+                <a:spcPts val="1000"/>
+              </a:spcAft>
+              <a:buChar char="→"/>
+            </a:pPr>
+            <a:r>
+              <a:rPr sz="1800" b="0" i="0" u="none" cap="none">
+                <a:ln>
+                  <a:noFill/>
+                </a:ln>
+                <a:solidFill>
+                  <a:prstClr val="black"/>
+                </a:solidFill>
+                <a:latin typeface="Helvetica Neue"/>
+                <a:ea typeface="Helvetica Neue"/>
+                <a:cs typeface="Helvetica Neue"/>
+              </a:rPr>
+              <a:t>Balanced policy selected</a:t>
+            </a:r>
           </a:p>
         </p:txBody>
       </p:sp>
     </p:spTree>
+    <p:extLst>
+      <p:ext uri="{BB962C8B-B14F-4D97-AF65-F5344CB8AC3E}">
+        <p14:creationId xmlns:p14="http://schemas.microsoft.com/office/powerpoint/2010/main" val="3064231191"/>
+      </p:ext>
+    </p:extLst>
   </p:cSld>
-  <p:clrMapOvr>
-    <a:masterClrMapping/>
-  </p:clrMapOvr>
-  <mc:AlternateContent xmlns:mc="http://schemas.openxmlformats.org/markup-compatibility/2006">
-    <mc:Choice xmlns:p14="http://schemas.microsoft.com/office/powerpoint/2010/main" Requires="p14">
-      <p:transition xmlns:mc="http://schemas.openxmlformats.org/markup-compatibility/2006" xmlns:p14="http://schemas.microsoft.com/office/powerpoint/2010/main" mc:Ignorable="p14" p14:dur="500"/>
-    </mc:Choice>
-    <mc:Fallback>
-      <p:transition/>
-    </mc:Fallback>
-  </mc:AlternateContent>
 </p:sld>
 </file>
 
 <file path=ppt/slides/slide6.xml><?xml version="1.0" encoding="utf-8"?>
-<p:sld xmlns:r="http://schemas.openxmlformats.org/officeDocument/2006/relationships" xmlns:c="http://schemas.openxmlformats.org/drawingml/2006/chart" xmlns:a="http://schemas.openxmlformats.org/drawingml/2006/main" xmlns:dgm="http://schemas.openxmlformats.org/drawingml/2006/diagram" xmlns:dsp="http://schemas.microsoft.com/office/drawing/2008/diagram" xmlns:p="http://schemas.openxmlformats.org/presentationml/2006/main">
+<p:sld xmlns:p="http://schemas.openxmlformats.org/presentationml/2006/main">
   <p:cSld>
     <p:spTree>
       <p:nvGrpSpPr>
@@ -7993,18 +9507,19 @@
         <p:nvPr/>
       </p:nvGrpSpPr>
       <p:grpSpPr>
-        <a:xfrm>
-          <a:off x="0" y="0"/>
-          <a:ext cx="0" cy="0"/>
-          <a:chOff x="0" y="0"/>
-          <a:chExt cx="0" cy="0"/>
-        </a:xfrm>
+        <a:xfrm xmlns:a="http://schemas.openxmlformats.org/drawingml/2006/main"/>
       </p:grpSpPr>
       <p:sp>
         <p:nvSpPr>
-          <p:cNvPr id="2" name="Slide Number Placeholder 1"/>
+          <p:cNvPr id="2" name="Slide Number Placeholder 1">
+            <a:extLst xmlns:a="http://schemas.openxmlformats.org/drawingml/2006/main">
+              <a:ext uri="{FF2B5EF4-FFF2-40B4-BE49-F238E27FC236}">
+                <a16:creationId xmlns:a16="http://schemas.microsoft.com/office/drawing/2014/main" id="{78745C74-45EB-AE28-C330-5C7EA227B3A0}"/>
+              </a:ext>
+            </a:extLst>
+          </p:cNvPr>
           <p:cNvSpPr>
-            <a:spLocks noGrp="1"/>
+            <a:spLocks xmlns:a="http://schemas.openxmlformats.org/drawingml/2006/main" noGrp="1"/>
           </p:cNvSpPr>
           <p:nvPr>
             <p:ph type="sldNum" idx="4"/>
@@ -8012,218 +9527,229 @@
         </p:nvSpPr>
         <p:spPr/>
         <p:txBody>
-          <a:bodyPr/>
-          <a:lstStyle/>
-          <a:p>
-            <a:pPr>
-              <a:defRPr/>
-            </a:pPr>
+          <a:bodyPr xmlns:a="http://schemas.openxmlformats.org/drawingml/2006/main"/>
+          <a:lstStyle xmlns:a="http://schemas.openxmlformats.org/drawingml/2006/main"/>
+          <a:p xmlns:a="http://schemas.openxmlformats.org/drawingml/2006/main">
             <a:fld id="{8C630A04-5A25-9E0C-9436-126091DB86B3}" type="slidenum">
-              <a:rPr lang="en-US" altLang="en-US"/>
-              <a:pPr>
-                <a:defRPr/>
-              </a:pPr>
               <a:t>6</a:t>
             </a:fld>
-            <a:endParaRPr lang="en-US" altLang="en-US"/>
           </a:p>
         </p:txBody>
       </p:sp>
       <p:sp>
         <p:nvSpPr>
-          <p:cNvPr id="3" name="Title 2"/>
+          <p:cNvPr id="3" name="Title 2">
+            <a:extLst xmlns:a="http://schemas.openxmlformats.org/drawingml/2006/main">
+              <a:ext uri="{FF2B5EF4-FFF2-40B4-BE49-F238E27FC236}">
+                <a16:creationId xmlns:a16="http://schemas.microsoft.com/office/drawing/2014/main" id="{D03F6A93-D8A5-5E1B-B897-7FC43395C7A7}"/>
+              </a:ext>
+            </a:extLst>
+          </p:cNvPr>
           <p:cNvSpPr>
-            <a:spLocks noGrp="1"/>
+            <a:spLocks xmlns:a="http://schemas.openxmlformats.org/drawingml/2006/main" noGrp="1"/>
           </p:cNvSpPr>
           <p:nvPr>
             <p:ph type="title" idx="0"/>
           </p:nvPr>
         </p:nvSpPr>
         <p:spPr>
-          <a:xfrm>
+          <a:xfrm xmlns:a="http://schemas.openxmlformats.org/drawingml/2006/main">
             <a:off x="393700" y="344009"/>
             <a:ext cx="7484432" cy="687058"/>
           </a:xfrm>
         </p:spPr>
         <p:txBody>
-          <a:bodyPr/>
-          <a:lstStyle/>
-          <a:p>
-            <a:pPr lvl="0">
-              <a:defRPr/>
-            </a:pPr>
-            <a:r>
-              <a:rPr lang="ko-KR" altLang="en-US"/>
-              <a:t>Official test results</a:t>
-            </a:r>
-            <a:endParaRPr lang="ko-KR" altLang="en-US"/>
+          <a:bodyPr xmlns:a="http://schemas.openxmlformats.org/drawingml/2006/main"/>
+          <a:lstStyle xmlns:a="http://schemas.openxmlformats.org/drawingml/2006/main"/>
+          <a:p xmlns:a="http://schemas.openxmlformats.org/drawingml/2006/main">
+            <a:r>
+              <a:t>Final Fusion results</a:t>
+            </a:r>
           </a:p>
         </p:txBody>
       </p:sp>
       <p:sp>
         <p:nvSpPr>
-          <p:cNvPr id="6" name="Rounded Rectangle 5"/>
+          <p:cNvPr id="6" name="Rounded Rectangle 5">
+            <a:extLst xmlns:a="http://schemas.openxmlformats.org/drawingml/2006/main">
+              <a:ext uri="{FF2B5EF4-FFF2-40B4-BE49-F238E27FC236}">
+                <a16:creationId xmlns:a16="http://schemas.microsoft.com/office/drawing/2014/main" id="{4B8E9A03-4B2C-B18E-82B3-81A4A01C1BFE}"/>
+              </a:ext>
+            </a:extLst>
+          </p:cNvPr>
           <p:cNvSpPr>
-            <a:spLocks noGrp="1"/>
+            <a:spLocks xmlns:a="http://schemas.openxmlformats.org/drawingml/2006/main" noGrp="1"/>
           </p:cNvSpPr>
           <p:nvPr/>
         </p:nvSpPr>
         <p:spPr>
-          <a:xfrm>
+          <a:xfrm xmlns:a="http://schemas.openxmlformats.org/drawingml/2006/main">
             <a:off x="393700" y="4356100"/>
             <a:ext cx="2334563" cy="1882398"/>
           </a:xfrm>
-          <a:prstGeom prst="roundRect">
+          <a:prstGeom xmlns:a="http://schemas.openxmlformats.org/drawingml/2006/main" prst="roundRect">
             <a:avLst>
               <a:gd name="adj" fmla="val 3585"/>
             </a:avLst>
           </a:prstGeom>
-          <a:solidFill>
+          <a:solidFill xmlns:a="http://schemas.openxmlformats.org/drawingml/2006/main">
             <a:schemeClr val="bg2"/>
           </a:solidFill>
-          <a:ln>
+          <a:ln xmlns:a="http://schemas.openxmlformats.org/drawingml/2006/main">
             <a:noFill/>
           </a:ln>
         </p:spPr>
         <p:style>
-          <a:lnRef idx="2">
+          <a:lnRef xmlns:a="http://schemas.openxmlformats.org/drawingml/2006/main" idx="2">
             <a:schemeClr val="accent1">
               <a:shade val="15000"/>
             </a:schemeClr>
           </a:lnRef>
-          <a:fillRef idx="1">
+          <a:fillRef xmlns:a="http://schemas.openxmlformats.org/drawingml/2006/main" idx="1">
             <a:schemeClr val="accent1"/>
           </a:fillRef>
-          <a:effectRef idx="0">
+          <a:effectRef xmlns:a="http://schemas.openxmlformats.org/drawingml/2006/main" idx="0">
             <a:schemeClr val="accent1"/>
           </a:effectRef>
-          <a:fontRef idx="minor">
+          <a:fontRef xmlns:a="http://schemas.openxmlformats.org/drawingml/2006/main" idx="minor">
             <a:schemeClr val="lt1"/>
           </a:fontRef>
         </p:style>
         <p:txBody>
-          <a:bodyPr anchor="ctr"/>
-          <a:lstStyle/>
-          <a:p>
+          <a:bodyPr xmlns:a="http://schemas.openxmlformats.org/drawingml/2006/main" anchor="ctr"/>
+          <a:lstStyle xmlns:a="http://schemas.openxmlformats.org/drawingml/2006/main"/>
+          <a:p xmlns:a="http://schemas.openxmlformats.org/drawingml/2006/main">
             <a:pPr algn="ctr">
               <a:buNone/>
-              <a:defRPr/>
-            </a:pPr>
-            <a:endParaRPr lang="ko-KR" altLang="en-US"/>
+            </a:pPr>
           </a:p>
         </p:txBody>
       </p:sp>
       <p:sp>
         <p:nvSpPr>
-          <p:cNvPr id="19" name="Rounded Rectangle 18"/>
+          <p:cNvPr id="19" name="Rounded Rectangle 18">
+            <a:extLst xmlns:a="http://schemas.openxmlformats.org/drawingml/2006/main">
+              <a:ext uri="{FF2B5EF4-FFF2-40B4-BE49-F238E27FC236}">
+                <a16:creationId xmlns:a16="http://schemas.microsoft.com/office/drawing/2014/main" id="{BB9C5A0A-A5A1-9670-2D34-4ADE3A987520}"/>
+              </a:ext>
+            </a:extLst>
+          </p:cNvPr>
           <p:cNvSpPr>
-            <a:spLocks noGrp="1"/>
+            <a:spLocks xmlns:a="http://schemas.openxmlformats.org/drawingml/2006/main" noGrp="1"/>
           </p:cNvSpPr>
           <p:nvPr/>
         </p:nvSpPr>
         <p:spPr>
-          <a:xfrm>
+          <a:xfrm xmlns:a="http://schemas.openxmlformats.org/drawingml/2006/main">
             <a:off x="2968634" y="4356100"/>
             <a:ext cx="2334563" cy="1882398"/>
           </a:xfrm>
-          <a:prstGeom prst="roundRect">
+          <a:prstGeom xmlns:a="http://schemas.openxmlformats.org/drawingml/2006/main" prst="roundRect">
             <a:avLst>
               <a:gd name="adj" fmla="val 3585"/>
             </a:avLst>
           </a:prstGeom>
-          <a:solidFill>
+          <a:solidFill xmlns:a="http://schemas.openxmlformats.org/drawingml/2006/main">
             <a:schemeClr val="bg2"/>
           </a:solidFill>
-          <a:ln>
+          <a:ln xmlns:a="http://schemas.openxmlformats.org/drawingml/2006/main">
             <a:noFill/>
           </a:ln>
         </p:spPr>
         <p:style>
-          <a:lnRef idx="2">
+          <a:lnRef xmlns:a="http://schemas.openxmlformats.org/drawingml/2006/main" idx="2">
             <a:schemeClr val="accent1">
               <a:shade val="15000"/>
             </a:schemeClr>
           </a:lnRef>
-          <a:fillRef idx="1">
+          <a:fillRef xmlns:a="http://schemas.openxmlformats.org/drawingml/2006/main" idx="1">
             <a:schemeClr val="accent1"/>
           </a:fillRef>
-          <a:effectRef idx="0">
+          <a:effectRef xmlns:a="http://schemas.openxmlformats.org/drawingml/2006/main" idx="0">
             <a:schemeClr val="accent1"/>
           </a:effectRef>
-          <a:fontRef idx="minor">
+          <a:fontRef xmlns:a="http://schemas.openxmlformats.org/drawingml/2006/main" idx="minor">
             <a:schemeClr val="lt1"/>
           </a:fontRef>
         </p:style>
         <p:txBody>
-          <a:bodyPr anchor="ctr"/>
-          <a:lstStyle/>
-          <a:p>
+          <a:bodyPr xmlns:a="http://schemas.openxmlformats.org/drawingml/2006/main" anchor="ctr"/>
+          <a:lstStyle xmlns:a="http://schemas.openxmlformats.org/drawingml/2006/main"/>
+          <a:p xmlns:a="http://schemas.openxmlformats.org/drawingml/2006/main">
             <a:pPr algn="ctr">
               <a:buNone/>
-              <a:defRPr/>
-            </a:pPr>
-            <a:endParaRPr lang="ko-KR" altLang="en-US"/>
+            </a:pPr>
           </a:p>
         </p:txBody>
       </p:sp>
       <p:sp>
         <p:nvSpPr>
-          <p:cNvPr id="20" name="Rounded Rectangle 19"/>
+          <p:cNvPr id="20" name="Rounded Rectangle 19">
+            <a:extLst xmlns:a="http://schemas.openxmlformats.org/drawingml/2006/main">
+              <a:ext uri="{FF2B5EF4-FFF2-40B4-BE49-F238E27FC236}">
+                <a16:creationId xmlns:a16="http://schemas.microsoft.com/office/drawing/2014/main" id="{F8B1C048-B419-3AD6-93D8-57A7BA14EF24}"/>
+              </a:ext>
+            </a:extLst>
+          </p:cNvPr>
           <p:cNvSpPr>
-            <a:spLocks noGrp="1"/>
+            <a:spLocks xmlns:a="http://schemas.openxmlformats.org/drawingml/2006/main" noGrp="1"/>
           </p:cNvSpPr>
           <p:nvPr/>
         </p:nvSpPr>
         <p:spPr>
-          <a:xfrm>
+          <a:xfrm xmlns:a="http://schemas.openxmlformats.org/drawingml/2006/main">
             <a:off x="5543569" y="4356100"/>
             <a:ext cx="2334563" cy="1882398"/>
           </a:xfrm>
-          <a:prstGeom prst="roundRect">
+          <a:prstGeom xmlns:a="http://schemas.openxmlformats.org/drawingml/2006/main" prst="roundRect">
             <a:avLst>
               <a:gd name="adj" fmla="val 3585"/>
             </a:avLst>
           </a:prstGeom>
-          <a:solidFill>
+          <a:solidFill xmlns:a="http://schemas.openxmlformats.org/drawingml/2006/main">
             <a:schemeClr val="bg2"/>
           </a:solidFill>
-          <a:ln>
+          <a:ln xmlns:a="http://schemas.openxmlformats.org/drawingml/2006/main">
             <a:noFill/>
           </a:ln>
         </p:spPr>
         <p:style>
-          <a:lnRef idx="2">
+          <a:lnRef xmlns:a="http://schemas.openxmlformats.org/drawingml/2006/main" idx="2">
             <a:schemeClr val="accent1">
               <a:shade val="15000"/>
             </a:schemeClr>
           </a:lnRef>
-          <a:fillRef idx="1">
+          <a:fillRef xmlns:a="http://schemas.openxmlformats.org/drawingml/2006/main" idx="1">
             <a:schemeClr val="accent1"/>
           </a:fillRef>
-          <a:effectRef idx="0">
+          <a:effectRef xmlns:a="http://schemas.openxmlformats.org/drawingml/2006/main" idx="0">
             <a:schemeClr val="accent1"/>
           </a:effectRef>
-          <a:fontRef idx="minor">
+          <a:fontRef xmlns:a="http://schemas.openxmlformats.org/drawingml/2006/main" idx="minor">
             <a:schemeClr val="lt1"/>
           </a:fontRef>
         </p:style>
         <p:txBody>
-          <a:bodyPr anchor="ctr"/>
-          <a:lstStyle/>
-          <a:p>
+          <a:bodyPr xmlns:a="http://schemas.openxmlformats.org/drawingml/2006/main" anchor="ctr"/>
+          <a:lstStyle xmlns:a="http://schemas.openxmlformats.org/drawingml/2006/main"/>
+          <a:p xmlns:a="http://schemas.openxmlformats.org/drawingml/2006/main">
             <a:pPr algn="ctr">
               <a:buNone/>
-              <a:defRPr/>
-            </a:pPr>
-            <a:endParaRPr lang="ko-KR" altLang="en-US"/>
+            </a:pPr>
           </a:p>
         </p:txBody>
       </p:sp>
       <p:sp>
         <p:nvSpPr>
-          <p:cNvPr id="25" name="Footer Placeholder 24"/>
+          <p:cNvPr id="25" name="Footer Placeholder 24">
+            <a:extLst xmlns:a="http://schemas.openxmlformats.org/drawingml/2006/main">
+              <a:ext uri="{FF2B5EF4-FFF2-40B4-BE49-F238E27FC236}">
+                <a16:creationId xmlns:a16="http://schemas.microsoft.com/office/drawing/2014/main" id="{95A1BACE-9FEC-6113-E43D-CADED94947C8}"/>
+              </a:ext>
+            </a:extLst>
+          </p:cNvPr>
           <p:cNvSpPr>
-            <a:spLocks noGrp="1"/>
+            <a:spLocks xmlns:a="http://schemas.openxmlformats.org/drawingml/2006/main" noGrp="1"/>
           </p:cNvSpPr>
           <p:nvPr>
             <p:ph type="ftr" idx="3"/>
@@ -8231,42 +9757,44 @@
         </p:nvSpPr>
         <p:spPr/>
         <p:txBody>
-          <a:bodyPr/>
-          <a:lstStyle/>
-          <a:p>
-            <a:pPr lvl="0">
-              <a:defRPr/>
-            </a:pPr>
+          <a:bodyPr xmlns:a="http://schemas.openxmlformats.org/drawingml/2006/main"/>
+          <a:lstStyle xmlns:a="http://schemas.openxmlformats.org/drawingml/2006/main"/>
+          <a:p xmlns:a="http://schemas.openxmlformats.org/drawingml/2006/main">
             <a:r>
               <a:rPr sz="1100"/>
-              <a:t>*Strict-label test set · 165 independent source groups · June 20, 2026</a:t>
-            </a:r>
-            <a:endParaRPr sz="1100"/>
+              <a:t>*Strict-label test · 165 source groups · retrospective rerun · June 21, 2026</a:t>
+            </a:r>
           </a:p>
         </p:txBody>
       </p:sp>
       <p:sp>
         <p:nvSpPr>
-          <p:cNvPr id="28" name="Content Placeholder 2"/>
+          <p:cNvPr id="28" name="Content Placeholder 2">
+            <a:extLst xmlns:a="http://schemas.openxmlformats.org/drawingml/2006/main">
+              <a:ext uri="{FF2B5EF4-FFF2-40B4-BE49-F238E27FC236}">
+                <a16:creationId xmlns:a16="http://schemas.microsoft.com/office/drawing/2014/main" id="{B3C3191E-B483-A5B1-1BFC-8359BB565493}"/>
+              </a:ext>
+            </a:extLst>
+          </p:cNvPr>
           <p:cNvSpPr>
-            <a:spLocks noGrp="1"/>
+            <a:spLocks xmlns:a="http://schemas.openxmlformats.org/drawingml/2006/main" noGrp="1"/>
           </p:cNvSpPr>
           <p:nvPr/>
         </p:nvSpPr>
         <p:spPr>
-          <a:xfrm>
+          <a:xfrm xmlns:a="http://schemas.openxmlformats.org/drawingml/2006/main">
             <a:off x="8232273" y="2374900"/>
             <a:ext cx="3568700" cy="3863597"/>
           </a:xfrm>
-          <a:prstGeom prst="rect">
+          <a:prstGeom xmlns:a="http://schemas.openxmlformats.org/drawingml/2006/main" prst="rect">
             <a:avLst/>
           </a:prstGeom>
         </p:spPr>
         <p:txBody>
-          <a:bodyPr lIns="0" tIns="0" rIns="0" bIns="0" anchor="b">
-            <a:normAutofit/>
+          <a:bodyPr xmlns:a="http://schemas.openxmlformats.org/drawingml/2006/main" lIns="0" tIns="0" rIns="0" bIns="0" anchor="b">
+            <a:normAutofit fontScale="100000"/>
           </a:bodyPr>
-          <a:lstStyle>
+          <a:lstStyle xmlns:a="http://schemas.openxmlformats.org/drawingml/2006/main">
             <a:lvl1pPr marL="228600" indent="-228600" algn="l">
               <a:lnSpc>
                 <a:spcPct val="90000"/>
@@ -8421,7 +9949,7 @@
               </a:defRPr>
             </a:lvl9pPr>
           </a:lstStyle>
-          <a:p>
+          <a:p xmlns:a="http://schemas.openxmlformats.org/drawingml/2006/main">
             <a:pPr marL="0" indent="0">
               <a:lnSpc>
                 <a:spcPct val="114000"/>
@@ -8433,7 +9961,6 @@
                 <a:spcPts val="800"/>
               </a:spcAft>
               <a:buNone/>
-              <a:defRPr/>
             </a:pPr>
             <a:r>
               <a:rPr sz="1800">
@@ -8444,18 +9971,10 @@
                 <a:ea typeface="Helvetica Neue Medium"/>
                 <a:cs typeface="Helvetica Neue Medium"/>
               </a:rPr>
-              <a:t>WHAT THE NUMBERS MEAN</a:t>
-            </a:r>
-            <a:endParaRPr sz="1800">
-              <a:solidFill>
-                <a:prstClr val="black"/>
-              </a:solidFill>
-              <a:latin typeface="Helvetica Neue Medium"/>
-              <a:ea typeface="Helvetica Neue Medium"/>
-              <a:cs typeface="Helvetica Neue Medium"/>
-            </a:endParaRPr>
-          </a:p>
-          <a:p>
+              <a:t>INTERPRETATION</a:t>
+            </a:r>
+          </a:p>
+          <a:p xmlns:a="http://schemas.openxmlformats.org/drawingml/2006/main">
             <a:pPr marL="0" indent="0">
               <a:lnSpc>
                 <a:spcPct val="114000"/>
@@ -8467,7 +9986,6 @@
                 <a:spcPts val="800"/>
               </a:spcAft>
               <a:buNone/>
-              <a:defRPr/>
             </a:pPr>
             <a:r>
               <a:rPr sz="1400">
@@ -8478,18 +9996,10 @@
                 <a:ea typeface="Helvetica Neue"/>
                 <a:cs typeface="Helvetica Neue"/>
               </a:rPr>
-              <a:t>The retained model recovered most glass events, but missed 11 of 38 screams and raised 13 alarms on 98 normal groups.</a:t>
-            </a:r>
-            <a:endParaRPr sz="1400">
-              <a:solidFill>
-                <a:prstClr val="black"/>
-              </a:solidFill>
-              <a:latin typeface="Helvetica Neue"/>
-              <a:ea typeface="Helvetica Neue"/>
-              <a:cs typeface="Helvetica Neue"/>
-            </a:endParaRPr>
-          </a:p>
-          <a:p>
+              <a:t>Final Fusion provided the best overall balance across both threat classes and normal false alarms.</a:t>
+            </a:r>
+          </a:p>
+          <a:p xmlns:a="http://schemas.openxmlformats.org/drawingml/2006/main">
             <a:pPr marL="0" indent="0">
               <a:lnSpc>
                 <a:spcPct val="114000"/>
@@ -8501,30 +10011,6 @@
                 <a:spcPts val="800"/>
               </a:spcAft>
               <a:buNone/>
-              <a:defRPr/>
-            </a:pPr>
-            <a:endParaRPr sz="1400">
-              <a:solidFill>
-                <a:prstClr val="black"/>
-              </a:solidFill>
-              <a:latin typeface="Helvetica Neue"/>
-              <a:ea typeface="Helvetica Neue"/>
-              <a:cs typeface="Helvetica Neue"/>
-            </a:endParaRPr>
-          </a:p>
-          <a:p>
-            <a:pPr marL="0" indent="0">
-              <a:lnSpc>
-                <a:spcPct val="114000"/>
-              </a:lnSpc>
-              <a:spcBef>
-                <a:spcPts val="0"/>
-              </a:spcBef>
-              <a:spcAft>
-                <a:spcPts val="800"/>
-              </a:spcAft>
-              <a:buNone/>
-              <a:defRPr/>
             </a:pPr>
             <a:r>
               <a:rPr sz="1400">
@@ -8535,41 +10021,64 @@
                 <a:ea typeface="Helvetica Neue"/>
                 <a:cs typeface="Helvetica Neue"/>
               </a:rPr>
-              <a:t>No candidate passed the validation promotion gate, so the operating model was not replaced.</a:t>
-            </a:r>
-            <a:endParaRPr sz="1400">
-              <a:solidFill>
-                <a:prstClr val="black"/>
-              </a:solidFill>
-              <a:latin typeface="Helvetica Neue"/>
-              <a:ea typeface="Helvetica Neue"/>
-              <a:cs typeface="Helvetica Neue"/>
-            </a:endParaRPr>
+              <a:t/>
+            </a:r>
+          </a:p>
+          <a:p xmlns:a="http://schemas.openxmlformats.org/drawingml/2006/main">
+            <a:pPr marL="0" indent="0">
+              <a:lnSpc>
+                <a:spcPct val="114000"/>
+              </a:lnSpc>
+              <a:spcBef>
+                <a:spcPts val="0"/>
+              </a:spcBef>
+              <a:spcAft>
+                <a:spcPts val="800"/>
+              </a:spcAft>
+              <a:buNone/>
+            </a:pPr>
+            <a:r>
+              <a:rPr sz="1400">
+                <a:solidFill>
+                  <a:prstClr val="black"/>
+                </a:solidFill>
+                <a:latin typeface="Helvetica Neue"/>
+                <a:ea typeface="Helvetica Neue"/>
+                <a:cs typeface="Helvetica Neue"/>
+              </a:rPr>
+              <a:t>Policy parameters came from validation only. The test split had been inspected in earlier iterations, so fresh-data validation remains necessary.</a:t>
+            </a:r>
           </a:p>
         </p:txBody>
       </p:sp>
       <p:sp>
         <p:nvSpPr>
-          <p:cNvPr id="30" name="Content Placeholder 9"/>
+          <p:cNvPr id="30" name="Content Placeholder 9">
+            <a:extLst xmlns:a="http://schemas.openxmlformats.org/drawingml/2006/main">
+              <a:ext uri="{FF2B5EF4-FFF2-40B4-BE49-F238E27FC236}">
+                <a16:creationId xmlns:a16="http://schemas.microsoft.com/office/drawing/2014/main" id="{A2629DBE-08D2-7E4E-7363-739E24C59768}"/>
+              </a:ext>
+            </a:extLst>
+          </p:cNvPr>
           <p:cNvSpPr>
-            <a:spLocks noGrp="1"/>
+            <a:spLocks xmlns:a="http://schemas.openxmlformats.org/drawingml/2006/main" noGrp="1"/>
           </p:cNvSpPr>
           <p:nvPr/>
         </p:nvSpPr>
         <p:spPr>
-          <a:xfrm>
+          <a:xfrm xmlns:a="http://schemas.openxmlformats.org/drawingml/2006/main">
             <a:off x="565150" y="4563078"/>
             <a:ext cx="1612900" cy="903750"/>
           </a:xfrm>
-          <a:prstGeom prst="rect">
+          <a:prstGeom xmlns:a="http://schemas.openxmlformats.org/drawingml/2006/main" prst="rect">
             <a:avLst/>
           </a:prstGeom>
         </p:spPr>
         <p:txBody>
-          <a:bodyPr vert="horz" lIns="0" tIns="0" rIns="0" bIns="0" anchor="b">
-            <a:normAutofit fontScale="85000" lnSpcReduction="20000"/>
+          <a:bodyPr xmlns:a="http://schemas.openxmlformats.org/drawingml/2006/main" vert="horz" lIns="0" tIns="0" rIns="0" bIns="0" anchor="b">
+            <a:normAutofit fontScale="100000"/>
           </a:bodyPr>
-          <a:lstStyle>
+          <a:lstStyle xmlns:a="http://schemas.openxmlformats.org/drawingml/2006/main">
             <a:lvl1pPr marL="228600" indent="-228600" algn="l">
               <a:lnSpc>
                 <a:spcPct val="90000"/>
@@ -8724,7 +10233,7 @@
               </a:defRPr>
             </a:lvl9pPr>
           </a:lstStyle>
-          <a:p>
+          <a:p xmlns:a="http://schemas.openxmlformats.org/drawingml/2006/main">
             <a:pPr marL="2540" indent="0" algn="l">
               <a:lnSpc>
                 <a:spcPct val="110000"/>
@@ -8736,10 +10245,12 @@
                 <a:spcPts val="0"/>
               </a:spcAft>
               <a:buNone/>
-              <a:defRPr/>
             </a:pPr>
             <a:r>
               <a:rPr sz="5000" u="none" cap="none">
+                <a:ln>
+                  <a:noFill/>
+                </a:ln>
                 <a:solidFill>
                   <a:prstClr val="black"/>
                 </a:solidFill>
@@ -8747,41 +10258,39 @@
                 <a:ea typeface="Helvetica Neue"/>
                 <a:cs typeface="Helvetica Neue"/>
               </a:rPr>
-              <a:t>13.3%</a:t>
-            </a:r>
-            <a:endParaRPr sz="5000" u="none" cap="none">
-              <a:solidFill>
-                <a:prstClr val="black"/>
-              </a:solidFill>
-              <a:latin typeface="Helvetica Neue"/>
-              <a:ea typeface="Helvetica Neue"/>
-              <a:cs typeface="Helvetica Neue"/>
-            </a:endParaRPr>
+              <a:t>9.2%</a:t>
+            </a:r>
           </a:p>
         </p:txBody>
       </p:sp>
       <p:sp>
         <p:nvSpPr>
-          <p:cNvPr id="31" name="Content Placeholder 9"/>
+          <p:cNvPr id="31" name="Content Placeholder 9">
+            <a:extLst xmlns:a="http://schemas.openxmlformats.org/drawingml/2006/main">
+              <a:ext uri="{FF2B5EF4-FFF2-40B4-BE49-F238E27FC236}">
+                <a16:creationId xmlns:a16="http://schemas.microsoft.com/office/drawing/2014/main" id="{2D533C57-9277-DA71-420A-852FB372D17F}"/>
+              </a:ext>
+            </a:extLst>
+          </p:cNvPr>
           <p:cNvSpPr>
-            <a:spLocks noGrp="1"/>
+            <a:spLocks xmlns:a="http://schemas.openxmlformats.org/drawingml/2006/main" noGrp="1"/>
           </p:cNvSpPr>
           <p:nvPr/>
         </p:nvSpPr>
         <p:spPr>
-          <a:xfrm>
+          <a:xfrm xmlns:a="http://schemas.openxmlformats.org/drawingml/2006/main">
             <a:off x="656590" y="5466828"/>
             <a:ext cx="1612900" cy="392952"/>
           </a:xfrm>
-          <a:prstGeom prst="rect">
+          <a:prstGeom xmlns:a="http://schemas.openxmlformats.org/drawingml/2006/main" prst="rect">
             <a:avLst/>
           </a:prstGeom>
         </p:spPr>
         <p:txBody>
-          <a:bodyPr vert="horz" lIns="0" tIns="0" rIns="0" bIns="0" anchor="b">
-            <a:normAutofit fontScale="73263"/>
+          <a:bodyPr xmlns:a="http://schemas.openxmlformats.org/drawingml/2006/main" vert="horz" lIns="0" tIns="0" rIns="0" bIns="0" anchor="b">
+            <a:normAutofit fontScale="76873"/>
           </a:bodyPr>
-          <a:lstStyle>
+          <a:lstStyle xmlns:a="http://schemas.openxmlformats.org/drawingml/2006/main">
             <a:lvl1pPr marL="228600" indent="-228600" algn="l">
               <a:lnSpc>
                 <a:spcPct val="90000"/>
@@ -8936,7 +10445,7 @@
               </a:defRPr>
             </a:lvl9pPr>
           </a:lstStyle>
-          <a:p>
+          <a:p xmlns:a="http://schemas.openxmlformats.org/drawingml/2006/main">
             <a:pPr marL="2540" indent="0" algn="l">
               <a:lnSpc>
                 <a:spcPct val="110000"/>
@@ -8948,7 +10457,6 @@
                 <a:spcPts val="0"/>
               </a:spcAft>
               <a:buNone/>
-              <a:defRPr/>
             </a:pPr>
             <a:r>
               <a:rPr sz="1600">
@@ -8959,41 +10467,39 @@
                 <a:ea typeface="Helvetica Neue"/>
                 <a:cs typeface="Helvetica Neue"/>
               </a:rPr>
-              <a:t>Normal false alarm · 13/98</a:t>
-            </a:r>
-            <a:endParaRPr sz="1600">
-              <a:solidFill>
-                <a:prstClr val="black"/>
-              </a:solidFill>
-              <a:latin typeface="Helvetica Neue"/>
-              <a:ea typeface="Helvetica Neue"/>
-              <a:cs typeface="Helvetica Neue"/>
-            </a:endParaRPr>
+              <a:t>Normal false alarm · 9/98</a:t>
+            </a:r>
           </a:p>
         </p:txBody>
       </p:sp>
       <p:sp>
         <p:nvSpPr>
-          <p:cNvPr id="32" name="Content Placeholder 9"/>
+          <p:cNvPr id="32" name="Content Placeholder 9">
+            <a:extLst xmlns:a="http://schemas.openxmlformats.org/drawingml/2006/main">
+              <a:ext uri="{FF2B5EF4-FFF2-40B4-BE49-F238E27FC236}">
+                <a16:creationId xmlns:a16="http://schemas.microsoft.com/office/drawing/2014/main" id="{C960D833-F6EA-C5E9-6DE4-D21876FC340D}"/>
+              </a:ext>
+            </a:extLst>
+          </p:cNvPr>
           <p:cNvSpPr>
-            <a:spLocks noGrp="1"/>
+            <a:spLocks xmlns:a="http://schemas.openxmlformats.org/drawingml/2006/main" noGrp="1"/>
           </p:cNvSpPr>
           <p:nvPr/>
         </p:nvSpPr>
         <p:spPr>
-          <a:xfrm>
+          <a:xfrm xmlns:a="http://schemas.openxmlformats.org/drawingml/2006/main">
             <a:off x="3172795" y="4563078"/>
             <a:ext cx="1612900" cy="903750"/>
           </a:xfrm>
-          <a:prstGeom prst="rect">
+          <a:prstGeom xmlns:a="http://schemas.openxmlformats.org/drawingml/2006/main" prst="rect">
             <a:avLst/>
           </a:prstGeom>
         </p:spPr>
         <p:txBody>
-          <a:bodyPr vert="horz" lIns="0" tIns="0" rIns="0" bIns="0" anchor="b">
-            <a:normAutofit fontScale="85000" lnSpcReduction="20000"/>
+          <a:bodyPr xmlns:a="http://schemas.openxmlformats.org/drawingml/2006/main" vert="horz" lIns="0" tIns="0" rIns="0" bIns="0" anchor="b">
+            <a:normAutofit fontScale="100000"/>
           </a:bodyPr>
-          <a:lstStyle>
+          <a:lstStyle xmlns:a="http://schemas.openxmlformats.org/drawingml/2006/main">
             <a:lvl1pPr marL="228600" indent="-228600" algn="l">
               <a:lnSpc>
                 <a:spcPct val="90000"/>
@@ -9148,7 +10654,7 @@
               </a:defRPr>
             </a:lvl9pPr>
           </a:lstStyle>
-          <a:p>
+          <a:p xmlns:a="http://schemas.openxmlformats.org/drawingml/2006/main">
             <a:pPr marL="2540" indent="0" algn="l">
               <a:lnSpc>
                 <a:spcPct val="110000"/>
@@ -9160,10 +10666,12 @@
                 <a:spcPts val="0"/>
               </a:spcAft>
               <a:buNone/>
-              <a:defRPr/>
             </a:pPr>
             <a:r>
               <a:rPr sz="5000" u="none" cap="none">
+                <a:ln>
+                  <a:noFill/>
+                </a:ln>
                 <a:solidFill>
                   <a:prstClr val="black"/>
                 </a:solidFill>
@@ -9171,41 +10679,39 @@
                 <a:ea typeface="Helvetica Neue"/>
                 <a:cs typeface="Helvetica Neue"/>
               </a:rPr>
-              <a:t>82.8%</a:t>
-            </a:r>
-            <a:endParaRPr sz="5000" u="none" cap="none">
-              <a:solidFill>
-                <a:prstClr val="black"/>
-              </a:solidFill>
-              <a:latin typeface="Helvetica Neue"/>
-              <a:ea typeface="Helvetica Neue"/>
-              <a:cs typeface="Helvetica Neue"/>
-            </a:endParaRPr>
+              <a:t>75.9%</a:t>
+            </a:r>
           </a:p>
         </p:txBody>
       </p:sp>
       <p:sp>
         <p:nvSpPr>
-          <p:cNvPr id="33" name="Content Placeholder 9"/>
+          <p:cNvPr id="33" name="Content Placeholder 9">
+            <a:extLst xmlns:a="http://schemas.openxmlformats.org/drawingml/2006/main">
+              <a:ext uri="{FF2B5EF4-FFF2-40B4-BE49-F238E27FC236}">
+                <a16:creationId xmlns:a16="http://schemas.microsoft.com/office/drawing/2014/main" id="{BF33EEB6-55CD-E6FE-95D2-55A288BCF125}"/>
+              </a:ext>
+            </a:extLst>
+          </p:cNvPr>
           <p:cNvSpPr>
-            <a:spLocks noGrp="1"/>
+            <a:spLocks xmlns:a="http://schemas.openxmlformats.org/drawingml/2006/main" noGrp="1"/>
           </p:cNvSpPr>
           <p:nvPr/>
         </p:nvSpPr>
         <p:spPr>
-          <a:xfrm>
+          <a:xfrm xmlns:a="http://schemas.openxmlformats.org/drawingml/2006/main">
             <a:off x="3264235" y="5466828"/>
             <a:ext cx="1612900" cy="392952"/>
           </a:xfrm>
-          <a:prstGeom prst="rect">
+          <a:prstGeom xmlns:a="http://schemas.openxmlformats.org/drawingml/2006/main" prst="rect">
             <a:avLst/>
           </a:prstGeom>
         </p:spPr>
         <p:txBody>
-          <a:bodyPr vert="horz" lIns="0" tIns="0" rIns="0" bIns="0" anchor="b">
-            <a:normAutofit fontScale="85000" lnSpcReduction="20000"/>
+          <a:bodyPr xmlns:a="http://schemas.openxmlformats.org/drawingml/2006/main" vert="horz" lIns="0" tIns="0" rIns="0" bIns="0" anchor="b">
+            <a:normAutofit fontScale="100000"/>
           </a:bodyPr>
-          <a:lstStyle>
+          <a:lstStyle xmlns:a="http://schemas.openxmlformats.org/drawingml/2006/main">
             <a:lvl1pPr marL="228600" indent="-228600" algn="l">
               <a:lnSpc>
                 <a:spcPct val="90000"/>
@@ -9360,7 +10866,7 @@
               </a:defRPr>
             </a:lvl9pPr>
           </a:lstStyle>
-          <a:p>
+          <a:p xmlns:a="http://schemas.openxmlformats.org/drawingml/2006/main">
             <a:pPr marL="2540" indent="0" algn="l">
               <a:lnSpc>
                 <a:spcPct val="110000"/>
@@ -9372,7 +10878,6 @@
                 <a:spcPts val="0"/>
               </a:spcAft>
               <a:buNone/>
-              <a:defRPr/>
             </a:pPr>
             <a:r>
               <a:rPr sz="1600">
@@ -9383,41 +10888,39 @@
                 <a:ea typeface="Helvetica Neue"/>
                 <a:cs typeface="Helvetica Neue"/>
               </a:rPr>
-              <a:t>Glass recall · 24/29</a:t>
-            </a:r>
-            <a:endParaRPr sz="1600">
-              <a:solidFill>
-                <a:prstClr val="black"/>
-              </a:solidFill>
-              <a:latin typeface="Helvetica Neue"/>
-              <a:ea typeface="Helvetica Neue"/>
-              <a:cs typeface="Helvetica Neue"/>
-            </a:endParaRPr>
+              <a:t>Glass recall · 22/29</a:t>
+            </a:r>
           </a:p>
         </p:txBody>
       </p:sp>
       <p:sp>
         <p:nvSpPr>
-          <p:cNvPr id="35" name="Content Placeholder 9"/>
+          <p:cNvPr id="35" name="Content Placeholder 9">
+            <a:extLst xmlns:a="http://schemas.openxmlformats.org/drawingml/2006/main">
+              <a:ext uri="{FF2B5EF4-FFF2-40B4-BE49-F238E27FC236}">
+                <a16:creationId xmlns:a16="http://schemas.microsoft.com/office/drawing/2014/main" id="{6ABC2165-3103-0F8C-58B6-34BB68635572}"/>
+              </a:ext>
+            </a:extLst>
+          </p:cNvPr>
           <p:cNvSpPr>
-            <a:spLocks noGrp="1"/>
+            <a:spLocks xmlns:a="http://schemas.openxmlformats.org/drawingml/2006/main" noGrp="1"/>
           </p:cNvSpPr>
           <p:nvPr/>
         </p:nvSpPr>
         <p:spPr>
-          <a:xfrm>
+          <a:xfrm xmlns:a="http://schemas.openxmlformats.org/drawingml/2006/main">
             <a:off x="5771616" y="4563078"/>
             <a:ext cx="1612900" cy="903750"/>
           </a:xfrm>
-          <a:prstGeom prst="rect">
+          <a:prstGeom xmlns:a="http://schemas.openxmlformats.org/drawingml/2006/main" prst="rect">
             <a:avLst/>
           </a:prstGeom>
         </p:spPr>
         <p:txBody>
-          <a:bodyPr vert="horz" lIns="0" tIns="0" rIns="0" bIns="0" anchor="b">
-            <a:normAutofit fontScale="85000" lnSpcReduction="20000"/>
+          <a:bodyPr xmlns:a="http://schemas.openxmlformats.org/drawingml/2006/main" vert="horz" lIns="0" tIns="0" rIns="0" bIns="0" anchor="b">
+            <a:normAutofit fontScale="100000"/>
           </a:bodyPr>
-          <a:lstStyle>
+          <a:lstStyle xmlns:a="http://schemas.openxmlformats.org/drawingml/2006/main">
             <a:lvl1pPr marL="228600" indent="-228600" algn="l">
               <a:lnSpc>
                 <a:spcPct val="90000"/>
@@ -9572,7 +11075,7 @@
               </a:defRPr>
             </a:lvl9pPr>
           </a:lstStyle>
-          <a:p>
+          <a:p xmlns:a="http://schemas.openxmlformats.org/drawingml/2006/main">
             <a:pPr marL="2540" indent="0" algn="l">
               <a:lnSpc>
                 <a:spcPct val="110000"/>
@@ -9584,10 +11087,12 @@
                 <a:spcPts val="0"/>
               </a:spcAft>
               <a:buNone/>
-              <a:defRPr/>
             </a:pPr>
             <a:r>
               <a:rPr sz="5000" u="none" cap="none">
+                <a:ln>
+                  <a:noFill/>
+                </a:ln>
                 <a:solidFill>
                   <a:prstClr val="black"/>
                 </a:solidFill>
@@ -9595,41 +11100,39 @@
                 <a:ea typeface="Helvetica Neue"/>
                 <a:cs typeface="Helvetica Neue"/>
               </a:rPr>
-              <a:t>71.1%</a:t>
-            </a:r>
-            <a:endParaRPr sz="5000" u="none" cap="none">
-              <a:solidFill>
-                <a:prstClr val="black"/>
-              </a:solidFill>
-              <a:latin typeface="Helvetica Neue"/>
-              <a:ea typeface="Helvetica Neue"/>
-              <a:cs typeface="Helvetica Neue"/>
-            </a:endParaRPr>
+              <a:t>78.9%</a:t>
+            </a:r>
           </a:p>
         </p:txBody>
       </p:sp>
       <p:sp>
         <p:nvSpPr>
-          <p:cNvPr id="36" name="Content Placeholder 9"/>
+          <p:cNvPr id="36" name="Content Placeholder 9">
+            <a:extLst xmlns:a="http://schemas.openxmlformats.org/drawingml/2006/main">
+              <a:ext uri="{FF2B5EF4-FFF2-40B4-BE49-F238E27FC236}">
+                <a16:creationId xmlns:a16="http://schemas.microsoft.com/office/drawing/2014/main" id="{C48CB7DC-F282-1D69-FD55-0B1565AB0418}"/>
+              </a:ext>
+            </a:extLst>
+          </p:cNvPr>
           <p:cNvSpPr>
-            <a:spLocks noGrp="1"/>
+            <a:spLocks xmlns:a="http://schemas.openxmlformats.org/drawingml/2006/main" noGrp="1"/>
           </p:cNvSpPr>
           <p:nvPr/>
         </p:nvSpPr>
         <p:spPr>
-          <a:xfrm>
+          <a:xfrm xmlns:a="http://schemas.openxmlformats.org/drawingml/2006/main">
             <a:off x="5863056" y="5466828"/>
             <a:ext cx="1612900" cy="392952"/>
           </a:xfrm>
-          <a:prstGeom prst="rect">
+          <a:prstGeom xmlns:a="http://schemas.openxmlformats.org/drawingml/2006/main" prst="rect">
             <a:avLst/>
           </a:prstGeom>
         </p:spPr>
         <p:txBody>
-          <a:bodyPr vert="horz" lIns="0" tIns="0" rIns="0" bIns="0" anchor="b">
-            <a:normAutofit fontScale="85000" lnSpcReduction="20000"/>
+          <a:bodyPr xmlns:a="http://schemas.openxmlformats.org/drawingml/2006/main" vert="horz" lIns="0" tIns="0" rIns="0" bIns="0" anchor="b">
+            <a:normAutofit fontScale="92988"/>
           </a:bodyPr>
-          <a:lstStyle>
+          <a:lstStyle xmlns:a="http://schemas.openxmlformats.org/drawingml/2006/main">
             <a:lvl1pPr marL="228600" indent="-228600" algn="l">
               <a:lnSpc>
                 <a:spcPct val="90000"/>
@@ -9784,7 +11287,7 @@
               </a:defRPr>
             </a:lvl9pPr>
           </a:lstStyle>
-          <a:p>
+          <a:p xmlns:a="http://schemas.openxmlformats.org/drawingml/2006/main">
             <a:pPr marL="2540" indent="0" algn="l">
               <a:lnSpc>
                 <a:spcPct val="110000"/>
@@ -9796,7 +11299,6 @@
                 <a:spcPts val="0"/>
               </a:spcAft>
               <a:buNone/>
-              <a:defRPr/>
             </a:pPr>
             <a:r>
               <a:rPr sz="1600">
@@ -9807,200 +11309,210 @@
                 <a:ea typeface="Helvetica Neue"/>
                 <a:cs typeface="Helvetica Neue"/>
               </a:rPr>
-              <a:t>Scream recall · 27/38</a:t>
-            </a:r>
-            <a:endParaRPr sz="1600">
-              <a:solidFill>
-                <a:prstClr val="black"/>
-              </a:solidFill>
-              <a:latin typeface="Helvetica Neue"/>
-              <a:ea typeface="Helvetica Neue"/>
-              <a:cs typeface="Helvetica Neue"/>
-            </a:endParaRPr>
+              <a:t>Scream recall · 30/38</a:t>
+            </a:r>
           </a:p>
         </p:txBody>
       </p:sp>
       <p:sp>
         <p:nvSpPr>
-          <p:cNvPr id="4" name="Rounded Rectangle 3"/>
+          <p:cNvPr id="4" name="Rounded Rectangle 3">
+            <a:extLst xmlns:a="http://schemas.openxmlformats.org/drawingml/2006/main">
+              <a:ext uri="{FF2B5EF4-FFF2-40B4-BE49-F238E27FC236}">
+                <a16:creationId xmlns:a16="http://schemas.microsoft.com/office/drawing/2014/main" id="{BD5FE77B-90E1-5236-3990-7079CE78B791}"/>
+              </a:ext>
+            </a:extLst>
+          </p:cNvPr>
           <p:cNvSpPr>
-            <a:spLocks noGrp="1"/>
+            <a:spLocks xmlns:a="http://schemas.openxmlformats.org/drawingml/2006/main" noGrp="1"/>
           </p:cNvSpPr>
           <p:nvPr/>
         </p:nvSpPr>
         <p:spPr>
-          <a:xfrm>
+          <a:xfrm xmlns:a="http://schemas.openxmlformats.org/drawingml/2006/main">
             <a:off x="393700" y="2241550"/>
             <a:ext cx="2334563" cy="1882398"/>
           </a:xfrm>
-          <a:prstGeom prst="roundRect">
+          <a:prstGeom xmlns:a="http://schemas.openxmlformats.org/drawingml/2006/main" prst="roundRect">
             <a:avLst>
               <a:gd name="adj" fmla="val 3585"/>
             </a:avLst>
           </a:prstGeom>
-          <a:solidFill>
+          <a:solidFill xmlns:a="http://schemas.openxmlformats.org/drawingml/2006/main">
             <a:schemeClr val="bg2"/>
           </a:solidFill>
-          <a:ln>
+          <a:ln xmlns:a="http://schemas.openxmlformats.org/drawingml/2006/main">
             <a:noFill/>
           </a:ln>
         </p:spPr>
         <p:style>
-          <a:lnRef idx="2">
+          <a:lnRef xmlns:a="http://schemas.openxmlformats.org/drawingml/2006/main" idx="2">
             <a:schemeClr val="accent1">
               <a:shade val="15000"/>
             </a:schemeClr>
           </a:lnRef>
-          <a:fillRef idx="1">
+          <a:fillRef xmlns:a="http://schemas.openxmlformats.org/drawingml/2006/main" idx="1">
             <a:schemeClr val="accent1"/>
           </a:fillRef>
-          <a:effectRef idx="0">
+          <a:effectRef xmlns:a="http://schemas.openxmlformats.org/drawingml/2006/main" idx="0">
             <a:schemeClr val="accent1"/>
           </a:effectRef>
-          <a:fontRef idx="minor">
+          <a:fontRef xmlns:a="http://schemas.openxmlformats.org/drawingml/2006/main" idx="minor">
             <a:schemeClr val="lt1"/>
           </a:fontRef>
         </p:style>
         <p:txBody>
-          <a:bodyPr anchor="ctr"/>
-          <a:lstStyle/>
-          <a:p>
+          <a:bodyPr xmlns:a="http://schemas.openxmlformats.org/drawingml/2006/main" anchor="ctr"/>
+          <a:lstStyle xmlns:a="http://schemas.openxmlformats.org/drawingml/2006/main"/>
+          <a:p xmlns:a="http://schemas.openxmlformats.org/drawingml/2006/main">
             <a:pPr algn="ctr">
               <a:buNone/>
-              <a:defRPr/>
-            </a:pPr>
-            <a:endParaRPr lang="ko-KR" altLang="en-US"/>
+            </a:pPr>
           </a:p>
         </p:txBody>
       </p:sp>
       <p:sp>
         <p:nvSpPr>
-          <p:cNvPr id="5" name="Rounded Rectangle 4"/>
+          <p:cNvPr id="5" name="Rounded Rectangle 4">
+            <a:extLst xmlns:a="http://schemas.openxmlformats.org/drawingml/2006/main">
+              <a:ext uri="{FF2B5EF4-FFF2-40B4-BE49-F238E27FC236}">
+                <a16:creationId xmlns:a16="http://schemas.microsoft.com/office/drawing/2014/main" id="{60C351F7-AC2A-1B40-78B5-13B90FA91BEA}"/>
+              </a:ext>
+            </a:extLst>
+          </p:cNvPr>
           <p:cNvSpPr>
-            <a:spLocks noGrp="1"/>
+            <a:spLocks xmlns:a="http://schemas.openxmlformats.org/drawingml/2006/main" noGrp="1"/>
           </p:cNvSpPr>
           <p:nvPr/>
         </p:nvSpPr>
         <p:spPr>
-          <a:xfrm>
+          <a:xfrm xmlns:a="http://schemas.openxmlformats.org/drawingml/2006/main">
             <a:off x="2968634" y="2241550"/>
             <a:ext cx="2334563" cy="1882398"/>
           </a:xfrm>
-          <a:prstGeom prst="roundRect">
+          <a:prstGeom xmlns:a="http://schemas.openxmlformats.org/drawingml/2006/main" prst="roundRect">
             <a:avLst>
               <a:gd name="adj" fmla="val 3585"/>
             </a:avLst>
           </a:prstGeom>
-          <a:solidFill>
+          <a:solidFill xmlns:a="http://schemas.openxmlformats.org/drawingml/2006/main">
             <a:schemeClr val="bg2"/>
           </a:solidFill>
-          <a:ln>
+          <a:ln xmlns:a="http://schemas.openxmlformats.org/drawingml/2006/main">
             <a:noFill/>
           </a:ln>
         </p:spPr>
         <p:style>
-          <a:lnRef idx="2">
+          <a:lnRef xmlns:a="http://schemas.openxmlformats.org/drawingml/2006/main" idx="2">
             <a:schemeClr val="accent1">
               <a:shade val="15000"/>
             </a:schemeClr>
           </a:lnRef>
-          <a:fillRef idx="1">
+          <a:fillRef xmlns:a="http://schemas.openxmlformats.org/drawingml/2006/main" idx="1">
             <a:schemeClr val="accent1"/>
           </a:fillRef>
-          <a:effectRef idx="0">
+          <a:effectRef xmlns:a="http://schemas.openxmlformats.org/drawingml/2006/main" idx="0">
             <a:schemeClr val="accent1"/>
           </a:effectRef>
-          <a:fontRef idx="minor">
+          <a:fontRef xmlns:a="http://schemas.openxmlformats.org/drawingml/2006/main" idx="minor">
             <a:schemeClr val="lt1"/>
           </a:fontRef>
         </p:style>
         <p:txBody>
-          <a:bodyPr anchor="ctr"/>
-          <a:lstStyle/>
-          <a:p>
+          <a:bodyPr xmlns:a="http://schemas.openxmlformats.org/drawingml/2006/main" anchor="ctr"/>
+          <a:lstStyle xmlns:a="http://schemas.openxmlformats.org/drawingml/2006/main"/>
+          <a:p xmlns:a="http://schemas.openxmlformats.org/drawingml/2006/main">
             <a:pPr algn="ctr">
               <a:buNone/>
-              <a:defRPr/>
-            </a:pPr>
-            <a:endParaRPr lang="ko-KR" altLang="en-US"/>
+            </a:pPr>
           </a:p>
         </p:txBody>
       </p:sp>
       <p:sp>
         <p:nvSpPr>
-          <p:cNvPr id="7" name="Rounded Rectangle 6"/>
+          <p:cNvPr id="7" name="Rounded Rectangle 6">
+            <a:extLst xmlns:a="http://schemas.openxmlformats.org/drawingml/2006/main">
+              <a:ext uri="{FF2B5EF4-FFF2-40B4-BE49-F238E27FC236}">
+                <a16:creationId xmlns:a16="http://schemas.microsoft.com/office/drawing/2014/main" id="{11CEE641-9418-21DE-A949-29DF25A0EFFD}"/>
+              </a:ext>
+            </a:extLst>
+          </p:cNvPr>
           <p:cNvSpPr>
-            <a:spLocks noGrp="1"/>
+            <a:spLocks xmlns:a="http://schemas.openxmlformats.org/drawingml/2006/main" noGrp="1"/>
           </p:cNvSpPr>
           <p:nvPr/>
         </p:nvSpPr>
         <p:spPr>
-          <a:xfrm>
+          <a:xfrm xmlns:a="http://schemas.openxmlformats.org/drawingml/2006/main">
             <a:off x="5543569" y="2241550"/>
             <a:ext cx="2334563" cy="1882398"/>
           </a:xfrm>
-          <a:prstGeom prst="roundRect">
+          <a:prstGeom xmlns:a="http://schemas.openxmlformats.org/drawingml/2006/main" prst="roundRect">
             <a:avLst>
               <a:gd name="adj" fmla="val 3585"/>
             </a:avLst>
           </a:prstGeom>
-          <a:solidFill>
+          <a:solidFill xmlns:a="http://schemas.openxmlformats.org/drawingml/2006/main">
             <a:schemeClr val="bg2"/>
           </a:solidFill>
-          <a:ln>
+          <a:ln xmlns:a="http://schemas.openxmlformats.org/drawingml/2006/main">
             <a:noFill/>
           </a:ln>
         </p:spPr>
         <p:style>
-          <a:lnRef idx="2">
+          <a:lnRef xmlns:a="http://schemas.openxmlformats.org/drawingml/2006/main" idx="2">
             <a:schemeClr val="accent1">
               <a:shade val="15000"/>
             </a:schemeClr>
           </a:lnRef>
-          <a:fillRef idx="1">
+          <a:fillRef xmlns:a="http://schemas.openxmlformats.org/drawingml/2006/main" idx="1">
             <a:schemeClr val="accent1"/>
           </a:fillRef>
-          <a:effectRef idx="0">
+          <a:effectRef xmlns:a="http://schemas.openxmlformats.org/drawingml/2006/main" idx="0">
             <a:schemeClr val="accent1"/>
           </a:effectRef>
-          <a:fontRef idx="minor">
+          <a:fontRef xmlns:a="http://schemas.openxmlformats.org/drawingml/2006/main" idx="minor">
             <a:schemeClr val="lt1"/>
           </a:fontRef>
         </p:style>
         <p:txBody>
-          <a:bodyPr anchor="ctr"/>
-          <a:lstStyle/>
-          <a:p>
+          <a:bodyPr xmlns:a="http://schemas.openxmlformats.org/drawingml/2006/main" anchor="ctr"/>
+          <a:lstStyle xmlns:a="http://schemas.openxmlformats.org/drawingml/2006/main"/>
+          <a:p xmlns:a="http://schemas.openxmlformats.org/drawingml/2006/main">
             <a:pPr algn="ctr">
               <a:buNone/>
-              <a:defRPr/>
-            </a:pPr>
-            <a:endParaRPr lang="ko-KR" altLang="en-US"/>
+            </a:pPr>
           </a:p>
         </p:txBody>
       </p:sp>
       <p:sp>
         <p:nvSpPr>
-          <p:cNvPr id="8" name="Content Placeholder 9"/>
+          <p:cNvPr id="8" name="Content Placeholder 9">
+            <a:extLst xmlns:a="http://schemas.openxmlformats.org/drawingml/2006/main">
+              <a:ext uri="{FF2B5EF4-FFF2-40B4-BE49-F238E27FC236}">
+                <a16:creationId xmlns:a16="http://schemas.microsoft.com/office/drawing/2014/main" id="{C27408C0-0932-3E46-A6F1-86E2F1C7E1EB}"/>
+              </a:ext>
+            </a:extLst>
+          </p:cNvPr>
           <p:cNvSpPr>
-            <a:spLocks noGrp="1"/>
+            <a:spLocks xmlns:a="http://schemas.openxmlformats.org/drawingml/2006/main" noGrp="1"/>
           </p:cNvSpPr>
           <p:nvPr/>
         </p:nvSpPr>
         <p:spPr>
-          <a:xfrm>
+          <a:xfrm xmlns:a="http://schemas.openxmlformats.org/drawingml/2006/main">
             <a:off x="565150" y="2448528"/>
             <a:ext cx="1612900" cy="903750"/>
           </a:xfrm>
-          <a:prstGeom prst="rect">
+          <a:prstGeom xmlns:a="http://schemas.openxmlformats.org/drawingml/2006/main" prst="rect">
             <a:avLst/>
           </a:prstGeom>
         </p:spPr>
         <p:txBody>
-          <a:bodyPr vert="horz" lIns="0" tIns="0" rIns="0" bIns="0" anchor="b">
-            <a:normAutofit/>
+          <a:bodyPr xmlns:a="http://schemas.openxmlformats.org/drawingml/2006/main" vert="horz" lIns="0" tIns="0" rIns="0" bIns="0" anchor="b">
+            <a:normAutofit fontScale="100000"/>
           </a:bodyPr>
-          <a:lstStyle>
+          <a:lstStyle xmlns:a="http://schemas.openxmlformats.org/drawingml/2006/main">
             <a:lvl1pPr marL="228600" indent="-228600" algn="l">
               <a:lnSpc>
                 <a:spcPct val="90000"/>
@@ -10155,7 +11667,7 @@
               </a:defRPr>
             </a:lvl9pPr>
           </a:lstStyle>
-          <a:p>
+          <a:p xmlns:a="http://schemas.openxmlformats.org/drawingml/2006/main">
             <a:pPr marL="2540" indent="0" algn="l">
               <a:lnSpc>
                 <a:spcPct val="110000"/>
@@ -10167,10 +11679,12 @@
                 <a:spcPts val="0"/>
               </a:spcAft>
               <a:buNone/>
-              <a:defRPr/>
             </a:pPr>
             <a:r>
               <a:rPr sz="5000" u="none" cap="none">
+                <a:ln>
+                  <a:noFill/>
+                </a:ln>
                 <a:solidFill>
                   <a:prstClr val="black"/>
                 </a:solidFill>
@@ -10180,39 +11694,37 @@
               </a:rPr>
               <a:t>165</a:t>
             </a:r>
-            <a:endParaRPr sz="5000" u="none" cap="none">
-              <a:solidFill>
-                <a:prstClr val="black"/>
-              </a:solidFill>
-              <a:latin typeface="Helvetica Neue"/>
-              <a:ea typeface="Helvetica Neue"/>
-              <a:cs typeface="Helvetica Neue"/>
-            </a:endParaRPr>
           </a:p>
         </p:txBody>
       </p:sp>
       <p:sp>
         <p:nvSpPr>
-          <p:cNvPr id="9" name="Content Placeholder 9"/>
+          <p:cNvPr id="9" name="Content Placeholder 9">
+            <a:extLst xmlns:a="http://schemas.openxmlformats.org/drawingml/2006/main">
+              <a:ext uri="{FF2B5EF4-FFF2-40B4-BE49-F238E27FC236}">
+                <a16:creationId xmlns:a16="http://schemas.microsoft.com/office/drawing/2014/main" id="{56E44BE8-FC97-2F06-AD91-3DEB9C1337DC}"/>
+              </a:ext>
+            </a:extLst>
+          </p:cNvPr>
           <p:cNvSpPr>
-            <a:spLocks noGrp="1"/>
+            <a:spLocks xmlns:a="http://schemas.openxmlformats.org/drawingml/2006/main" noGrp="1"/>
           </p:cNvSpPr>
           <p:nvPr/>
         </p:nvSpPr>
         <p:spPr>
-          <a:xfrm>
+          <a:xfrm xmlns:a="http://schemas.openxmlformats.org/drawingml/2006/main">
             <a:off x="656590" y="3352278"/>
             <a:ext cx="1612900" cy="392952"/>
           </a:xfrm>
-          <a:prstGeom prst="rect">
+          <a:prstGeom xmlns:a="http://schemas.openxmlformats.org/drawingml/2006/main" prst="rect">
             <a:avLst/>
           </a:prstGeom>
         </p:spPr>
         <p:txBody>
-          <a:bodyPr vert="horz" lIns="0" tIns="0" rIns="0" bIns="0" anchor="b">
-            <a:normAutofit/>
+          <a:bodyPr xmlns:a="http://schemas.openxmlformats.org/drawingml/2006/main" vert="horz" lIns="0" tIns="0" rIns="0" bIns="0" anchor="b">
+            <a:normAutofit fontScale="100000"/>
           </a:bodyPr>
-          <a:lstStyle>
+          <a:lstStyle xmlns:a="http://schemas.openxmlformats.org/drawingml/2006/main">
             <a:lvl1pPr marL="228600" indent="-228600" algn="l">
               <a:lnSpc>
                 <a:spcPct val="90000"/>
@@ -10367,7 +11879,7 @@
               </a:defRPr>
             </a:lvl9pPr>
           </a:lstStyle>
-          <a:p>
+          <a:p xmlns:a="http://schemas.openxmlformats.org/drawingml/2006/main">
             <a:pPr marL="2540" indent="0" algn="l">
               <a:lnSpc>
                 <a:spcPct val="110000"/>
@@ -10379,7 +11891,6 @@
                 <a:spcPts val="0"/>
               </a:spcAft>
               <a:buNone/>
-              <a:defRPr/>
             </a:pPr>
             <a:r>
               <a:rPr sz="1600">
@@ -10392,39 +11903,37 @@
               </a:rPr>
               <a:t>Test groups</a:t>
             </a:r>
-            <a:endParaRPr sz="1600">
-              <a:solidFill>
-                <a:prstClr val="black"/>
-              </a:solidFill>
-              <a:latin typeface="Helvetica Neue"/>
-              <a:ea typeface="Helvetica Neue"/>
-              <a:cs typeface="Helvetica Neue"/>
-            </a:endParaRPr>
           </a:p>
         </p:txBody>
       </p:sp>
       <p:sp>
         <p:nvSpPr>
-          <p:cNvPr id="10" name="Content Placeholder 9"/>
+          <p:cNvPr id="10" name="Content Placeholder 9">
+            <a:extLst xmlns:a="http://schemas.openxmlformats.org/drawingml/2006/main">
+              <a:ext uri="{FF2B5EF4-FFF2-40B4-BE49-F238E27FC236}">
+                <a16:creationId xmlns:a16="http://schemas.microsoft.com/office/drawing/2014/main" id="{DF499E89-5132-2D79-D060-7F883BF46606}"/>
+              </a:ext>
+            </a:extLst>
+          </p:cNvPr>
           <p:cNvSpPr>
-            <a:spLocks noGrp="1"/>
+            <a:spLocks xmlns:a="http://schemas.openxmlformats.org/drawingml/2006/main" noGrp="1"/>
           </p:cNvSpPr>
           <p:nvPr/>
         </p:nvSpPr>
         <p:spPr>
-          <a:xfrm>
+          <a:xfrm xmlns:a="http://schemas.openxmlformats.org/drawingml/2006/main">
             <a:off x="3172795" y="2448528"/>
             <a:ext cx="1612900" cy="903750"/>
           </a:xfrm>
-          <a:prstGeom prst="rect">
+          <a:prstGeom xmlns:a="http://schemas.openxmlformats.org/drawingml/2006/main" prst="rect">
             <a:avLst/>
           </a:prstGeom>
         </p:spPr>
         <p:txBody>
-          <a:bodyPr vert="horz" lIns="0" tIns="0" rIns="0" bIns="0" anchor="b">
-            <a:normAutofit fontScale="85000" lnSpcReduction="20000"/>
+          <a:bodyPr xmlns:a="http://schemas.openxmlformats.org/drawingml/2006/main" vert="horz" lIns="0" tIns="0" rIns="0" bIns="0" anchor="b">
+            <a:normAutofit fontScale="100000"/>
           </a:bodyPr>
-          <a:lstStyle>
+          <a:lstStyle xmlns:a="http://schemas.openxmlformats.org/drawingml/2006/main">
             <a:lvl1pPr marL="228600" indent="-228600" algn="l">
               <a:lnSpc>
                 <a:spcPct val="90000"/>
@@ -10579,7 +12088,7 @@
               </a:defRPr>
             </a:lvl9pPr>
           </a:lstStyle>
-          <a:p>
+          <a:p xmlns:a="http://schemas.openxmlformats.org/drawingml/2006/main">
             <a:pPr marL="2540" indent="0" algn="l">
               <a:lnSpc>
                 <a:spcPct val="110000"/>
@@ -10591,10 +12100,12 @@
                 <a:spcPts val="0"/>
               </a:spcAft>
               <a:buNone/>
-              <a:defRPr/>
             </a:pPr>
             <a:r>
               <a:rPr sz="5000" u="none" cap="none">
+                <a:ln>
+                  <a:noFill/>
+                </a:ln>
                 <a:solidFill>
                   <a:prstClr val="black"/>
                 </a:solidFill>
@@ -10602,41 +12113,39 @@
                 <a:ea typeface="Helvetica Neue"/>
                 <a:cs typeface="Helvetica Neue"/>
               </a:rPr>
-              <a:t>82.4%</a:t>
-            </a:r>
-            <a:endParaRPr sz="5000" u="none" cap="none">
-              <a:solidFill>
-                <a:prstClr val="black"/>
-              </a:solidFill>
-              <a:latin typeface="Helvetica Neue"/>
-              <a:ea typeface="Helvetica Neue"/>
-              <a:cs typeface="Helvetica Neue"/>
-            </a:endParaRPr>
+              <a:t>85.5%</a:t>
+            </a:r>
           </a:p>
         </p:txBody>
       </p:sp>
       <p:sp>
         <p:nvSpPr>
-          <p:cNvPr id="11" name="Content Placeholder 9"/>
+          <p:cNvPr id="11" name="Content Placeholder 9">
+            <a:extLst xmlns:a="http://schemas.openxmlformats.org/drawingml/2006/main">
+              <a:ext uri="{FF2B5EF4-FFF2-40B4-BE49-F238E27FC236}">
+                <a16:creationId xmlns:a16="http://schemas.microsoft.com/office/drawing/2014/main" id="{5C3FD83C-7E51-3532-0CC5-3111AC378682}"/>
+              </a:ext>
+            </a:extLst>
+          </p:cNvPr>
           <p:cNvSpPr>
-            <a:spLocks noGrp="1"/>
+            <a:spLocks xmlns:a="http://schemas.openxmlformats.org/drawingml/2006/main" noGrp="1"/>
           </p:cNvSpPr>
           <p:nvPr/>
         </p:nvSpPr>
         <p:spPr>
-          <a:xfrm>
+          <a:xfrm xmlns:a="http://schemas.openxmlformats.org/drawingml/2006/main">
             <a:off x="3264235" y="3352278"/>
             <a:ext cx="1612900" cy="392952"/>
           </a:xfrm>
-          <a:prstGeom prst="rect">
+          <a:prstGeom xmlns:a="http://schemas.openxmlformats.org/drawingml/2006/main" prst="rect">
             <a:avLst/>
           </a:prstGeom>
         </p:spPr>
         <p:txBody>
-          <a:bodyPr vert="horz" lIns="0" tIns="0" rIns="0" bIns="0" anchor="b">
-            <a:normAutofit fontScale="85000" lnSpcReduction="20000"/>
+          <a:bodyPr xmlns:a="http://schemas.openxmlformats.org/drawingml/2006/main" vert="horz" lIns="0" tIns="0" rIns="0" bIns="0" anchor="b">
+            <a:normAutofit fontScale="100000"/>
           </a:bodyPr>
-          <a:lstStyle>
+          <a:lstStyle xmlns:a="http://schemas.openxmlformats.org/drawingml/2006/main">
             <a:lvl1pPr marL="228600" indent="-228600" algn="l">
               <a:lnSpc>
                 <a:spcPct val="90000"/>
@@ -10791,7 +12300,7 @@
               </a:defRPr>
             </a:lvl9pPr>
           </a:lstStyle>
-          <a:p>
+          <a:p xmlns:a="http://schemas.openxmlformats.org/drawingml/2006/main">
             <a:pPr marL="2540" indent="0" algn="l">
               <a:lnSpc>
                 <a:spcPct val="110000"/>
@@ -10803,7 +12312,6 @@
                 <a:spcPts val="0"/>
               </a:spcAft>
               <a:buNone/>
-              <a:defRPr/>
             </a:pPr>
             <a:r>
               <a:rPr sz="1600">
@@ -10814,41 +12322,39 @@
                 <a:ea typeface="Helvetica Neue"/>
                 <a:cs typeface="Helvetica Neue"/>
               </a:rPr>
-              <a:t>Accuracy · 136/165</a:t>
-            </a:r>
-            <a:endParaRPr sz="1600">
-              <a:solidFill>
-                <a:prstClr val="black"/>
-              </a:solidFill>
-              <a:latin typeface="Helvetica Neue"/>
-              <a:ea typeface="Helvetica Neue"/>
-              <a:cs typeface="Helvetica Neue"/>
-            </a:endParaRPr>
+              <a:t>Accuracy · 141/165</a:t>
+            </a:r>
           </a:p>
         </p:txBody>
       </p:sp>
       <p:sp>
         <p:nvSpPr>
-          <p:cNvPr id="12" name="Content Placeholder 9"/>
+          <p:cNvPr id="12" name="Content Placeholder 9">
+            <a:extLst xmlns:a="http://schemas.openxmlformats.org/drawingml/2006/main">
+              <a:ext uri="{FF2B5EF4-FFF2-40B4-BE49-F238E27FC236}">
+                <a16:creationId xmlns:a16="http://schemas.microsoft.com/office/drawing/2014/main" id="{69C6FF59-91B0-A266-F811-6C509F30CF4B}"/>
+              </a:ext>
+            </a:extLst>
+          </p:cNvPr>
           <p:cNvSpPr>
-            <a:spLocks noGrp="1"/>
+            <a:spLocks xmlns:a="http://schemas.openxmlformats.org/drawingml/2006/main" noGrp="1"/>
           </p:cNvSpPr>
           <p:nvPr/>
         </p:nvSpPr>
         <p:spPr>
-          <a:xfrm>
+          <a:xfrm xmlns:a="http://schemas.openxmlformats.org/drawingml/2006/main">
             <a:off x="5771616" y="2448528"/>
             <a:ext cx="1612900" cy="903750"/>
           </a:xfrm>
-          <a:prstGeom prst="rect">
+          <a:prstGeom xmlns:a="http://schemas.openxmlformats.org/drawingml/2006/main" prst="rect">
             <a:avLst/>
           </a:prstGeom>
         </p:spPr>
         <p:txBody>
-          <a:bodyPr vert="horz" lIns="0" tIns="0" rIns="0" bIns="0" anchor="b">
-            <a:normAutofit/>
+          <a:bodyPr xmlns:a="http://schemas.openxmlformats.org/drawingml/2006/main" vert="horz" lIns="0" tIns="0" rIns="0" bIns="0" anchor="b">
+            <a:normAutofit fontScale="100000"/>
           </a:bodyPr>
-          <a:lstStyle>
+          <a:lstStyle xmlns:a="http://schemas.openxmlformats.org/drawingml/2006/main">
             <a:lvl1pPr marL="228600" indent="-228600" algn="l">
               <a:lnSpc>
                 <a:spcPct val="90000"/>
@@ -11003,7 +12509,7 @@
               </a:defRPr>
             </a:lvl9pPr>
           </a:lstStyle>
-          <a:p>
+          <a:p xmlns:a="http://schemas.openxmlformats.org/drawingml/2006/main">
             <a:pPr marL="2540" indent="0" algn="l">
               <a:lnSpc>
                 <a:spcPct val="110000"/>
@@ -11015,10 +12521,12 @@
                 <a:spcPts val="0"/>
               </a:spcAft>
               <a:buNone/>
-              <a:defRPr/>
             </a:pPr>
             <a:r>
               <a:rPr sz="5000" u="none" cap="none">
+                <a:ln>
+                  <a:noFill/>
+                </a:ln>
                 <a:solidFill>
                   <a:prstClr val="black"/>
                 </a:solidFill>
@@ -11026,41 +12534,39 @@
                 <a:ea typeface="Helvetica Neue"/>
                 <a:cs typeface="Helvetica Neue"/>
               </a:rPr>
-              <a:t>0.801</a:t>
-            </a:r>
-            <a:endParaRPr sz="5000" u="none" cap="none">
-              <a:solidFill>
-                <a:prstClr val="black"/>
-              </a:solidFill>
-              <a:latin typeface="Helvetica Neue"/>
-              <a:ea typeface="Helvetica Neue"/>
-              <a:cs typeface="Helvetica Neue"/>
-            </a:endParaRPr>
+              <a:t>0.837</a:t>
+            </a:r>
           </a:p>
         </p:txBody>
       </p:sp>
       <p:sp>
         <p:nvSpPr>
-          <p:cNvPr id="13" name="Content Placeholder 9"/>
+          <p:cNvPr id="13" name="Content Placeholder 9">
+            <a:extLst xmlns:a="http://schemas.openxmlformats.org/drawingml/2006/main">
+              <a:ext uri="{FF2B5EF4-FFF2-40B4-BE49-F238E27FC236}">
+                <a16:creationId xmlns:a16="http://schemas.microsoft.com/office/drawing/2014/main" id="{CB933D0C-0148-034A-E964-ED7F56E5FB68}"/>
+              </a:ext>
+            </a:extLst>
+          </p:cNvPr>
           <p:cNvSpPr>
-            <a:spLocks noGrp="1"/>
+            <a:spLocks xmlns:a="http://schemas.openxmlformats.org/drawingml/2006/main" noGrp="1"/>
           </p:cNvSpPr>
           <p:nvPr/>
         </p:nvSpPr>
         <p:spPr>
-          <a:xfrm>
+          <a:xfrm xmlns:a="http://schemas.openxmlformats.org/drawingml/2006/main">
             <a:off x="5863056" y="3352278"/>
             <a:ext cx="1612900" cy="392952"/>
           </a:xfrm>
-          <a:prstGeom prst="rect">
+          <a:prstGeom xmlns:a="http://schemas.openxmlformats.org/drawingml/2006/main" prst="rect">
             <a:avLst/>
           </a:prstGeom>
         </p:spPr>
         <p:txBody>
-          <a:bodyPr vert="horz" lIns="0" tIns="0" rIns="0" bIns="0" anchor="b">
-            <a:normAutofit/>
+          <a:bodyPr xmlns:a="http://schemas.openxmlformats.org/drawingml/2006/main" vert="horz" lIns="0" tIns="0" rIns="0" bIns="0" anchor="b">
+            <a:normAutofit fontScale="100000"/>
           </a:bodyPr>
-          <a:lstStyle>
+          <a:lstStyle xmlns:a="http://schemas.openxmlformats.org/drawingml/2006/main">
             <a:lvl1pPr marL="228600" indent="-228600" algn="l">
               <a:lnSpc>
                 <a:spcPct val="90000"/>
@@ -11215,7 +12721,7 @@
               </a:defRPr>
             </a:lvl9pPr>
           </a:lstStyle>
-          <a:p>
+          <a:p xmlns:a="http://schemas.openxmlformats.org/drawingml/2006/main">
             <a:pPr marL="2540" indent="0" algn="l">
               <a:lnSpc>
                 <a:spcPct val="110000"/>
@@ -11227,7 +12733,6 @@
                 <a:spcPts val="0"/>
               </a:spcAft>
               <a:buNone/>
-              <a:defRPr/>
             </a:pPr>
             <a:r>
               <a:rPr sz="1600">
@@ -11240,35 +12745,21 @@
               </a:rPr>
               <a:t>Macro F1</a:t>
             </a:r>
-            <a:endParaRPr sz="1600">
-              <a:solidFill>
-                <a:prstClr val="black"/>
-              </a:solidFill>
-              <a:latin typeface="Helvetica Neue"/>
-              <a:ea typeface="Helvetica Neue"/>
-              <a:cs typeface="Helvetica Neue"/>
-            </a:endParaRPr>
           </a:p>
         </p:txBody>
       </p:sp>
     </p:spTree>
+    <p:extLst>
+      <p:ext uri="{BB962C8B-B14F-4D97-AF65-F5344CB8AC3E}">
+        <p14:creationId xmlns:p14="http://schemas.microsoft.com/office/powerpoint/2010/main" val="855019973"/>
+      </p:ext>
+    </p:extLst>
   </p:cSld>
-  <p:clrMapOvr>
-    <a:masterClrMapping/>
-  </p:clrMapOvr>
-  <mc:AlternateContent xmlns:mc="http://schemas.openxmlformats.org/markup-compatibility/2006">
-    <mc:Choice xmlns:p14="http://schemas.microsoft.com/office/powerpoint/2010/main" Requires="p14">
-      <p:transition xmlns:mc="http://schemas.openxmlformats.org/markup-compatibility/2006" xmlns:p14="http://schemas.microsoft.com/office/powerpoint/2010/main" mc:Ignorable="p14" p14:dur="500"/>
-    </mc:Choice>
-    <mc:Fallback>
-      <p:transition/>
-    </mc:Fallback>
-  </mc:AlternateContent>
 </p:sld>
 </file>
 
 <file path=ppt/slides/slide7.xml><?xml version="1.0" encoding="utf-8"?>
-<p:sld xmlns:r="http://schemas.openxmlformats.org/officeDocument/2006/relationships" xmlns:c="http://schemas.openxmlformats.org/drawingml/2006/chart" xmlns:a="http://schemas.openxmlformats.org/drawingml/2006/main" xmlns:dgm="http://schemas.openxmlformats.org/drawingml/2006/diagram" xmlns:dsp="http://schemas.microsoft.com/office/drawing/2008/diagram" xmlns:p="http://schemas.openxmlformats.org/presentationml/2006/main">
+<p:sld xmlns:p="http://schemas.openxmlformats.org/presentationml/2006/main">
   <p:cSld>
     <p:spTree>
       <p:nvGrpSpPr>
@@ -11277,88 +12768,93 @@
         <p:nvPr/>
       </p:nvGrpSpPr>
       <p:grpSpPr>
-        <a:xfrm>
-          <a:off x="0" y="0"/>
-          <a:ext cx="0" cy="0"/>
-          <a:chOff x="0" y="0"/>
-          <a:chExt cx="0" cy="0"/>
-        </a:xfrm>
+        <a:xfrm xmlns:a="http://schemas.openxmlformats.org/drawingml/2006/main"/>
       </p:grpSpPr>
       <p:sp>
         <p:nvSpPr>
-          <p:cNvPr id="19" name="Rounded Rectangle 18"/>
+          <p:cNvPr id="19" name="Rounded Rectangle 18">
+            <a:extLst xmlns:a="http://schemas.openxmlformats.org/drawingml/2006/main">
+              <a:ext uri="{FF2B5EF4-FFF2-40B4-BE49-F238E27FC236}">
+                <a16:creationId xmlns:a16="http://schemas.microsoft.com/office/drawing/2014/main" id="{1D44F7AB-1763-C9DF-D07A-AAEE9DB548AE}"/>
+              </a:ext>
+            </a:extLst>
+          </p:cNvPr>
           <p:cNvSpPr>
-            <a:spLocks noGrp="1"/>
+            <a:spLocks xmlns:a="http://schemas.openxmlformats.org/drawingml/2006/main" noGrp="1"/>
           </p:cNvSpPr>
           <p:nvPr/>
         </p:nvSpPr>
         <p:spPr>
-          <a:xfrm>
+          <a:xfrm xmlns:a="http://schemas.openxmlformats.org/drawingml/2006/main">
             <a:off x="8233335" y="3022600"/>
             <a:ext cx="2581975" cy="2971800"/>
           </a:xfrm>
-          <a:prstGeom prst="roundRect">
+          <a:prstGeom xmlns:a="http://schemas.openxmlformats.org/drawingml/2006/main" prst="roundRect">
             <a:avLst>
               <a:gd name="adj" fmla="val 0"/>
             </a:avLst>
           </a:prstGeom>
-          <a:solidFill>
+          <a:solidFill xmlns:a="http://schemas.openxmlformats.org/drawingml/2006/main">
             <a:schemeClr val="bg2"/>
           </a:solidFill>
-          <a:ln>
+          <a:ln xmlns:a="http://schemas.openxmlformats.org/drawingml/2006/main">
             <a:noFill/>
           </a:ln>
         </p:spPr>
         <p:style>
-          <a:lnRef idx="2">
+          <a:lnRef xmlns:a="http://schemas.openxmlformats.org/drawingml/2006/main" idx="2">
             <a:schemeClr val="accent1">
               <a:shade val="15000"/>
             </a:schemeClr>
           </a:lnRef>
-          <a:fillRef idx="1">
+          <a:fillRef xmlns:a="http://schemas.openxmlformats.org/drawingml/2006/main" idx="1">
             <a:schemeClr val="accent1"/>
           </a:fillRef>
-          <a:effectRef idx="0">
+          <a:effectRef xmlns:a="http://schemas.openxmlformats.org/drawingml/2006/main" idx="0">
             <a:schemeClr val="accent1"/>
           </a:effectRef>
-          <a:fontRef idx="minor">
+          <a:fontRef xmlns:a="http://schemas.openxmlformats.org/drawingml/2006/main" idx="minor">
             <a:schemeClr val="lt1"/>
           </a:fontRef>
         </p:style>
         <p:txBody>
-          <a:bodyPr anchor="ctr"/>
-          <a:lstStyle/>
-          <a:p>
+          <a:bodyPr xmlns:a="http://schemas.openxmlformats.org/drawingml/2006/main" anchor="ctr"/>
+          <a:lstStyle xmlns:a="http://schemas.openxmlformats.org/drawingml/2006/main"/>
+          <a:p xmlns:a="http://schemas.openxmlformats.org/drawingml/2006/main">
             <a:pPr algn="ctr">
               <a:buNone/>
-              <a:defRPr/>
-            </a:pPr>
-            <a:endParaRPr lang="ko-KR" altLang="en-US"/>
+            </a:pPr>
           </a:p>
         </p:txBody>
       </p:sp>
       <p:sp>
         <p:nvSpPr>
-          <p:cNvPr id="26" name="Content Placeholder 15"/>
+          <p:cNvPr id="26" name="Content Placeholder 15">
+            <a:extLst xmlns:a="http://schemas.openxmlformats.org/drawingml/2006/main">
+              <a:ext uri="{FF2B5EF4-FFF2-40B4-BE49-F238E27FC236}">
+                <a16:creationId xmlns:a16="http://schemas.microsoft.com/office/drawing/2014/main" id="{DEA69B8B-AC82-5D8D-6DC3-1435E10EFA74}"/>
+              </a:ext>
+            </a:extLst>
+          </p:cNvPr>
           <p:cNvSpPr>
-            <a:spLocks noGrp="1"/>
+            <a:spLocks xmlns:a="http://schemas.openxmlformats.org/drawingml/2006/main" noGrp="1"/>
           </p:cNvSpPr>
           <p:nvPr/>
         </p:nvSpPr>
         <p:spPr>
-          <a:xfrm>
+          <a:xfrm xmlns:a="http://schemas.openxmlformats.org/drawingml/2006/main">
             <a:off x="8458602" y="3325812"/>
             <a:ext cx="2145400" cy="1677988"/>
           </a:xfrm>
-          <a:prstGeom prst="rect">
+          <a:prstGeom xmlns:a="http://schemas.openxmlformats.org/drawingml/2006/main" prst="rect">
             <a:avLst/>
           </a:prstGeom>
         </p:spPr>
         <p:txBody>
-          <a:bodyPr vert="horz" lIns="0" tIns="0" rIns="0" bIns="0">
+          <a:bodyPr xmlns:a="http://schemas.openxmlformats.org/drawingml/2006/main" vert="horz" lIns="0" tIns="0" rIns="0" bIns="0">
             <a:noAutofit/>
           </a:bodyPr>
-          <a:lstStyle>
+          <a:lstStyle xmlns:a="http://schemas.openxmlformats.org/drawingml/2006/main">
             <a:lvl1pPr marL="228600" indent="-228600" algn="l">
               <a:lnSpc>
                 <a:spcPct val="90000"/>
@@ -11513,7 +13009,7 @@
               </a:defRPr>
             </a:lvl9pPr>
           </a:lstStyle>
-          <a:p>
+          <a:p xmlns:a="http://schemas.openxmlformats.org/drawingml/2006/main">
             <a:pPr marL="0" indent="0">
               <a:lnSpc>
                 <a:spcPct val="114000"/>
@@ -11525,7 +13021,6 @@
                 <a:spcPts val="800"/>
               </a:spcAft>
               <a:buNone/>
-              <a:defRPr/>
             </a:pPr>
             <a:r>
               <a:rPr>
@@ -11533,15 +13028,10 @@
                 <a:ea typeface="Helvetica Neue"/>
                 <a:cs typeface="Helvetica Neue"/>
               </a:rPr>
-              <a:t>CANDIDATE C</a:t>
-            </a:r>
-            <a:endParaRPr>
-              <a:latin typeface="Helvetica Neue"/>
-              <a:ea typeface="Helvetica Neue"/>
-              <a:cs typeface="Helvetica Neue"/>
-            </a:endParaRPr>
-          </a:p>
-          <a:p>
+              <a:t>LOW-THRESHOLD ABLATION</a:t>
+            </a:r>
+          </a:p>
+          <a:p xmlns:a="http://schemas.openxmlformats.org/drawingml/2006/main">
             <a:pPr marL="0" indent="0">
               <a:lnSpc>
                 <a:spcPct val="114000"/>
@@ -11553,7 +13043,6 @@
                 <a:spcPts val="800"/>
               </a:spcAft>
               <a:buNone/>
-              <a:defRPr/>
             </a:pPr>
             <a:r>
               <a:rPr sz="1400">
@@ -11561,38 +13050,39 @@
                 <a:ea typeface="Helvetica Neue"/>
                 <a:cs typeface="Helvetica Neue"/>
               </a:rPr>
-              <a:t>Normal false alarms fell to 3.2%, but scream recall was only 60.5%. We rejected the upgrade.</a:t>
-            </a:r>
-            <a:endParaRPr sz="1400">
-              <a:latin typeface="Helvetica Neue"/>
-              <a:ea typeface="Helvetica Neue"/>
-              <a:cs typeface="Helvetica Neue"/>
-            </a:endParaRPr>
+              <a:t>Kept the relaxed shortcut; removed its required YAMNet gate. This unsafe variant: 58.2% false alarms. Final Fusion: 9.2%.</a:t>
+            </a:r>
           </a:p>
         </p:txBody>
       </p:sp>
       <p:sp>
         <p:nvSpPr>
-          <p:cNvPr id="27" name="Text Placeholder 16"/>
+          <p:cNvPr id="27" name="Text Placeholder 16">
+            <a:extLst xmlns:a="http://schemas.openxmlformats.org/drawingml/2006/main">
+              <a:ext uri="{FF2B5EF4-FFF2-40B4-BE49-F238E27FC236}">
+                <a16:creationId xmlns:a16="http://schemas.microsoft.com/office/drawing/2014/main" id="{B6300F8B-E97D-EE9E-4225-90702D36C4D1}"/>
+              </a:ext>
+            </a:extLst>
+          </p:cNvPr>
           <p:cNvSpPr>
-            <a:spLocks noGrp="1"/>
+            <a:spLocks xmlns:a="http://schemas.openxmlformats.org/drawingml/2006/main" noGrp="1"/>
           </p:cNvSpPr>
           <p:nvPr/>
         </p:nvSpPr>
         <p:spPr>
-          <a:xfrm>
+          <a:xfrm xmlns:a="http://schemas.openxmlformats.org/drawingml/2006/main">
             <a:off x="8487334" y="5544658"/>
             <a:ext cx="1686860" cy="207014"/>
           </a:xfrm>
-          <a:prstGeom prst="rect">
+          <a:prstGeom xmlns:a="http://schemas.openxmlformats.org/drawingml/2006/main" prst="rect">
             <a:avLst/>
           </a:prstGeom>
         </p:spPr>
         <p:txBody>
-          <a:bodyPr vert="horz" lIns="0" tIns="0" rIns="0" bIns="0">
+          <a:bodyPr xmlns:a="http://schemas.openxmlformats.org/drawingml/2006/main" vert="horz" lIns="0" tIns="0" rIns="0" bIns="0">
             <a:noAutofit/>
           </a:bodyPr>
-          <a:lstStyle>
+          <a:lstStyle xmlns:a="http://schemas.openxmlformats.org/drawingml/2006/main">
             <a:lvl1pPr marL="228600" indent="-228600" algn="l">
               <a:lnSpc>
                 <a:spcPct val="90000"/>
@@ -11747,7 +13237,7 @@
               </a:defRPr>
             </a:lvl9pPr>
           </a:lstStyle>
-          <a:p>
+          <a:p xmlns:a="http://schemas.openxmlformats.org/drawingml/2006/main">
             <a:pPr marL="0" indent="0">
               <a:lnSpc>
                 <a:spcPct val="114000"/>
@@ -11759,7 +13249,6 @@
                 <a:spcPts val="800"/>
               </a:spcAft>
               <a:buNone/>
-              <a:defRPr/>
             </a:pPr>
             <a:r>
               <a:rPr sz="1400">
@@ -11770,48 +13259,46 @@
                 <a:ea typeface="Helvetica Neue"/>
                 <a:cs typeface="Helvetica Neue"/>
               </a:rPr>
-              <a:t>FINAL SELECTION</a:t>
-            </a:r>
-            <a:endParaRPr sz="1400">
-              <a:solidFill>
-                <a:prstClr val="black"/>
-              </a:solidFill>
-              <a:latin typeface="Helvetica Neue"/>
-              <a:ea typeface="Helvetica Neue"/>
-              <a:cs typeface="Helvetica Neue"/>
-            </a:endParaRPr>
+              <a:t>COMPONENT TEST</a:t>
+            </a:r>
           </a:p>
         </p:txBody>
       </p:sp>
       <p:sp>
         <p:nvSpPr>
-          <p:cNvPr id="28" name="Google Shape;2261;p159"/>
+          <p:cNvPr id="28" name="Google Shape;2261;p159">
+            <a:extLst xmlns:a="http://schemas.openxmlformats.org/drawingml/2006/main">
+              <a:ext uri="{FF2B5EF4-FFF2-40B4-BE49-F238E27FC236}">
+                <a16:creationId xmlns:a16="http://schemas.microsoft.com/office/drawing/2014/main" id="{D866E886-664F-3FB7-D53F-EC59490BDA56}"/>
+              </a:ext>
+            </a:extLst>
+          </p:cNvPr>
           <p:cNvSpPr>
-            <a:spLocks noGrp="1"/>
+            <a:spLocks xmlns:a="http://schemas.openxmlformats.org/drawingml/2006/main" noGrp="1"/>
           </p:cNvSpPr>
           <p:nvPr/>
         </p:nvSpPr>
         <p:spPr>
-          <a:xfrm>
+          <a:xfrm xmlns:a="http://schemas.openxmlformats.org/drawingml/2006/main">
             <a:off x="8460678" y="5288071"/>
             <a:ext cx="107100" cy="107100"/>
           </a:xfrm>
-          <a:prstGeom prst="ellipse">
+          <a:prstGeom xmlns:a="http://schemas.openxmlformats.org/drawingml/2006/main" prst="ellipse">
             <a:avLst/>
           </a:prstGeom>
-          <a:solidFill>
+          <a:solidFill xmlns:a="http://schemas.openxmlformats.org/drawingml/2006/main">
             <a:schemeClr val="dk1"/>
           </a:solidFill>
-          <a:ln>
+          <a:ln xmlns:a="http://schemas.openxmlformats.org/drawingml/2006/main">
             <a:noFill/>
           </a:ln>
         </p:spPr>
         <p:txBody>
-          <a:bodyPr wrap="square" lIns="91424" tIns="91424" rIns="91424" bIns="91424" anchor="ctr">
+          <a:bodyPr xmlns:a="http://schemas.openxmlformats.org/drawingml/2006/main" spcFirstLastPara="1" wrap="square" lIns="91425" tIns="91425" rIns="91425" bIns="91425" anchor="ctr">
             <a:noAutofit/>
           </a:bodyPr>
-          <a:lstStyle/>
-          <a:p>
+          <a:lstStyle xmlns:a="http://schemas.openxmlformats.org/drawingml/2006/main"/>
+          <a:p xmlns:a="http://schemas.openxmlformats.org/drawingml/2006/main">
             <a:pPr marL="0" indent="0" algn="ctr">
               <a:lnSpc>
                 <a:spcPct val="100000"/>
@@ -11823,87 +13310,95 @@
                 <a:spcPts val="0"/>
               </a:spcAft>
               <a:buNone/>
-              <a:defRPr/>
-            </a:pPr>
-            <a:endParaRPr lang="ko-KR" altLang="en-US"/>
+            </a:pPr>
           </a:p>
         </p:txBody>
       </p:sp>
       <p:sp>
         <p:nvSpPr>
-          <p:cNvPr id="12" name="Rounded Rectangle 11"/>
+          <p:cNvPr id="12" name="Rounded Rectangle 11">
+            <a:extLst xmlns:a="http://schemas.openxmlformats.org/drawingml/2006/main">
+              <a:ext uri="{FF2B5EF4-FFF2-40B4-BE49-F238E27FC236}">
+                <a16:creationId xmlns:a16="http://schemas.microsoft.com/office/drawing/2014/main" id="{9164D62F-0E28-6899-D1A2-846CA2FAA06B}"/>
+              </a:ext>
+            </a:extLst>
+          </p:cNvPr>
           <p:cNvSpPr>
-            <a:spLocks noGrp="1"/>
+            <a:spLocks xmlns:a="http://schemas.openxmlformats.org/drawingml/2006/main" noGrp="1"/>
           </p:cNvSpPr>
           <p:nvPr/>
         </p:nvSpPr>
         <p:spPr>
-          <a:xfrm>
+          <a:xfrm xmlns:a="http://schemas.openxmlformats.org/drawingml/2006/main">
             <a:off x="4293347" y="3022600"/>
             <a:ext cx="2581975" cy="2971800"/>
           </a:xfrm>
-          <a:prstGeom prst="roundRect">
+          <a:prstGeom xmlns:a="http://schemas.openxmlformats.org/drawingml/2006/main" prst="roundRect">
             <a:avLst>
               <a:gd name="adj" fmla="val 0"/>
             </a:avLst>
           </a:prstGeom>
-          <a:solidFill>
+          <a:solidFill xmlns:a="http://schemas.openxmlformats.org/drawingml/2006/main">
             <a:schemeClr val="bg2"/>
           </a:solidFill>
-          <a:ln>
+          <a:ln xmlns:a="http://schemas.openxmlformats.org/drawingml/2006/main">
             <a:noFill/>
           </a:ln>
         </p:spPr>
         <p:style>
-          <a:lnRef idx="2">
+          <a:lnRef xmlns:a="http://schemas.openxmlformats.org/drawingml/2006/main" idx="2">
             <a:schemeClr val="accent1">
               <a:shade val="15000"/>
             </a:schemeClr>
           </a:lnRef>
-          <a:fillRef idx="1">
+          <a:fillRef xmlns:a="http://schemas.openxmlformats.org/drawingml/2006/main" idx="1">
             <a:schemeClr val="accent1"/>
           </a:fillRef>
-          <a:effectRef idx="0">
+          <a:effectRef xmlns:a="http://schemas.openxmlformats.org/drawingml/2006/main" idx="0">
             <a:schemeClr val="accent1"/>
           </a:effectRef>
-          <a:fontRef idx="minor">
+          <a:fontRef xmlns:a="http://schemas.openxmlformats.org/drawingml/2006/main" idx="minor">
             <a:schemeClr val="lt1"/>
           </a:fontRef>
         </p:style>
         <p:txBody>
-          <a:bodyPr anchor="ctr"/>
-          <a:lstStyle/>
-          <a:p>
+          <a:bodyPr xmlns:a="http://schemas.openxmlformats.org/drawingml/2006/main" anchor="ctr"/>
+          <a:lstStyle xmlns:a="http://schemas.openxmlformats.org/drawingml/2006/main"/>
+          <a:p xmlns:a="http://schemas.openxmlformats.org/drawingml/2006/main">
             <a:pPr algn="ctr">
               <a:buNone/>
-              <a:defRPr/>
-            </a:pPr>
-            <a:endParaRPr lang="ko-KR" altLang="en-US"/>
+            </a:pPr>
           </a:p>
         </p:txBody>
       </p:sp>
       <p:sp>
         <p:nvSpPr>
-          <p:cNvPr id="13" name="Content Placeholder 15"/>
+          <p:cNvPr id="13" name="Content Placeholder 15">
+            <a:extLst xmlns:a="http://schemas.openxmlformats.org/drawingml/2006/main">
+              <a:ext uri="{FF2B5EF4-FFF2-40B4-BE49-F238E27FC236}">
+                <a16:creationId xmlns:a16="http://schemas.microsoft.com/office/drawing/2014/main" id="{74B5E1C3-F19B-1098-5782-2ABB1D1A91AF}"/>
+              </a:ext>
+            </a:extLst>
+          </p:cNvPr>
           <p:cNvSpPr>
-            <a:spLocks noGrp="1"/>
+            <a:spLocks xmlns:a="http://schemas.openxmlformats.org/drawingml/2006/main" noGrp="1"/>
           </p:cNvSpPr>
           <p:nvPr/>
         </p:nvSpPr>
         <p:spPr>
-          <a:xfrm>
+          <a:xfrm xmlns:a="http://schemas.openxmlformats.org/drawingml/2006/main">
             <a:off x="4518614" y="3325812"/>
             <a:ext cx="2145400" cy="1677988"/>
           </a:xfrm>
-          <a:prstGeom prst="rect">
+          <a:prstGeom xmlns:a="http://schemas.openxmlformats.org/drawingml/2006/main" prst="rect">
             <a:avLst/>
           </a:prstGeom>
         </p:spPr>
         <p:txBody>
-          <a:bodyPr vert="horz" lIns="0" tIns="0" rIns="0" bIns="0">
+          <a:bodyPr xmlns:a="http://schemas.openxmlformats.org/drawingml/2006/main" vert="horz" lIns="0" tIns="0" rIns="0" bIns="0">
             <a:noAutofit/>
           </a:bodyPr>
-          <a:lstStyle>
+          <a:lstStyle xmlns:a="http://schemas.openxmlformats.org/drawingml/2006/main">
             <a:lvl1pPr marL="228600" indent="-228600" algn="l">
               <a:lnSpc>
                 <a:spcPct val="90000"/>
@@ -12058,7 +13553,7 @@
               </a:defRPr>
             </a:lvl9pPr>
           </a:lstStyle>
-          <a:p>
+          <a:p xmlns:a="http://schemas.openxmlformats.org/drawingml/2006/main">
             <a:pPr marL="0" indent="0">
               <a:lnSpc>
                 <a:spcPct val="114000"/>
@@ -12070,7 +13565,6 @@
                 <a:spcPts val="800"/>
               </a:spcAft>
               <a:buNone/>
-              <a:defRPr/>
             </a:pPr>
             <a:r>
               <a:rPr>
@@ -12080,13 +13574,8 @@
               </a:rPr>
               <a:t>BROAD LABELS</a:t>
             </a:r>
-            <a:endParaRPr>
-              <a:latin typeface="Helvetica Neue"/>
-              <a:ea typeface="Helvetica Neue"/>
-              <a:cs typeface="Helvetica Neue"/>
-            </a:endParaRPr>
-          </a:p>
-          <a:p>
+          </a:p>
+          <a:p xmlns:a="http://schemas.openxmlformats.org/drawingml/2006/main">
             <a:pPr marL="0" indent="0">
               <a:lnSpc>
                 <a:spcPct val="114000"/>
@@ -12098,7 +13587,6 @@
                 <a:spcPts val="800"/>
               </a:spcAft>
               <a:buNone/>
-              <a:defRPr/>
             </a:pPr>
             <a:r>
               <a:rPr sz="1400">
@@ -12108,89 +13596,94 @@
               </a:rPr>
               <a:t>Generic breaking sounds polluted the glass class. We removed 158 unverified clips and rebuilt the split.</a:t>
             </a:r>
-            <a:endParaRPr sz="1400">
-              <a:latin typeface="Helvetica Neue"/>
-              <a:ea typeface="Helvetica Neue"/>
-              <a:cs typeface="Helvetica Neue"/>
-            </a:endParaRPr>
           </a:p>
         </p:txBody>
       </p:sp>
       <p:sp>
         <p:nvSpPr>
-          <p:cNvPr id="7" name="Rounded Rectangle 6"/>
+          <p:cNvPr id="7" name="Rounded Rectangle 6">
+            <a:extLst xmlns:a="http://schemas.openxmlformats.org/drawingml/2006/main">
+              <a:ext uri="{FF2B5EF4-FFF2-40B4-BE49-F238E27FC236}">
+                <a16:creationId xmlns:a16="http://schemas.microsoft.com/office/drawing/2014/main" id="{0D46C2F3-E047-949F-E426-85D04E8B5696}"/>
+              </a:ext>
+            </a:extLst>
+          </p:cNvPr>
           <p:cNvSpPr>
-            <a:spLocks noGrp="1"/>
+            <a:spLocks xmlns:a="http://schemas.openxmlformats.org/drawingml/2006/main" noGrp="1"/>
           </p:cNvSpPr>
           <p:nvPr/>
         </p:nvSpPr>
         <p:spPr>
-          <a:xfrm>
+          <a:xfrm xmlns:a="http://schemas.openxmlformats.org/drawingml/2006/main">
             <a:off x="393700" y="3022600"/>
             <a:ext cx="2581975" cy="2971800"/>
           </a:xfrm>
-          <a:prstGeom prst="roundRect">
+          <a:prstGeom xmlns:a="http://schemas.openxmlformats.org/drawingml/2006/main" prst="roundRect">
             <a:avLst>
               <a:gd name="adj" fmla="val 0"/>
             </a:avLst>
           </a:prstGeom>
-          <a:solidFill>
+          <a:solidFill xmlns:a="http://schemas.openxmlformats.org/drawingml/2006/main">
             <a:schemeClr val="bg2"/>
           </a:solidFill>
-          <a:ln>
+          <a:ln xmlns:a="http://schemas.openxmlformats.org/drawingml/2006/main">
             <a:noFill/>
           </a:ln>
         </p:spPr>
         <p:style>
-          <a:lnRef idx="2">
+          <a:lnRef xmlns:a="http://schemas.openxmlformats.org/drawingml/2006/main" idx="2">
             <a:schemeClr val="accent1">
               <a:shade val="15000"/>
             </a:schemeClr>
           </a:lnRef>
-          <a:fillRef idx="1">
+          <a:fillRef xmlns:a="http://schemas.openxmlformats.org/drawingml/2006/main" idx="1">
             <a:schemeClr val="accent1"/>
           </a:fillRef>
-          <a:effectRef idx="0">
+          <a:effectRef xmlns:a="http://schemas.openxmlformats.org/drawingml/2006/main" idx="0">
             <a:schemeClr val="accent1"/>
           </a:effectRef>
-          <a:fontRef idx="minor">
+          <a:fontRef xmlns:a="http://schemas.openxmlformats.org/drawingml/2006/main" idx="minor">
             <a:schemeClr val="lt1"/>
           </a:fontRef>
         </p:style>
         <p:txBody>
-          <a:bodyPr anchor="ctr"/>
-          <a:lstStyle/>
-          <a:p>
+          <a:bodyPr xmlns:a="http://schemas.openxmlformats.org/drawingml/2006/main" anchor="ctr"/>
+          <a:lstStyle xmlns:a="http://schemas.openxmlformats.org/drawingml/2006/main"/>
+          <a:p xmlns:a="http://schemas.openxmlformats.org/drawingml/2006/main">
             <a:pPr algn="ctr">
               <a:buNone/>
-              <a:defRPr/>
-            </a:pPr>
-            <a:endParaRPr lang="ko-KR" altLang="en-US"/>
+            </a:pPr>
           </a:p>
         </p:txBody>
       </p:sp>
       <p:sp>
         <p:nvSpPr>
-          <p:cNvPr id="16" name="Content Placeholder 15"/>
+          <p:cNvPr id="16" name="Content Placeholder 15">
+            <a:extLst xmlns:a="http://schemas.openxmlformats.org/drawingml/2006/main">
+              <a:ext uri="{FF2B5EF4-FFF2-40B4-BE49-F238E27FC236}">
+                <a16:creationId xmlns:a16="http://schemas.microsoft.com/office/drawing/2014/main" id="{C2D97B83-3C45-E37A-21C3-D5F333EEE61E}"/>
+              </a:ext>
+            </a:extLst>
+          </p:cNvPr>
           <p:cNvSpPr>
-            <a:spLocks noGrp="1"/>
+            <a:spLocks xmlns:a="http://schemas.openxmlformats.org/drawingml/2006/main" noGrp="1"/>
           </p:cNvSpPr>
           <p:nvPr>
             <p:ph idx="1"/>
           </p:nvPr>
         </p:nvSpPr>
         <p:spPr>
-          <a:xfrm>
+          <a:xfrm xmlns:a="http://schemas.openxmlformats.org/drawingml/2006/main">
             <a:off x="618967" y="5549772"/>
             <a:ext cx="1730533" cy="192900"/>
           </a:xfrm>
         </p:spPr>
         <p:txBody>
-          <a:bodyPr>
+          <a:bodyPr xmlns:a="http://schemas.openxmlformats.org/drawingml/2006/main">
             <a:noAutofit/>
           </a:bodyPr>
-          <a:lstStyle/>
-          <a:p>
+          <a:lstStyle xmlns:a="http://schemas.openxmlformats.org/drawingml/2006/main"/>
+          <a:p xmlns:a="http://schemas.openxmlformats.org/drawingml/2006/main">
             <a:pPr marL="0" indent="0">
               <a:lnSpc>
                 <a:spcPct val="114000"/>
@@ -12202,7 +13695,6 @@
                 <a:spcPts val="800"/>
               </a:spcAft>
               <a:buNone/>
-              <a:defRPr/>
             </a:pPr>
             <a:r>
               <a:rPr sz="1400">
@@ -12212,19 +13704,20 @@
               </a:rPr>
               <a:t>MIDTERM</a:t>
             </a:r>
-            <a:endParaRPr sz="1400">
-              <a:latin typeface="Helvetica Neue"/>
-              <a:ea typeface="Helvetica Neue"/>
-              <a:cs typeface="Helvetica Neue"/>
-            </a:endParaRPr>
           </a:p>
         </p:txBody>
       </p:sp>
       <p:sp>
         <p:nvSpPr>
-          <p:cNvPr id="4" name="Slide Number Placeholder 3"/>
+          <p:cNvPr id="4" name="Slide Number Placeholder 3">
+            <a:extLst xmlns:a="http://schemas.openxmlformats.org/drawingml/2006/main">
+              <a:ext uri="{FF2B5EF4-FFF2-40B4-BE49-F238E27FC236}">
+                <a16:creationId xmlns:a16="http://schemas.microsoft.com/office/drawing/2014/main" id="{AD63574A-89C7-955F-74B9-B91B30FDEB28}"/>
+              </a:ext>
+            </a:extLst>
+          </p:cNvPr>
           <p:cNvSpPr>
-            <a:spLocks noGrp="1"/>
+            <a:spLocks xmlns:a="http://schemas.openxmlformats.org/drawingml/2006/main" noGrp="1"/>
           </p:cNvSpPr>
           <p:nvPr>
             <p:ph type="sldNum" idx="4"/>
@@ -12232,28 +13725,26 @@
         </p:nvSpPr>
         <p:spPr/>
         <p:txBody>
-          <a:bodyPr/>
-          <a:lstStyle/>
-          <a:p>
-            <a:pPr>
-              <a:defRPr/>
-            </a:pPr>
+          <a:bodyPr xmlns:a="http://schemas.openxmlformats.org/drawingml/2006/main"/>
+          <a:lstStyle xmlns:a="http://schemas.openxmlformats.org/drawingml/2006/main"/>
+          <a:p xmlns:a="http://schemas.openxmlformats.org/drawingml/2006/main">
             <a:fld id="{D3D7D1C8-AE23-AA48-DF65-C742588DBE47}" type="slidenum">
-              <a:rPr lang="en-US" altLang="en-US"/>
-              <a:pPr>
-                <a:defRPr/>
-              </a:pPr>
               <a:t>7</a:t>
             </a:fld>
-            <a:endParaRPr lang="en-US" altLang="en-US"/>
           </a:p>
         </p:txBody>
       </p:sp>
       <p:sp>
         <p:nvSpPr>
-          <p:cNvPr id="11" name="Title 10"/>
+          <p:cNvPr id="11" name="Title 10">
+            <a:extLst xmlns:a="http://schemas.openxmlformats.org/drawingml/2006/main">
+              <a:ext uri="{FF2B5EF4-FFF2-40B4-BE49-F238E27FC236}">
+                <a16:creationId xmlns:a16="http://schemas.microsoft.com/office/drawing/2014/main" id="{B8BE5863-55C6-337E-1F38-84416561EDD2}"/>
+              </a:ext>
+            </a:extLst>
+          </p:cNvPr>
           <p:cNvSpPr>
-            <a:spLocks noGrp="1"/>
+            <a:spLocks xmlns:a="http://schemas.openxmlformats.org/drawingml/2006/main" noGrp="1"/>
           </p:cNvSpPr>
           <p:nvPr>
             <p:ph type="title" idx="0"/>
@@ -12261,42 +13752,43 @@
         </p:nvSpPr>
         <p:spPr/>
         <p:txBody>
-          <a:bodyPr/>
-          <a:lstStyle/>
-          <a:p>
-            <a:pPr lvl="0">
-              <a:defRPr/>
-            </a:pPr>
-            <a:r>
-              <a:rPr lang="ko-KR" altLang="en-US"/>
-              <a:t>Trial and error changed the evaluation, not only the model</a:t>
-            </a:r>
-            <a:endParaRPr lang="ko-KR" altLang="en-US"/>
+          <a:bodyPr xmlns:a="http://schemas.openxmlformats.org/drawingml/2006/main"/>
+          <a:lstStyle xmlns:a="http://schemas.openxmlformats.org/drawingml/2006/main"/>
+          <a:p xmlns:a="http://schemas.openxmlformats.org/drawingml/2006/main">
+            <a:r>
+              <a:t>Trial and error changed the system</a:t>
+            </a:r>
           </a:p>
         </p:txBody>
       </p:sp>
       <p:sp>
         <p:nvSpPr>
-          <p:cNvPr id="17" name="Text Placeholder 16"/>
+          <p:cNvPr id="17" name="Text Placeholder 16">
+            <a:extLst xmlns:a="http://schemas.openxmlformats.org/drawingml/2006/main">
+              <a:ext uri="{FF2B5EF4-FFF2-40B4-BE49-F238E27FC236}">
+                <a16:creationId xmlns:a16="http://schemas.microsoft.com/office/drawing/2014/main" id="{44FE8A3D-53A2-1416-CACF-BD6787D6F073}"/>
+              </a:ext>
+            </a:extLst>
+          </p:cNvPr>
           <p:cNvSpPr>
-            <a:spLocks noGrp="1"/>
+            <a:spLocks xmlns:a="http://schemas.openxmlformats.org/drawingml/2006/main" noGrp="1"/>
           </p:cNvSpPr>
           <p:nvPr>
             <p:ph type="body" idx="12"/>
           </p:nvPr>
         </p:nvSpPr>
         <p:spPr>
-          <a:xfrm>
+          <a:xfrm xmlns:a="http://schemas.openxmlformats.org/drawingml/2006/main">
             <a:off x="4547346" y="5544658"/>
             <a:ext cx="1686860" cy="207014"/>
           </a:xfrm>
         </p:spPr>
         <p:txBody>
-          <a:bodyPr>
+          <a:bodyPr xmlns:a="http://schemas.openxmlformats.org/drawingml/2006/main">
             <a:noAutofit/>
           </a:bodyPr>
-          <a:lstStyle/>
-          <a:p>
+          <a:lstStyle xmlns:a="http://schemas.openxmlformats.org/drawingml/2006/main"/>
+          <a:p xmlns:a="http://schemas.openxmlformats.org/drawingml/2006/main">
             <a:pPr marL="0" indent="0" algn="l">
               <a:lnSpc>
                 <a:spcPct val="114000"/>
@@ -12308,10 +13800,12 @@
                 <a:spcPts val="800"/>
               </a:spcAft>
               <a:buNone/>
-              <a:defRPr/>
             </a:pPr>
             <a:r>
               <a:rPr sz="1400" u="none" cap="none">
+                <a:ln>
+                  <a:noFill/>
+                </a:ln>
                 <a:solidFill>
                   <a:prstClr val="black"/>
                 </a:solidFill>
@@ -12321,14 +13815,6 @@
               </a:rPr>
               <a:t>DATA AUDIT</a:t>
             </a:r>
-            <a:endParaRPr sz="1400" u="none" cap="none">
-              <a:solidFill>
-                <a:prstClr val="black"/>
-              </a:solidFill>
-              <a:latin typeface="Helvetica Neue"/>
-              <a:ea typeface="Helvetica Neue"/>
-              <a:cs typeface="Helvetica Neue"/>
-            </a:endParaRPr>
           </a:p>
         </p:txBody>
       </p:sp>
@@ -12336,58 +13822,64 @@
         <p:nvCxnSpPr>
           <p:cNvPr id="52" name="Google Shape;2259;p159"/>
           <p:cNvCxnSpPr>
-            <a:stCxn id="3" idx="2"/>
+            <a:stCxn xmlns:a="http://schemas.openxmlformats.org/drawingml/2006/main" id="3" idx="2"/>
           </p:cNvCxnSpPr>
           <p:nvPr/>
         </p:nvCxnSpPr>
         <p:spPr>
-          <a:xfrm>
+          <a:xfrm xmlns:a="http://schemas.openxmlformats.org/drawingml/2006/main">
             <a:off x="618967" y="5341621"/>
             <a:ext cx="12245400" cy="300"/>
           </a:xfrm>
-          <a:prstGeom prst="straightConnector1">
+          <a:prstGeom xmlns:a="http://schemas.openxmlformats.org/drawingml/2006/main" prst="straightConnector1">
             <a:avLst/>
           </a:prstGeom>
-          <a:ln w="9525" cap="flat">
+          <a:ln xmlns:a="http://schemas.openxmlformats.org/drawingml/2006/main" w="9525" cap="flat">
             <a:solidFill>
               <a:schemeClr val="dk1"/>
             </a:solidFill>
             <a:prstDash val="solid"/>
             <a:round/>
-            <a:headEnd w="med" len="med"/>
-            <a:tailEnd w="med" len="med"/>
+            <a:headEnd type="none" w="med" len="med"/>
+            <a:tailEnd type="none" w="med" len="med"/>
           </a:ln>
         </p:spPr>
       </p:cxnSp>
       <p:sp>
         <p:nvSpPr>
-          <p:cNvPr id="3" name="Google Shape;2260;p159"/>
+          <p:cNvPr id="3" name="Google Shape;2260;p159">
+            <a:extLst xmlns:a="http://schemas.openxmlformats.org/drawingml/2006/main">
+              <a:ext uri="{FF2B5EF4-FFF2-40B4-BE49-F238E27FC236}">
+                <a16:creationId xmlns:a16="http://schemas.microsoft.com/office/drawing/2014/main" id="{C18CA270-D7FF-5F52-A97F-D8D6C3E591F9}"/>
+              </a:ext>
+            </a:extLst>
+          </p:cNvPr>
           <p:cNvSpPr>
-            <a:spLocks noGrp="1"/>
+            <a:spLocks xmlns:a="http://schemas.openxmlformats.org/drawingml/2006/main" noGrp="1"/>
           </p:cNvSpPr>
           <p:nvPr/>
         </p:nvSpPr>
         <p:spPr>
-          <a:xfrm>
+          <a:xfrm xmlns:a="http://schemas.openxmlformats.org/drawingml/2006/main">
             <a:off x="618967" y="5288071"/>
             <a:ext cx="107100" cy="107100"/>
           </a:xfrm>
-          <a:prstGeom prst="ellipse">
+          <a:prstGeom xmlns:a="http://schemas.openxmlformats.org/drawingml/2006/main" prst="ellipse">
             <a:avLst/>
           </a:prstGeom>
-          <a:solidFill>
+          <a:solidFill xmlns:a="http://schemas.openxmlformats.org/drawingml/2006/main">
             <a:schemeClr val="dk1"/>
           </a:solidFill>
-          <a:ln>
+          <a:ln xmlns:a="http://schemas.openxmlformats.org/drawingml/2006/main">
             <a:noFill/>
           </a:ln>
         </p:spPr>
         <p:txBody>
-          <a:bodyPr wrap="square" lIns="91424" tIns="91424" rIns="91424" bIns="91424" anchor="ctr">
+          <a:bodyPr xmlns:a="http://schemas.openxmlformats.org/drawingml/2006/main" spcFirstLastPara="1" wrap="square" lIns="91425" tIns="91425" rIns="91425" bIns="91425" anchor="ctr">
             <a:noAutofit/>
           </a:bodyPr>
-          <a:lstStyle/>
-          <a:p>
+          <a:lstStyle xmlns:a="http://schemas.openxmlformats.org/drawingml/2006/main"/>
+          <a:p xmlns:a="http://schemas.openxmlformats.org/drawingml/2006/main">
             <a:pPr marL="0" indent="0" algn="ctr">
               <a:lnSpc>
                 <a:spcPct val="100000"/>
@@ -12399,41 +13891,45 @@
                 <a:spcPts val="0"/>
               </a:spcAft>
               <a:buNone/>
-              <a:defRPr/>
-            </a:pPr>
-            <a:endParaRPr lang="ko-KR" altLang="en-US"/>
+            </a:pPr>
           </a:p>
         </p:txBody>
       </p:sp>
       <p:sp>
         <p:nvSpPr>
-          <p:cNvPr id="5" name="Google Shape;2261;p159"/>
+          <p:cNvPr id="5" name="Google Shape;2261;p159">
+            <a:extLst xmlns:a="http://schemas.openxmlformats.org/drawingml/2006/main">
+              <a:ext uri="{FF2B5EF4-FFF2-40B4-BE49-F238E27FC236}">
+                <a16:creationId xmlns:a16="http://schemas.microsoft.com/office/drawing/2014/main" id="{A1A1F5EF-D65E-D2BC-463A-C5FFC2E3DA62}"/>
+              </a:ext>
+            </a:extLst>
+          </p:cNvPr>
           <p:cNvSpPr>
-            <a:spLocks noGrp="1"/>
+            <a:spLocks xmlns:a="http://schemas.openxmlformats.org/drawingml/2006/main" noGrp="1"/>
           </p:cNvSpPr>
           <p:nvPr/>
         </p:nvSpPr>
         <p:spPr>
-          <a:xfrm>
+          <a:xfrm xmlns:a="http://schemas.openxmlformats.org/drawingml/2006/main">
             <a:off x="4520690" y="5288071"/>
             <a:ext cx="107100" cy="107100"/>
           </a:xfrm>
-          <a:prstGeom prst="ellipse">
+          <a:prstGeom xmlns:a="http://schemas.openxmlformats.org/drawingml/2006/main" prst="ellipse">
             <a:avLst/>
           </a:prstGeom>
-          <a:solidFill>
+          <a:solidFill xmlns:a="http://schemas.openxmlformats.org/drawingml/2006/main">
             <a:schemeClr val="dk1"/>
           </a:solidFill>
-          <a:ln>
+          <a:ln xmlns:a="http://schemas.openxmlformats.org/drawingml/2006/main">
             <a:noFill/>
           </a:ln>
         </p:spPr>
         <p:txBody>
-          <a:bodyPr wrap="square" lIns="91424" tIns="91424" rIns="91424" bIns="91424" anchor="ctr">
+          <a:bodyPr xmlns:a="http://schemas.openxmlformats.org/drawingml/2006/main" spcFirstLastPara="1" wrap="square" lIns="91425" tIns="91425" rIns="91425" bIns="91425" anchor="ctr">
             <a:noAutofit/>
           </a:bodyPr>
-          <a:lstStyle/>
-          <a:p>
+          <a:lstStyle xmlns:a="http://schemas.openxmlformats.org/drawingml/2006/main"/>
+          <a:p xmlns:a="http://schemas.openxmlformats.org/drawingml/2006/main">
             <a:pPr marL="0" indent="0" algn="ctr">
               <a:lnSpc>
                 <a:spcPct val="100000"/>
@@ -12445,34 +13941,38 @@
                 <a:spcPts val="0"/>
               </a:spcAft>
               <a:buNone/>
-              <a:defRPr/>
-            </a:pPr>
-            <a:endParaRPr lang="ko-KR" altLang="en-US"/>
+            </a:pPr>
           </a:p>
         </p:txBody>
       </p:sp>
       <p:sp>
         <p:nvSpPr>
-          <p:cNvPr id="8" name="Content Placeholder 15"/>
+          <p:cNvPr id="8" name="Content Placeholder 15">
+            <a:extLst xmlns:a="http://schemas.openxmlformats.org/drawingml/2006/main">
+              <a:ext uri="{FF2B5EF4-FFF2-40B4-BE49-F238E27FC236}">
+                <a16:creationId xmlns:a16="http://schemas.microsoft.com/office/drawing/2014/main" id="{E4FBD0D2-0150-2466-E4B2-FBFCAE3E3054}"/>
+              </a:ext>
+            </a:extLst>
+          </p:cNvPr>
           <p:cNvSpPr>
-            <a:spLocks noGrp="1"/>
+            <a:spLocks xmlns:a="http://schemas.openxmlformats.org/drawingml/2006/main" noGrp="1"/>
           </p:cNvSpPr>
           <p:nvPr/>
         </p:nvSpPr>
         <p:spPr>
-          <a:xfrm>
+          <a:xfrm xmlns:a="http://schemas.openxmlformats.org/drawingml/2006/main">
             <a:off x="618967" y="3325812"/>
             <a:ext cx="2145400" cy="1677988"/>
           </a:xfrm>
-          <a:prstGeom prst="rect">
+          <a:prstGeom xmlns:a="http://schemas.openxmlformats.org/drawingml/2006/main" prst="rect">
             <a:avLst/>
           </a:prstGeom>
         </p:spPr>
         <p:txBody>
-          <a:bodyPr vert="horz" lIns="0" tIns="0" rIns="0" bIns="0">
+          <a:bodyPr xmlns:a="http://schemas.openxmlformats.org/drawingml/2006/main" vert="horz" lIns="0" tIns="0" rIns="0" bIns="0">
             <a:noAutofit/>
           </a:bodyPr>
-          <a:lstStyle>
+          <a:lstStyle xmlns:a="http://schemas.openxmlformats.org/drawingml/2006/main">
             <a:lvl1pPr marL="228600" indent="-228600" algn="l">
               <a:lnSpc>
                 <a:spcPct val="90000"/>
@@ -12627,7 +14127,7 @@
               </a:defRPr>
             </a:lvl9pPr>
           </a:lstStyle>
-          <a:p>
+          <a:p xmlns:a="http://schemas.openxmlformats.org/drawingml/2006/main">
             <a:pPr marL="0" indent="0">
               <a:lnSpc>
                 <a:spcPct val="114000"/>
@@ -12639,7 +14139,6 @@
                 <a:spcPts val="800"/>
               </a:spcAft>
               <a:buNone/>
-              <a:defRPr/>
             </a:pPr>
             <a:r>
               <a:rPr>
@@ -12649,13 +14148,8 @@
               </a:rPr>
               <a:t>MEAN POOLING</a:t>
             </a:r>
-            <a:endParaRPr>
-              <a:latin typeface="Helvetica Neue"/>
-              <a:ea typeface="Helvetica Neue"/>
-              <a:cs typeface="Helvetica Neue"/>
-            </a:endParaRPr>
-          </a:p>
-          <a:p>
+          </a:p>
+          <a:p xmlns:a="http://schemas.openxmlformats.org/drawingml/2006/main">
             <a:pPr marL="0" indent="0">
               <a:lnSpc>
                 <a:spcPct val="114000"/>
@@ -12667,7 +14161,6 @@
                 <a:spcPts val="800"/>
               </a:spcAft>
               <a:buNone/>
-              <a:defRPr/>
             </a:pPr>
             <a:r>
               <a:rPr sz="1400">
@@ -12675,34 +14168,23 @@
                 <a:ea typeface="Helvetica Neue"/>
                 <a:cs typeface="Helvetica Neue"/>
               </a:rPr>
-              <a:t>A diagnostic example showed short impacts disappearing inside long averages. This was not an official accuracy result.</a:t>
-            </a:r>
-            <a:endParaRPr sz="1400">
-              <a:latin typeface="Helvetica Neue"/>
-              <a:ea typeface="Helvetica Neue"/>
-              <a:cs typeface="Helvetica Neue"/>
-            </a:endParaRPr>
+              <a:t>Started with conventional YAMNet-style clip averaging. It suits clip tagging, but short glass impacts were diluted, so we retained frame-level evidence.</a:t>
+            </a:r>
           </a:p>
         </p:txBody>
       </p:sp>
     </p:spTree>
+    <p:extLst>
+      <p:ext uri="{BB962C8B-B14F-4D97-AF65-F5344CB8AC3E}">
+        <p14:creationId xmlns:p14="http://schemas.microsoft.com/office/powerpoint/2010/main" val="687912555"/>
+      </p:ext>
+    </p:extLst>
   </p:cSld>
-  <p:clrMapOvr>
-    <a:masterClrMapping/>
-  </p:clrMapOvr>
-  <mc:AlternateContent xmlns:mc="http://schemas.openxmlformats.org/markup-compatibility/2006">
-    <mc:Choice xmlns:p14="http://schemas.microsoft.com/office/powerpoint/2010/main" Requires="p14">
-      <p:transition xmlns:mc="http://schemas.openxmlformats.org/markup-compatibility/2006" xmlns:p14="http://schemas.microsoft.com/office/powerpoint/2010/main" mc:Ignorable="p14" p14:dur="500"/>
-    </mc:Choice>
-    <mc:Fallback>
-      <p:transition/>
-    </mc:Fallback>
-  </mc:AlternateContent>
 </p:sld>
 </file>
 
 <file path=ppt/slides/slide8.xml><?xml version="1.0" encoding="utf-8"?>
-<p:sld xmlns:r="http://schemas.openxmlformats.org/officeDocument/2006/relationships" xmlns:c="http://schemas.openxmlformats.org/drawingml/2006/chart" xmlns:a="http://schemas.openxmlformats.org/drawingml/2006/main" xmlns:dgm="http://schemas.openxmlformats.org/drawingml/2006/diagram" xmlns:dsp="http://schemas.microsoft.com/office/drawing/2008/diagram" xmlns:p="http://schemas.openxmlformats.org/presentationml/2006/main">
+<p:sld xmlns:p="http://schemas.openxmlformats.org/presentationml/2006/main">
   <p:cSld>
     <p:spTree>
       <p:nvGrpSpPr>
@@ -12711,177 +14193,190 @@
         <p:nvPr/>
       </p:nvGrpSpPr>
       <p:grpSpPr>
-        <a:xfrm>
-          <a:off x="0" y="0"/>
-          <a:ext cx="0" cy="0"/>
-          <a:chOff x="0" y="0"/>
-          <a:chExt cx="0" cy="0"/>
-        </a:xfrm>
+        <a:xfrm xmlns:a="http://schemas.openxmlformats.org/drawingml/2006/main"/>
       </p:grpSpPr>
       <p:sp>
         <p:nvSpPr>
-          <p:cNvPr id="4" name="Rounded Rectangle 3"/>
+          <p:cNvPr id="4" name="Rounded Rectangle 3">
+            <a:extLst xmlns:a="http://schemas.openxmlformats.org/drawingml/2006/main">
+              <a:ext uri="{FF2B5EF4-FFF2-40B4-BE49-F238E27FC236}">
+                <a16:creationId xmlns:a16="http://schemas.microsoft.com/office/drawing/2014/main" id="{399D28F4-0533-71C4-6121-D7C1CF725D88}"/>
+              </a:ext>
+            </a:extLst>
+          </p:cNvPr>
           <p:cNvSpPr>
-            <a:spLocks noGrp="1"/>
+            <a:spLocks xmlns:a="http://schemas.openxmlformats.org/drawingml/2006/main" noGrp="1"/>
           </p:cNvSpPr>
           <p:nvPr/>
         </p:nvSpPr>
         <p:spPr>
-          <a:xfrm>
+          <a:xfrm xmlns:a="http://schemas.openxmlformats.org/drawingml/2006/main">
             <a:off x="5930900" y="393700"/>
             <a:ext cx="5867400" cy="1638300"/>
           </a:xfrm>
-          <a:prstGeom prst="roundRect">
+          <a:prstGeom xmlns:a="http://schemas.openxmlformats.org/drawingml/2006/main" prst="roundRect">
             <a:avLst>
               <a:gd name="adj" fmla="val 3585"/>
             </a:avLst>
           </a:prstGeom>
-          <a:solidFill>
+          <a:solidFill xmlns:a="http://schemas.openxmlformats.org/drawingml/2006/main">
             <a:schemeClr val="bg2"/>
           </a:solidFill>
-          <a:ln>
+          <a:ln xmlns:a="http://schemas.openxmlformats.org/drawingml/2006/main">
             <a:noFill/>
           </a:ln>
         </p:spPr>
         <p:style>
-          <a:lnRef idx="2">
+          <a:lnRef xmlns:a="http://schemas.openxmlformats.org/drawingml/2006/main" idx="2">
             <a:schemeClr val="accent1">
               <a:shade val="15000"/>
             </a:schemeClr>
           </a:lnRef>
-          <a:fillRef idx="1">
+          <a:fillRef xmlns:a="http://schemas.openxmlformats.org/drawingml/2006/main" idx="1">
             <a:schemeClr val="accent1"/>
           </a:fillRef>
-          <a:effectRef idx="0">
+          <a:effectRef xmlns:a="http://schemas.openxmlformats.org/drawingml/2006/main" idx="0">
             <a:schemeClr val="accent1"/>
           </a:effectRef>
-          <a:fontRef idx="minor">
+          <a:fontRef xmlns:a="http://schemas.openxmlformats.org/drawingml/2006/main" idx="minor">
             <a:schemeClr val="lt1"/>
           </a:fontRef>
         </p:style>
         <p:txBody>
-          <a:bodyPr anchor="ctr"/>
-          <a:lstStyle/>
-          <a:p>
+          <a:bodyPr xmlns:a="http://schemas.openxmlformats.org/drawingml/2006/main" anchor="ctr"/>
+          <a:lstStyle xmlns:a="http://schemas.openxmlformats.org/drawingml/2006/main"/>
+          <a:p xmlns:a="http://schemas.openxmlformats.org/drawingml/2006/main">
             <a:pPr algn="ctr">
               <a:buNone/>
-              <a:defRPr/>
-            </a:pPr>
-            <a:endParaRPr lang="ko-KR" altLang="en-US"/>
+            </a:pPr>
           </a:p>
         </p:txBody>
       </p:sp>
       <p:sp>
         <p:nvSpPr>
-          <p:cNvPr id="5" name="Rounded Rectangle 4"/>
+          <p:cNvPr id="5" name="Rounded Rectangle 4">
+            <a:extLst xmlns:a="http://schemas.openxmlformats.org/drawingml/2006/main">
+              <a:ext uri="{FF2B5EF4-FFF2-40B4-BE49-F238E27FC236}">
+                <a16:creationId xmlns:a16="http://schemas.microsoft.com/office/drawing/2014/main" id="{3B220E5B-9AD4-0A77-D081-8DD6CEDEDE55}"/>
+              </a:ext>
+            </a:extLst>
+          </p:cNvPr>
           <p:cNvSpPr>
-            <a:spLocks noGrp="1"/>
+            <a:spLocks xmlns:a="http://schemas.openxmlformats.org/drawingml/2006/main" noGrp="1"/>
           </p:cNvSpPr>
           <p:nvPr/>
         </p:nvSpPr>
         <p:spPr>
-          <a:xfrm>
+          <a:xfrm xmlns:a="http://schemas.openxmlformats.org/drawingml/2006/main">
             <a:off x="5930900" y="2369856"/>
             <a:ext cx="5867400" cy="1638300"/>
           </a:xfrm>
-          <a:prstGeom prst="roundRect">
+          <a:prstGeom xmlns:a="http://schemas.openxmlformats.org/drawingml/2006/main" prst="roundRect">
             <a:avLst>
               <a:gd name="adj" fmla="val 3585"/>
             </a:avLst>
           </a:prstGeom>
-          <a:solidFill>
+          <a:solidFill xmlns:a="http://schemas.openxmlformats.org/drawingml/2006/main">
             <a:schemeClr val="bg2"/>
           </a:solidFill>
-          <a:ln>
+          <a:ln xmlns:a="http://schemas.openxmlformats.org/drawingml/2006/main">
             <a:noFill/>
           </a:ln>
         </p:spPr>
         <p:style>
-          <a:lnRef idx="2">
+          <a:lnRef xmlns:a="http://schemas.openxmlformats.org/drawingml/2006/main" idx="2">
             <a:schemeClr val="accent1">
               <a:shade val="15000"/>
             </a:schemeClr>
           </a:lnRef>
-          <a:fillRef idx="1">
+          <a:fillRef xmlns:a="http://schemas.openxmlformats.org/drawingml/2006/main" idx="1">
             <a:schemeClr val="accent1"/>
           </a:fillRef>
-          <a:effectRef idx="0">
+          <a:effectRef xmlns:a="http://schemas.openxmlformats.org/drawingml/2006/main" idx="0">
             <a:schemeClr val="accent1"/>
           </a:effectRef>
-          <a:fontRef idx="minor">
+          <a:fontRef xmlns:a="http://schemas.openxmlformats.org/drawingml/2006/main" idx="minor">
             <a:schemeClr val="lt1"/>
           </a:fontRef>
         </p:style>
         <p:txBody>
-          <a:bodyPr anchor="ctr"/>
-          <a:lstStyle/>
-          <a:p>
+          <a:bodyPr xmlns:a="http://schemas.openxmlformats.org/drawingml/2006/main" anchor="ctr"/>
+          <a:lstStyle xmlns:a="http://schemas.openxmlformats.org/drawingml/2006/main"/>
+          <a:p xmlns:a="http://schemas.openxmlformats.org/drawingml/2006/main">
             <a:pPr algn="ctr">
               <a:buNone/>
-              <a:defRPr/>
-            </a:pPr>
-            <a:endParaRPr lang="ko-KR" altLang="en-US"/>
+            </a:pPr>
           </a:p>
         </p:txBody>
       </p:sp>
       <p:sp>
         <p:nvSpPr>
-          <p:cNvPr id="6" name="Rounded Rectangle 5"/>
+          <p:cNvPr id="6" name="Rounded Rectangle 5">
+            <a:extLst xmlns:a="http://schemas.openxmlformats.org/drawingml/2006/main">
+              <a:ext uri="{FF2B5EF4-FFF2-40B4-BE49-F238E27FC236}">
+                <a16:creationId xmlns:a16="http://schemas.microsoft.com/office/drawing/2014/main" id="{8015B47D-C18B-C33D-B6B9-8B12C7F21DA3}"/>
+              </a:ext>
+            </a:extLst>
+          </p:cNvPr>
           <p:cNvSpPr>
-            <a:spLocks noGrp="1"/>
+            <a:spLocks xmlns:a="http://schemas.openxmlformats.org/drawingml/2006/main" noGrp="1"/>
           </p:cNvSpPr>
           <p:nvPr/>
         </p:nvSpPr>
         <p:spPr>
-          <a:xfrm>
+          <a:xfrm xmlns:a="http://schemas.openxmlformats.org/drawingml/2006/main">
             <a:off x="5930900" y="4356100"/>
             <a:ext cx="5867400" cy="1638300"/>
           </a:xfrm>
-          <a:prstGeom prst="roundRect">
+          <a:prstGeom xmlns:a="http://schemas.openxmlformats.org/drawingml/2006/main" prst="roundRect">
             <a:avLst>
               <a:gd name="adj" fmla="val 3585"/>
             </a:avLst>
           </a:prstGeom>
-          <a:solidFill>
+          <a:solidFill xmlns:a="http://schemas.openxmlformats.org/drawingml/2006/main">
             <a:schemeClr val="bg2"/>
           </a:solidFill>
-          <a:ln>
+          <a:ln xmlns:a="http://schemas.openxmlformats.org/drawingml/2006/main">
             <a:noFill/>
           </a:ln>
         </p:spPr>
         <p:style>
-          <a:lnRef idx="2">
+          <a:lnRef xmlns:a="http://schemas.openxmlformats.org/drawingml/2006/main" idx="2">
             <a:schemeClr val="accent1">
               <a:shade val="15000"/>
             </a:schemeClr>
           </a:lnRef>
-          <a:fillRef idx="1">
+          <a:fillRef xmlns:a="http://schemas.openxmlformats.org/drawingml/2006/main" idx="1">
             <a:schemeClr val="accent1"/>
           </a:fillRef>
-          <a:effectRef idx="0">
+          <a:effectRef xmlns:a="http://schemas.openxmlformats.org/drawingml/2006/main" idx="0">
             <a:schemeClr val="accent1"/>
           </a:effectRef>
-          <a:fontRef idx="minor">
+          <a:fontRef xmlns:a="http://schemas.openxmlformats.org/drawingml/2006/main" idx="minor">
             <a:schemeClr val="lt1"/>
           </a:fontRef>
         </p:style>
         <p:txBody>
-          <a:bodyPr anchor="ctr"/>
-          <a:lstStyle/>
-          <a:p>
+          <a:bodyPr xmlns:a="http://schemas.openxmlformats.org/drawingml/2006/main" anchor="ctr"/>
+          <a:lstStyle xmlns:a="http://schemas.openxmlformats.org/drawingml/2006/main"/>
+          <a:p xmlns:a="http://schemas.openxmlformats.org/drawingml/2006/main">
             <a:pPr algn="ctr">
               <a:buNone/>
-              <a:defRPr/>
-            </a:pPr>
-            <a:endParaRPr lang="ko-KR" altLang="en-US"/>
+            </a:pPr>
           </a:p>
         </p:txBody>
       </p:sp>
       <p:sp>
         <p:nvSpPr>
-          <p:cNvPr id="2" name="Slide Number Placeholder 1"/>
+          <p:cNvPr id="2" name="Slide Number Placeholder 1">
+            <a:extLst xmlns:a="http://schemas.openxmlformats.org/drawingml/2006/main">
+              <a:ext uri="{FF2B5EF4-FFF2-40B4-BE49-F238E27FC236}">
+                <a16:creationId xmlns:a16="http://schemas.microsoft.com/office/drawing/2014/main" id="{C70AE1A9-6BFA-C8F8-15D8-E0C474C9873F}"/>
+              </a:ext>
+            </a:extLst>
+          </p:cNvPr>
           <p:cNvSpPr>
-            <a:spLocks noGrp="1"/>
+            <a:spLocks xmlns:a="http://schemas.openxmlformats.org/drawingml/2006/main" noGrp="1"/>
           </p:cNvSpPr>
           <p:nvPr>
             <p:ph type="sldNum" idx="4"/>
@@ -12889,76 +14384,75 @@
         </p:nvSpPr>
         <p:spPr/>
         <p:txBody>
-          <a:bodyPr/>
-          <a:lstStyle/>
-          <a:p>
-            <a:pPr>
-              <a:defRPr/>
-            </a:pPr>
+          <a:bodyPr xmlns:a="http://schemas.openxmlformats.org/drawingml/2006/main"/>
+          <a:lstStyle xmlns:a="http://schemas.openxmlformats.org/drawingml/2006/main"/>
+          <a:p xmlns:a="http://schemas.openxmlformats.org/drawingml/2006/main">
             <a:fld id="{BA58DA2A-B818-18A9-29C1-B697728D5BCE}" type="slidenum">
-              <a:rPr lang="en-US" altLang="en-US"/>
-              <a:pPr>
-                <a:defRPr/>
-              </a:pPr>
               <a:t>8</a:t>
             </a:fld>
-            <a:endParaRPr lang="en-US" altLang="en-US"/>
           </a:p>
         </p:txBody>
       </p:sp>
       <p:sp>
         <p:nvSpPr>
-          <p:cNvPr id="3" name="Title 2"/>
+          <p:cNvPr id="3" name="Title 2">
+            <a:extLst xmlns:a="http://schemas.openxmlformats.org/drawingml/2006/main">
+              <a:ext uri="{FF2B5EF4-FFF2-40B4-BE49-F238E27FC236}">
+                <a16:creationId xmlns:a16="http://schemas.microsoft.com/office/drawing/2014/main" id="{B98E6F4A-D901-EDDD-8055-85C5D5B5077A}"/>
+              </a:ext>
+            </a:extLst>
+          </p:cNvPr>
           <p:cNvSpPr>
-            <a:spLocks noGrp="1"/>
+            <a:spLocks xmlns:a="http://schemas.openxmlformats.org/drawingml/2006/main" noGrp="1"/>
           </p:cNvSpPr>
           <p:nvPr>
             <p:ph type="title" idx="0"/>
           </p:nvPr>
         </p:nvSpPr>
         <p:spPr>
-          <a:xfrm>
+          <a:xfrm xmlns:a="http://schemas.openxmlformats.org/drawingml/2006/main">
             <a:off x="393701" y="344008"/>
             <a:ext cx="4928108" cy="1047491"/>
           </a:xfrm>
         </p:spPr>
         <p:txBody>
-          <a:bodyPr/>
-          <a:lstStyle/>
-          <a:p>
-            <a:pPr lvl="0">
-              <a:defRPr/>
-            </a:pPr>
-            <a:r>
-              <a:rPr lang="ko-KR" altLang="en-US"/>
-              <a:t>Official vs. original demo</a:t>
-            </a:r>
-            <a:endParaRPr lang="ko-KR" altLang="en-US"/>
+          <a:bodyPr xmlns:a="http://schemas.openxmlformats.org/drawingml/2006/main"/>
+          <a:lstStyle xmlns:a="http://schemas.openxmlformats.org/drawingml/2006/main"/>
+          <a:p xmlns:a="http://schemas.openxmlformats.org/drawingml/2006/main">
+            <a:r>
+              <a:t>Real-time Fusion</a:t>
+            </a:r>
           </a:p>
         </p:txBody>
       </p:sp>
       <p:sp>
         <p:nvSpPr>
-          <p:cNvPr id="11" name="Content Placeholder 10"/>
+          <p:cNvPr id="11" name="Content Placeholder 10">
+            <a:extLst xmlns:a="http://schemas.openxmlformats.org/drawingml/2006/main">
+              <a:ext uri="{FF2B5EF4-FFF2-40B4-BE49-F238E27FC236}">
+                <a16:creationId xmlns:a16="http://schemas.microsoft.com/office/drawing/2014/main" id="{32851832-A61E-C0E6-B2C4-DAC1BEA62DF8}"/>
+              </a:ext>
+            </a:extLst>
+          </p:cNvPr>
           <p:cNvSpPr>
-            <a:spLocks noGrp="1"/>
+            <a:spLocks xmlns:a="http://schemas.openxmlformats.org/drawingml/2006/main" noGrp="1"/>
           </p:cNvSpPr>
           <p:nvPr>
             <p:ph idx="4294967295"/>
           </p:nvPr>
         </p:nvSpPr>
         <p:spPr>
-          <a:xfrm>
+          <a:xfrm xmlns:a="http://schemas.openxmlformats.org/drawingml/2006/main">
             <a:off x="6261100" y="672952"/>
             <a:ext cx="5287433" cy="1079796"/>
           </a:xfrm>
         </p:spPr>
         <p:txBody>
-          <a:bodyPr>
-            <a:normAutofit fontScale="85000"/>
+          <a:bodyPr xmlns:a="http://schemas.openxmlformats.org/drawingml/2006/main">
+            <a:normAutofit fontScale="77394"/>
           </a:bodyPr>
-          <a:lstStyle/>
-          <a:p>
+          <a:lstStyle xmlns:a="http://schemas.openxmlformats.org/drawingml/2006/main"/>
+          <a:p xmlns:a="http://schemas.openxmlformats.org/drawingml/2006/main">
             <a:pPr marL="0" indent="0" algn="l">
               <a:lnSpc>
                 <a:spcPct val="110000"/>
@@ -12970,10 +14464,12 @@
                 <a:spcPts val="0"/>
               </a:spcAft>
               <a:buNone/>
-              <a:defRPr/>
             </a:pPr>
             <a:r>
               <a:rPr sz="1800" b="0" i="0" u="none" cap="none">
+                <a:ln>
+                  <a:noFill/>
+                </a:ln>
                 <a:solidFill>
                   <a:prstClr val="black"/>
                 </a:solidFill>
@@ -12981,18 +14477,10 @@
                 <a:ea typeface="Helvetica Neue"/>
                 <a:cs typeface="Helvetica Neue"/>
               </a:rPr>
-              <a:t>OFFICIAL</a:t>
-            </a:r>
-            <a:endParaRPr sz="1800" b="0" i="0" u="none" cap="none">
-              <a:solidFill>
-                <a:prstClr val="black"/>
-              </a:solidFill>
-              <a:latin typeface="Helvetica Neue"/>
-              <a:ea typeface="Helvetica Neue"/>
-              <a:cs typeface="Helvetica Neue"/>
-            </a:endParaRPr>
-          </a:p>
-          <a:p>
+              <a:t>SHARED YAMNET OUTPUTS</a:t>
+            </a:r>
+          </a:p>
+          <a:p xmlns:a="http://schemas.openxmlformats.org/drawingml/2006/main">
             <a:pPr marL="0" indent="0" algn="l">
               <a:lnSpc>
                 <a:spcPct val="100000"/>
@@ -13004,10 +14492,12 @@
                 <a:spcPts val="1300"/>
               </a:spcAft>
               <a:buNone/>
-              <a:defRPr/>
             </a:pPr>
             <a:r>
               <a:rPr sz="1800" b="0" i="0" u="none" cap="none">
+                <a:ln>
+                  <a:noFill/>
+                </a:ln>
                 <a:solidFill>
                   <a:prstClr val="black"/>
                 </a:solidFill>
@@ -13015,41 +14505,39 @@
                 <a:ea typeface="Helvetica Neue"/>
                 <a:cs typeface="Helvetica Neue"/>
               </a:rPr>
-              <a:t>Classifier-only; thresholds 0.95 / 0.40; consecutive frames 1 / 3. Macro F1 0.801, normal false alarms 13.3%.</a:t>
-            </a:r>
-            <a:endParaRPr sz="1800" b="0" i="0" u="none" cap="none">
-              <a:solidFill>
-                <a:prstClr val="black"/>
-              </a:solidFill>
-              <a:latin typeface="Helvetica Neue"/>
-              <a:ea typeface="Helvetica Neue"/>
-              <a:cs typeface="Helvetica Neue"/>
-            </a:endParaRPr>
+              <a:t>Each forward pass returns 1,024-D embeddings for our head and 521 AudioSet scores for corroboration.</a:t>
+            </a:r>
           </a:p>
         </p:txBody>
       </p:sp>
       <p:sp>
         <p:nvSpPr>
-          <p:cNvPr id="8" name="Content Placeholder 10"/>
+          <p:cNvPr id="8" name="Content Placeholder 10">
+            <a:extLst xmlns:a="http://schemas.openxmlformats.org/drawingml/2006/main">
+              <a:ext uri="{FF2B5EF4-FFF2-40B4-BE49-F238E27FC236}">
+                <a16:creationId xmlns:a16="http://schemas.microsoft.com/office/drawing/2014/main" id="{81492ACB-99F1-D37C-A4AB-B658921013CF}"/>
+              </a:ext>
+            </a:extLst>
+          </p:cNvPr>
           <p:cNvSpPr>
-            <a:spLocks noGrp="1"/>
+            <a:spLocks xmlns:a="http://schemas.openxmlformats.org/drawingml/2006/main" noGrp="1"/>
           </p:cNvSpPr>
           <p:nvPr/>
         </p:nvSpPr>
         <p:spPr>
-          <a:xfrm>
+          <a:xfrm xmlns:a="http://schemas.openxmlformats.org/drawingml/2006/main">
             <a:off x="6261100" y="2664788"/>
             <a:ext cx="5287433" cy="1048436"/>
           </a:xfrm>
-          <a:prstGeom prst="rect">
+          <a:prstGeom xmlns:a="http://schemas.openxmlformats.org/drawingml/2006/main" prst="rect">
             <a:avLst/>
           </a:prstGeom>
         </p:spPr>
         <p:txBody>
-          <a:bodyPr vert="horz" lIns="0" tIns="0" rIns="0" bIns="0">
+          <a:bodyPr xmlns:a="http://schemas.openxmlformats.org/drawingml/2006/main" vert="horz" lIns="0" tIns="0" rIns="0" bIns="0">
             <a:normAutofit fontScale="84459"/>
           </a:bodyPr>
-          <a:lstStyle>
+          <a:lstStyle xmlns:a="http://schemas.openxmlformats.org/drawingml/2006/main">
             <a:lvl1pPr marL="228600" indent="-228600" algn="l">
               <a:lnSpc>
                 <a:spcPct val="90000"/>
@@ -13204,7 +14692,7 @@
               </a:defRPr>
             </a:lvl9pPr>
           </a:lstStyle>
-          <a:p>
+          <a:p xmlns:a="http://schemas.openxmlformats.org/drawingml/2006/main">
             <a:pPr marL="0" indent="0">
               <a:lnSpc>
                 <a:spcPct val="110000"/>
@@ -13213,7 +14701,6 @@
                 <a:spcPts val="0"/>
               </a:spcBef>
               <a:buNone/>
-              <a:defRPr/>
             </a:pPr>
             <a:r>
               <a:rPr sz="1800">
@@ -13224,18 +14711,10 @@
                 <a:ea typeface="Helvetica Neue"/>
                 <a:cs typeface="Helvetica Neue"/>
               </a:rPr>
-              <a:t>ORIGINAL DEMO</a:t>
-            </a:r>
-            <a:endParaRPr sz="1800">
-              <a:solidFill>
-                <a:prstClr val="black"/>
-              </a:solidFill>
-              <a:latin typeface="Helvetica Neue"/>
-              <a:ea typeface="Helvetica Neue"/>
-              <a:cs typeface="Helvetica Neue"/>
-            </a:endParaRPr>
-          </a:p>
-          <a:p>
+              <a:t>TWO DECISION PATHS</a:t>
+            </a:r>
+          </a:p>
+          <a:p xmlns:a="http://schemas.openxmlformats.org/drawingml/2006/main">
             <a:pPr marL="0" indent="0">
               <a:lnSpc>
                 <a:spcPct val="100000"/>
@@ -13247,7 +14726,6 @@
                 <a:spcPts val="1300"/>
               </a:spcAft>
               <a:buNone/>
-              <a:defRPr/>
             </a:pPr>
             <a:r>
               <a:rPr sz="1800">
@@ -13258,41 +14736,39 @@
                 <a:ea typeface="Helvetica Neue"/>
                 <a:cs typeface="Helvetica Neue"/>
               </a:rPr>
-              <a:t>Classifier + YAMNet fusion; thresholds 0.97 / 0.92 plus scream mean and margin. Live loop also had an RMS gate.</a:t>
-            </a:r>
-            <a:endParaRPr sz="1800">
-              <a:solidFill>
-                <a:prstClr val="black"/>
-              </a:solidFill>
-              <a:latin typeface="Helvetica Neue"/>
-              <a:ea typeface="Helvetica Neue"/>
-              <a:cs typeface="Helvetica Neue"/>
-            </a:endParaRPr>
+              <a:t>A sustained classifier run can trigger directly. Otherwise, classifier and YAMNet must agree on the same frame.</a:t>
+            </a:r>
           </a:p>
         </p:txBody>
       </p:sp>
       <p:sp>
         <p:nvSpPr>
-          <p:cNvPr id="9" name="Content Placeholder 10"/>
+          <p:cNvPr id="9" name="Content Placeholder 10">
+            <a:extLst xmlns:a="http://schemas.openxmlformats.org/drawingml/2006/main">
+              <a:ext uri="{FF2B5EF4-FFF2-40B4-BE49-F238E27FC236}">
+                <a16:creationId xmlns:a16="http://schemas.microsoft.com/office/drawing/2014/main" id="{EE244A58-AA3E-6549-238A-E0B6EB985242}"/>
+              </a:ext>
+            </a:extLst>
+          </p:cNvPr>
           <p:cNvSpPr>
-            <a:spLocks noGrp="1"/>
+            <a:spLocks xmlns:a="http://schemas.openxmlformats.org/drawingml/2006/main" noGrp="1"/>
           </p:cNvSpPr>
           <p:nvPr/>
         </p:nvSpPr>
         <p:spPr>
-          <a:xfrm>
+          <a:xfrm xmlns:a="http://schemas.openxmlformats.org/drawingml/2006/main">
             <a:off x="6261100" y="4656290"/>
             <a:ext cx="5287433" cy="1037920"/>
           </a:xfrm>
-          <a:prstGeom prst="rect">
+          <a:prstGeom xmlns:a="http://schemas.openxmlformats.org/drawingml/2006/main" prst="rect">
             <a:avLst/>
           </a:prstGeom>
         </p:spPr>
         <p:txBody>
-          <a:bodyPr vert="horz" lIns="0" tIns="0" rIns="0" bIns="0">
-            <a:normAutofit fontScale="92500"/>
+          <a:bodyPr xmlns:a="http://schemas.openxmlformats.org/drawingml/2006/main" vert="horz" lIns="0" tIns="0" rIns="0" bIns="0">
+            <a:normAutofit fontScale="83223"/>
           </a:bodyPr>
-          <a:lstStyle>
+          <a:lstStyle xmlns:a="http://schemas.openxmlformats.org/drawingml/2006/main">
             <a:lvl1pPr marL="228600" indent="-228600" algn="l">
               <a:lnSpc>
                 <a:spcPct val="90000"/>
@@ -13447,7 +14923,7 @@
               </a:defRPr>
             </a:lvl9pPr>
           </a:lstStyle>
-          <a:p>
+          <a:p xmlns:a="http://schemas.openxmlformats.org/drawingml/2006/main">
             <a:pPr marL="0" indent="0">
               <a:lnSpc>
                 <a:spcPct val="110000"/>
@@ -13456,7 +14932,6 @@
                 <a:spcPts val="0"/>
               </a:spcBef>
               <a:buNone/>
-              <a:defRPr/>
             </a:pPr>
             <a:r>
               <a:rPr sz="1800">
@@ -13467,18 +14942,10 @@
                 <a:ea typeface="Helvetica Neue"/>
                 <a:cs typeface="Helvetica Neue"/>
               </a:rPr>
-              <a:t>TRADE-OFF</a:t>
-            </a:r>
-            <a:endParaRPr sz="1800">
-              <a:solidFill>
-                <a:prstClr val="black"/>
-              </a:solidFill>
-              <a:latin typeface="Helvetica Neue"/>
-              <a:ea typeface="Helvetica Neue"/>
-              <a:cs typeface="Helvetica Neue"/>
-            </a:endParaRPr>
-          </a:p>
-          <a:p>
+              <a:t>LATENCY SCOPE</a:t>
+            </a:r>
+          </a:p>
+          <a:p xmlns:a="http://schemas.openxmlformats.org/drawingml/2006/main">
             <a:pPr marL="0" indent="0">
               <a:lnSpc>
                 <a:spcPct val="100000"/>
@@ -13490,7 +14957,6 @@
                 <a:spcPts val="1300"/>
               </a:spcAft>
               <a:buNone/>
-              <a:defRPr/>
             </a:pPr>
             <a:r>
               <a:rPr sz="1800">
@@ -13501,32 +14967,18 @@
                 <a:ea typeface="Helvetica Neue"/>
                 <a:cs typeface="Helvetica Neue"/>
               </a:rPr>
-              <a:t>Offline ablation without RMS: Macro F1 0.804, false alarms 7.1%, glass recall 82.8%, scream recall 57.9%.</a:t>
-            </a:r>
-            <a:endParaRPr sz="1800">
-              <a:solidFill>
-                <a:prstClr val="black"/>
-              </a:solidFill>
-              <a:latin typeface="Helvetica Neue"/>
-              <a:ea typeface="Helvetica Neue"/>
-              <a:cs typeface="Helvetica Neue"/>
-            </a:endParaRPr>
+              <a:t>3 s window, 1 s hop. PC inference: 57 ms mean, 61 ms p95. Raspberry Pi end-to-end: [0000] ms mean, [0000] ms p95.</a:t>
+            </a:r>
           </a:p>
         </p:txBody>
       </p:sp>
     </p:spTree>
+    <p:extLst>
+      <p:ext uri="{BB962C8B-B14F-4D97-AF65-F5344CB8AC3E}">
+        <p14:creationId xmlns:p14="http://schemas.microsoft.com/office/powerpoint/2010/main" val="465626630"/>
+      </p:ext>
+    </p:extLst>
   </p:cSld>
-  <p:clrMapOvr>
-    <a:masterClrMapping/>
-  </p:clrMapOvr>
-  <mc:AlternateContent xmlns:mc="http://schemas.openxmlformats.org/markup-compatibility/2006">
-    <mc:Choice xmlns:p14="http://schemas.microsoft.com/office/powerpoint/2010/main" Requires="p14">
-      <p:transition xmlns:mc="http://schemas.openxmlformats.org/markup-compatibility/2006" xmlns:p14="http://schemas.microsoft.com/office/powerpoint/2010/main" mc:Ignorable="p14" p14:dur="500"/>
-    </mc:Choice>
-    <mc:Fallback>
-      <p:transition/>
-    </mc:Fallback>
-  </mc:AlternateContent>
 </p:sld>
 </file>
 
@@ -13813,7 +15265,7 @@
                 <a:ea typeface="Helvetica Neue"/>
                 <a:cs typeface="Helvetica Neue"/>
               </a:rPr>
-              <a:t>Benchmark the complete pipeline on Raspberry Pi and calibrate thresholds per microphone and room.</a:t>
+              <a:t>Validate Raspberry Pi latency under sustained load and calibrate thresholds per microphone and room.</a:t>
             </a:r>
           </a:p>
         </p:txBody>
@@ -14744,487 +16196,44 @@
 </file>
 
 <file path=ppt/theme/theme1.xml><?xml version="1.0" encoding="utf-8"?>
-<a:theme xmlns:r="http://schemas.openxmlformats.org/officeDocument/2006/relationships" xmlns:c="http://schemas.openxmlformats.org/drawingml/2006/chart" xmlns:dgm="http://schemas.openxmlformats.org/drawingml/2006/diagram" xmlns:dsp="http://schemas.microsoft.com/office/drawing/2008/diagram" xmlns:a="http://schemas.openxmlformats.org/drawingml/2006/main" xmlns:pic="http://schemas.openxmlformats.org/drawingml/2006/picture" xmlns:wp="http://schemas.openxmlformats.org/drawingml/2006/wordprocessingDrawing" xmlns:xdr="http://schemas.openxmlformats.org/drawingml/2006/spreadsheetDrawing" xmlns:lc="http://schemas.openxmlformats.org/drawingml/2006/lockedCanvas" xmlns:p="http://schemas.openxmlformats.org/presentationml/2006/main" name="Default Codex Theme">
+<a:theme xmlns:a="http://schemas.openxmlformats.org/drawingml/2006/main" name="Default Codex Theme">
   <a:themeElements>
     <a:clrScheme name="Office">
       <a:dk1>
         <a:sysClr val="windowText" lastClr="000000"/>
       </a:dk1>
       <a:lt1>
-        <a:sysClr val="window" lastClr="ffffff"/>
+        <a:sysClr val="window" lastClr="FFFFFF"/>
       </a:lt1>
       <a:dk2>
-        <a:srgbClr val="0e2841"/>
+        <a:srgbClr val="0E2841"/>
       </a:dk2>
       <a:lt2>
-        <a:srgbClr val="e8e8e8"/>
+        <a:srgbClr val="E8E8E8"/>
       </a:lt2>
       <a:accent1>
         <a:srgbClr val="156082"/>
       </a:accent1>
       <a:accent2>
-        <a:srgbClr val="e97132"/>
+        <a:srgbClr val="E97132"/>
       </a:accent2>
       <a:accent3>
-        <a:srgbClr val="196b24"/>
+        <a:srgbClr val="196B24"/>
       </a:accent3>
       <a:accent4>
-        <a:srgbClr val="0f9ed5"/>
+        <a:srgbClr val="0F9ED5"/>
       </a:accent4>
       <a:accent5>
-        <a:srgbClr val="a02b93"/>
+        <a:srgbClr val="A02B93"/>
       </a:accent5>
       <a:accent6>
-        <a:srgbClr val="4ea72e"/>
+        <a:srgbClr val="4EA72E"/>
       </a:accent6>
       <a:hlink>
         <a:srgbClr val="467886"/>
       </a:hlink>
       <a:folHlink>
-        <a:srgbClr val="96607d"/>
-      </a:folHlink>
-    </a:clrScheme>
-    <a:fontScheme name="Helvetica Neue">
-      <a:majorFont>
-        <a:latin typeface="Helvetica Neue"/>
-        <a:ea typeface=""/>
-        <a:cs typeface=""/>
-      </a:majorFont>
-      <a:minorFont>
-        <a:latin typeface="Helvetica Neue"/>
-        <a:ea typeface=""/>
-        <a:cs typeface=""/>
-      </a:minorFont>
-    </a:fontScheme>
-    <a:fmtScheme name="Office">
-      <a:fillStyleLst>
-        <a:solidFill>
-          <a:schemeClr val="phClr"/>
-        </a:solidFill>
-        <a:gradFill rotWithShape="1">
-          <a:gsLst>
-            <a:gs pos="0">
-              <a:schemeClr val="phClr">
-                <a:tint val="67000"/>
-                <a:lumMod val="110000"/>
-                <a:satMod val="105000"/>
-              </a:schemeClr>
-            </a:gs>
-            <a:gs pos="50000">
-              <a:schemeClr val="phClr">
-                <a:tint val="73000"/>
-                <a:lumMod val="105000"/>
-                <a:satMod val="103000"/>
-              </a:schemeClr>
-            </a:gs>
-            <a:gs pos="100000">
-              <a:schemeClr val="phClr">
-                <a:tint val="81000"/>
-                <a:lumMod val="105000"/>
-                <a:satMod val="109000"/>
-              </a:schemeClr>
-            </a:gs>
-          </a:gsLst>
-          <a:lin ang="5400000" scaled="0"/>
-        </a:gradFill>
-        <a:gradFill rotWithShape="1">
-          <a:gsLst>
-            <a:gs pos="0">
-              <a:schemeClr val="phClr">
-                <a:tint val="94000"/>
-                <a:lumMod val="102000"/>
-                <a:satMod val="103000"/>
-              </a:schemeClr>
-            </a:gs>
-            <a:gs pos="50000">
-              <a:schemeClr val="phClr">
-                <a:shade val="100000"/>
-                <a:lumMod val="100000"/>
-                <a:satMod val="110000"/>
-              </a:schemeClr>
-            </a:gs>
-            <a:gs pos="100000">
-              <a:schemeClr val="phClr">
-                <a:shade val="78000"/>
-                <a:lumMod val="99000"/>
-                <a:satMod val="120000"/>
-              </a:schemeClr>
-            </a:gs>
-          </a:gsLst>
-          <a:lin ang="5400000" scaled="0"/>
-        </a:gradFill>
-      </a:fillStyleLst>
-      <a:lnStyleLst>
-        <a:ln w="12700">
-          <a:solidFill>
-            <a:schemeClr val="phClr"/>
-          </a:solidFill>
-          <a:prstDash val="solid"/>
-        </a:ln>
-        <a:ln w="19050">
-          <a:solidFill>
-            <a:schemeClr val="phClr"/>
-          </a:solidFill>
-          <a:prstDash val="solid"/>
-        </a:ln>
-        <a:ln w="25400">
-          <a:solidFill>
-            <a:schemeClr val="phClr"/>
-          </a:solidFill>
-          <a:prstDash val="solid"/>
-        </a:ln>
-      </a:lnStyleLst>
-      <a:effectStyleLst>
-        <a:effectStyle>
-          <a:effectLst/>
-        </a:effectStyle>
-        <a:effectStyle>
-          <a:effectLst/>
-        </a:effectStyle>
-        <a:effectStyle>
-          <a:effectLst>
-            <a:outerShdw blurRad="57150" dist="19050" dir="5400000" algn="ctr" rotWithShape="0">
-              <a:srgbClr val="000000">
-                <a:alpha val="63000"/>
-              </a:srgbClr>
-            </a:outerShdw>
-          </a:effectLst>
-        </a:effectStyle>
-      </a:effectStyleLst>
-      <a:bgFillStyleLst>
-        <a:solidFill>
-          <a:schemeClr val="phClr"/>
-        </a:solidFill>
-        <a:solidFill>
-          <a:schemeClr val="phClr">
-            <a:tint val="95000"/>
-            <a:satMod val="170000"/>
-          </a:schemeClr>
-        </a:solidFill>
-        <a:gradFill rotWithShape="1">
-          <a:gsLst>
-            <a:gs pos="0">
-              <a:schemeClr val="phClr">
-                <a:tint val="93000"/>
-                <a:shade val="98000"/>
-                <a:lumMod val="102000"/>
-                <a:satMod val="150000"/>
-              </a:schemeClr>
-            </a:gs>
-            <a:gs pos="50000">
-              <a:schemeClr val="phClr">
-                <a:tint val="98000"/>
-                <a:shade val="90000"/>
-                <a:lumMod val="103000"/>
-                <a:satMod val="130000"/>
-              </a:schemeClr>
-            </a:gs>
-            <a:gs pos="100000">
-              <a:schemeClr val="phClr">
-                <a:shade val="63000"/>
-                <a:satMod val="120000"/>
-              </a:schemeClr>
-            </a:gs>
-          </a:gsLst>
-          <a:lin ang="5400000" scaled="0"/>
-        </a:gradFill>
-      </a:bgFillStyleLst>
-    </a:fmtScheme>
-  </a:themeElements>
-</a:theme>
-</file>
-
-<file path=ppt/theme/theme2.xml><?xml version="1.0" encoding="utf-8"?>
-<a:theme xmlns:r="http://schemas.openxmlformats.org/officeDocument/2006/relationships" xmlns:c="http://schemas.openxmlformats.org/drawingml/2006/chart" xmlns:dgm="http://schemas.openxmlformats.org/drawingml/2006/diagram" xmlns:dsp="http://schemas.microsoft.com/office/drawing/2008/diagram" xmlns:a="http://schemas.openxmlformats.org/drawingml/2006/main" xmlns:pic="http://schemas.openxmlformats.org/drawingml/2006/picture" xmlns:wp="http://schemas.openxmlformats.org/drawingml/2006/wordprocessingDrawing" xmlns:xdr="http://schemas.openxmlformats.org/drawingml/2006/spreadsheetDrawing" xmlns:lc="http://schemas.openxmlformats.org/drawingml/2006/lockedCanvas" xmlns:p="http://schemas.openxmlformats.org/presentationml/2006/main" name="">
-  <a:themeElements>
-    <a:clrScheme name="">
-      <a:dk1>
-        <a:sysClr val="windowText" lastClr="000000"/>
-      </a:dk1>
-      <a:lt1>
-        <a:sysClr val="window" lastClr="ffffff"/>
-      </a:lt1>
-      <a:dk2>
-        <a:srgbClr val="3a3c84"/>
-      </a:dk2>
-      <a:lt2>
-        <a:srgbClr val="faf3db"/>
-      </a:lt2>
-      <a:accent1>
-        <a:srgbClr val="6182d6"/>
-      </a:accent1>
-      <a:accent2>
-        <a:srgbClr val="ff843a"/>
-      </a:accent2>
-      <a:accent3>
-        <a:srgbClr val="b2b2b2"/>
-      </a:accent3>
-      <a:accent4>
-        <a:srgbClr val="ffd700"/>
-      </a:accent4>
-      <a:accent5>
-        <a:srgbClr val="289b6e"/>
-      </a:accent5>
-      <a:accent6>
-        <a:srgbClr val="9d5cbb"/>
-      </a:accent6>
-      <a:hlink>
-        <a:srgbClr val="0000ff"/>
-      </a:hlink>
-      <a:folHlink>
-        <a:srgbClr val="800080"/>
-      </a:folHlink>
-    </a:clrScheme>
-    <a:fontScheme name="">
-      <a:majorFont>
-        <a:latin typeface="HNC_GO_B_HINT_GS"/>
-        <a:ea typeface=""/>
-        <a:cs typeface="HNC_GO_B_HINT_GS"/>
-      </a:majorFont>
-      <a:minorFont>
-        <a:latin typeface="HNC_GO_B_HINT_GS"/>
-        <a:ea typeface=""/>
-        <a:cs typeface="HNC_GO_B_HINT_GS"/>
-      </a:minorFont>
-    </a:fontScheme>
-    <a:fmtScheme name="">
-      <a:fillStyleLst>
-        <a:solidFill>
-          <a:schemeClr val="phClr"/>
-        </a:solidFill>
-        <a:gradFill rotWithShape="1">
-          <a:gsLst>
-            <a:gs pos="0">
-              <a:schemeClr val="phClr">
-                <a:tint val="50000"/>
-                <a:satMod val="300000"/>
-              </a:schemeClr>
-            </a:gs>
-            <a:gs pos="35000">
-              <a:schemeClr val="phClr">
-                <a:tint val="37000"/>
-                <a:satMod val="300000"/>
-              </a:schemeClr>
-            </a:gs>
-            <a:gs pos="100000">
-              <a:schemeClr val="phClr">
-                <a:tint val="15000"/>
-                <a:satMod val="350000"/>
-              </a:schemeClr>
-            </a:gs>
-          </a:gsLst>
-          <a:lin ang="16200000" scaled="1"/>
-        </a:gradFill>
-        <a:gradFill rotWithShape="1">
-          <a:gsLst>
-            <a:gs pos="0">
-              <a:schemeClr val="phClr">
-                <a:shade val="51000"/>
-                <a:satMod val="130000"/>
-              </a:schemeClr>
-            </a:gs>
-            <a:gs pos="80000">
-              <a:schemeClr val="phClr">
-                <a:shade val="93000"/>
-                <a:satMod val="130000"/>
-              </a:schemeClr>
-            </a:gs>
-            <a:gs pos="100000">
-              <a:schemeClr val="phClr">
-                <a:shade val="94000"/>
-                <a:satMod val="135000"/>
-              </a:schemeClr>
-            </a:gs>
-          </a:gsLst>
-          <a:lin ang="16200000" scaled="0"/>
-        </a:gradFill>
-      </a:fillStyleLst>
-      <a:lnStyleLst>
-        <a:ln w="12700" cap="flat" cmpd="sng" algn="ctr">
-          <a:solidFill>
-            <a:schemeClr val="phClr"/>
-          </a:solidFill>
-          <a:prstDash val="solid"/>
-        </a:ln>
-        <a:ln w="19050" cap="flat" cmpd="sng" algn="ctr">
-          <a:solidFill>
-            <a:schemeClr val="phClr"/>
-          </a:solidFill>
-          <a:prstDash val="solid"/>
-        </a:ln>
-        <a:ln w="38100" cap="flat" cmpd="sng" algn="ctr">
-          <a:solidFill>
-            <a:schemeClr val="phClr"/>
-          </a:solidFill>
-          <a:prstDash val="solid"/>
-        </a:ln>
-      </a:lnStyleLst>
-      <a:effectStyleLst>
-        <a:effectStyle>
-          <a:effectLst>
-            <a:outerShdw blurRad="63500" dist="45398" dir="5400000" rotWithShape="0">
-              <a:srgbClr val="000000">
-                <a:alpha val="38000"/>
-              </a:srgbClr>
-            </a:outerShdw>
-          </a:effectLst>
-        </a:effectStyle>
-        <a:effectStyle>
-          <a:effectLst>
-            <a:outerShdw blurRad="63500" dist="23000" dir="5400000" rotWithShape="0">
-              <a:srgbClr val="000000">
-                <a:alpha val="35000"/>
-              </a:srgbClr>
-            </a:outerShdw>
-          </a:effectLst>
-        </a:effectStyle>
-        <a:effectStyle>
-          <a:effectLst>
-            <a:reflection blurRad="12700" stA="26000" endPos="28000" dist="38100" dir="5400000" sy="-100000" rotWithShape="0"/>
-          </a:effectLst>
-        </a:effectStyle>
-      </a:effectStyleLst>
-      <a:bgFillStyleLst>
-        <a:solidFill>
-          <a:schemeClr val="phClr"/>
-        </a:solidFill>
-        <a:gradFill rotWithShape="1">
-          <a:gsLst>
-            <a:gs pos="0">
-              <a:schemeClr val="phClr">
-                <a:tint val="40000"/>
-                <a:satMod val="350000"/>
-              </a:schemeClr>
-            </a:gs>
-            <a:gs pos="40000">
-              <a:schemeClr val="phClr">
-                <a:tint val="45000"/>
-                <a:shade val="99000"/>
-                <a:satMod val="350000"/>
-              </a:schemeClr>
-            </a:gs>
-            <a:gs pos="100000">
-              <a:schemeClr val="phClr">
-                <a:shade val="20000"/>
-                <a:satMod val="255000"/>
-              </a:schemeClr>
-            </a:gs>
-          </a:gsLst>
-          <a:path path="circle">
-            <a:fillToRect l="50000" t="-80000" r="50000" b="180000"/>
-          </a:path>
-        </a:gradFill>
-        <a:gradFill rotWithShape="1">
-          <a:gsLst>
-            <a:gs pos="0">
-              <a:schemeClr val="phClr">
-                <a:tint val="80000"/>
-                <a:satMod val="300000"/>
-              </a:schemeClr>
-            </a:gs>
-            <a:gs pos="100000">
-              <a:schemeClr val="phClr">
-                <a:shade val="30000"/>
-                <a:satMod val="200000"/>
-              </a:schemeClr>
-            </a:gs>
-          </a:gsLst>
-          <a:path path="circle">
-            <a:fillToRect l="50000" t="50000" r="50000" b="50000"/>
-          </a:path>
-        </a:gradFill>
-      </a:bgFillStyleLst>
-    </a:fmtScheme>
-  </a:themeElements>
-  <a:objectDefaults>
-    <a:spDef>
-      <a:spPr/>
-      <a:bodyPr/>
-      <a:lstStyle/>
-      <a:style>
-        <a:lnRef idx="2">
-          <a:schemeClr val="accent1">
-            <a:shade val="20000"/>
-          </a:schemeClr>
-        </a:lnRef>
-        <a:fillRef idx="1">
-          <a:schemeClr val="accent1"/>
-        </a:fillRef>
-        <a:effectRef idx="0">
-          <a:schemeClr val="accent1"/>
-        </a:effectRef>
-        <a:fontRef idx="minor">
-          <a:schemeClr val="lt1"/>
-        </a:fontRef>
-      </a:style>
-    </a:spDef>
-    <a:lnDef>
-      <a:spPr/>
-      <a:bodyPr/>
-      <a:lstStyle/>
-      <a:style>
-        <a:lnRef idx="1">
-          <a:schemeClr val="accent1"/>
-        </a:lnRef>
-        <a:fillRef idx="0">
-          <a:schemeClr val="accent1"/>
-        </a:fillRef>
-        <a:effectRef idx="0">
-          <a:schemeClr val="accent1"/>
-        </a:effectRef>
-        <a:fontRef idx="minor">
-          <a:schemeClr val="tx1"/>
-        </a:fontRef>
-      </a:style>
-    </a:lnDef>
-    <a:txDef>
-      <a:spPr/>
-      <a:bodyPr/>
-      <a:lstStyle/>
-    </a:txDef>
-  </a:objectDefaults>
-</a:theme>
-</file>
-
-<file path=ppt/theme/theme3.xml><?xml version="1.0" encoding="utf-8"?>
-<a:theme xmlns:r="http://schemas.openxmlformats.org/officeDocument/2006/relationships" xmlns:c="http://schemas.openxmlformats.org/drawingml/2006/chart" xmlns:dgm="http://schemas.openxmlformats.org/drawingml/2006/diagram" xmlns:dsp="http://schemas.microsoft.com/office/drawing/2008/diagram" xmlns:a="http://schemas.openxmlformats.org/drawingml/2006/main" xmlns:pic="http://schemas.openxmlformats.org/drawingml/2006/picture" xmlns:wp="http://schemas.openxmlformats.org/drawingml/2006/wordprocessingDrawing" xmlns:xdr="http://schemas.openxmlformats.org/drawingml/2006/spreadsheetDrawing" xmlns:lc="http://schemas.openxmlformats.org/drawingml/2006/lockedCanvas" xmlns:p="http://schemas.openxmlformats.org/presentationml/2006/main" name="Default Codex Theme">
-  <a:themeElements>
-    <a:clrScheme name="Office">
-      <a:dk1>
-        <a:sysClr val="windowText" lastClr="000000"/>
-      </a:dk1>
-      <a:lt1>
-        <a:sysClr val="window" lastClr="ffffff"/>
-      </a:lt1>
-      <a:dk2>
-        <a:srgbClr val="0e2841"/>
-      </a:dk2>
-      <a:lt2>
-        <a:srgbClr val="e8e8e8"/>
-      </a:lt2>
-      <a:accent1>
-        <a:srgbClr val="156082"/>
-      </a:accent1>
-      <a:accent2>
-        <a:srgbClr val="e97132"/>
-      </a:accent2>
-      <a:accent3>
-        <a:srgbClr val="196b24"/>
-      </a:accent3>
-      <a:accent4>
-        <a:srgbClr val="0f9ed5"/>
-      </a:accent4>
-      <a:accent5>
-        <a:srgbClr val="a02b93"/>
-      </a:accent5>
-      <a:accent6>
-        <a:srgbClr val="4ea72e"/>
-      </a:accent6>
-      <a:hlink>
-        <a:srgbClr val="467886"/>
-      </a:hlink>
-      <a:folHlink>
-        <a:srgbClr val="96607d"/>
+        <a:srgbClr val="96607D"/>
       </a:folHlink>
     </a:clrScheme>
     <a:fontScheme name="Helvetica Neue">
